--- a/docs/lectures/lecture_02/02_lecture_powerpoint.pptx
+++ b/docs/lectures/lecture_02/02_lecture_powerpoint.pptx
@@ -4043,7 +4043,7 @@
       </p:sp>
       <p:graphicFrame xmlns:a="http://schemas.openxmlformats.org/drawingml/2006/main" xmlns:r="http://schemas.openxmlformats.org/officeDocument/2006/relationships" xmlns:p="http://schemas.openxmlformats.org/presentationml/2006/main">
         <p:nvGraphicFramePr>
-          <p:cNvPr id="146684152" name=""/>
+          <p:cNvPr id="526510488" name=""/>
           <p:cNvGraphicFramePr>
             <a:graphicFrameLocks noGrp="true"/>
           </p:cNvGraphicFramePr>

--- a/docs/lectures/lecture_02/02_lecture_powerpoint.pptx
+++ b/docs/lectures/lecture_02/02_lecture_powerpoint.pptx
@@ -4043,7 +4043,7 @@
       </p:sp>
       <p:graphicFrame xmlns:a="http://schemas.openxmlformats.org/drawingml/2006/main" xmlns:r="http://schemas.openxmlformats.org/officeDocument/2006/relationships" xmlns:p="http://schemas.openxmlformats.org/presentationml/2006/main">
         <p:nvGraphicFramePr>
-          <p:cNvPr id="942936449" name=""/>
+          <p:cNvPr id="979770801" name=""/>
           <p:cNvGraphicFramePr>
             <a:graphicFrameLocks noGrp="true"/>
           </p:cNvGraphicFramePr>

--- a/docs/lectures/lecture_02/02_lecture_powerpoint.pptx
+++ b/docs/lectures/lecture_02/02_lecture_powerpoint.pptx
@@ -7,6 +7,34 @@
   <p:sldIdLst>
     <p:sldId id="256" r:id="rId2"/>
     <p:sldId id="257" r:id="rId3"/>
+    <p:sldId id="258" r:id="rId4"/>
+    <p:sldId id="259" r:id="rId5"/>
+    <p:sldId id="260" r:id="rId6"/>
+    <p:sldId id="261" r:id="rId7"/>
+    <p:sldId id="262" r:id="rId8"/>
+    <p:sldId id="263" r:id="rId9"/>
+    <p:sldId id="264" r:id="rId10"/>
+    <p:sldId id="265" r:id="rId11"/>
+    <p:sldId id="266" r:id="rId12"/>
+    <p:sldId id="267" r:id="rId13"/>
+    <p:sldId id="268" r:id="rId14"/>
+    <p:sldId id="269" r:id="rId15"/>
+    <p:sldId id="270" r:id="rId16"/>
+    <p:sldId id="271" r:id="rId17"/>
+    <p:sldId id="272" r:id="rId18"/>
+    <p:sldId id="273" r:id="rId19"/>
+    <p:sldId id="274" r:id="rId20"/>
+    <p:sldId id="275" r:id="rId21"/>
+    <p:sldId id="276" r:id="rId22"/>
+    <p:sldId id="277" r:id="rId23"/>
+    <p:sldId id="278" r:id="rId24"/>
+    <p:sldId id="279" r:id="rId25"/>
+    <p:sldId id="280" r:id="rId26"/>
+    <p:sldId id="281" r:id="rId27"/>
+    <p:sldId id="282" r:id="rId28"/>
+    <p:sldId id="283" r:id="rId29"/>
+    <p:sldId id="284" r:id="rId30"/>
+    <p:sldId id="285" r:id="rId31"/>
   </p:sldIdLst>
   <p:sldSz cx="9144000" cy="5143500" type="screen16x9"/>
   <p:notesSz cx="6858000" cy="9144000"/>
@@ -3294,7 +3322,7 @@
             </a:pPr>
             <a:r>
               <a:rPr/>
-              <a:t>Lecture 02</a:t>
+              <a:t>Lecture 02 — Meeting R</a:t>
             </a:r>
           </a:p>
         </p:txBody>
@@ -3324,7 +3352,3489 @@
             </a:pPr>
             <a:r>
               <a:rPr/>
-              <a:t>Bill Perry</a:t>
+              <a:t>From the console to your first plot</a:t>
+            </a:r>
+          </a:p>
+        </p:txBody>
+      </p:sp>
+    </p:spTree>
+  </p:cSld>
+</p:sld>
+</file>
+
+<file path=ppt/slides/slide10.xml><?xml version="1.0" encoding="utf-8"?>
+<p:sld xmlns:a="http://schemas.openxmlformats.org/drawingml/2006/main" xmlns:r="http://schemas.openxmlformats.org/officeDocument/2006/relationships" xmlns:p="http://schemas.openxmlformats.org/presentationml/2006/main">
+  <p:cSld>
+    <p:spTree>
+      <p:nvGrpSpPr>
+        <p:cNvPr id="1" name=""/>
+        <p:cNvGrpSpPr/>
+        <p:nvPr/>
+      </p:nvGrpSpPr>
+      <p:grpSpPr>
+        <a:xfrm>
+          <a:off x="0" y="0"/>
+          <a:ext cx="0" cy="0"/>
+          <a:chOff x="0" y="0"/>
+          <a:chExt cx="0" cy="0"/>
+        </a:xfrm>
+      </p:grpSpPr>
+      <p:sp>
+        <p:nvSpPr>
+          <p:cNvPr id="3" name="Content Placeholder 2"/>
+          <p:cNvSpPr>
+            <a:spLocks noGrp="1"/>
+          </p:cNvSpPr>
+          <p:nvPr>
+            <p:ph idx="1" sz="half"/>
+          </p:nvPr>
+        </p:nvSpPr>
+        <p:spPr/>
+        <p:txBody>
+          <a:bodyPr/>
+          <a:lstStyle/>
+          <a:p>
+            <a:pPr lvl="0" indent="0" marL="0">
+              <a:buNone/>
+            </a:pPr>
+            <a:r>
+              <a:rPr/>
+              <a:t>Type math straight into the </a:t>
+            </a:r>
+            <a:r>
+              <a:rPr b="1"/>
+              <a:t>console</a:t>
+            </a:r>
+            <a:r>
+              <a:rPr/>
+              <a:t> and press Enter:</a:t>
+            </a:r>
+          </a:p>
+          <a:p>
+            <a:pPr lvl="0" indent="0">
+              <a:buNone/>
+            </a:pPr>
+            <a:r>
+              <a:rPr>
+                <a:solidFill>
+                  <a:srgbClr val="AD0000"/>
+                </a:solidFill>
+                <a:latin typeface="Courier"/>
+              </a:rPr>
+              <a:t>3</a:t>
+            </a:r>
+            <a:r>
+              <a:rPr>
+                <a:solidFill>
+                  <a:srgbClr val="003B4F"/>
+                </a:solidFill>
+                <a:latin typeface="Courier"/>
+              </a:rPr>
+              <a:t> </a:t>
+            </a:r>
+            <a:r>
+              <a:rPr>
+                <a:solidFill>
+                  <a:srgbClr val="5E5E5E"/>
+                </a:solidFill>
+                <a:latin typeface="Courier"/>
+              </a:rPr>
+              <a:t>+</a:t>
+            </a:r>
+            <a:r>
+              <a:rPr>
+                <a:solidFill>
+                  <a:srgbClr val="003B4F"/>
+                </a:solidFill>
+                <a:latin typeface="Courier"/>
+              </a:rPr>
+              <a:t> </a:t>
+            </a:r>
+            <a:r>
+              <a:rPr>
+                <a:solidFill>
+                  <a:srgbClr val="AD0000"/>
+                </a:solidFill>
+                <a:latin typeface="Courier"/>
+              </a:rPr>
+              <a:t>5</a:t>
+            </a:r>
+            <a:br/>
+            <a:r>
+              <a:rPr>
+                <a:solidFill>
+                  <a:srgbClr val="AD0000"/>
+                </a:solidFill>
+                <a:latin typeface="Courier"/>
+              </a:rPr>
+              <a:t>12</a:t>
+            </a:r>
+            <a:r>
+              <a:rPr>
+                <a:solidFill>
+                  <a:srgbClr val="003B4F"/>
+                </a:solidFill>
+                <a:latin typeface="Courier"/>
+              </a:rPr>
+              <a:t> </a:t>
+            </a:r>
+            <a:r>
+              <a:rPr>
+                <a:solidFill>
+                  <a:srgbClr val="5E5E5E"/>
+                </a:solidFill>
+                <a:latin typeface="Courier"/>
+              </a:rPr>
+              <a:t>/</a:t>
+            </a:r>
+            <a:r>
+              <a:rPr>
+                <a:solidFill>
+                  <a:srgbClr val="003B4F"/>
+                </a:solidFill>
+                <a:latin typeface="Courier"/>
+              </a:rPr>
+              <a:t> </a:t>
+            </a:r>
+            <a:r>
+              <a:rPr>
+                <a:solidFill>
+                  <a:srgbClr val="AD0000"/>
+                </a:solidFill>
+                <a:latin typeface="Courier"/>
+              </a:rPr>
+              <a:t>7</a:t>
+            </a:r>
+            <a:br/>
+            <a:r>
+              <a:rPr>
+                <a:solidFill>
+                  <a:srgbClr val="AD0000"/>
+                </a:solidFill>
+                <a:latin typeface="Courier"/>
+              </a:rPr>
+              <a:t>2</a:t>
+            </a:r>
+            <a:r>
+              <a:rPr>
+                <a:solidFill>
+                  <a:srgbClr val="003B4F"/>
+                </a:solidFill>
+                <a:latin typeface="Courier"/>
+              </a:rPr>
+              <a:t> </a:t>
+            </a:r>
+            <a:r>
+              <a:rPr>
+                <a:solidFill>
+                  <a:srgbClr val="5E5E5E"/>
+                </a:solidFill>
+                <a:latin typeface="Courier"/>
+              </a:rPr>
+              <a:t>^</a:t>
+            </a:r>
+            <a:r>
+              <a:rPr>
+                <a:solidFill>
+                  <a:srgbClr val="003B4F"/>
+                </a:solidFill>
+                <a:latin typeface="Courier"/>
+              </a:rPr>
+              <a:t> </a:t>
+            </a:r>
+            <a:r>
+              <a:rPr>
+                <a:solidFill>
+                  <a:srgbClr val="AD0000"/>
+                </a:solidFill>
+                <a:latin typeface="Courier"/>
+              </a:rPr>
+              <a:t>10</a:t>
+            </a:r>
+          </a:p>
+          <a:p>
+            <a:pPr lvl="0" indent="0" marL="0">
+              <a:buNone/>
+            </a:pPr>
+            <a:r>
+              <a:rPr/>
+              <a:t>R answers immediately. The console is great for quick “what’s the answer?” questions.</a:t>
+            </a:r>
+          </a:p>
+          <a:p>
+            <a:pPr lvl="0" indent="0" marL="0">
+              <a:buNone/>
+            </a:pPr>
+            <a:r>
+              <a:rPr b="1"/>
+              <a:t>⚠️ Watch out!</a:t>
+            </a:r>
+          </a:p>
+          <a:p>
+            <a:pPr lvl="0" indent="0" marL="0">
+              <a:buNone/>
+            </a:pPr>
+            <a:r>
+              <a:rPr/>
+              <a:t>A </a:t>
+            </a:r>
+            <a:r>
+              <a:rPr>
+                <a:latin typeface="Courier"/>
+              </a:rPr>
+              <a:t>+</a:t>
+            </a:r>
+            <a:r>
+              <a:rPr/>
+              <a:t> at the start of the console line means R is </a:t>
+            </a:r>
+            <a:r>
+              <a:rPr b="1"/>
+              <a:t>still waiting</a:t>
+            </a:r>
+            <a:r>
+              <a:rPr/>
+              <a:t> for you to finish a command. Press Esc to start over.</a:t>
+            </a:r>
+          </a:p>
+        </p:txBody>
+      </p:sp>
+      <p:sp>
+        <p:nvSpPr>
+          <p:cNvPr id="4" name="Content Placeholder 3"/>
+          <p:cNvSpPr>
+            <a:spLocks noGrp="1"/>
+          </p:cNvSpPr>
+          <p:nvPr>
+            <p:ph idx="2" sz="half"/>
+          </p:nvPr>
+        </p:nvSpPr>
+        <p:spPr/>
+        <p:txBody>
+          <a:bodyPr/>
+          <a:lstStyle/>
+          <a:p>
+            <a:pPr lvl="0" indent="0" marL="0">
+              <a:buNone/>
+            </a:pPr>
+            <a:r>
+              <a:rPr b="1"/>
+              <a:t>📊 Coming from Excel?</a:t>
+            </a:r>
+          </a:p>
+          <a:p>
+            <a:pPr lvl="0" indent="0" marL="0">
+              <a:buNone/>
+            </a:pPr>
+            <a:r>
+              <a:rPr/>
+              <a:t>This is just like typing </a:t>
+            </a:r>
+            <a:r>
+              <a:rPr>
+                <a:latin typeface="Courier"/>
+              </a:rPr>
+              <a:t>=3+5</a:t>
+            </a:r>
+            <a:r>
+              <a:rPr/>
+              <a:t> into an Excel cell — except there are no cells, just a line you type and run.</a:t>
+            </a:r>
+          </a:p>
+        </p:txBody>
+      </p:sp>
+    </p:spTree>
+  </p:cSld>
+</p:sld>
+</file>
+
+<file path=ppt/slides/slide11.xml><?xml version="1.0" encoding="utf-8"?>
+<p:sld xmlns:a="http://schemas.openxmlformats.org/drawingml/2006/main" xmlns:r="http://schemas.openxmlformats.org/officeDocument/2006/relationships" xmlns:p="http://schemas.openxmlformats.org/presentationml/2006/main">
+  <p:cSld>
+    <p:spTree>
+      <p:nvGrpSpPr>
+        <p:cNvPr id="1" name=""/>
+        <p:cNvGrpSpPr/>
+        <p:nvPr/>
+      </p:nvGrpSpPr>
+      <p:grpSpPr>
+        <a:xfrm>
+          <a:off x="0" y="0"/>
+          <a:ext cx="0" cy="0"/>
+          <a:chOff x="0" y="0"/>
+          <a:chExt cx="0" cy="0"/>
+        </a:xfrm>
+      </p:grpSpPr>
+      <p:sp>
+        <p:nvSpPr>
+          <p:cNvPr id="2" name="Title 1"/>
+          <p:cNvSpPr>
+            <a:spLocks noGrp="1"/>
+          </p:cNvSpPr>
+          <p:nvPr>
+            <p:ph type="title"/>
+          </p:nvPr>
+        </p:nvSpPr>
+        <p:spPr>
+          <a:xfrm>
+            <a:off x="0" y="0"/>
+            <a:ext cx="9144000" cy="602780"/>
+          </a:xfrm>
+          <a:solidFill>
+            <a:srgbClr val="70121D"/>
+          </a:solidFill>
+        </p:spPr>
+        <p:txBody>
+          <a:bodyPr/>
+          <a:lstStyle/>
+          <a:p>
+            <a:pPr lvl="0" indent="0" marL="0">
+              <a:buNone/>
+            </a:pPr>
+            <a:r>
+              <a:rPr/>
+              <a:t>Storing values: the </a:t>
+            </a:r>
+            <a:r>
+              <a:rPr b="1"/>
+              <a:t>ladder</a:t>
+            </a:r>
+            <a:r>
+              <a:rPr/>
+              <a:t> </a:t>
+            </a:r>
+            <a:r>
+              <a:rPr>
+                <a:latin typeface="Courier"/>
+              </a:rPr>
+              <a:t>&lt;-</a:t>
+            </a:r>
+          </a:p>
+        </p:txBody>
+      </p:sp>
+      <p:sp>
+        <p:nvSpPr>
+          <p:cNvPr id="3" name="Content Placeholder 2"/>
+          <p:cNvSpPr>
+            <a:spLocks noGrp="1"/>
+          </p:cNvSpPr>
+          <p:nvPr>
+            <p:ph idx="1" sz="half"/>
+          </p:nvPr>
+        </p:nvSpPr>
+        <p:spPr/>
+        <p:txBody>
+          <a:bodyPr/>
+          <a:lstStyle/>
+          <a:p>
+            <a:pPr lvl="0" indent="0" marL="0">
+              <a:buNone/>
+            </a:pPr>
+            <a:r>
+              <a:rPr/>
+              <a:t>To keep a value, give it a </a:t>
+            </a:r>
+            <a:r>
+              <a:rPr b="1"/>
+              <a:t>name</a:t>
+            </a:r>
+            <a:r>
+              <a:rPr/>
+              <a:t> with the assignment operator </a:t>
+            </a:r>
+            <a:r>
+              <a:rPr>
+                <a:latin typeface="Courier"/>
+              </a:rPr>
+              <a:t>&lt;-</a:t>
+            </a:r>
+            <a:r>
+              <a:rPr/>
+              <a:t>:</a:t>
+            </a:r>
+          </a:p>
+          <a:p>
+            <a:pPr lvl="0" indent="0">
+              <a:buNone/>
+            </a:pPr>
+            <a:r>
+              <a:rPr>
+                <a:solidFill>
+                  <a:srgbClr val="003B4F"/>
+                </a:solidFill>
+                <a:latin typeface="Courier"/>
+              </a:rPr>
+              <a:t>x &lt;- </a:t>
+            </a:r>
+            <a:r>
+              <a:rPr>
+                <a:solidFill>
+                  <a:srgbClr val="AD0000"/>
+                </a:solidFill>
+                <a:latin typeface="Courier"/>
+              </a:rPr>
+              <a:t>7</a:t>
+            </a:r>
+            <a:r>
+              <a:rPr>
+                <a:solidFill>
+                  <a:srgbClr val="003B4F"/>
+                </a:solidFill>
+                <a:latin typeface="Courier"/>
+              </a:rPr>
+              <a:t>          </a:t>
+            </a:r>
+            <a:r>
+              <a:rPr>
+                <a:solidFill>
+                  <a:srgbClr val="5E5E5E"/>
+                </a:solidFill>
+                <a:latin typeface="Courier"/>
+              </a:rPr>
+              <a:t># store 7 under the name x</a:t>
+            </a:r>
+            <a:br/>
+            <a:r>
+              <a:rPr>
+                <a:solidFill>
+                  <a:srgbClr val="003B4F"/>
+                </a:solidFill>
+                <a:latin typeface="Courier"/>
+              </a:rPr>
+              <a:t>x               </a:t>
+            </a:r>
+            <a:r>
+              <a:rPr>
+                <a:solidFill>
+                  <a:srgbClr val="5E5E5E"/>
+                </a:solidFill>
+                <a:latin typeface="Courier"/>
+              </a:rPr>
+              <a:t># type the name to read it back</a:t>
+            </a:r>
+            <a:br/>
+            <a:r>
+              <a:rPr>
+                <a:solidFill>
+                  <a:srgbClr val="003B4F"/>
+                </a:solidFill>
+                <a:latin typeface="Courier"/>
+              </a:rPr>
+              <a:t>x </a:t>
+            </a:r>
+            <a:r>
+              <a:rPr>
+                <a:solidFill>
+                  <a:srgbClr val="5E5E5E"/>
+                </a:solidFill>
+                <a:latin typeface="Courier"/>
+              </a:rPr>
+              <a:t>*</a:t>
+            </a:r>
+            <a:r>
+              <a:rPr>
+                <a:solidFill>
+                  <a:srgbClr val="003B4F"/>
+                </a:solidFill>
+                <a:latin typeface="Courier"/>
+              </a:rPr>
+              <a:t> </a:t>
+            </a:r>
+            <a:r>
+              <a:rPr>
+                <a:solidFill>
+                  <a:srgbClr val="AD0000"/>
+                </a:solidFill>
+                <a:latin typeface="Courier"/>
+              </a:rPr>
+              <a:t>2</a:t>
+            </a:r>
+            <a:r>
+              <a:rPr>
+                <a:solidFill>
+                  <a:srgbClr val="003B4F"/>
+                </a:solidFill>
+                <a:latin typeface="Courier"/>
+              </a:rPr>
+              <a:t>           </a:t>
+            </a:r>
+            <a:r>
+              <a:rPr>
+                <a:solidFill>
+                  <a:srgbClr val="5E5E5E"/>
+                </a:solidFill>
+                <a:latin typeface="Courier"/>
+              </a:rPr>
+              <a:t># now use it in math</a:t>
+            </a:r>
+          </a:p>
+          <a:p>
+            <a:pPr lvl="0"/>
+            <a:r>
+              <a:rPr>
+                <a:latin typeface="Courier"/>
+              </a:rPr>
+              <a:t>&lt;-</a:t>
+            </a:r>
+            <a:r>
+              <a:rPr/>
+              <a:t> puts the value </a:t>
+            </a:r>
+            <a:r>
+              <a:rPr b="1"/>
+              <a:t>into your environment</a:t>
+            </a:r>
+            <a:r>
+              <a:rPr/>
+              <a:t> (look right!).</a:t>
+            </a:r>
+          </a:p>
+          <a:p>
+            <a:pPr lvl="0"/>
+            <a:r>
+              <a:rPr/>
+              <a:t>Shortcut: Alt + - (Win) or Option + - (Mac) types </a:t>
+            </a:r>
+            <a:r>
+              <a:rPr>
+                <a:latin typeface="Courier"/>
+              </a:rPr>
+              <a:t>&lt;-</a:t>
+            </a:r>
+            <a:r>
+              <a:rPr/>
+              <a:t> for you.</a:t>
+            </a:r>
+          </a:p>
+          <a:p>
+            <a:pPr lvl="0" indent="0" marL="0">
+              <a:buNone/>
+            </a:pPr>
+            <a:r>
+              <a:rPr b="1"/>
+              <a:t>📖 New word</a:t>
+            </a:r>
+          </a:p>
+          <a:p>
+            <a:pPr lvl="0" indent="0" marL="0">
+              <a:buNone/>
+            </a:pPr>
+            <a:r>
+              <a:rPr b="1"/>
+              <a:t>Assignment operator</a:t>
+            </a:r>
+            <a:r>
+              <a:rPr/>
+              <a:t> </a:t>
+            </a:r>
+            <a:r>
+              <a:rPr>
+                <a:latin typeface="Courier"/>
+              </a:rPr>
+              <a:t>&lt;-</a:t>
+            </a:r>
+            <a:r>
+              <a:rPr/>
+              <a:t> = “take the thing on the right and store it under the name on the left.”</a:t>
+            </a:r>
+          </a:p>
+        </p:txBody>
+      </p:sp>
+      <p:pic>
+        <p:nvPicPr>
+          <p:cNvPr descr="images/diagram_assignment.png" id="0" name="Picture 1"/>
+          <p:cNvPicPr>
+            <a:picLocks noGrp="1" noChangeAspect="1"/>
+          </p:cNvPicPr>
+          <p:nvPr/>
+        </p:nvPicPr>
+        <p:blipFill>
+          <a:blip r:embed="rId2"/>
+          <a:stretch>
+            <a:fillRect/>
+          </a:stretch>
+        </p:blipFill>
+        <p:spPr bwMode="auto">
+          <a:xfrm>
+            <a:off x="6121400" y="1778000"/>
+            <a:ext cx="2781300" cy="2247900"/>
+          </a:xfrm>
+          <a:prstGeom prst="rect">
+            <a:avLst/>
+          </a:prstGeom>
+          <a:noFill/>
+          <a:ln w="9525">
+            <a:noFill/>
+            <a:headEnd/>
+            <a:tailEnd/>
+          </a:ln>
+        </p:spPr>
+      </p:pic>
+    </p:spTree>
+  </p:cSld>
+</p:sld>
+</file>
+
+<file path=ppt/slides/slide12.xml><?xml version="1.0" encoding="utf-8"?>
+<p:sld xmlns:a="http://schemas.openxmlformats.org/drawingml/2006/main" xmlns:r="http://schemas.openxmlformats.org/officeDocument/2006/relationships" xmlns:p="http://schemas.openxmlformats.org/presentationml/2006/main">
+  <p:cSld>
+    <p:spTree>
+      <p:nvGrpSpPr>
+        <p:cNvPr id="1" name=""/>
+        <p:cNvGrpSpPr/>
+        <p:nvPr/>
+      </p:nvGrpSpPr>
+      <p:grpSpPr>
+        <a:xfrm>
+          <a:off x="0" y="0"/>
+          <a:ext cx="0" cy="0"/>
+          <a:chOff x="0" y="0"/>
+          <a:chExt cx="0" cy="0"/>
+        </a:xfrm>
+      </p:grpSpPr>
+      <p:sp>
+        <p:nvSpPr>
+          <p:cNvPr id="2" name="Title 1"/>
+          <p:cNvSpPr>
+            <a:spLocks noGrp="1"/>
+          </p:cNvSpPr>
+          <p:nvPr>
+            <p:ph type="title"/>
+          </p:nvPr>
+        </p:nvSpPr>
+        <p:spPr>
+          <a:xfrm>
+            <a:off x="0" y="0"/>
+            <a:ext cx="9144000" cy="602780"/>
+          </a:xfrm>
+          <a:solidFill>
+            <a:srgbClr val="70121D"/>
+          </a:solidFill>
+        </p:spPr>
+        <p:txBody>
+          <a:bodyPr/>
+          <a:lstStyle/>
+          <a:p>
+            <a:pPr lvl="0" indent="0" marL="0">
+              <a:buNone/>
+            </a:pPr>
+            <a:r>
+              <a:rPr/>
+              <a:t>Naming your objects well</a:t>
+            </a:r>
+          </a:p>
+        </p:txBody>
+      </p:sp>
+      <p:sp>
+        <p:nvSpPr>
+          <p:cNvPr id="3" name="Content Placeholder 2"/>
+          <p:cNvSpPr>
+            <a:spLocks noGrp="1"/>
+          </p:cNvSpPr>
+          <p:nvPr>
+            <p:ph idx="1" sz="half"/>
+          </p:nvPr>
+        </p:nvSpPr>
+        <p:spPr/>
+        <p:txBody>
+          <a:bodyPr/>
+          <a:lstStyle/>
+          <a:p>
+            <a:pPr lvl="0" indent="0" marL="0">
+              <a:buNone/>
+            </a:pPr>
+            <a:r>
+              <a:rPr/>
+              <a:t>Good names make code readable months later:</a:t>
+            </a:r>
+          </a:p>
+          <a:p>
+            <a:pPr lvl="0"/>
+            <a:r>
+              <a:rPr/>
+              <a:t>Be </a:t>
+            </a:r>
+            <a:r>
+              <a:rPr b="1"/>
+              <a:t>explicit</a:t>
+            </a:r>
+            <a:r>
+              <a:rPr/>
+              <a:t>, not too long: </a:t>
+            </a:r>
+            <a:r>
+              <a:rPr>
+                <a:latin typeface="Courier"/>
+              </a:rPr>
+              <a:t>leaf_mass</a:t>
+            </a:r>
+            <a:r>
+              <a:rPr/>
+              <a:t>, not </a:t>
+            </a:r>
+            <a:r>
+              <a:rPr>
+                <a:latin typeface="Courier"/>
+              </a:rPr>
+              <a:t>x2</a:t>
+            </a:r>
+          </a:p>
+          <a:p>
+            <a:pPr lvl="0"/>
+            <a:r>
+              <a:rPr b="1"/>
+              <a:t>Cannot start with a number</a:t>
+            </a:r>
+            <a:r>
+              <a:rPr/>
+              <a:t> — </a:t>
+            </a:r>
+            <a:r>
+              <a:rPr>
+                <a:latin typeface="Courier"/>
+              </a:rPr>
+              <a:t>x2</a:t>
+            </a:r>
+            <a:r>
+              <a:rPr/>
+              <a:t> ✅, </a:t>
+            </a:r>
+            <a:r>
+              <a:rPr>
+                <a:latin typeface="Courier"/>
+              </a:rPr>
+              <a:t>2x</a:t>
+            </a:r>
+            <a:r>
+              <a:rPr/>
+              <a:t> ❌</a:t>
+            </a:r>
+          </a:p>
+          <a:p>
+            <a:pPr lvl="0"/>
+            <a:r>
+              <a:rPr/>
+              <a:t>R is </a:t>
+            </a:r>
+            <a:r>
+              <a:rPr b="1"/>
+              <a:t>case-sensitive</a:t>
+            </a:r>
+            <a:r>
+              <a:rPr/>
+              <a:t> — </a:t>
+            </a:r>
+            <a:r>
+              <a:rPr>
+                <a:latin typeface="Courier"/>
+              </a:rPr>
+              <a:t>weight_kg</a:t>
+            </a:r>
+            <a:r>
+              <a:rPr/>
+              <a:t> ≠ </a:t>
+            </a:r>
+            <a:r>
+              <a:rPr>
+                <a:latin typeface="Courier"/>
+              </a:rPr>
+              <a:t>Weight_kg</a:t>
+            </a:r>
+          </a:p>
+          <a:p>
+            <a:pPr lvl="0"/>
+            <a:r>
+              <a:rPr/>
+              <a:t>Avoid names of built-in functions (</a:t>
+            </a:r>
+            <a:r>
+              <a:rPr>
+                <a:latin typeface="Courier"/>
+              </a:rPr>
+              <a:t>mean</a:t>
+            </a:r>
+            <a:r>
+              <a:rPr/>
+              <a:t>, </a:t>
+            </a:r>
+            <a:r>
+              <a:rPr>
+                <a:latin typeface="Courier"/>
+              </a:rPr>
+              <a:t>data</a:t>
+            </a:r>
+            <a:r>
+              <a:rPr/>
+              <a:t>, </a:t>
+            </a:r>
+            <a:r>
+              <a:rPr>
+                <a:latin typeface="Courier"/>
+              </a:rPr>
+              <a:t>c</a:t>
+            </a:r>
+            <a:r>
+              <a:rPr/>
+              <a:t>)</a:t>
+            </a:r>
+          </a:p>
+          <a:p>
+            <a:pPr lvl="0"/>
+            <a:r>
+              <a:rPr/>
+              <a:t>Avoid dots; use </a:t>
+            </a:r>
+            <a:r>
+              <a:rPr b="1">
+                <a:latin typeface="Courier"/>
+              </a:rPr>
+              <a:t>lower_snake_case</a:t>
+            </a:r>
+            <a:r>
+              <a:rPr/>
+              <a:t> like the tidyverse</a:t>
+            </a:r>
+          </a:p>
+          <a:p>
+            <a:pPr lvl="0" indent="0" marL="0">
+              <a:buNone/>
+            </a:pPr>
+            <a:r>
+              <a:rPr b="1"/>
+              <a:t>⚠️ Watch out!</a:t>
+            </a:r>
+          </a:p>
+          <a:p>
+            <a:pPr lvl="0" indent="0" marL="0">
+              <a:buNone/>
+            </a:pPr>
+            <a:r>
+              <a:rPr>
+                <a:latin typeface="Courier"/>
+              </a:rPr>
+              <a:t>weight_g</a:t>
+            </a:r>
+            <a:r>
+              <a:rPr/>
+              <a:t> and </a:t>
+            </a:r>
+            <a:r>
+              <a:rPr>
+                <a:latin typeface="Courier"/>
+              </a:rPr>
+              <a:t>weight_G</a:t>
+            </a:r>
+            <a:r>
+              <a:rPr/>
+              <a:t> are two </a:t>
+            </a:r>
+            <a:r>
+              <a:rPr i="1"/>
+              <a:t>different</a:t>
+            </a:r>
+            <a:r>
+              <a:rPr/>
+              <a:t> objects. Pick one style and stick with it.</a:t>
+            </a:r>
+          </a:p>
+        </p:txBody>
+      </p:sp>
+      <p:sp>
+        <p:nvSpPr>
+          <p:cNvPr id="4" name="Content Placeholder 3"/>
+          <p:cNvSpPr>
+            <a:spLocks noGrp="1"/>
+          </p:cNvSpPr>
+          <p:nvPr>
+            <p:ph idx="2" sz="half"/>
+          </p:nvPr>
+        </p:nvSpPr>
+        <p:spPr/>
+        <p:txBody>
+          <a:bodyPr/>
+          <a:lstStyle/>
+          <a:p>
+            <a:pPr lvl="0" indent="0" marL="0">
+              <a:buNone/>
+            </a:pPr>
+            <a:r>
+              <a:rPr b="1"/>
+              <a:t>📖 New word</a:t>
+            </a:r>
+          </a:p>
+          <a:p>
+            <a:pPr lvl="0" indent="0" marL="0">
+              <a:buNone/>
+            </a:pPr>
+            <a:r>
+              <a:rPr b="1"/>
+              <a:t>Object</a:t>
+            </a:r>
+            <a:r>
+              <a:rPr/>
+              <a:t> (R) = </a:t>
+            </a:r>
+            <a:r>
+              <a:rPr b="1"/>
+              <a:t>variable</a:t>
+            </a:r>
+            <a:r>
+              <a:rPr/>
+              <a:t> (Excel/other languages). Same idea: a named box that holds something.</a:t>
+            </a:r>
+          </a:p>
+          <a:p>
+            <a:pPr lvl="0" indent="0" marL="0">
+              <a:buNone/>
+            </a:pPr>
+            <a:r>
+              <a:rPr b="1"/>
+              <a:t>✅ Key idea</a:t>
+            </a:r>
+          </a:p>
+          <a:p>
+            <a:pPr lvl="0" indent="0" marL="0">
+              <a:buNone/>
+            </a:pPr>
+            <a:r>
+              <a:rPr/>
+              <a:t>Nouns for objects (</a:t>
+            </a:r>
+            <a:r>
+              <a:rPr>
+                <a:latin typeface="Courier"/>
+              </a:rPr>
+              <a:t>tree_df</a:t>
+            </a:r>
+            <a:r>
+              <a:rPr/>
+              <a:t>), verbs for functions (</a:t>
+            </a:r>
+            <a:r>
+              <a:rPr>
+                <a:latin typeface="Courier"/>
+              </a:rPr>
+              <a:t>filter</a:t>
+            </a:r>
+            <a:r>
+              <a:rPr/>
+              <a:t>).</a:t>
+            </a:r>
+          </a:p>
+        </p:txBody>
+      </p:sp>
+    </p:spTree>
+  </p:cSld>
+</p:sld>
+</file>
+
+<file path=ppt/slides/slide13.xml><?xml version="1.0" encoding="utf-8"?>
+<p:sld xmlns:a="http://schemas.openxmlformats.org/drawingml/2006/main" xmlns:r="http://schemas.openxmlformats.org/officeDocument/2006/relationships" xmlns:p="http://schemas.openxmlformats.org/presentationml/2006/main">
+  <p:cSld>
+    <p:spTree>
+      <p:nvGrpSpPr>
+        <p:cNvPr id="1" name=""/>
+        <p:cNvGrpSpPr/>
+        <p:nvPr/>
+      </p:nvGrpSpPr>
+      <p:grpSpPr>
+        <a:xfrm>
+          <a:off x="0" y="0"/>
+          <a:ext cx="0" cy="0"/>
+          <a:chOff x="0" y="0"/>
+          <a:chExt cx="0" cy="0"/>
+        </a:xfrm>
+      </p:grpSpPr>
+      <p:sp>
+        <p:nvSpPr>
+          <p:cNvPr id="2" name="Title 1"/>
+          <p:cNvSpPr>
+            <a:spLocks noGrp="1"/>
+          </p:cNvSpPr>
+          <p:nvPr>
+            <p:ph type="title"/>
+          </p:nvPr>
+        </p:nvSpPr>
+        <p:spPr>
+          <a:xfrm>
+            <a:off x="0" y="0"/>
+            <a:ext cx="9144000" cy="602780"/>
+          </a:xfrm>
+          <a:solidFill>
+            <a:srgbClr val="70121D"/>
+          </a:solidFill>
+        </p:spPr>
+        <p:txBody>
+          <a:bodyPr/>
+          <a:lstStyle/>
+          <a:p>
+            <a:pPr lvl="0" indent="0" marL="0">
+              <a:buNone/>
+            </a:pPr>
+            <a:r>
+              <a:rPr/>
+              <a:t>Leave notes with comments </a:t>
+            </a:r>
+            <a:r>
+              <a:rPr>
+                <a:latin typeface="Courier"/>
+              </a:rPr>
+              <a:t>#</a:t>
+            </a:r>
+          </a:p>
+        </p:txBody>
+      </p:sp>
+      <p:sp>
+        <p:nvSpPr>
+          <p:cNvPr id="3" name="Content Placeholder 2"/>
+          <p:cNvSpPr>
+            <a:spLocks noGrp="1"/>
+          </p:cNvSpPr>
+          <p:nvPr>
+            <p:ph idx="1" sz="half"/>
+          </p:nvPr>
+        </p:nvSpPr>
+        <p:spPr/>
+        <p:txBody>
+          <a:bodyPr/>
+          <a:lstStyle/>
+          <a:p>
+            <a:pPr lvl="0" indent="0" marL="0">
+              <a:buNone/>
+            </a:pPr>
+            <a:r>
+              <a:rPr/>
+              <a:t>Anything to the right of </a:t>
+            </a:r>
+            <a:r>
+              <a:rPr>
+                <a:latin typeface="Courier"/>
+              </a:rPr>
+              <a:t>#</a:t>
+            </a:r>
+            <a:r>
+              <a:rPr/>
+              <a:t> is </a:t>
+            </a:r>
+            <a:r>
+              <a:rPr b="1"/>
+              <a:t>ignored by R</a:t>
+            </a:r>
+            <a:r>
+              <a:rPr/>
+              <a:t> — it’s a note to humans:</a:t>
+            </a:r>
+          </a:p>
+          <a:p>
+            <a:pPr lvl="0" indent="0">
+              <a:buNone/>
+            </a:pPr>
+            <a:r>
+              <a:rPr>
+                <a:solidFill>
+                  <a:srgbClr val="5E5E5E"/>
+                </a:solidFill>
+                <a:latin typeface="Courier"/>
+              </a:rPr>
+              <a:t># weights of four leaves, in grams</a:t>
+            </a:r>
+            <a:br/>
+            <a:r>
+              <a:rPr>
+                <a:solidFill>
+                  <a:srgbClr val="003B4F"/>
+                </a:solidFill>
+                <a:latin typeface="Courier"/>
+              </a:rPr>
+              <a:t>leaf_mass &lt;- </a:t>
+            </a:r>
+            <a:r>
+              <a:rPr>
+                <a:solidFill>
+                  <a:srgbClr val="4758AB"/>
+                </a:solidFill>
+                <a:latin typeface="Courier"/>
+              </a:rPr>
+              <a:t>c</a:t>
+            </a:r>
+            <a:r>
+              <a:rPr>
+                <a:solidFill>
+                  <a:srgbClr val="003B4F"/>
+                </a:solidFill>
+                <a:latin typeface="Courier"/>
+              </a:rPr>
+              <a:t>(</a:t>
+            </a:r>
+            <a:r>
+              <a:rPr>
+                <a:solidFill>
+                  <a:srgbClr val="AD0000"/>
+                </a:solidFill>
+                <a:latin typeface="Courier"/>
+              </a:rPr>
+              <a:t>4</a:t>
+            </a:r>
+            <a:r>
+              <a:rPr>
+                <a:solidFill>
+                  <a:srgbClr val="003B4F"/>
+                </a:solidFill>
+                <a:latin typeface="Courier"/>
+              </a:rPr>
+              <a:t>, </a:t>
+            </a:r>
+            <a:r>
+              <a:rPr>
+                <a:solidFill>
+                  <a:srgbClr val="AD0000"/>
+                </a:solidFill>
+                <a:latin typeface="Courier"/>
+              </a:rPr>
+              <a:t>3</a:t>
+            </a:r>
+            <a:r>
+              <a:rPr>
+                <a:solidFill>
+                  <a:srgbClr val="003B4F"/>
+                </a:solidFill>
+                <a:latin typeface="Courier"/>
+              </a:rPr>
+              <a:t>, </a:t>
+            </a:r>
+            <a:r>
+              <a:rPr>
+                <a:solidFill>
+                  <a:srgbClr val="AD0000"/>
+                </a:solidFill>
+                <a:latin typeface="Courier"/>
+              </a:rPr>
+              <a:t>5</a:t>
+            </a:r>
+            <a:r>
+              <a:rPr>
+                <a:solidFill>
+                  <a:srgbClr val="003B4F"/>
+                </a:solidFill>
+                <a:latin typeface="Courier"/>
+              </a:rPr>
+              <a:t>, </a:t>
+            </a:r>
+            <a:r>
+              <a:rPr>
+                <a:solidFill>
+                  <a:srgbClr val="AD0000"/>
+                </a:solidFill>
+                <a:latin typeface="Courier"/>
+              </a:rPr>
+              <a:t>7</a:t>
+            </a:r>
+            <a:r>
+              <a:rPr>
+                <a:solidFill>
+                  <a:srgbClr val="003B4F"/>
+                </a:solidFill>
+                <a:latin typeface="Courier"/>
+              </a:rPr>
+              <a:t>)</a:t>
+            </a:r>
+            <a:br/>
+            <a:br/>
+            <a:r>
+              <a:rPr>
+                <a:solidFill>
+                  <a:srgbClr val="4758AB"/>
+                </a:solidFill>
+                <a:latin typeface="Courier"/>
+              </a:rPr>
+              <a:t>mean</a:t>
+            </a:r>
+            <a:r>
+              <a:rPr>
+                <a:solidFill>
+                  <a:srgbClr val="003B4F"/>
+                </a:solidFill>
+                <a:latin typeface="Courier"/>
+              </a:rPr>
+              <a:t>(leaf_mass)   </a:t>
+            </a:r>
+            <a:r>
+              <a:rPr>
+                <a:solidFill>
+                  <a:srgbClr val="5E5E5E"/>
+                </a:solidFill>
+                <a:latin typeface="Courier"/>
+              </a:rPr>
+              <a:t># average leaf mass</a:t>
+            </a:r>
+          </a:p>
+          <a:p>
+            <a:pPr lvl="0"/>
+            <a:r>
+              <a:rPr/>
+              <a:t>Comment generously — your future self will thank you.</a:t>
+            </a:r>
+          </a:p>
+          <a:p>
+            <a:pPr lvl="0"/>
+            <a:r>
+              <a:rPr/>
+              <a:t>Shortcut to toggle a line: Ctrl/Cmd + Shift + C.</a:t>
+            </a:r>
+          </a:p>
+          <a:p>
+            <a:pPr lvl="0" indent="0" marL="0">
+              <a:buNone/>
+            </a:pPr>
+            <a:r>
+              <a:rPr b="1"/>
+              <a:t>✅ Key idea</a:t>
+            </a:r>
+          </a:p>
+          <a:p>
+            <a:pPr lvl="0" indent="0" marL="0">
+              <a:buNone/>
+            </a:pPr>
+            <a:r>
+              <a:rPr/>
+              <a:t>If a line confused you while writing it, comment </a:t>
+            </a:r>
+            <a:r>
+              <a:rPr i="1"/>
+              <a:t>why</a:t>
+            </a:r>
+            <a:r>
+              <a:rPr/>
+              <a:t> you did it.</a:t>
+            </a:r>
+          </a:p>
+        </p:txBody>
+      </p:sp>
+      <p:sp>
+        <p:nvSpPr>
+          <p:cNvPr id="4" name="Content Placeholder 3"/>
+          <p:cNvSpPr>
+            <a:spLocks noGrp="1"/>
+          </p:cNvSpPr>
+          <p:nvPr>
+            <p:ph idx="2" sz="half"/>
+          </p:nvPr>
+        </p:nvSpPr>
+        <p:spPr/>
+        <p:txBody>
+          <a:bodyPr/>
+          <a:lstStyle/>
+          <a:p>
+            <a:pPr lvl="0" indent="0" marL="0">
+              <a:buNone/>
+            </a:pPr>
+            <a:r>
+              <a:rPr b="1"/>
+              <a:t>📊 Coming from Excel?</a:t>
+            </a:r>
+          </a:p>
+          <a:p>
+            <a:pPr lvl="0" indent="0" marL="0">
+              <a:buNone/>
+            </a:pPr>
+            <a:r>
+              <a:rPr/>
+              <a:t>Comments are like the little notes you scribble in a spreadsheet cell — but they never get in the way of the numbers.</a:t>
+            </a:r>
+          </a:p>
+        </p:txBody>
+      </p:sp>
+    </p:spTree>
+  </p:cSld>
+</p:sld>
+</file>
+
+<file path=ppt/slides/slide14.xml><?xml version="1.0" encoding="utf-8"?>
+<p:sld xmlns:a="http://schemas.openxmlformats.org/drawingml/2006/main" xmlns:r="http://schemas.openxmlformats.org/officeDocument/2006/relationships" xmlns:p="http://schemas.openxmlformats.org/presentationml/2006/main">
+  <p:cSld>
+    <p:spTree>
+      <p:nvGrpSpPr>
+        <p:cNvPr id="1" name=""/>
+        <p:cNvGrpSpPr/>
+        <p:nvPr/>
+      </p:nvGrpSpPr>
+      <p:grpSpPr>
+        <a:xfrm>
+          <a:off x="0" y="0"/>
+          <a:ext cx="0" cy="0"/>
+          <a:chOff x="0" y="0"/>
+          <a:chExt cx="0" cy="0"/>
+        </a:xfrm>
+      </p:grpSpPr>
+      <p:sp>
+        <p:nvSpPr>
+          <p:cNvPr id="2" name="Title 1"/>
+          <p:cNvSpPr>
+            <a:spLocks noGrp="1"/>
+          </p:cNvSpPr>
+          <p:nvPr>
+            <p:ph type="title"/>
+          </p:nvPr>
+        </p:nvSpPr>
+        <p:spPr>
+          <a:xfrm>
+            <a:off x="0" y="0"/>
+            <a:ext cx="9144000" cy="602780"/>
+          </a:xfrm>
+          <a:solidFill>
+            <a:srgbClr val="70121D"/>
+          </a:solidFill>
+        </p:spPr>
+        <p:txBody>
+          <a:bodyPr/>
+          <a:lstStyle/>
+          <a:p>
+            <a:pPr lvl="0" indent="0" marL="0">
+              <a:buNone/>
+            </a:pPr>
+            <a:r>
+              <a:rPr/>
+              <a:t>Functions and their arguments</a:t>
+            </a:r>
+          </a:p>
+        </p:txBody>
+      </p:sp>
+      <p:sp>
+        <p:nvSpPr>
+          <p:cNvPr id="3" name="Content Placeholder 2"/>
+          <p:cNvSpPr>
+            <a:spLocks noGrp="1"/>
+          </p:cNvSpPr>
+          <p:nvPr>
+            <p:ph idx="1" sz="half"/>
+          </p:nvPr>
+        </p:nvSpPr>
+        <p:spPr/>
+        <p:txBody>
+          <a:bodyPr/>
+          <a:lstStyle/>
+          <a:p>
+            <a:pPr lvl="0" indent="0" marL="0">
+              <a:buNone/>
+            </a:pPr>
+            <a:r>
+              <a:rPr/>
+              <a:t>A </a:t>
+            </a:r>
+            <a:r>
+              <a:rPr b="1"/>
+              <a:t>function</a:t>
+            </a:r>
+            <a:r>
+              <a:rPr/>
+              <a:t> is a canned script you call by name. You feed it </a:t>
+            </a:r>
+            <a:r>
+              <a:rPr b="1"/>
+              <a:t>arguments</a:t>
+            </a:r>
+            <a:r>
+              <a:rPr/>
+              <a:t> (inputs); it </a:t>
+            </a:r>
+            <a:r>
+              <a:rPr b="1"/>
+              <a:t>returns</a:t>
+            </a:r>
+            <a:r>
+              <a:rPr/>
+              <a:t> a result.</a:t>
+            </a:r>
+          </a:p>
+          <a:p>
+            <a:pPr lvl="0" indent="0">
+              <a:buNone/>
+            </a:pPr>
+            <a:r>
+              <a:rPr>
+                <a:solidFill>
+                  <a:srgbClr val="4758AB"/>
+                </a:solidFill>
+                <a:latin typeface="Courier"/>
+              </a:rPr>
+              <a:t>sqrt</a:t>
+            </a:r>
+            <a:r>
+              <a:rPr>
+                <a:solidFill>
+                  <a:srgbClr val="003B4F"/>
+                </a:solidFill>
+                <a:latin typeface="Courier"/>
+              </a:rPr>
+              <a:t>(</a:t>
+            </a:r>
+            <a:r>
+              <a:rPr>
+                <a:solidFill>
+                  <a:srgbClr val="AD0000"/>
+                </a:solidFill>
+                <a:latin typeface="Courier"/>
+              </a:rPr>
+              <a:t>10</a:t>
+            </a:r>
+            <a:r>
+              <a:rPr>
+                <a:solidFill>
+                  <a:srgbClr val="003B4F"/>
+                </a:solidFill>
+                <a:latin typeface="Courier"/>
+              </a:rPr>
+              <a:t>)               </a:t>
+            </a:r>
+            <a:r>
+              <a:rPr>
+                <a:solidFill>
+                  <a:srgbClr val="5E5E5E"/>
+                </a:solidFill>
+                <a:latin typeface="Courier"/>
+              </a:rPr>
+              <a:t># one argument</a:t>
+            </a:r>
+            <a:br/>
+            <a:r>
+              <a:rPr>
+                <a:solidFill>
+                  <a:srgbClr val="4758AB"/>
+                </a:solidFill>
+                <a:latin typeface="Courier"/>
+              </a:rPr>
+              <a:t>round</a:t>
+            </a:r>
+            <a:r>
+              <a:rPr>
+                <a:solidFill>
+                  <a:srgbClr val="003B4F"/>
+                </a:solidFill>
+                <a:latin typeface="Courier"/>
+              </a:rPr>
+              <a:t>(</a:t>
+            </a:r>
+            <a:r>
+              <a:rPr>
+                <a:solidFill>
+                  <a:srgbClr val="AD0000"/>
+                </a:solidFill>
+                <a:latin typeface="Courier"/>
+              </a:rPr>
+              <a:t>3.14159</a:t>
+            </a:r>
+            <a:r>
+              <a:rPr>
+                <a:solidFill>
+                  <a:srgbClr val="003B4F"/>
+                </a:solidFill>
+                <a:latin typeface="Courier"/>
+              </a:rPr>
+              <a:t>)         </a:t>
+            </a:r>
+            <a:r>
+              <a:rPr>
+                <a:solidFill>
+                  <a:srgbClr val="5E5E5E"/>
+                </a:solidFill>
+                <a:latin typeface="Courier"/>
+              </a:rPr>
+              <a:t># default: 0 digits -&gt; 3</a:t>
+            </a:r>
+            <a:br/>
+            <a:r>
+              <a:rPr>
+                <a:solidFill>
+                  <a:srgbClr val="4758AB"/>
+                </a:solidFill>
+                <a:latin typeface="Courier"/>
+              </a:rPr>
+              <a:t>round</a:t>
+            </a:r>
+            <a:r>
+              <a:rPr>
+                <a:solidFill>
+                  <a:srgbClr val="003B4F"/>
+                </a:solidFill>
+                <a:latin typeface="Courier"/>
+              </a:rPr>
+              <a:t>(</a:t>
+            </a:r>
+            <a:r>
+              <a:rPr>
+                <a:solidFill>
+                  <a:srgbClr val="AD0000"/>
+                </a:solidFill>
+                <a:latin typeface="Courier"/>
+              </a:rPr>
+              <a:t>3.14159</a:t>
+            </a:r>
+            <a:r>
+              <a:rPr>
+                <a:solidFill>
+                  <a:srgbClr val="003B4F"/>
+                </a:solidFill>
+                <a:latin typeface="Courier"/>
+              </a:rPr>
+              <a:t>, </a:t>
+            </a:r>
+            <a:r>
+              <a:rPr>
+                <a:solidFill>
+                  <a:srgbClr val="AD0000"/>
+                </a:solidFill>
+                <a:latin typeface="Courier"/>
+              </a:rPr>
+              <a:t>2</a:t>
+            </a:r>
+            <a:r>
+              <a:rPr>
+                <a:solidFill>
+                  <a:srgbClr val="003B4F"/>
+                </a:solidFill>
+                <a:latin typeface="Courier"/>
+              </a:rPr>
+              <a:t>)      </a:t>
+            </a:r>
+            <a:r>
+              <a:rPr>
+                <a:solidFill>
+                  <a:srgbClr val="5E5E5E"/>
+                </a:solidFill>
+                <a:latin typeface="Courier"/>
+              </a:rPr>
+              <a:t># two digits     -&gt; 3.14</a:t>
+            </a:r>
+            <a:br/>
+            <a:r>
+              <a:rPr>
+                <a:solidFill>
+                  <a:srgbClr val="4758AB"/>
+                </a:solidFill>
+                <a:latin typeface="Courier"/>
+              </a:rPr>
+              <a:t>round</a:t>
+            </a:r>
+            <a:r>
+              <a:rPr>
+                <a:solidFill>
+                  <a:srgbClr val="003B4F"/>
+                </a:solidFill>
+                <a:latin typeface="Courier"/>
+              </a:rPr>
+              <a:t>(</a:t>
+            </a:r>
+            <a:r>
+              <a:rPr>
+                <a:solidFill>
+                  <a:srgbClr val="657422"/>
+                </a:solidFill>
+                <a:latin typeface="Courier"/>
+              </a:rPr>
+              <a:t>x =</a:t>
+            </a:r>
+            <a:r>
+              <a:rPr>
+                <a:solidFill>
+                  <a:srgbClr val="003B4F"/>
+                </a:solidFill>
+                <a:latin typeface="Courier"/>
+              </a:rPr>
+              <a:t> </a:t>
+            </a:r>
+            <a:r>
+              <a:rPr>
+                <a:solidFill>
+                  <a:srgbClr val="AD0000"/>
+                </a:solidFill>
+                <a:latin typeface="Courier"/>
+              </a:rPr>
+              <a:t>3.14159</a:t>
+            </a:r>
+            <a:r>
+              <a:rPr>
+                <a:solidFill>
+                  <a:srgbClr val="003B4F"/>
+                </a:solidFill>
+                <a:latin typeface="Courier"/>
+              </a:rPr>
+              <a:t>, </a:t>
+            </a:r>
+            <a:r>
+              <a:rPr>
+                <a:solidFill>
+                  <a:srgbClr val="657422"/>
+                </a:solidFill>
+                <a:latin typeface="Courier"/>
+              </a:rPr>
+              <a:t>digits =</a:t>
+            </a:r>
+            <a:r>
+              <a:rPr>
+                <a:solidFill>
+                  <a:srgbClr val="003B4F"/>
+                </a:solidFill>
+                <a:latin typeface="Courier"/>
+              </a:rPr>
+              <a:t> </a:t>
+            </a:r>
+            <a:r>
+              <a:rPr>
+                <a:solidFill>
+                  <a:srgbClr val="AD0000"/>
+                </a:solidFill>
+                <a:latin typeface="Courier"/>
+              </a:rPr>
+              <a:t>2</a:t>
+            </a:r>
+            <a:r>
+              <a:rPr>
+                <a:solidFill>
+                  <a:srgbClr val="003B4F"/>
+                </a:solidFill>
+                <a:latin typeface="Courier"/>
+              </a:rPr>
+              <a:t>)   </a:t>
+            </a:r>
+            <a:r>
+              <a:rPr>
+                <a:solidFill>
+                  <a:srgbClr val="5E5E5E"/>
+                </a:solidFill>
+                <a:latin typeface="Courier"/>
+              </a:rPr>
+              <a:t># named</a:t>
+            </a:r>
+          </a:p>
+          <a:p>
+            <a:pPr lvl="0" indent="0" marL="0">
+              <a:buNone/>
+            </a:pPr>
+            <a:r>
+              <a:rPr/>
+              <a:t>Stuck on a function? Ask R:</a:t>
+            </a:r>
+          </a:p>
+          <a:p>
+            <a:pPr lvl="0" indent="0">
+              <a:buNone/>
+            </a:pPr>
+            <a:r>
+              <a:rPr>
+                <a:solidFill>
+                  <a:srgbClr val="003B4F"/>
+                </a:solidFill>
+                <a:latin typeface="Courier"/>
+              </a:rPr>
+              <a:t>?round        </a:t>
+            </a:r>
+            <a:r>
+              <a:rPr>
+                <a:solidFill>
+                  <a:srgbClr val="5E5E5E"/>
+                </a:solidFill>
+                <a:latin typeface="Courier"/>
+              </a:rPr>
+              <a:t># open the help page</a:t>
+            </a:r>
+            <a:br/>
+            <a:r>
+              <a:rPr>
+                <a:solidFill>
+                  <a:srgbClr val="4758AB"/>
+                </a:solidFill>
+                <a:latin typeface="Courier"/>
+              </a:rPr>
+              <a:t>args</a:t>
+            </a:r>
+            <a:r>
+              <a:rPr>
+                <a:solidFill>
+                  <a:srgbClr val="003B4F"/>
+                </a:solidFill>
+                <a:latin typeface="Courier"/>
+              </a:rPr>
+              <a:t>(round)   </a:t>
+            </a:r>
+            <a:r>
+              <a:rPr>
+                <a:solidFill>
+                  <a:srgbClr val="5E5E5E"/>
+                </a:solidFill>
+                <a:latin typeface="Courier"/>
+              </a:rPr>
+              <a:t># what arguments does it take?</a:t>
+            </a:r>
+          </a:p>
+          <a:p>
+            <a:pPr lvl="0" indent="0" marL="0">
+              <a:buNone/>
+            </a:pPr>
+            <a:r>
+              <a:rPr b="1"/>
+              <a:t>📖 New word</a:t>
+            </a:r>
+          </a:p>
+          <a:p>
+            <a:pPr lvl="0" indent="0" marL="0">
+              <a:buNone/>
+            </a:pPr>
+            <a:r>
+              <a:rPr b="1"/>
+              <a:t>Argument</a:t>
+            </a:r>
+            <a:r>
+              <a:rPr/>
+              <a:t> = an input you hand to a function, inside its </a:t>
+            </a:r>
+            <a:r>
+              <a:rPr>
+                <a:latin typeface="Courier"/>
+              </a:rPr>
+              <a:t>( )</a:t>
+            </a:r>
+            <a:r>
+              <a:rPr/>
+              <a:t>.</a:t>
+            </a:r>
+          </a:p>
+        </p:txBody>
+      </p:sp>
+      <p:pic>
+        <p:nvPicPr>
+          <p:cNvPr descr="images/diagram_function.png" id="0" name="Picture 1"/>
+          <p:cNvPicPr>
+            <a:picLocks noGrp="1" noChangeAspect="1"/>
+          </p:cNvPicPr>
+          <p:nvPr/>
+        </p:nvPicPr>
+        <p:blipFill>
+          <a:blip r:embed="rId2"/>
+          <a:stretch>
+            <a:fillRect/>
+          </a:stretch>
+        </p:blipFill>
+        <p:spPr bwMode="auto">
+          <a:xfrm>
+            <a:off x="6121400" y="1828800"/>
+            <a:ext cx="2781300" cy="2133600"/>
+          </a:xfrm>
+          <a:prstGeom prst="rect">
+            <a:avLst/>
+          </a:prstGeom>
+          <a:noFill/>
+          <a:ln w="9525">
+            <a:noFill/>
+            <a:headEnd/>
+            <a:tailEnd/>
+          </a:ln>
+        </p:spPr>
+      </p:pic>
+    </p:spTree>
+  </p:cSld>
+</p:sld>
+</file>
+
+<file path=ppt/slides/slide15.xml><?xml version="1.0" encoding="utf-8"?>
+<p:sld xmlns:a="http://schemas.openxmlformats.org/drawingml/2006/main" xmlns:r="http://schemas.openxmlformats.org/officeDocument/2006/relationships" xmlns:p="http://schemas.openxmlformats.org/presentationml/2006/main">
+  <p:cSld>
+    <p:spTree>
+      <p:nvGrpSpPr>
+        <p:cNvPr id="1" name=""/>
+        <p:cNvGrpSpPr/>
+        <p:nvPr/>
+      </p:nvGrpSpPr>
+      <p:grpSpPr>
+        <a:xfrm>
+          <a:off x="0" y="0"/>
+          <a:ext cx="0" cy="0"/>
+          <a:chOff x="0" y="0"/>
+          <a:chExt cx="0" cy="0"/>
+        </a:xfrm>
+      </p:grpSpPr>
+      <p:sp>
+        <p:nvSpPr>
+          <p:cNvPr id="2" name="Title 1"/>
+          <p:cNvSpPr>
+            <a:spLocks noGrp="1"/>
+          </p:cNvSpPr>
+          <p:nvPr>
+            <p:ph type="title"/>
+          </p:nvPr>
+        </p:nvSpPr>
+        <p:spPr>
+          <a:xfrm>
+            <a:off x="0" y="0"/>
+            <a:ext cx="9144000" cy="602780"/>
+          </a:xfrm>
+          <a:solidFill>
+            <a:srgbClr val="70121D"/>
+          </a:solidFill>
+        </p:spPr>
+        <p:txBody>
+          <a:bodyPr/>
+          <a:lstStyle/>
+          <a:p>
+            <a:pPr lvl="0" indent="0" marL="0">
+              <a:buNone/>
+            </a:pPr>
+            <a:r>
+              <a:rPr/>
+              <a:t>Vectors — a row of values</a:t>
+            </a:r>
+          </a:p>
+        </p:txBody>
+      </p:sp>
+      <p:sp>
+        <p:nvSpPr>
+          <p:cNvPr id="3" name="Content Placeholder 2"/>
+          <p:cNvSpPr>
+            <a:spLocks noGrp="1"/>
+          </p:cNvSpPr>
+          <p:nvPr>
+            <p:ph idx="1" sz="half"/>
+          </p:nvPr>
+        </p:nvSpPr>
+        <p:spPr/>
+        <p:txBody>
+          <a:bodyPr/>
+          <a:lstStyle/>
+          <a:p>
+            <a:pPr lvl="0" indent="0" marL="0">
+              <a:buNone/>
+            </a:pPr>
+            <a:r>
+              <a:rPr/>
+              <a:t>A </a:t>
+            </a:r>
+            <a:r>
+              <a:rPr b="1"/>
+              <a:t>vector</a:t>
+            </a:r>
+            <a:r>
+              <a:rPr/>
+              <a:t> is a series of values built with </a:t>
+            </a:r>
+            <a:r>
+              <a:rPr>
+                <a:latin typeface="Courier"/>
+              </a:rPr>
+              <a:t>c()</a:t>
+            </a:r>
+            <a:r>
+              <a:rPr/>
+              <a:t> (“combine”):</a:t>
+            </a:r>
+          </a:p>
+          <a:p>
+            <a:pPr lvl="0" indent="0">
+              <a:buNone/>
+            </a:pPr>
+            <a:r>
+              <a:rPr>
+                <a:solidFill>
+                  <a:srgbClr val="003B4F"/>
+                </a:solidFill>
+                <a:latin typeface="Courier"/>
+              </a:rPr>
+              <a:t>weight_g &lt;- </a:t>
+            </a:r>
+            <a:r>
+              <a:rPr>
+                <a:solidFill>
+                  <a:srgbClr val="4758AB"/>
+                </a:solidFill>
+                <a:latin typeface="Courier"/>
+              </a:rPr>
+              <a:t>c</a:t>
+            </a:r>
+            <a:r>
+              <a:rPr>
+                <a:solidFill>
+                  <a:srgbClr val="003B4F"/>
+                </a:solidFill>
+                <a:latin typeface="Courier"/>
+              </a:rPr>
+              <a:t>(</a:t>
+            </a:r>
+            <a:r>
+              <a:rPr>
+                <a:solidFill>
+                  <a:srgbClr val="AD0000"/>
+                </a:solidFill>
+                <a:latin typeface="Courier"/>
+              </a:rPr>
+              <a:t>4</a:t>
+            </a:r>
+            <a:r>
+              <a:rPr>
+                <a:solidFill>
+                  <a:srgbClr val="003B4F"/>
+                </a:solidFill>
+                <a:latin typeface="Courier"/>
+              </a:rPr>
+              <a:t>, </a:t>
+            </a:r>
+            <a:r>
+              <a:rPr>
+                <a:solidFill>
+                  <a:srgbClr val="AD0000"/>
+                </a:solidFill>
+                <a:latin typeface="Courier"/>
+              </a:rPr>
+              <a:t>3</a:t>
+            </a:r>
+            <a:r>
+              <a:rPr>
+                <a:solidFill>
+                  <a:srgbClr val="003B4F"/>
+                </a:solidFill>
+                <a:latin typeface="Courier"/>
+              </a:rPr>
+              <a:t>, </a:t>
+            </a:r>
+            <a:r>
+              <a:rPr>
+                <a:solidFill>
+                  <a:srgbClr val="AD0000"/>
+                </a:solidFill>
+                <a:latin typeface="Courier"/>
+              </a:rPr>
+              <a:t>5</a:t>
+            </a:r>
+            <a:r>
+              <a:rPr>
+                <a:solidFill>
+                  <a:srgbClr val="003B4F"/>
+                </a:solidFill>
+                <a:latin typeface="Courier"/>
+              </a:rPr>
+              <a:t>, </a:t>
+            </a:r>
+            <a:r>
+              <a:rPr>
+                <a:solidFill>
+                  <a:srgbClr val="AD0000"/>
+                </a:solidFill>
+                <a:latin typeface="Courier"/>
+              </a:rPr>
+              <a:t>7</a:t>
+            </a:r>
+            <a:r>
+              <a:rPr>
+                <a:solidFill>
+                  <a:srgbClr val="003B4F"/>
+                </a:solidFill>
+                <a:latin typeface="Courier"/>
+              </a:rPr>
+              <a:t>)     </a:t>
+            </a:r>
+            <a:r>
+              <a:rPr>
+                <a:solidFill>
+                  <a:srgbClr val="5E5E5E"/>
+                </a:solidFill>
+                <a:latin typeface="Courier"/>
+              </a:rPr>
+              <a:t># numbers</a:t>
+            </a:r>
+            <a:br/>
+            <a:r>
+              <a:rPr>
+                <a:solidFill>
+                  <a:srgbClr val="003B4F"/>
+                </a:solidFill>
+                <a:latin typeface="Courier"/>
+              </a:rPr>
+              <a:t>side     &lt;- </a:t>
+            </a:r>
+            <a:r>
+              <a:rPr>
+                <a:solidFill>
+                  <a:srgbClr val="4758AB"/>
+                </a:solidFill>
+                <a:latin typeface="Courier"/>
+              </a:rPr>
+              <a:t>c</a:t>
+            </a:r>
+            <a:r>
+              <a:rPr>
+                <a:solidFill>
+                  <a:srgbClr val="003B4F"/>
+                </a:solidFill>
+                <a:latin typeface="Courier"/>
+              </a:rPr>
+              <a:t>(</a:t>
+            </a:r>
+            <a:r>
+              <a:rPr>
+                <a:solidFill>
+                  <a:srgbClr val="20794D"/>
+                </a:solidFill>
+                <a:latin typeface="Courier"/>
+              </a:rPr>
+              <a:t>"sunny"</a:t>
+            </a:r>
+            <a:r>
+              <a:rPr>
+                <a:solidFill>
+                  <a:srgbClr val="003B4F"/>
+                </a:solidFill>
+                <a:latin typeface="Courier"/>
+              </a:rPr>
+              <a:t>, </a:t>
+            </a:r>
+            <a:r>
+              <a:rPr>
+                <a:solidFill>
+                  <a:srgbClr val="20794D"/>
+                </a:solidFill>
+                <a:latin typeface="Courier"/>
+              </a:rPr>
+              <a:t>"shady"</a:t>
+            </a:r>
+            <a:r>
+              <a:rPr>
+                <a:solidFill>
+                  <a:srgbClr val="003B4F"/>
+                </a:solidFill>
+                <a:latin typeface="Courier"/>
+              </a:rPr>
+              <a:t>)  </a:t>
+            </a:r>
+            <a:r>
+              <a:rPr>
+                <a:solidFill>
+                  <a:srgbClr val="5E5E5E"/>
+                </a:solidFill>
+                <a:latin typeface="Courier"/>
+              </a:rPr>
+              <a:t># text needs quotes</a:t>
+            </a:r>
+          </a:p>
+          <a:p>
+            <a:pPr lvl="0" indent="0" marL="0">
+              <a:buNone/>
+            </a:pPr>
+            <a:r>
+              <a:rPr/>
+              <a:t>Inspect any vector:</a:t>
+            </a:r>
+          </a:p>
+          <a:p>
+            <a:pPr lvl="0" indent="0">
+              <a:buNone/>
+            </a:pPr>
+            <a:r>
+              <a:rPr>
+                <a:solidFill>
+                  <a:srgbClr val="4758AB"/>
+                </a:solidFill>
+                <a:latin typeface="Courier"/>
+              </a:rPr>
+              <a:t>length</a:t>
+            </a:r>
+            <a:r>
+              <a:rPr>
+                <a:solidFill>
+                  <a:srgbClr val="003B4F"/>
+                </a:solidFill>
+                <a:latin typeface="Courier"/>
+              </a:rPr>
+              <a:t>(weight_g)   </a:t>
+            </a:r>
+            <a:r>
+              <a:rPr>
+                <a:solidFill>
+                  <a:srgbClr val="5E5E5E"/>
+                </a:solidFill>
+                <a:latin typeface="Courier"/>
+              </a:rPr>
+              <a:t># how many values?</a:t>
+            </a:r>
+            <a:br/>
+            <a:r>
+              <a:rPr>
+                <a:solidFill>
+                  <a:srgbClr val="4758AB"/>
+                </a:solidFill>
+                <a:latin typeface="Courier"/>
+              </a:rPr>
+              <a:t>class</a:t>
+            </a:r>
+            <a:r>
+              <a:rPr>
+                <a:solidFill>
+                  <a:srgbClr val="003B4F"/>
+                </a:solidFill>
+                <a:latin typeface="Courier"/>
+              </a:rPr>
+              <a:t>(weight_g)    </a:t>
+            </a:r>
+            <a:r>
+              <a:rPr>
+                <a:solidFill>
+                  <a:srgbClr val="5E5E5E"/>
+                </a:solidFill>
+                <a:latin typeface="Courier"/>
+              </a:rPr>
+              <a:t># what type?</a:t>
+            </a:r>
+            <a:br/>
+            <a:r>
+              <a:rPr>
+                <a:solidFill>
+                  <a:srgbClr val="4758AB"/>
+                </a:solidFill>
+                <a:latin typeface="Courier"/>
+              </a:rPr>
+              <a:t>str</a:t>
+            </a:r>
+            <a:r>
+              <a:rPr>
+                <a:solidFill>
+                  <a:srgbClr val="003B4F"/>
+                </a:solidFill>
+                <a:latin typeface="Courier"/>
+              </a:rPr>
+              <a:t>(weight_g)      </a:t>
+            </a:r>
+            <a:r>
+              <a:rPr>
+                <a:solidFill>
+                  <a:srgbClr val="5E5E5E"/>
+                </a:solidFill>
+                <a:latin typeface="Courier"/>
+              </a:rPr>
+              <a:t># quick structure overview</a:t>
+            </a:r>
+          </a:p>
+          <a:p>
+            <a:pPr lvl="0" indent="0" marL="0">
+              <a:buNone/>
+            </a:pPr>
+            <a:r>
+              <a:rPr b="1"/>
+              <a:t>⚠️ Watch out!</a:t>
+            </a:r>
+          </a:p>
+          <a:p>
+            <a:pPr lvl="0" indent="0" marL="0">
+              <a:buNone/>
+            </a:pPr>
+            <a:r>
+              <a:rPr/>
+              <a:t>Quotes matter: </a:t>
+            </a:r>
+            <a:r>
+              <a:rPr>
+                <a:latin typeface="Courier"/>
+              </a:rPr>
+              <a:t>"sunny"</a:t>
+            </a:r>
+            <a:r>
+              <a:rPr/>
+              <a:t> is text. Without quotes, R hunts for an </a:t>
+            </a:r>
+            <a:r>
+              <a:rPr b="1"/>
+              <a:t>object</a:t>
+            </a:r>
+            <a:r>
+              <a:rPr/>
+              <a:t> named </a:t>
+            </a:r>
+            <a:r>
+              <a:rPr>
+                <a:latin typeface="Courier"/>
+              </a:rPr>
+              <a:t>sunny</a:t>
+            </a:r>
+            <a:r>
+              <a:rPr/>
+              <a:t> and errors when it can’t find one.</a:t>
+            </a:r>
+          </a:p>
+        </p:txBody>
+      </p:sp>
+      <p:sp>
+        <p:nvSpPr>
+          <p:cNvPr id="4" name="Content Placeholder 3"/>
+          <p:cNvSpPr>
+            <a:spLocks noGrp="1"/>
+          </p:cNvSpPr>
+          <p:nvPr>
+            <p:ph idx="2" sz="half"/>
+          </p:nvPr>
+        </p:nvSpPr>
+        <p:spPr/>
+        <p:txBody>
+          <a:bodyPr/>
+          <a:lstStyle/>
+          <a:p>
+            <a:pPr lvl="0" indent="0" marL="0">
+              <a:buNone/>
+            </a:pPr>
+            <a:r>
+              <a:rPr b="1"/>
+              <a:t>✅ Key idea</a:t>
+            </a:r>
+          </a:p>
+          <a:p>
+            <a:pPr lvl="0" indent="0" marL="0">
+              <a:buNone/>
+            </a:pPr>
+            <a:r>
+              <a:rPr/>
+              <a:t>A vector is the workhorse of R. A spreadsheet </a:t>
+            </a:r>
+            <a:r>
+              <a:rPr b="1"/>
+              <a:t>column</a:t>
+            </a:r>
+            <a:r>
+              <a:rPr/>
+              <a:t> is really just a vector.</a:t>
+            </a:r>
+          </a:p>
+        </p:txBody>
+      </p:sp>
+    </p:spTree>
+  </p:cSld>
+</p:sld>
+</file>
+
+<file path=ppt/slides/slide16.xml><?xml version="1.0" encoding="utf-8"?>
+<p:sld xmlns:a="http://schemas.openxmlformats.org/drawingml/2006/main" xmlns:r="http://schemas.openxmlformats.org/officeDocument/2006/relationships" xmlns:p="http://schemas.openxmlformats.org/presentationml/2006/main">
+  <p:cSld>
+    <p:spTree>
+      <p:nvGrpSpPr>
+        <p:cNvPr id="1" name=""/>
+        <p:cNvGrpSpPr/>
+        <p:nvPr/>
+      </p:nvGrpSpPr>
+      <p:grpSpPr>
+        <a:xfrm>
+          <a:off x="0" y="0"/>
+          <a:ext cx="0" cy="0"/>
+          <a:chOff x="0" y="0"/>
+          <a:chExt cx="0" cy="0"/>
+        </a:xfrm>
+      </p:grpSpPr>
+      <p:sp>
+        <p:nvSpPr>
+          <p:cNvPr id="2" name="Title 1"/>
+          <p:cNvSpPr>
+            <a:spLocks noGrp="1"/>
+          </p:cNvSpPr>
+          <p:nvPr>
+            <p:ph type="title"/>
+          </p:nvPr>
+        </p:nvSpPr>
+        <p:spPr>
+          <a:xfrm>
+            <a:off x="0" y="0"/>
+            <a:ext cx="9144000" cy="602780"/>
+          </a:xfrm>
+          <a:solidFill>
+            <a:srgbClr val="70121D"/>
+          </a:solidFill>
+        </p:spPr>
+        <p:txBody>
+          <a:bodyPr/>
+          <a:lstStyle/>
+          <a:p>
+            <a:pPr lvl="0" indent="0" marL="0">
+              <a:buNone/>
+            </a:pPr>
+            <a:r>
+              <a:rPr/>
+              <a:t>Data types live inside vectors</a:t>
+            </a:r>
+          </a:p>
+        </p:txBody>
+      </p:sp>
+      <p:sp>
+        <p:nvSpPr>
+          <p:cNvPr id="3" name="Content Placeholder 2"/>
+          <p:cNvSpPr>
+            <a:spLocks noGrp="1"/>
+          </p:cNvSpPr>
+          <p:nvPr>
+            <p:ph idx="1" sz="half"/>
+          </p:nvPr>
+        </p:nvSpPr>
+        <p:spPr/>
+        <p:txBody>
+          <a:bodyPr/>
+          <a:lstStyle/>
+          <a:p>
+            <a:pPr lvl="0" indent="0" marL="0">
+              <a:buNone/>
+            </a:pPr>
+            <a:r>
+              <a:rPr/>
+              <a:t>Every vector holds </a:t>
+            </a:r>
+            <a:r>
+              <a:rPr b="1"/>
+              <a:t>one type</a:t>
+            </a:r>
+            <a:r>
+              <a:rPr/>
+              <a:t>:</a:t>
+            </a:r>
+          </a:p>
+          <a:p>
+            <a:pPr lvl="0"/>
+            <a:r>
+              <a:rPr>
+                <a:latin typeface="Courier"/>
+              </a:rPr>
+              <a:t>numeric</a:t>
+            </a:r>
+            <a:r>
+              <a:rPr/>
+              <a:t> — </a:t>
+            </a:r>
+            <a:r>
+              <a:rPr>
+                <a:latin typeface="Courier"/>
+              </a:rPr>
+              <a:t>4</a:t>
+            </a:r>
+            <a:r>
+              <a:rPr/>
+              <a:t>, </a:t>
+            </a:r>
+            <a:r>
+              <a:rPr>
+                <a:latin typeface="Courier"/>
+              </a:rPr>
+              <a:t>3.5</a:t>
+            </a:r>
+          </a:p>
+          <a:p>
+            <a:pPr lvl="0"/>
+            <a:r>
+              <a:rPr>
+                <a:latin typeface="Courier"/>
+              </a:rPr>
+              <a:t>character</a:t>
+            </a:r>
+            <a:r>
+              <a:rPr/>
+              <a:t> — </a:t>
+            </a:r>
+            <a:r>
+              <a:rPr>
+                <a:latin typeface="Courier"/>
+              </a:rPr>
+              <a:t>"sunny"</a:t>
+            </a:r>
+          </a:p>
+          <a:p>
+            <a:pPr lvl="0"/>
+            <a:r>
+              <a:rPr>
+                <a:latin typeface="Courier"/>
+              </a:rPr>
+              <a:t>logical</a:t>
+            </a:r>
+            <a:r>
+              <a:rPr/>
+              <a:t> — </a:t>
+            </a:r>
+            <a:r>
+              <a:rPr>
+                <a:latin typeface="Courier"/>
+              </a:rPr>
+              <a:t>TRUE</a:t>
+            </a:r>
+            <a:r>
+              <a:rPr/>
+              <a:t> / </a:t>
+            </a:r>
+            <a:r>
+              <a:rPr>
+                <a:latin typeface="Courier"/>
+              </a:rPr>
+              <a:t>FALSE</a:t>
+            </a:r>
+          </a:p>
+          <a:p>
+            <a:pPr lvl="0"/>
+            <a:r>
+              <a:rPr>
+                <a:latin typeface="Courier"/>
+              </a:rPr>
+              <a:t>integer</a:t>
+            </a:r>
+            <a:r>
+              <a:rPr/>
+              <a:t> — </a:t>
+            </a:r>
+            <a:r>
+              <a:rPr>
+                <a:latin typeface="Courier"/>
+              </a:rPr>
+              <a:t>2L</a:t>
+            </a:r>
+          </a:p>
+          <a:p>
+            <a:pPr lvl="0" indent="0" marL="0">
+              <a:buNone/>
+            </a:pPr>
+            <a:r>
+              <a:rPr/>
+              <a:t>Mix types and R quietly </a:t>
+            </a:r>
+            <a:r>
+              <a:rPr b="1"/>
+              <a:t>coerces</a:t>
+            </a:r>
+            <a:r>
+              <a:rPr/>
+              <a:t> them all to one:</a:t>
+            </a:r>
+          </a:p>
+          <a:p>
+            <a:pPr lvl="0" indent="0">
+              <a:buNone/>
+            </a:pPr>
+            <a:r>
+              <a:rPr>
+                <a:solidFill>
+                  <a:srgbClr val="4758AB"/>
+                </a:solidFill>
+                <a:latin typeface="Courier"/>
+              </a:rPr>
+              <a:t>c</a:t>
+            </a:r>
+            <a:r>
+              <a:rPr>
+                <a:solidFill>
+                  <a:srgbClr val="003B4F"/>
+                </a:solidFill>
+                <a:latin typeface="Courier"/>
+              </a:rPr>
+              <a:t>(</a:t>
+            </a:r>
+            <a:r>
+              <a:rPr>
+                <a:solidFill>
+                  <a:srgbClr val="AD0000"/>
+                </a:solidFill>
+                <a:latin typeface="Courier"/>
+              </a:rPr>
+              <a:t>1</a:t>
+            </a:r>
+            <a:r>
+              <a:rPr>
+                <a:solidFill>
+                  <a:srgbClr val="003B4F"/>
+                </a:solidFill>
+                <a:latin typeface="Courier"/>
+              </a:rPr>
+              <a:t>, </a:t>
+            </a:r>
+            <a:r>
+              <a:rPr>
+                <a:solidFill>
+                  <a:srgbClr val="AD0000"/>
+                </a:solidFill>
+                <a:latin typeface="Courier"/>
+              </a:rPr>
+              <a:t>2</a:t>
+            </a:r>
+            <a:r>
+              <a:rPr>
+                <a:solidFill>
+                  <a:srgbClr val="003B4F"/>
+                </a:solidFill>
+                <a:latin typeface="Courier"/>
+              </a:rPr>
+              <a:t>, </a:t>
+            </a:r>
+            <a:r>
+              <a:rPr>
+                <a:solidFill>
+                  <a:srgbClr val="AD0000"/>
+                </a:solidFill>
+                <a:latin typeface="Courier"/>
+              </a:rPr>
+              <a:t>3</a:t>
+            </a:r>
+            <a:r>
+              <a:rPr>
+                <a:solidFill>
+                  <a:srgbClr val="003B4F"/>
+                </a:solidFill>
+                <a:latin typeface="Courier"/>
+              </a:rPr>
+              <a:t>, </a:t>
+            </a:r>
+            <a:r>
+              <a:rPr>
+                <a:solidFill>
+                  <a:srgbClr val="20794D"/>
+                </a:solidFill>
+                <a:latin typeface="Courier"/>
+              </a:rPr>
+              <a:t>"a"</a:t>
+            </a:r>
+            <a:r>
+              <a:rPr>
+                <a:solidFill>
+                  <a:srgbClr val="003B4F"/>
+                </a:solidFill>
+                <a:latin typeface="Courier"/>
+              </a:rPr>
+              <a:t>)     </a:t>
+            </a:r>
+            <a:r>
+              <a:rPr>
+                <a:solidFill>
+                  <a:srgbClr val="5E5E5E"/>
+                </a:solidFill>
+                <a:latin typeface="Courier"/>
+              </a:rPr>
+              <a:t># all become character</a:t>
+            </a:r>
+            <a:br/>
+            <a:r>
+              <a:rPr>
+                <a:solidFill>
+                  <a:srgbClr val="4758AB"/>
+                </a:solidFill>
+                <a:latin typeface="Courier"/>
+              </a:rPr>
+              <a:t>c</a:t>
+            </a:r>
+            <a:r>
+              <a:rPr>
+                <a:solidFill>
+                  <a:srgbClr val="003B4F"/>
+                </a:solidFill>
+                <a:latin typeface="Courier"/>
+              </a:rPr>
+              <a:t>(</a:t>
+            </a:r>
+            <a:r>
+              <a:rPr>
+                <a:solidFill>
+                  <a:srgbClr val="AD0000"/>
+                </a:solidFill>
+                <a:latin typeface="Courier"/>
+              </a:rPr>
+              <a:t>1</a:t>
+            </a:r>
+            <a:r>
+              <a:rPr>
+                <a:solidFill>
+                  <a:srgbClr val="003B4F"/>
+                </a:solidFill>
+                <a:latin typeface="Courier"/>
+              </a:rPr>
+              <a:t>, </a:t>
+            </a:r>
+            <a:r>
+              <a:rPr>
+                <a:solidFill>
+                  <a:srgbClr val="AD0000"/>
+                </a:solidFill>
+                <a:latin typeface="Courier"/>
+              </a:rPr>
+              <a:t>2</a:t>
+            </a:r>
+            <a:r>
+              <a:rPr>
+                <a:solidFill>
+                  <a:srgbClr val="003B4F"/>
+                </a:solidFill>
+                <a:latin typeface="Courier"/>
+              </a:rPr>
+              <a:t>, </a:t>
+            </a:r>
+            <a:r>
+              <a:rPr>
+                <a:solidFill>
+                  <a:srgbClr val="AD0000"/>
+                </a:solidFill>
+                <a:latin typeface="Courier"/>
+              </a:rPr>
+              <a:t>3</a:t>
+            </a:r>
+            <a:r>
+              <a:rPr>
+                <a:solidFill>
+                  <a:srgbClr val="003B4F"/>
+                </a:solidFill>
+                <a:latin typeface="Courier"/>
+              </a:rPr>
+              <a:t>, </a:t>
+            </a:r>
+            <a:r>
+              <a:rPr>
+                <a:solidFill>
+                  <a:srgbClr val="8F5902"/>
+                </a:solidFill>
+                <a:latin typeface="Courier"/>
+              </a:rPr>
+              <a:t>TRUE</a:t>
+            </a:r>
+            <a:r>
+              <a:rPr>
+                <a:solidFill>
+                  <a:srgbClr val="003B4F"/>
+                </a:solidFill>
+                <a:latin typeface="Courier"/>
+              </a:rPr>
+              <a:t>)    </a:t>
+            </a:r>
+            <a:r>
+              <a:rPr>
+                <a:solidFill>
+                  <a:srgbClr val="5E5E5E"/>
+                </a:solidFill>
+                <a:latin typeface="Courier"/>
+              </a:rPr>
+              <a:t># all become numeric</a:t>
+            </a:r>
+            <a:br/>
+            <a:r>
+              <a:rPr>
+                <a:solidFill>
+                  <a:srgbClr val="4758AB"/>
+                </a:solidFill>
+                <a:latin typeface="Courier"/>
+              </a:rPr>
+              <a:t>class</a:t>
+            </a:r>
+            <a:r>
+              <a:rPr>
+                <a:solidFill>
+                  <a:srgbClr val="003B4F"/>
+                </a:solidFill>
+                <a:latin typeface="Courier"/>
+              </a:rPr>
+              <a:t>(</a:t>
+            </a:r>
+            <a:r>
+              <a:rPr>
+                <a:solidFill>
+                  <a:srgbClr val="4758AB"/>
+                </a:solidFill>
+                <a:latin typeface="Courier"/>
+              </a:rPr>
+              <a:t>c</a:t>
+            </a:r>
+            <a:r>
+              <a:rPr>
+                <a:solidFill>
+                  <a:srgbClr val="003B4F"/>
+                </a:solidFill>
+                <a:latin typeface="Courier"/>
+              </a:rPr>
+              <a:t>(</a:t>
+            </a:r>
+            <a:r>
+              <a:rPr>
+                <a:solidFill>
+                  <a:srgbClr val="AD0000"/>
+                </a:solidFill>
+                <a:latin typeface="Courier"/>
+              </a:rPr>
+              <a:t>1</a:t>
+            </a:r>
+            <a:r>
+              <a:rPr>
+                <a:solidFill>
+                  <a:srgbClr val="003B4F"/>
+                </a:solidFill>
+                <a:latin typeface="Courier"/>
+              </a:rPr>
+              <a:t>, </a:t>
+            </a:r>
+            <a:r>
+              <a:rPr>
+                <a:solidFill>
+                  <a:srgbClr val="AD0000"/>
+                </a:solidFill>
+                <a:latin typeface="Courier"/>
+              </a:rPr>
+              <a:t>2</a:t>
+            </a:r>
+            <a:r>
+              <a:rPr>
+                <a:solidFill>
+                  <a:srgbClr val="003B4F"/>
+                </a:solidFill>
+                <a:latin typeface="Courier"/>
+              </a:rPr>
+              <a:t>, </a:t>
+            </a:r>
+            <a:r>
+              <a:rPr>
+                <a:solidFill>
+                  <a:srgbClr val="AD0000"/>
+                </a:solidFill>
+                <a:latin typeface="Courier"/>
+              </a:rPr>
+              <a:t>3</a:t>
+            </a:r>
+            <a:r>
+              <a:rPr>
+                <a:solidFill>
+                  <a:srgbClr val="003B4F"/>
+                </a:solidFill>
+                <a:latin typeface="Courier"/>
+              </a:rPr>
+              <a:t>, </a:t>
+            </a:r>
+            <a:r>
+              <a:rPr>
+                <a:solidFill>
+                  <a:srgbClr val="20794D"/>
+                </a:solidFill>
+                <a:latin typeface="Courier"/>
+              </a:rPr>
+              <a:t>"a"</a:t>
+            </a:r>
+            <a:r>
+              <a:rPr>
+                <a:solidFill>
+                  <a:srgbClr val="003B4F"/>
+                </a:solidFill>
+                <a:latin typeface="Courier"/>
+              </a:rPr>
+              <a:t>))</a:t>
+            </a:r>
+          </a:p>
+          <a:p>
+            <a:pPr lvl="0" indent="0" marL="0">
+              <a:buNone/>
+            </a:pPr>
+            <a:r>
+              <a:rPr b="1"/>
+              <a:t>📖 New word</a:t>
+            </a:r>
+          </a:p>
+          <a:p>
+            <a:pPr lvl="0" indent="0" marL="0">
+              <a:buNone/>
+            </a:pPr>
+            <a:r>
+              <a:rPr b="1"/>
+              <a:t>Coercion</a:t>
+            </a:r>
+            <a:r>
+              <a:rPr/>
+              <a:t> = R automatically converting everything in a vector to a single shared type.</a:t>
+            </a:r>
+          </a:p>
+        </p:txBody>
+      </p:sp>
+      <p:pic>
+        <p:nvPicPr>
+          <p:cNvPr descr="images/diagram_datatypes.png" id="0" name="Picture 1"/>
+          <p:cNvPicPr>
+            <a:picLocks noGrp="1" noChangeAspect="1"/>
+          </p:cNvPicPr>
+          <p:nvPr/>
+        </p:nvPicPr>
+        <p:blipFill>
+          <a:blip r:embed="rId2"/>
+          <a:stretch>
+            <a:fillRect/>
+          </a:stretch>
+        </p:blipFill>
+        <p:spPr bwMode="auto">
+          <a:xfrm>
+            <a:off x="6121400" y="1778000"/>
+            <a:ext cx="2781300" cy="2247900"/>
+          </a:xfrm>
+          <a:prstGeom prst="rect">
+            <a:avLst/>
+          </a:prstGeom>
+          <a:noFill/>
+          <a:ln w="9525">
+            <a:noFill/>
+            <a:headEnd/>
+            <a:tailEnd/>
+          </a:ln>
+        </p:spPr>
+      </p:pic>
+    </p:spTree>
+  </p:cSld>
+</p:sld>
+</file>
+
+<file path=ppt/slides/slide17.xml><?xml version="1.0" encoding="utf-8"?>
+<p:sld xmlns:a="http://schemas.openxmlformats.org/drawingml/2006/main" xmlns:r="http://schemas.openxmlformats.org/officeDocument/2006/relationships" xmlns:p="http://schemas.openxmlformats.org/presentationml/2006/main">
+  <p:cSld>
+    <p:spTree>
+      <p:nvGrpSpPr>
+        <p:cNvPr id="1" name=""/>
+        <p:cNvGrpSpPr/>
+        <p:nvPr/>
+      </p:nvGrpSpPr>
+      <p:grpSpPr>
+        <a:xfrm>
+          <a:off x="0" y="0"/>
+          <a:ext cx="0" cy="0"/>
+          <a:chOff x="0" y="0"/>
+          <a:chExt cx="0" cy="0"/>
+        </a:xfrm>
+      </p:grpSpPr>
+      <p:sp>
+        <p:nvSpPr>
+          <p:cNvPr id="2" name="Title 1"/>
+          <p:cNvSpPr>
+            <a:spLocks noGrp="1"/>
+          </p:cNvSpPr>
+          <p:nvPr>
+            <p:ph type="title"/>
+          </p:nvPr>
+        </p:nvSpPr>
+        <p:spPr>
+          <a:xfrm>
+            <a:off x="0" y="0"/>
+            <a:ext cx="9144000" cy="582780"/>
+          </a:xfrm>
+        </p:spPr>
+        <p:txBody>
+          <a:bodyPr/>
+          <a:lstStyle/>
+          <a:p>
+            <a:pPr lvl="0" indent="0" marL="0">
+              <a:buNone/>
+            </a:pPr>
+            <a:r>
+              <a:rPr/>
+              <a:t>Part 3 · From console to script</a:t>
+            </a:r>
+          </a:p>
+        </p:txBody>
+      </p:sp>
+      <p:sp>
+        <p:nvSpPr>
+          <p:cNvPr id="3" name="Content Placeholder 2"/>
+          <p:cNvSpPr>
+            <a:spLocks noGrp="1"/>
+          </p:cNvSpPr>
+          <p:nvPr>
+            <p:ph idx="1"/>
+          </p:nvPr>
+        </p:nvSpPr>
+        <p:spPr/>
+        <p:txBody>
+          <a:bodyPr/>
+          <a:lstStyle/>
+          <a:p>
+            <a:pPr lvl="0" indent="0" marL="0">
+              <a:spcBef>
+                <a:spcPts val="3000"/>
+              </a:spcBef>
+              <a:buNone/>
+            </a:pPr>
+            <a:r>
+              <a:rPr b="1"/>
+              <a:t>Don’t retype — use a script</a:t>
+            </a:r>
+          </a:p>
+        </p:txBody>
+      </p:sp>
+    </p:spTree>
+  </p:cSld>
+</p:sld>
+</file>
+
+<file path=ppt/slides/slide18.xml><?xml version="1.0" encoding="utf-8"?>
+<p:sld xmlns:a="http://schemas.openxmlformats.org/drawingml/2006/main" xmlns:r="http://schemas.openxmlformats.org/officeDocument/2006/relationships" xmlns:p="http://schemas.openxmlformats.org/presentationml/2006/main">
+  <p:cSld>
+    <p:spTree>
+      <p:nvGrpSpPr>
+        <p:cNvPr id="1" name=""/>
+        <p:cNvGrpSpPr/>
+        <p:nvPr/>
+      </p:nvGrpSpPr>
+      <p:grpSpPr>
+        <a:xfrm>
+          <a:off x="0" y="0"/>
+          <a:ext cx="0" cy="0"/>
+          <a:chOff x="0" y="0"/>
+          <a:chExt cx="0" cy="0"/>
+        </a:xfrm>
+      </p:grpSpPr>
+      <p:sp>
+        <p:nvSpPr>
+          <p:cNvPr id="3" name="Content Placeholder 2"/>
+          <p:cNvSpPr>
+            <a:spLocks noGrp="1"/>
+          </p:cNvSpPr>
+          <p:nvPr>
+            <p:ph idx="1" sz="half"/>
+          </p:nvPr>
+        </p:nvSpPr>
+        <p:spPr/>
+        <p:txBody>
+          <a:bodyPr/>
+          <a:lstStyle/>
+          <a:p>
+            <a:pPr lvl="0" indent="0" marL="0">
+              <a:buNone/>
+            </a:pPr>
+            <a:r>
+              <a:rPr/>
+              <a:t>The console forgets. A </a:t>
+            </a:r>
+            <a:r>
+              <a:rPr b="1"/>
+              <a:t>script</a:t>
+            </a:r>
+            <a:r>
+              <a:rPr/>
+              <a:t> (</a:t>
+            </a:r>
+            <a:r>
+              <a:rPr>
+                <a:latin typeface="Courier"/>
+              </a:rPr>
+              <a:t>.R</a:t>
+            </a:r>
+            <a:r>
+              <a:rPr/>
+              <a:t> file) remembers and re-runs.</a:t>
+            </a:r>
+          </a:p>
+          <a:p>
+            <a:pPr lvl="0"/>
+            <a:r>
+              <a:rPr b="1"/>
+              <a:t>File → New File → R File</a:t>
+            </a:r>
+            <a:r>
+              <a:rPr/>
+              <a:t> opens </a:t>
+            </a:r>
+            <a:r>
+              <a:rPr>
+                <a:latin typeface="Courier"/>
+              </a:rPr>
+              <a:t>Untitled-1</a:t>
+            </a:r>
+          </a:p>
+          <a:p>
+            <a:pPr lvl="0"/>
+            <a:r>
+              <a:rPr/>
+              <a:t>Type your commands, one per line</a:t>
+            </a:r>
+          </a:p>
+          <a:p>
+            <a:pPr lvl="0"/>
+            <a:r>
+              <a:rPr/>
+              <a:t>Put the cursor on a line and press Ctrl/Cmd + Enter to run it</a:t>
+            </a:r>
+          </a:p>
+          <a:p>
+            <a:pPr lvl="0"/>
+            <a:r>
+              <a:rPr b="1"/>
+              <a:t>Save</a:t>
+            </a:r>
+            <a:r>
+              <a:rPr/>
+              <a:t> with Ctrl/Cmd + S — reopen later and rerun everything</a:t>
+            </a:r>
+          </a:p>
+          <a:p>
+            <a:pPr lvl="0" indent="0">
+              <a:buNone/>
+            </a:pPr>
+            <a:r>
+              <a:rPr>
+                <a:solidFill>
+                  <a:srgbClr val="003B4F"/>
+                </a:solidFill>
+                <a:latin typeface="Courier"/>
+              </a:rPr>
+              <a:t>x    &lt;- </a:t>
+            </a:r>
+            <a:r>
+              <a:rPr>
+                <a:solidFill>
+                  <a:srgbClr val="AD0000"/>
+                </a:solidFill>
+                <a:latin typeface="Courier"/>
+              </a:rPr>
+              <a:t>7</a:t>
+            </a:r>
+            <a:br/>
+            <a:r>
+              <a:rPr>
+                <a:solidFill>
+                  <a:srgbClr val="003B4F"/>
+                </a:solidFill>
+                <a:latin typeface="Courier"/>
+              </a:rPr>
+              <a:t>y    &lt;- </a:t>
+            </a:r>
+            <a:r>
+              <a:rPr>
+                <a:solidFill>
+                  <a:srgbClr val="AD0000"/>
+                </a:solidFill>
+                <a:latin typeface="Courier"/>
+              </a:rPr>
+              <a:t>5</a:t>
+            </a:r>
+            <a:br/>
+            <a:r>
+              <a:rPr>
+                <a:solidFill>
+                  <a:srgbClr val="003B4F"/>
+                </a:solidFill>
+                <a:latin typeface="Courier"/>
+              </a:rPr>
+              <a:t>text &lt;- </a:t>
+            </a:r>
+            <a:r>
+              <a:rPr>
+                <a:solidFill>
+                  <a:srgbClr val="20794D"/>
+                </a:solidFill>
+                <a:latin typeface="Courier"/>
+              </a:rPr>
+              <a:t>"say hello"</a:t>
+            </a:r>
+            <a:br/>
+            <a:r>
+              <a:rPr>
+                <a:solidFill>
+                  <a:srgbClr val="003B4F"/>
+                </a:solidFill>
+                <a:latin typeface="Courier"/>
+              </a:rPr>
+              <a:t>x </a:t>
+            </a:r>
+            <a:r>
+              <a:rPr>
+                <a:solidFill>
+                  <a:srgbClr val="5E5E5E"/>
+                </a:solidFill>
+                <a:latin typeface="Courier"/>
+              </a:rPr>
+              <a:t>+</a:t>
+            </a:r>
+            <a:r>
+              <a:rPr>
+                <a:solidFill>
+                  <a:srgbClr val="003B4F"/>
+                </a:solidFill>
+                <a:latin typeface="Courier"/>
+              </a:rPr>
+              <a:t> y</a:t>
+            </a:r>
+          </a:p>
+          <a:p>
+            <a:pPr lvl="0" indent="0" marL="0">
+              <a:buNone/>
+            </a:pPr>
+            <a:r>
+              <a:rPr b="1"/>
+              <a:t>✅ Key idea</a:t>
+            </a:r>
+          </a:p>
+          <a:p>
+            <a:pPr lvl="0" indent="0" marL="0">
+              <a:buNone/>
+            </a:pPr>
+            <a:r>
+              <a:rPr/>
+              <a:t>Console = scratch paper. Script = the lab notebook you keep.</a:t>
+            </a:r>
+          </a:p>
+        </p:txBody>
+      </p:sp>
+      <p:pic>
+        <p:nvPicPr>
+          <p:cNvPr descr="images/paste-2.png" id="0" name="Picture 1"/>
+          <p:cNvPicPr>
+            <a:picLocks noGrp="1" noChangeAspect="1"/>
+          </p:cNvPicPr>
+          <p:nvPr/>
+        </p:nvPicPr>
+        <p:blipFill>
+          <a:blip r:embed="rId2"/>
+          <a:stretch>
+            <a:fillRect/>
+          </a:stretch>
+        </p:blipFill>
+        <p:spPr bwMode="auto">
+          <a:xfrm>
+            <a:off x="6121400" y="1803400"/>
+            <a:ext cx="2781300" cy="2171700"/>
+          </a:xfrm>
+          <a:prstGeom prst="rect">
+            <a:avLst/>
+          </a:prstGeom>
+          <a:noFill/>
+          <a:ln w="9525">
+            <a:noFill/>
+            <a:headEnd/>
+            <a:tailEnd/>
+          </a:ln>
+        </p:spPr>
+      </p:pic>
+    </p:spTree>
+  </p:cSld>
+</p:sld>
+</file>
+
+<file path=ppt/slides/slide19.xml><?xml version="1.0" encoding="utf-8"?>
+<p:sld xmlns:a="http://schemas.openxmlformats.org/drawingml/2006/main" xmlns:r="http://schemas.openxmlformats.org/officeDocument/2006/relationships" xmlns:p="http://schemas.openxmlformats.org/presentationml/2006/main">
+  <p:cSld>
+    <p:spTree>
+      <p:nvGrpSpPr>
+        <p:cNvPr id="1" name=""/>
+        <p:cNvGrpSpPr/>
+        <p:nvPr/>
+      </p:nvGrpSpPr>
+      <p:grpSpPr>
+        <a:xfrm>
+          <a:off x="0" y="0"/>
+          <a:ext cx="0" cy="0"/>
+          <a:chOff x="0" y="0"/>
+          <a:chExt cx="0" cy="0"/>
+        </a:xfrm>
+      </p:grpSpPr>
+      <p:sp>
+        <p:nvSpPr>
+          <p:cNvPr id="2" name="Title 1"/>
+          <p:cNvSpPr>
+            <a:spLocks noGrp="1"/>
+          </p:cNvSpPr>
+          <p:nvPr>
+            <p:ph type="title"/>
+          </p:nvPr>
+        </p:nvSpPr>
+        <p:spPr>
+          <a:xfrm>
+            <a:off x="0" y="0"/>
+            <a:ext cx="9144000" cy="602780"/>
+          </a:xfrm>
+          <a:solidFill>
+            <a:srgbClr val="70121D"/>
+          </a:solidFill>
+        </p:spPr>
+        <p:txBody>
+          <a:bodyPr/>
+          <a:lstStyle/>
+          <a:p>
+            <a:pPr lvl="0" indent="0" marL="0">
+              <a:buNone/>
+            </a:pPr>
+            <a:r>
+              <a:rPr/>
+              <a:t>Packages vs. libraries</a:t>
+            </a:r>
+          </a:p>
+        </p:txBody>
+      </p:sp>
+      <p:sp>
+        <p:nvSpPr>
+          <p:cNvPr id="3" name="Content Placeholder 2"/>
+          <p:cNvSpPr>
+            <a:spLocks noGrp="1"/>
+          </p:cNvSpPr>
+          <p:nvPr>
+            <p:ph idx="1" sz="half"/>
+          </p:nvPr>
+        </p:nvSpPr>
+        <p:spPr/>
+        <p:txBody>
+          <a:bodyPr/>
+          <a:lstStyle/>
+          <a:p>
+            <a:pPr lvl="0" indent="0" marL="0">
+              <a:buNone/>
+            </a:pPr>
+            <a:r>
+              <a:rPr/>
+              <a:t>Like apps for your phone, </a:t>
+            </a:r>
+            <a:r>
+              <a:rPr b="1"/>
+              <a:t>packages</a:t>
+            </a:r>
+            <a:r>
+              <a:rPr/>
+              <a:t> add new abilities to R.</a:t>
+            </a:r>
+          </a:p>
+          <a:p>
+            <a:pPr lvl="0"/>
+            <a:r>
+              <a:rPr b="1"/>
+              <a:t>Install once</a:t>
+            </a:r>
+            <a:r>
+              <a:rPr/>
+              <a:t> (download the app):</a:t>
+            </a:r>
+          </a:p>
+          <a:p>
+            <a:pPr lvl="0" indent="0">
+              <a:buNone/>
+            </a:pPr>
+            <a:r>
+              <a:rPr>
+                <a:solidFill>
+                  <a:srgbClr val="4758AB"/>
+                </a:solidFill>
+                <a:latin typeface="Courier"/>
+              </a:rPr>
+              <a:t>install.packages</a:t>
+            </a:r>
+            <a:r>
+              <a:rPr>
+                <a:solidFill>
+                  <a:srgbClr val="003B4F"/>
+                </a:solidFill>
+                <a:latin typeface="Courier"/>
+              </a:rPr>
+              <a:t>(</a:t>
+            </a:r>
+            <a:r>
+              <a:rPr>
+                <a:solidFill>
+                  <a:srgbClr val="20794D"/>
+                </a:solidFill>
+                <a:latin typeface="Courier"/>
+              </a:rPr>
+              <a:t>"tidyverse"</a:t>
+            </a:r>
+            <a:r>
+              <a:rPr>
+                <a:solidFill>
+                  <a:srgbClr val="003B4F"/>
+                </a:solidFill>
+                <a:latin typeface="Courier"/>
+              </a:rPr>
+              <a:t>)</a:t>
+            </a:r>
+            <a:br/>
+            <a:r>
+              <a:rPr>
+                <a:solidFill>
+                  <a:srgbClr val="4758AB"/>
+                </a:solidFill>
+                <a:latin typeface="Courier"/>
+              </a:rPr>
+              <a:t>install.packages</a:t>
+            </a:r>
+            <a:r>
+              <a:rPr>
+                <a:solidFill>
+                  <a:srgbClr val="003B4F"/>
+                </a:solidFill>
+                <a:latin typeface="Courier"/>
+              </a:rPr>
+              <a:t>(</a:t>
+            </a:r>
+            <a:r>
+              <a:rPr>
+                <a:solidFill>
+                  <a:srgbClr val="20794D"/>
+                </a:solidFill>
+                <a:latin typeface="Courier"/>
+              </a:rPr>
+              <a:t>"readxl"</a:t>
+            </a:r>
+            <a:r>
+              <a:rPr>
+                <a:solidFill>
+                  <a:srgbClr val="003B4F"/>
+                </a:solidFill>
+                <a:latin typeface="Courier"/>
+              </a:rPr>
+              <a:t>)</a:t>
+            </a:r>
+          </a:p>
+          <a:p>
+            <a:pPr lvl="0"/>
+            <a:r>
+              <a:rPr b="1"/>
+              <a:t>Load every session</a:t>
+            </a:r>
+            <a:r>
+              <a:rPr/>
+              <a:t> (open the app):</a:t>
+            </a:r>
+          </a:p>
+          <a:p>
+            <a:pPr lvl="0" indent="0">
+              <a:buNone/>
+            </a:pPr>
+            <a:r>
+              <a:rPr>
+                <a:solidFill>
+                  <a:srgbClr val="4758AB"/>
+                </a:solidFill>
+                <a:latin typeface="Courier"/>
+              </a:rPr>
+              <a:t>library</a:t>
+            </a:r>
+            <a:r>
+              <a:rPr>
+                <a:solidFill>
+                  <a:srgbClr val="003B4F"/>
+                </a:solidFill>
+                <a:latin typeface="Courier"/>
+              </a:rPr>
+              <a:t>(tidyverse)   </a:t>
+            </a:r>
+            <a:r>
+              <a:rPr>
+                <a:solidFill>
+                  <a:srgbClr val="5E5E5E"/>
+                </a:solidFill>
+                <a:latin typeface="Courier"/>
+              </a:rPr>
+              <a:t># data wrangling + plotting</a:t>
+            </a:r>
+            <a:br/>
+            <a:r>
+              <a:rPr>
+                <a:solidFill>
+                  <a:srgbClr val="4758AB"/>
+                </a:solidFill>
+                <a:latin typeface="Courier"/>
+              </a:rPr>
+              <a:t>library</a:t>
+            </a:r>
+            <a:r>
+              <a:rPr>
+                <a:solidFill>
+                  <a:srgbClr val="003B4F"/>
+                </a:solidFill>
+                <a:latin typeface="Courier"/>
+              </a:rPr>
+              <a:t>(readxl)      </a:t>
+            </a:r>
+            <a:r>
+              <a:rPr>
+                <a:solidFill>
+                  <a:srgbClr val="5E5E5E"/>
+                </a:solidFill>
+                <a:latin typeface="Courier"/>
+              </a:rPr>
+              <a:t># read Excel files</a:t>
+            </a:r>
+          </a:p>
+          <a:p>
+            <a:pPr lvl="0" indent="0" marL="0">
+              <a:buNone/>
+            </a:pPr>
+            <a:r>
+              <a:rPr b="1"/>
+              <a:t>⚠️ Watch out!</a:t>
+            </a:r>
+          </a:p>
+          <a:p>
+            <a:pPr lvl="0" indent="0" marL="0">
+              <a:buNone/>
+            </a:pPr>
+            <a:r>
+              <a:rPr/>
+              <a:t>A common first-day error: forgetting </a:t>
+            </a:r>
+            <a:r>
+              <a:rPr>
+                <a:latin typeface="Courier"/>
+              </a:rPr>
+              <a:t>library(tidyverse)</a:t>
+            </a:r>
+            <a:r>
+              <a:rPr/>
+              <a:t>. If R says </a:t>
+            </a:r>
+            <a:r>
+              <a:rPr i="1"/>
+              <a:t>“could not find function </a:t>
+            </a:r>
+            <a:r>
+              <a:rPr i="1">
+                <a:latin typeface="Courier"/>
+              </a:rPr>
+              <a:t>read_excel</a:t>
+            </a:r>
+            <a:r>
+              <a:rPr i="1"/>
+              <a:t>”</a:t>
+            </a:r>
+            <a:r>
+              <a:rPr/>
+              <a:t>, you skipped the </a:t>
+            </a:r>
+            <a:r>
+              <a:rPr>
+                <a:latin typeface="Courier"/>
+              </a:rPr>
+              <a:t>library()</a:t>
+            </a:r>
+            <a:r>
+              <a:rPr/>
+              <a:t> line.</a:t>
+            </a:r>
+          </a:p>
+        </p:txBody>
+      </p:sp>
+      <p:sp>
+        <p:nvSpPr>
+          <p:cNvPr id="4" name="Content Placeholder 3"/>
+          <p:cNvSpPr>
+            <a:spLocks noGrp="1"/>
+          </p:cNvSpPr>
+          <p:nvPr>
+            <p:ph idx="2" sz="half"/>
+          </p:nvPr>
+        </p:nvSpPr>
+        <p:spPr/>
+        <p:txBody>
+          <a:bodyPr/>
+          <a:lstStyle/>
+          <a:p>
+            <a:pPr lvl="0" indent="0" marL="0">
+              <a:buNone/>
+            </a:pPr>
+            <a:r>
+              <a:rPr b="1"/>
+              <a:t>📖 New word</a:t>
+            </a:r>
+          </a:p>
+          <a:p>
+            <a:pPr lvl="0" indent="0" marL="0">
+              <a:buNone/>
+            </a:pPr>
+            <a:r>
+              <a:rPr b="1"/>
+              <a:t>Package</a:t>
+            </a:r>
+            <a:r>
+              <a:rPr/>
+              <a:t> = the installed toolbox (one time). </a:t>
+            </a:r>
+            <a:r>
+              <a:rPr b="1"/>
+              <a:t>Library</a:t>
+            </a:r>
+            <a:r>
+              <a:rPr/>
+              <a:t> = loading that toolbox into today’s session (every time).</a:t>
             </a:r>
           </a:p>
         </p:txBody>
@@ -3364,7 +6874,7 @@
         <p:spPr>
           <a:xfrm>
             <a:off x="0" y="0"/>
-            <a:ext cx="9144000" cy="1021556"/>
+            <a:ext cx="9144000" cy="582780"/>
           </a:xfrm>
         </p:spPr>
         <p:txBody>
@@ -3376,7 +6886,4778 @@
             </a:pPr>
             <a:r>
               <a:rPr/>
-              <a:t>Review of Lecture 1</a:t>
+              <a:t>Where we left off (Lecture 01)</a:t>
+            </a:r>
+          </a:p>
+        </p:txBody>
+      </p:sp>
+      <p:sp>
+        <p:nvSpPr>
+          <p:cNvPr id="3" name="Content Placeholder 2"/>
+          <p:cNvSpPr>
+            <a:spLocks noGrp="1"/>
+          </p:cNvSpPr>
+          <p:nvPr>
+            <p:ph idx="1"/>
+          </p:nvPr>
+        </p:nvSpPr>
+        <p:spPr/>
+        <p:txBody>
+          <a:bodyPr/>
+          <a:lstStyle/>
+          <a:p>
+            <a:pPr lvl="0"/>
+            <a:r>
+              <a:rPr b="1"/>
+              <a:t>Learning goals</a:t>
+            </a:r>
+            <a:r>
+              <a:rPr/>
+              <a:t> — data organization, Excel → R workflow, hypothesis testing, interpretation</a:t>
+            </a:r>
+          </a:p>
+          <a:p>
+            <a:pPr lvl="0"/>
+            <a:r>
+              <a:rPr b="1"/>
+              <a:t>Science fundamentals</a:t>
+            </a:r>
+            <a:r>
+              <a:rPr/>
+              <a:t> — falsifiable predictions; null vs. alternate hypotheses</a:t>
+            </a:r>
+          </a:p>
+          <a:p>
+            <a:pPr lvl="0"/>
+            <a:r>
+              <a:rPr b="1"/>
+              <a:t>Our class project</a:t>
+            </a:r>
+            <a:r>
+              <a:rPr/>
+              <a:t> — leaf morphology: </a:t>
+            </a:r>
+            <a:r>
+              <a:rPr i="1"/>
+              <a:t>sunny vs. shady</a:t>
+            </a:r>
+            <a:r>
+              <a:rPr/>
+              <a:t> sides of trees</a:t>
+            </a:r>
+          </a:p>
+          <a:p>
+            <a:pPr lvl="0"/>
+            <a:r>
+              <a:rPr b="1"/>
+              <a:t>Design</a:t>
+            </a:r>
+            <a:r>
+              <a:rPr/>
+              <a:t> — randomization, replication (multiple trees), sampling limits</a:t>
+            </a:r>
+          </a:p>
+          <a:p>
+            <a:pPr lvl="0"/>
+            <a:r>
+              <a:rPr b="1"/>
+              <a:t>Variables</a:t>
+            </a:r>
+            <a:r>
+              <a:rPr/>
+              <a:t> — dependent (leaf mass/size) vs. independent (side of tree)</a:t>
+            </a:r>
+          </a:p>
+          <a:p>
+            <a:pPr lvl="0"/>
+            <a:r>
+              <a:rPr b="1"/>
+              <a:t>Spreadsheet hygiene</a:t>
+            </a:r>
+            <a:r>
+              <a:rPr/>
+              <a:t> — metadata, consistent terms, units, clean sheet design</a:t>
+            </a:r>
+          </a:p>
+          <a:p>
+            <a:pPr lvl="0" indent="0" marL="0">
+              <a:buNone/>
+            </a:pPr>
+            <a:r>
+              <a:rPr b="1"/>
+              <a:t>✅ Key idea</a:t>
+            </a:r>
+          </a:p>
+          <a:p>
+            <a:pPr lvl="0" indent="0" marL="0">
+              <a:buNone/>
+            </a:pPr>
+            <a:r>
+              <a:rPr/>
+              <a:t>Today we take that tidy spreadsheet and bring it to life in R.</a:t>
+            </a:r>
+          </a:p>
+        </p:txBody>
+      </p:sp>
+    </p:spTree>
+  </p:cSld>
+</p:sld>
+</file>
+
+<file path=ppt/slides/slide20.xml><?xml version="1.0" encoding="utf-8"?>
+<p:sld xmlns:a="http://schemas.openxmlformats.org/drawingml/2006/main" xmlns:r="http://schemas.openxmlformats.org/officeDocument/2006/relationships" xmlns:p="http://schemas.openxmlformats.org/presentationml/2006/main">
+  <p:cSld>
+    <p:spTree>
+      <p:nvGrpSpPr>
+        <p:cNvPr id="1" name=""/>
+        <p:cNvGrpSpPr/>
+        <p:nvPr/>
+      </p:nvGrpSpPr>
+      <p:grpSpPr>
+        <a:xfrm>
+          <a:off x="0" y="0"/>
+          <a:ext cx="0" cy="0"/>
+          <a:chOff x="0" y="0"/>
+          <a:chExt cx="0" cy="0"/>
+        </a:xfrm>
+      </p:grpSpPr>
+      <p:sp>
+        <p:nvSpPr>
+          <p:cNvPr id="2" name="Title 1"/>
+          <p:cNvSpPr>
+            <a:spLocks noGrp="1"/>
+          </p:cNvSpPr>
+          <p:nvPr>
+            <p:ph type="title"/>
+          </p:nvPr>
+        </p:nvSpPr>
+        <p:spPr>
+          <a:xfrm>
+            <a:off x="0" y="0"/>
+            <a:ext cx="9144000" cy="602780"/>
+          </a:xfrm>
+          <a:solidFill>
+            <a:srgbClr val="70121D"/>
+          </a:solidFill>
+        </p:spPr>
+        <p:txBody>
+          <a:bodyPr/>
+          <a:lstStyle/>
+          <a:p>
+            <a:pPr lvl="0" indent="0" marL="0">
+              <a:buNone/>
+            </a:pPr>
+            <a:r>
+              <a:rPr/>
+              <a:t>Load our tree data</a:t>
+            </a:r>
+          </a:p>
+        </p:txBody>
+      </p:sp>
+      <p:sp>
+        <p:nvSpPr>
+          <p:cNvPr id="3" name="Content Placeholder 2"/>
+          <p:cNvSpPr>
+            <a:spLocks noGrp="1"/>
+          </p:cNvSpPr>
+          <p:nvPr>
+            <p:ph idx="1" sz="half"/>
+          </p:nvPr>
+        </p:nvSpPr>
+        <p:spPr/>
+        <p:txBody>
+          <a:bodyPr/>
+          <a:lstStyle/>
+          <a:p>
+            <a:pPr lvl="0" indent="0" marL="0">
+              <a:buNone/>
+            </a:pPr>
+            <a:r>
+              <a:rPr/>
+              <a:t>Put the Excel file in your project’s </a:t>
+            </a:r>
+            <a:r>
+              <a:rPr>
+                <a:latin typeface="Courier"/>
+              </a:rPr>
+              <a:t>data_raw/</a:t>
+            </a:r>
+            <a:r>
+              <a:rPr/>
+              <a:t> folder, then:</a:t>
+            </a:r>
+          </a:p>
+          <a:p>
+            <a:pPr lvl="0" indent="0">
+              <a:buNone/>
+            </a:pPr>
+            <a:r>
+              <a:rPr>
+                <a:solidFill>
+                  <a:srgbClr val="4758AB"/>
+                </a:solidFill>
+                <a:latin typeface="Courier"/>
+              </a:rPr>
+              <a:t>library</a:t>
+            </a:r>
+            <a:r>
+              <a:rPr>
+                <a:solidFill>
+                  <a:srgbClr val="003B4F"/>
+                </a:solidFill>
+                <a:latin typeface="Courier"/>
+              </a:rPr>
+              <a:t>(tidyverse)</a:t>
+            </a:r>
+            <a:br/>
+            <a:r>
+              <a:rPr>
+                <a:solidFill>
+                  <a:srgbClr val="4758AB"/>
+                </a:solidFill>
+                <a:latin typeface="Courier"/>
+              </a:rPr>
+              <a:t>library</a:t>
+            </a:r>
+            <a:r>
+              <a:rPr>
+                <a:solidFill>
+                  <a:srgbClr val="003B4F"/>
+                </a:solidFill>
+                <a:latin typeface="Courier"/>
+              </a:rPr>
+              <a:t>(readxl)</a:t>
+            </a:r>
+            <a:br/>
+            <a:br/>
+            <a:r>
+              <a:rPr>
+                <a:solidFill>
+                  <a:srgbClr val="5E5E5E"/>
+                </a:solidFill>
+                <a:latin typeface="Courier"/>
+              </a:rPr>
+              <a:t># read the Excel file into a data frame</a:t>
+            </a:r>
+            <a:br/>
+            <a:r>
+              <a:rPr>
+                <a:solidFill>
+                  <a:srgbClr val="003B4F"/>
+                </a:solidFill>
+                <a:latin typeface="Courier"/>
+              </a:rPr>
+              <a:t>tree_df &lt;- </a:t>
+            </a:r>
+            <a:r>
+              <a:rPr>
+                <a:solidFill>
+                  <a:srgbClr val="4758AB"/>
+                </a:solidFill>
+                <a:latin typeface="Courier"/>
+              </a:rPr>
+              <a:t>read_excel</a:t>
+            </a:r>
+            <a:r>
+              <a:rPr>
+                <a:solidFill>
+                  <a:srgbClr val="003B4F"/>
+                </a:solidFill>
+                <a:latin typeface="Courier"/>
+              </a:rPr>
+              <a:t>(</a:t>
+            </a:r>
+            <a:r>
+              <a:rPr>
+                <a:solidFill>
+                  <a:srgbClr val="20794D"/>
+                </a:solidFill>
+                <a:latin typeface="Courier"/>
+              </a:rPr>
+              <a:t>"data_raw/2026_06_25_tree_experiment_raw_data.xlsx"</a:t>
+            </a:r>
+            <a:r>
+              <a:rPr>
+                <a:solidFill>
+                  <a:srgbClr val="003B4F"/>
+                </a:solidFill>
+                <a:latin typeface="Courier"/>
+              </a:rPr>
+              <a:t>)</a:t>
+            </a:r>
+            <a:br/>
+            <a:br/>
+            <a:r>
+              <a:rPr>
+                <a:solidFill>
+                  <a:srgbClr val="003B4F"/>
+                </a:solidFill>
+                <a:latin typeface="Courier"/>
+              </a:rPr>
+              <a:t>tree_df          </a:t>
+            </a:r>
+            <a:r>
+              <a:rPr>
+                <a:solidFill>
+                  <a:srgbClr val="5E5E5E"/>
+                </a:solidFill>
+                <a:latin typeface="Courier"/>
+              </a:rPr>
+              <a:t># print it to the console</a:t>
+            </a:r>
+          </a:p>
+          <a:p>
+            <a:pPr lvl="0" indent="0" marL="0">
+              <a:buNone/>
+            </a:pPr>
+            <a:r>
+              <a:rPr b="1"/>
+              <a:t>🖐 Try it yourself</a:t>
+            </a:r>
+          </a:p>
+          <a:p>
+            <a:pPr lvl="0" indent="0" marL="0">
+              <a:buNone/>
+            </a:pPr>
+            <a:r>
+              <a:rPr b="1"/>
+              <a:t>What did you name your project folder?</a:t>
+            </a:r>
+            <a:r>
+              <a:rPr/>
+              <a:t> </a:t>
+            </a:r>
+            <a:r>
+              <a:rPr b="1"/>
+              <a:t>What did you call your script?</a:t>
+            </a:r>
+            <a:r>
+              <a:rPr/>
+              <a:t> Write them down — we’ll reuse them all term.</a:t>
+            </a:r>
+          </a:p>
+        </p:txBody>
+      </p:sp>
+      <p:sp>
+        <p:nvSpPr>
+          <p:cNvPr id="4" name="Content Placeholder 3"/>
+          <p:cNvSpPr>
+            <a:spLocks noGrp="1"/>
+          </p:cNvSpPr>
+          <p:nvPr>
+            <p:ph idx="2" sz="half"/>
+          </p:nvPr>
+        </p:nvSpPr>
+        <p:spPr/>
+        <p:txBody>
+          <a:bodyPr/>
+          <a:lstStyle/>
+          <a:p>
+            <a:pPr lvl="0" indent="0" marL="0">
+              <a:buNone/>
+            </a:pPr>
+            <a:r>
+              <a:rPr b="1"/>
+              <a:t>📊 Coming from Excel?</a:t>
+            </a:r>
+          </a:p>
+          <a:p>
+            <a:pPr lvl="0" indent="0" marL="0">
+              <a:buNone/>
+            </a:pPr>
+            <a:r>
+              <a:rPr>
+                <a:latin typeface="Courier"/>
+              </a:rPr>
+              <a:t>read_excel()</a:t>
+            </a:r>
+            <a:r>
+              <a:rPr/>
+              <a:t> is the bridge from your spreadsheet into R. Your sheet’s first row becomes the </a:t>
+            </a:r>
+            <a:r>
+              <a:rPr b="1"/>
+              <a:t>column names</a:t>
+            </a:r>
+            <a:r>
+              <a:rPr/>
+              <a:t>.</a:t>
+            </a:r>
+          </a:p>
+        </p:txBody>
+      </p:sp>
+    </p:spTree>
+  </p:cSld>
+</p:sld>
+</file>
+
+<file path=ppt/slides/slide21.xml><?xml version="1.0" encoding="utf-8"?>
+<p:sld xmlns:a="http://schemas.openxmlformats.org/drawingml/2006/main" xmlns:r="http://schemas.openxmlformats.org/officeDocument/2006/relationships" xmlns:p="http://schemas.openxmlformats.org/presentationml/2006/main">
+  <p:cSld>
+    <p:spTree>
+      <p:nvGrpSpPr>
+        <p:cNvPr id="1" name=""/>
+        <p:cNvGrpSpPr/>
+        <p:nvPr/>
+      </p:nvGrpSpPr>
+      <p:grpSpPr>
+        <a:xfrm>
+          <a:off x="0" y="0"/>
+          <a:ext cx="0" cy="0"/>
+          <a:chOff x="0" y="0"/>
+          <a:chExt cx="0" cy="0"/>
+        </a:xfrm>
+      </p:grpSpPr>
+      <p:sp>
+        <p:nvSpPr>
+          <p:cNvPr id="2" name="Title 1"/>
+          <p:cNvSpPr>
+            <a:spLocks noGrp="1"/>
+          </p:cNvSpPr>
+          <p:nvPr>
+            <p:ph type="title"/>
+          </p:nvPr>
+        </p:nvSpPr>
+        <p:spPr>
+          <a:xfrm>
+            <a:off x="0" y="0"/>
+            <a:ext cx="9144000" cy="602780"/>
+          </a:xfrm>
+          <a:solidFill>
+            <a:srgbClr val="70121D"/>
+          </a:solidFill>
+        </p:spPr>
+        <p:txBody>
+          <a:bodyPr/>
+          <a:lstStyle/>
+          <a:p>
+            <a:pPr lvl="0" indent="0" marL="0">
+              <a:buNone/>
+            </a:pPr>
+            <a:r>
+              <a:rPr/>
+              <a:t>Meet the data frame</a:t>
+            </a:r>
+          </a:p>
+        </p:txBody>
+      </p:sp>
+      <p:sp>
+        <p:nvSpPr>
+          <p:cNvPr id="3" name="Content Placeholder 2"/>
+          <p:cNvSpPr>
+            <a:spLocks noGrp="1"/>
+          </p:cNvSpPr>
+          <p:nvPr>
+            <p:ph idx="1" sz="half"/>
+          </p:nvPr>
+        </p:nvSpPr>
+        <p:spPr/>
+        <p:txBody>
+          <a:bodyPr/>
+          <a:lstStyle/>
+          <a:p>
+            <a:pPr lvl="0" indent="0" marL="0">
+              <a:buNone/>
+            </a:pPr>
+            <a:r>
+              <a:rPr/>
+              <a:t>A </a:t>
+            </a:r>
+            <a:r>
+              <a:rPr b="1"/>
+              <a:t>data frame</a:t>
+            </a:r>
+            <a:r>
+              <a:rPr/>
+              <a:t> is a table: each </a:t>
+            </a:r>
+            <a:r>
+              <a:rPr b="1"/>
+              <a:t>column is a vector</a:t>
+            </a:r>
+            <a:r>
+              <a:rPr/>
+              <a:t> of one type, and the rows line up.</a:t>
+            </a:r>
+          </a:p>
+          <a:p>
+            <a:pPr lvl="0" indent="0" marL="0">
+              <a:buNone/>
+            </a:pPr>
+            <a:r>
+              <a:rPr/>
+              <a:t>Our </a:t>
+            </a:r>
+            <a:r>
+              <a:rPr>
+                <a:latin typeface="Courier"/>
+              </a:rPr>
+              <a:t>tree_df</a:t>
+            </a:r>
+            <a:r>
+              <a:rPr/>
+              <a:t> has five columns:</a:t>
+            </a:r>
+          </a:p>
+          <a:p>
+            <a:pPr lvl="0"/>
+            <a:r>
+              <a:rPr>
+                <a:latin typeface="Courier"/>
+              </a:rPr>
+              <a:t>index</a:t>
+            </a:r>
+            <a:r>
+              <a:rPr/>
+              <a:t> — leaf number </a:t>
+            </a:r>
+            <a:r>
+              <a:rPr i="1"/>
+              <a:t>(numeric)</a:t>
+            </a:r>
+          </a:p>
+          <a:p>
+            <a:pPr lvl="0"/>
+            <a:r>
+              <a:rPr>
+                <a:latin typeface="Courier"/>
+              </a:rPr>
+              <a:t>side</a:t>
+            </a:r>
+            <a:r>
+              <a:rPr/>
+              <a:t> — </a:t>
+            </a:r>
+            <a:r>
+              <a:rPr>
+                <a:latin typeface="Courier"/>
+              </a:rPr>
+              <a:t>"sunny"</a:t>
+            </a:r>
+            <a:r>
+              <a:rPr/>
+              <a:t> / </a:t>
+            </a:r>
+            <a:r>
+              <a:rPr>
+                <a:latin typeface="Courier"/>
+              </a:rPr>
+              <a:t>"shady"</a:t>
+            </a:r>
+            <a:r>
+              <a:rPr/>
+              <a:t> </a:t>
+            </a:r>
+            <a:r>
+              <a:rPr i="1"/>
+              <a:t>(character)</a:t>
+            </a:r>
+          </a:p>
+          <a:p>
+            <a:pPr lvl="0"/>
+            <a:r>
+              <a:rPr>
+                <a:latin typeface="Courier"/>
+              </a:rPr>
+              <a:t>weight_g</a:t>
+            </a:r>
+            <a:r>
+              <a:rPr/>
+              <a:t>, </a:t>
+            </a:r>
+            <a:r>
+              <a:rPr>
+                <a:latin typeface="Courier"/>
+              </a:rPr>
+              <a:t>width_cm</a:t>
+            </a:r>
+            <a:r>
+              <a:rPr/>
+              <a:t>, </a:t>
+            </a:r>
+            <a:r>
+              <a:rPr>
+                <a:latin typeface="Courier"/>
+              </a:rPr>
+              <a:t>height_cm</a:t>
+            </a:r>
+            <a:r>
+              <a:rPr/>
+              <a:t> </a:t>
+            </a:r>
+            <a:r>
+              <a:rPr i="1"/>
+              <a:t>(numeric)</a:t>
+            </a:r>
+          </a:p>
+          <a:p>
+            <a:pPr lvl="0" indent="0" marL="0">
+              <a:buNone/>
+            </a:pPr>
+            <a:r>
+              <a:rPr/>
+              <a:t>Pull a single column with </a:t>
+            </a:r>
+            <a:r>
+              <a:rPr>
+                <a:latin typeface="Courier"/>
+              </a:rPr>
+              <a:t>$</a:t>
+            </a:r>
+            <a:r>
+              <a:rPr/>
+              <a:t>:</a:t>
+            </a:r>
+          </a:p>
+          <a:p>
+            <a:pPr lvl="0" indent="0">
+              <a:buNone/>
+            </a:pPr>
+            <a:r>
+              <a:rPr>
+                <a:solidFill>
+                  <a:srgbClr val="003B4F"/>
+                </a:solidFill>
+                <a:latin typeface="Courier"/>
+              </a:rPr>
+              <a:t>tree_df</a:t>
+            </a:r>
+            <a:r>
+              <a:rPr>
+                <a:solidFill>
+                  <a:srgbClr val="5E5E5E"/>
+                </a:solidFill>
+                <a:latin typeface="Courier"/>
+              </a:rPr>
+              <a:t>$</a:t>
+            </a:r>
+            <a:r>
+              <a:rPr>
+                <a:solidFill>
+                  <a:srgbClr val="003B4F"/>
+                </a:solidFill>
+                <a:latin typeface="Courier"/>
+              </a:rPr>
+              <a:t>weight_g     </a:t>
+            </a:r>
+            <a:r>
+              <a:rPr>
+                <a:solidFill>
+                  <a:srgbClr val="5E5E5E"/>
+                </a:solidFill>
+                <a:latin typeface="Courier"/>
+              </a:rPr>
+              <a:t># just the weights, as a vector</a:t>
+            </a:r>
+          </a:p>
+          <a:p>
+            <a:pPr lvl="0" indent="0" marL="0">
+              <a:buNone/>
+            </a:pPr>
+            <a:r>
+              <a:rPr b="1"/>
+              <a:t>📖 New word</a:t>
+            </a:r>
+          </a:p>
+          <a:p>
+            <a:pPr lvl="0" indent="0" marL="0">
+              <a:buNone/>
+            </a:pPr>
+            <a:r>
+              <a:rPr b="1"/>
+              <a:t>Data frame</a:t>
+            </a:r>
+            <a:r>
+              <a:rPr/>
+              <a:t> = R’s word for a spreadsheet-style table.</a:t>
+            </a:r>
+          </a:p>
+        </p:txBody>
+      </p:sp>
+      <p:pic>
+        <p:nvPicPr>
+          <p:cNvPr descr="images/diagram_dataframe.png" id="0" name="Picture 1"/>
+          <p:cNvPicPr>
+            <a:picLocks noGrp="1" noChangeAspect="1"/>
+          </p:cNvPicPr>
+          <p:nvPr/>
+        </p:nvPicPr>
+        <p:blipFill>
+          <a:blip r:embed="rId2"/>
+          <a:stretch>
+            <a:fillRect/>
+          </a:stretch>
+        </p:blipFill>
+        <p:spPr bwMode="auto">
+          <a:xfrm>
+            <a:off x="6121400" y="1778000"/>
+            <a:ext cx="2781300" cy="2247900"/>
+          </a:xfrm>
+          <a:prstGeom prst="rect">
+            <a:avLst/>
+          </a:prstGeom>
+          <a:noFill/>
+          <a:ln w="9525">
+            <a:noFill/>
+            <a:headEnd/>
+            <a:tailEnd/>
+          </a:ln>
+        </p:spPr>
+      </p:pic>
+    </p:spTree>
+  </p:cSld>
+</p:sld>
+</file>
+
+<file path=ppt/slides/slide22.xml><?xml version="1.0" encoding="utf-8"?>
+<p:sld xmlns:a="http://schemas.openxmlformats.org/drawingml/2006/main" xmlns:r="http://schemas.openxmlformats.org/officeDocument/2006/relationships" xmlns:p="http://schemas.openxmlformats.org/presentationml/2006/main">
+  <p:cSld>
+    <p:spTree>
+      <p:nvGrpSpPr>
+        <p:cNvPr id="1" name=""/>
+        <p:cNvGrpSpPr/>
+        <p:nvPr/>
+      </p:nvGrpSpPr>
+      <p:grpSpPr>
+        <a:xfrm>
+          <a:off x="0" y="0"/>
+          <a:ext cx="0" cy="0"/>
+          <a:chOff x="0" y="0"/>
+          <a:chExt cx="0" cy="0"/>
+        </a:xfrm>
+      </p:grpSpPr>
+      <p:sp>
+        <p:nvSpPr>
+          <p:cNvPr id="2" name="Title 1"/>
+          <p:cNvSpPr>
+            <a:spLocks noGrp="1"/>
+          </p:cNvSpPr>
+          <p:nvPr>
+            <p:ph type="title"/>
+          </p:nvPr>
+        </p:nvSpPr>
+        <p:spPr>
+          <a:xfrm>
+            <a:off x="0" y="0"/>
+            <a:ext cx="9144000" cy="602780"/>
+          </a:xfrm>
+          <a:solidFill>
+            <a:srgbClr val="70121D"/>
+          </a:solidFill>
+        </p:spPr>
+        <p:txBody>
+          <a:bodyPr/>
+          <a:lstStyle/>
+          <a:p>
+            <a:pPr lvl="0" indent="0" marL="0">
+              <a:buNone/>
+            </a:pPr>
+            <a:r>
+              <a:rPr/>
+              <a:t>Look at your data before trusting it</a:t>
+            </a:r>
+          </a:p>
+        </p:txBody>
+      </p:sp>
+      <p:sp>
+        <p:nvSpPr>
+          <p:cNvPr id="3" name="Content Placeholder 2"/>
+          <p:cNvSpPr>
+            <a:spLocks noGrp="1"/>
+          </p:cNvSpPr>
+          <p:nvPr>
+            <p:ph idx="1" sz="half"/>
+          </p:nvPr>
+        </p:nvSpPr>
+        <p:spPr/>
+        <p:txBody>
+          <a:bodyPr/>
+          <a:lstStyle/>
+          <a:p>
+            <a:pPr lvl="0" indent="0" marL="0">
+              <a:buNone/>
+            </a:pPr>
+            <a:r>
+              <a:rPr/>
+              <a:t>Always eyeball a new data frame:</a:t>
+            </a:r>
+          </a:p>
+          <a:p>
+            <a:pPr lvl="0" indent="0">
+              <a:buNone/>
+            </a:pPr>
+            <a:r>
+              <a:rPr>
+                <a:solidFill>
+                  <a:srgbClr val="4758AB"/>
+                </a:solidFill>
+                <a:latin typeface="Courier"/>
+              </a:rPr>
+              <a:t>head</a:t>
+            </a:r>
+            <a:r>
+              <a:rPr>
+                <a:solidFill>
+                  <a:srgbClr val="003B4F"/>
+                </a:solidFill>
+                <a:latin typeface="Courier"/>
+              </a:rPr>
+              <a:t>(tree_df)     </a:t>
+            </a:r>
+            <a:r>
+              <a:rPr>
+                <a:solidFill>
+                  <a:srgbClr val="5E5E5E"/>
+                </a:solidFill>
+                <a:latin typeface="Courier"/>
+              </a:rPr>
+              <a:t># first 6 rows</a:t>
+            </a:r>
+            <a:br/>
+            <a:r>
+              <a:rPr>
+                <a:solidFill>
+                  <a:srgbClr val="4758AB"/>
+                </a:solidFill>
+                <a:latin typeface="Courier"/>
+              </a:rPr>
+              <a:t>tail</a:t>
+            </a:r>
+            <a:r>
+              <a:rPr>
+                <a:solidFill>
+                  <a:srgbClr val="003B4F"/>
+                </a:solidFill>
+                <a:latin typeface="Courier"/>
+              </a:rPr>
+              <a:t>(tree_df)     </a:t>
+            </a:r>
+            <a:r>
+              <a:rPr>
+                <a:solidFill>
+                  <a:srgbClr val="5E5E5E"/>
+                </a:solidFill>
+                <a:latin typeface="Courier"/>
+              </a:rPr>
+              <a:t># last 6 rows</a:t>
+            </a:r>
+            <a:br/>
+            <a:r>
+              <a:rPr>
+                <a:solidFill>
+                  <a:srgbClr val="4758AB"/>
+                </a:solidFill>
+                <a:latin typeface="Courier"/>
+              </a:rPr>
+              <a:t>dim</a:t>
+            </a:r>
+            <a:r>
+              <a:rPr>
+                <a:solidFill>
+                  <a:srgbClr val="003B4F"/>
+                </a:solidFill>
+                <a:latin typeface="Courier"/>
+              </a:rPr>
+              <a:t>(tree_df)      </a:t>
+            </a:r>
+            <a:r>
+              <a:rPr>
+                <a:solidFill>
+                  <a:srgbClr val="5E5E5E"/>
+                </a:solidFill>
+                <a:latin typeface="Courier"/>
+              </a:rPr>
+              <a:t># rows, columns  -&gt; 20  5</a:t>
+            </a:r>
+            <a:br/>
+            <a:r>
+              <a:rPr>
+                <a:solidFill>
+                  <a:srgbClr val="4758AB"/>
+                </a:solidFill>
+                <a:latin typeface="Courier"/>
+              </a:rPr>
+              <a:t>names</a:t>
+            </a:r>
+            <a:r>
+              <a:rPr>
+                <a:solidFill>
+                  <a:srgbClr val="003B4F"/>
+                </a:solidFill>
+                <a:latin typeface="Courier"/>
+              </a:rPr>
+              <a:t>(tree_df)    </a:t>
+            </a:r>
+            <a:r>
+              <a:rPr>
+                <a:solidFill>
+                  <a:srgbClr val="5E5E5E"/>
+                </a:solidFill>
+                <a:latin typeface="Courier"/>
+              </a:rPr>
+              <a:t># column names</a:t>
+            </a:r>
+            <a:br/>
+            <a:r>
+              <a:rPr>
+                <a:solidFill>
+                  <a:srgbClr val="4758AB"/>
+                </a:solidFill>
+                <a:latin typeface="Courier"/>
+              </a:rPr>
+              <a:t>str</a:t>
+            </a:r>
+            <a:r>
+              <a:rPr>
+                <a:solidFill>
+                  <a:srgbClr val="003B4F"/>
+                </a:solidFill>
+                <a:latin typeface="Courier"/>
+              </a:rPr>
+              <a:t>(tree_df)      </a:t>
+            </a:r>
+            <a:r>
+              <a:rPr>
+                <a:solidFill>
+                  <a:srgbClr val="5E5E5E"/>
+                </a:solidFill>
+                <a:latin typeface="Courier"/>
+              </a:rPr>
+              <a:t># type of every column</a:t>
+            </a:r>
+            <a:br/>
+            <a:r>
+              <a:rPr>
+                <a:solidFill>
+                  <a:srgbClr val="4758AB"/>
+                </a:solidFill>
+                <a:latin typeface="Courier"/>
+              </a:rPr>
+              <a:t>summary</a:t>
+            </a:r>
+            <a:r>
+              <a:rPr>
+                <a:solidFill>
+                  <a:srgbClr val="003B4F"/>
+                </a:solidFill>
+                <a:latin typeface="Courier"/>
+              </a:rPr>
+              <a:t>(tree_df)  </a:t>
+            </a:r>
+            <a:r>
+              <a:rPr>
+                <a:solidFill>
+                  <a:srgbClr val="5E5E5E"/>
+                </a:solidFill>
+                <a:latin typeface="Courier"/>
+              </a:rPr>
+              <a:t># min/mean/max per column</a:t>
+            </a:r>
+          </a:p>
+          <a:p>
+            <a:pPr lvl="0" indent="0" marL="0">
+              <a:buNone/>
+            </a:pPr>
+            <a:r>
+              <a:rPr b="1"/>
+              <a:t>🖐 Try it yourself</a:t>
+            </a:r>
+          </a:p>
+          <a:p>
+            <a:pPr lvl="0" indent="0" marL="0">
+              <a:buNone/>
+            </a:pPr>
+            <a:r>
+              <a:rPr/>
+              <a:t>Run </a:t>
+            </a:r>
+            <a:r>
+              <a:rPr>
+                <a:latin typeface="Courier"/>
+              </a:rPr>
+              <a:t>str(tree_df)</a:t>
+            </a:r>
+            <a:r>
+              <a:rPr/>
+              <a:t>. </a:t>
+            </a:r>
+            <a:r>
+              <a:rPr b="1"/>
+              <a:t>How many rows? What type is </a:t>
+            </a:r>
+            <a:r>
+              <a:rPr b="1">
+                <a:latin typeface="Courier"/>
+              </a:rPr>
+              <a:t>side</a:t>
+            </a:r>
+            <a:r>
+              <a:rPr b="1"/>
+              <a:t>?</a:t>
+            </a:r>
+          </a:p>
+        </p:txBody>
+      </p:sp>
+      <p:sp>
+        <p:nvSpPr>
+          <p:cNvPr id="4" name="Content Placeholder 3"/>
+          <p:cNvSpPr>
+            <a:spLocks noGrp="1"/>
+          </p:cNvSpPr>
+          <p:nvPr>
+            <p:ph idx="2" sz="half"/>
+          </p:nvPr>
+        </p:nvSpPr>
+        <p:spPr/>
+        <p:txBody>
+          <a:bodyPr/>
+          <a:lstStyle/>
+          <a:p>
+            <a:pPr lvl="0" indent="0" marL="0">
+              <a:buNone/>
+            </a:pPr>
+            <a:r>
+              <a:rPr b="1"/>
+              <a:t>✅ Key idea</a:t>
+            </a:r>
+          </a:p>
+          <a:p>
+            <a:pPr lvl="0" indent="0" marL="0">
+              <a:buNone/>
+            </a:pPr>
+            <a:r>
+              <a:rPr/>
+              <a:t>Check </a:t>
+            </a:r>
+            <a:r>
+              <a:rPr>
+                <a:latin typeface="Courier"/>
+              </a:rPr>
+              <a:t>dim()</a:t>
+            </a:r>
+            <a:r>
+              <a:rPr/>
+              <a:t> and </a:t>
+            </a:r>
+            <a:r>
+              <a:rPr>
+                <a:latin typeface="Courier"/>
+              </a:rPr>
+              <a:t>str()</a:t>
+            </a:r>
+            <a:r>
+              <a:rPr/>
+              <a:t> every single time you load data. Typos and wrong types hide here.</a:t>
+            </a:r>
+          </a:p>
+          <a:p>
+            <a:pPr lvl="0" indent="0" marL="0">
+              <a:buNone/>
+            </a:pPr>
+            <a:r>
+              <a:rPr b="1"/>
+              <a:t>⚠️ Watch out!</a:t>
+            </a:r>
+          </a:p>
+          <a:p>
+            <a:pPr lvl="0" indent="0" marL="0">
+              <a:buNone/>
+            </a:pPr>
+            <a:r>
+              <a:rPr/>
+              <a:t>If a number column shows as </a:t>
+            </a:r>
+            <a:r>
+              <a:rPr>
+                <a:latin typeface="Courier"/>
+              </a:rPr>
+              <a:t>character</a:t>
+            </a:r>
+            <a:r>
+              <a:rPr/>
+              <a:t>, a stray letter or comma snuck into your spreadsheet.</a:t>
+            </a:r>
+          </a:p>
+        </p:txBody>
+      </p:sp>
+    </p:spTree>
+  </p:cSld>
+</p:sld>
+</file>
+
+<file path=ppt/slides/slide23.xml><?xml version="1.0" encoding="utf-8"?>
+<p:sld xmlns:a="http://schemas.openxmlformats.org/drawingml/2006/main" xmlns:r="http://schemas.openxmlformats.org/officeDocument/2006/relationships" xmlns:p="http://schemas.openxmlformats.org/presentationml/2006/main">
+  <p:cSld>
+    <p:spTree>
+      <p:nvGrpSpPr>
+        <p:cNvPr id="1" name=""/>
+        <p:cNvGrpSpPr/>
+        <p:nvPr/>
+      </p:nvGrpSpPr>
+      <p:grpSpPr>
+        <a:xfrm>
+          <a:off x="0" y="0"/>
+          <a:ext cx="0" cy="0"/>
+          <a:chOff x="0" y="0"/>
+          <a:chExt cx="0" cy="0"/>
+        </a:xfrm>
+      </p:grpSpPr>
+      <p:sp>
+        <p:nvSpPr>
+          <p:cNvPr id="2" name="Title 1"/>
+          <p:cNvSpPr>
+            <a:spLocks noGrp="1"/>
+          </p:cNvSpPr>
+          <p:nvPr>
+            <p:ph type="title"/>
+          </p:nvPr>
+        </p:nvSpPr>
+        <p:spPr>
+          <a:xfrm>
+            <a:off x="0" y="0"/>
+            <a:ext cx="9144000" cy="602780"/>
+          </a:xfrm>
+          <a:solidFill>
+            <a:srgbClr val="70121D"/>
+          </a:solidFill>
+        </p:spPr>
+        <p:txBody>
+          <a:bodyPr/>
+          <a:lstStyle/>
+          <a:p>
+            <a:pPr lvl="0" indent="0" marL="0">
+              <a:buNone/>
+            </a:pPr>
+            <a:r>
+              <a:rPr/>
+              <a:t>The </a:t>
+            </a:r>
+            <a:r>
+              <a:rPr b="1"/>
+              <a:t>chute</a:t>
+            </a:r>
+            <a:r>
+              <a:rPr/>
+              <a:t> </a:t>
+            </a:r>
+            <a:r>
+              <a:rPr>
+                <a:latin typeface="Courier"/>
+              </a:rPr>
+              <a:t>|&gt;</a:t>
+            </a:r>
+            <a:r>
+              <a:rPr/>
+              <a:t> — the pipe</a:t>
+            </a:r>
+          </a:p>
+        </p:txBody>
+      </p:sp>
+      <p:sp>
+        <p:nvSpPr>
+          <p:cNvPr id="3" name="Content Placeholder 2"/>
+          <p:cNvSpPr>
+            <a:spLocks noGrp="1"/>
+          </p:cNvSpPr>
+          <p:nvPr>
+            <p:ph idx="1" sz="half"/>
+          </p:nvPr>
+        </p:nvSpPr>
+        <p:spPr/>
+        <p:txBody>
+          <a:bodyPr/>
+          <a:lstStyle/>
+          <a:p>
+            <a:pPr lvl="0" indent="0" marL="0">
+              <a:buNone/>
+            </a:pPr>
+            <a:r>
+              <a:rPr/>
+              <a:t>The </a:t>
+            </a:r>
+            <a:r>
+              <a:rPr b="1"/>
+              <a:t>pipe</a:t>
+            </a:r>
+            <a:r>
+              <a:rPr/>
+              <a:t> sends a result straight into the next command. Read it as the word </a:t>
+            </a:r>
+            <a:r>
+              <a:rPr b="1"/>
+              <a:t>“then”</a:t>
+            </a:r>
+            <a:r>
+              <a:rPr/>
+              <a:t>:</a:t>
+            </a:r>
+          </a:p>
+          <a:p>
+            <a:pPr lvl="0" indent="0">
+              <a:buNone/>
+            </a:pPr>
+            <a:r>
+              <a:rPr>
+                <a:solidFill>
+                  <a:srgbClr val="003B4F"/>
+                </a:solidFill>
+                <a:latin typeface="Courier"/>
+              </a:rPr>
+              <a:t>tree_df </a:t>
+            </a:r>
+            <a:r>
+              <a:rPr>
+                <a:solidFill>
+                  <a:srgbClr val="5E5E5E"/>
+                </a:solidFill>
+                <a:latin typeface="Courier"/>
+              </a:rPr>
+              <a:t>|&gt;</a:t>
+            </a:r>
+            <a:br/>
+            <a:r>
+              <a:rPr>
+                <a:solidFill>
+                  <a:srgbClr val="003B4F"/>
+                </a:solidFill>
+                <a:latin typeface="Courier"/>
+              </a:rPr>
+              <a:t>  </a:t>
+            </a:r>
+            <a:r>
+              <a:rPr>
+                <a:solidFill>
+                  <a:srgbClr val="4758AB"/>
+                </a:solidFill>
+                <a:latin typeface="Courier"/>
+              </a:rPr>
+              <a:t>group_by</a:t>
+            </a:r>
+            <a:r>
+              <a:rPr>
+                <a:solidFill>
+                  <a:srgbClr val="003B4F"/>
+                </a:solidFill>
+                <a:latin typeface="Courier"/>
+              </a:rPr>
+              <a:t>(side) </a:t>
+            </a:r>
+            <a:r>
+              <a:rPr>
+                <a:solidFill>
+                  <a:srgbClr val="5E5E5E"/>
+                </a:solidFill>
+                <a:latin typeface="Courier"/>
+              </a:rPr>
+              <a:t>|&gt;</a:t>
+            </a:r>
+            <a:br/>
+            <a:r>
+              <a:rPr>
+                <a:solidFill>
+                  <a:srgbClr val="003B4F"/>
+                </a:solidFill>
+                <a:latin typeface="Courier"/>
+              </a:rPr>
+              <a:t>  </a:t>
+            </a:r>
+            <a:r>
+              <a:rPr>
+                <a:solidFill>
+                  <a:srgbClr val="4758AB"/>
+                </a:solidFill>
+                <a:latin typeface="Courier"/>
+              </a:rPr>
+              <a:t>summarise</a:t>
+            </a:r>
+            <a:r>
+              <a:rPr>
+                <a:solidFill>
+                  <a:srgbClr val="003B4F"/>
+                </a:solidFill>
+                <a:latin typeface="Courier"/>
+              </a:rPr>
+              <a:t>(</a:t>
+            </a:r>
+            <a:r>
+              <a:rPr>
+                <a:solidFill>
+                  <a:srgbClr val="657422"/>
+                </a:solidFill>
+                <a:latin typeface="Courier"/>
+              </a:rPr>
+              <a:t>mean_weight =</a:t>
+            </a:r>
+            <a:r>
+              <a:rPr>
+                <a:solidFill>
+                  <a:srgbClr val="003B4F"/>
+                </a:solidFill>
+                <a:latin typeface="Courier"/>
+              </a:rPr>
+              <a:t> </a:t>
+            </a:r>
+            <a:r>
+              <a:rPr>
+                <a:solidFill>
+                  <a:srgbClr val="4758AB"/>
+                </a:solidFill>
+                <a:latin typeface="Courier"/>
+              </a:rPr>
+              <a:t>mean</a:t>
+            </a:r>
+            <a:r>
+              <a:rPr>
+                <a:solidFill>
+                  <a:srgbClr val="003B4F"/>
+                </a:solidFill>
+                <a:latin typeface="Courier"/>
+              </a:rPr>
+              <a:t>(weight_g))</a:t>
+            </a:r>
+          </a:p>
+          <a:p>
+            <a:pPr lvl="0" indent="0" marL="1270000">
+              <a:buNone/>
+            </a:pPr>
+            <a:r>
+              <a:rPr sz="2000"/>
+              <a:t>Take </a:t>
+            </a:r>
+            <a:r>
+              <a:rPr sz="2000">
+                <a:latin typeface="Courier"/>
+              </a:rPr>
+              <a:t>tree_df</a:t>
+            </a:r>
+            <a:r>
+              <a:rPr sz="2000"/>
+              <a:t>, </a:t>
+            </a:r>
+            <a:r>
+              <a:rPr sz="2000" b="1"/>
+              <a:t>then</a:t>
+            </a:r>
+            <a:r>
+              <a:rPr sz="2000"/>
+              <a:t> group by side, </a:t>
+            </a:r>
+            <a:r>
+              <a:rPr sz="2000" b="1"/>
+              <a:t>then</a:t>
+            </a:r>
+            <a:r>
+              <a:rPr sz="2000"/>
+              <a:t> average the weights.</a:t>
+            </a:r>
+          </a:p>
+          <a:p>
+            <a:pPr lvl="0" indent="0" marL="0">
+              <a:buNone/>
+            </a:pPr>
+            <a:r>
+              <a:rPr b="1"/>
+              <a:t>📖 New word</a:t>
+            </a:r>
+          </a:p>
+          <a:p>
+            <a:pPr lvl="0" indent="0" marL="0">
+              <a:buNone/>
+            </a:pPr>
+            <a:r>
+              <a:rPr b="1"/>
+              <a:t>Pipe</a:t>
+            </a:r>
+            <a:r>
+              <a:rPr/>
+              <a:t> </a:t>
+            </a:r>
+            <a:r>
+              <a:rPr>
+                <a:latin typeface="Courier"/>
+              </a:rPr>
+              <a:t>|&gt;</a:t>
+            </a:r>
+            <a:r>
+              <a:rPr/>
+              <a:t> = “take what’s on the left and feed it to the function on the right.” You may also see </a:t>
+            </a:r>
+            <a:r>
+              <a:rPr>
+                <a:latin typeface="Courier"/>
+              </a:rPr>
+              <a:t>%&gt;%</a:t>
+            </a:r>
+            <a:r>
+              <a:rPr/>
+              <a:t> from the tidyverse — same idea.</a:t>
+            </a:r>
+          </a:p>
+        </p:txBody>
+      </p:sp>
+      <p:pic>
+        <p:nvPicPr>
+          <p:cNvPr descr="images/diagram_pipe.png" id="0" name="Picture 1"/>
+          <p:cNvPicPr>
+            <a:picLocks noGrp="1" noChangeAspect="1"/>
+          </p:cNvPicPr>
+          <p:nvPr/>
+        </p:nvPicPr>
+        <p:blipFill>
+          <a:blip r:embed="rId2"/>
+          <a:stretch>
+            <a:fillRect/>
+          </a:stretch>
+        </p:blipFill>
+        <p:spPr bwMode="auto">
+          <a:xfrm>
+            <a:off x="6121400" y="1778000"/>
+            <a:ext cx="2781300" cy="2247900"/>
+          </a:xfrm>
+          <a:prstGeom prst="rect">
+            <a:avLst/>
+          </a:prstGeom>
+          <a:noFill/>
+          <a:ln w="9525">
+            <a:noFill/>
+            <a:headEnd/>
+            <a:tailEnd/>
+          </a:ln>
+        </p:spPr>
+      </p:pic>
+    </p:spTree>
+  </p:cSld>
+</p:sld>
+</file>
+
+<file path=ppt/slides/slide24.xml><?xml version="1.0" encoding="utf-8"?>
+<p:sld xmlns:a="http://schemas.openxmlformats.org/drawingml/2006/main" xmlns:r="http://schemas.openxmlformats.org/officeDocument/2006/relationships" xmlns:p="http://schemas.openxmlformats.org/presentationml/2006/main">
+  <p:cSld>
+    <p:spTree>
+      <p:nvGrpSpPr>
+        <p:cNvPr id="1" name=""/>
+        <p:cNvGrpSpPr/>
+        <p:nvPr/>
+      </p:nvGrpSpPr>
+      <p:grpSpPr>
+        <a:xfrm>
+          <a:off x="0" y="0"/>
+          <a:ext cx="0" cy="0"/>
+          <a:chOff x="0" y="0"/>
+          <a:chExt cx="0" cy="0"/>
+        </a:xfrm>
+      </p:grpSpPr>
+      <p:sp>
+        <p:nvSpPr>
+          <p:cNvPr id="2" name="Title 1"/>
+          <p:cNvSpPr>
+            <a:spLocks noGrp="1"/>
+          </p:cNvSpPr>
+          <p:nvPr>
+            <p:ph type="title"/>
+          </p:nvPr>
+        </p:nvSpPr>
+        <p:spPr>
+          <a:xfrm>
+            <a:off x="0" y="0"/>
+            <a:ext cx="9144000" cy="582780"/>
+          </a:xfrm>
+        </p:spPr>
+        <p:txBody>
+          <a:bodyPr/>
+          <a:lstStyle/>
+          <a:p>
+            <a:pPr lvl="0" indent="0" marL="0">
+              <a:buNone/>
+            </a:pPr>
+            <a:r>
+              <a:rPr/>
+              <a:t>Part 4 · Your first plot</a:t>
+            </a:r>
+          </a:p>
+        </p:txBody>
+      </p:sp>
+      <p:sp>
+        <p:nvSpPr>
+          <p:cNvPr id="3" name="Content Placeholder 2"/>
+          <p:cNvSpPr>
+            <a:spLocks noGrp="1"/>
+          </p:cNvSpPr>
+          <p:nvPr>
+            <p:ph idx="1"/>
+          </p:nvPr>
+        </p:nvSpPr>
+        <p:spPr/>
+        <p:txBody>
+          <a:bodyPr/>
+          <a:lstStyle/>
+          <a:p>
+            <a:pPr lvl="0" indent="0" marL="0">
+              <a:spcBef>
+                <a:spcPts val="3000"/>
+              </a:spcBef>
+              <a:buNone/>
+            </a:pPr>
+            <a:r>
+              <a:rPr b="1"/>
+              <a:t>ggplot: build a picture in layers</a:t>
+            </a:r>
+          </a:p>
+        </p:txBody>
+      </p:sp>
+    </p:spTree>
+  </p:cSld>
+</p:sld>
+</file>
+
+<file path=ppt/slides/slide25.xml><?xml version="1.0" encoding="utf-8"?>
+<p:sld xmlns:a="http://schemas.openxmlformats.org/drawingml/2006/main" xmlns:r="http://schemas.openxmlformats.org/officeDocument/2006/relationships" xmlns:p="http://schemas.openxmlformats.org/presentationml/2006/main">
+  <p:cSld>
+    <p:spTree>
+      <p:nvGrpSpPr>
+        <p:cNvPr id="1" name=""/>
+        <p:cNvGrpSpPr/>
+        <p:nvPr/>
+      </p:nvGrpSpPr>
+      <p:grpSpPr>
+        <a:xfrm>
+          <a:off x="0" y="0"/>
+          <a:ext cx="0" cy="0"/>
+          <a:chOff x="0" y="0"/>
+          <a:chExt cx="0" cy="0"/>
+        </a:xfrm>
+      </p:grpSpPr>
+      <p:sp>
+        <p:nvSpPr>
+          <p:cNvPr id="3" name="Content Placeholder 2"/>
+          <p:cNvSpPr>
+            <a:spLocks noGrp="1"/>
+          </p:cNvSpPr>
+          <p:nvPr>
+            <p:ph idx="1" sz="half"/>
+          </p:nvPr>
+        </p:nvSpPr>
+        <p:spPr/>
+        <p:txBody>
+          <a:bodyPr/>
+          <a:lstStyle/>
+          <a:p>
+            <a:pPr lvl="0" indent="0" marL="0">
+              <a:buNone/>
+            </a:pPr>
+            <a:r>
+              <a:rPr/>
+              <a:t>Plots are built from three core layers, joined with </a:t>
+            </a:r>
+            <a:r>
+              <a:rPr>
+                <a:latin typeface="Courier"/>
+              </a:rPr>
+              <a:t>+</a:t>
+            </a:r>
+            <a:r>
+              <a:rPr/>
+              <a:t>:</a:t>
+            </a:r>
+          </a:p>
+          <a:p>
+            <a:pPr lvl="0" indent="0">
+              <a:buNone/>
+            </a:pPr>
+            <a:r>
+              <a:rPr>
+                <a:solidFill>
+                  <a:srgbClr val="4758AB"/>
+                </a:solidFill>
+                <a:latin typeface="Courier"/>
+              </a:rPr>
+              <a:t>ggplot</a:t>
+            </a:r>
+            <a:r>
+              <a:rPr>
+                <a:solidFill>
+                  <a:srgbClr val="003B4F"/>
+                </a:solidFill>
+                <a:latin typeface="Courier"/>
+              </a:rPr>
+              <a:t>(tree_df, </a:t>
+            </a:r>
+            <a:r>
+              <a:rPr>
+                <a:solidFill>
+                  <a:srgbClr val="4758AB"/>
+                </a:solidFill>
+                <a:latin typeface="Courier"/>
+              </a:rPr>
+              <a:t>aes</a:t>
+            </a:r>
+            <a:r>
+              <a:rPr>
+                <a:solidFill>
+                  <a:srgbClr val="003B4F"/>
+                </a:solidFill>
+                <a:latin typeface="Courier"/>
+              </a:rPr>
+              <a:t>(</a:t>
+            </a:r>
+            <a:r>
+              <a:rPr>
+                <a:solidFill>
+                  <a:srgbClr val="657422"/>
+                </a:solidFill>
+                <a:latin typeface="Courier"/>
+              </a:rPr>
+              <a:t>x =</a:t>
+            </a:r>
+            <a:r>
+              <a:rPr>
+                <a:solidFill>
+                  <a:srgbClr val="003B4F"/>
+                </a:solidFill>
+                <a:latin typeface="Courier"/>
+              </a:rPr>
+              <a:t> side, </a:t>
+            </a:r>
+            <a:r>
+              <a:rPr>
+                <a:solidFill>
+                  <a:srgbClr val="657422"/>
+                </a:solidFill>
+                <a:latin typeface="Courier"/>
+              </a:rPr>
+              <a:t>y =</a:t>
+            </a:r>
+            <a:r>
+              <a:rPr>
+                <a:solidFill>
+                  <a:srgbClr val="003B4F"/>
+                </a:solidFill>
+                <a:latin typeface="Courier"/>
+              </a:rPr>
+              <a:t> weight_g))</a:t>
+            </a:r>
+          </a:p>
+          <a:p>
+            <a:pPr lvl="0" indent="-342900" marL="342900">
+              <a:buAutoNum type="arabicPeriod"/>
+            </a:pPr>
+            <a:r>
+              <a:rPr b="1"/>
+              <a:t>data</a:t>
+            </a:r>
+            <a:r>
+              <a:rPr/>
+              <a:t> — which data frame </a:t>
+            </a:r>
+            <a:r>
+              <a:rPr i="1"/>
+              <a:t>(</a:t>
+            </a:r>
+            <a:r>
+              <a:rPr i="1">
+                <a:latin typeface="Courier"/>
+              </a:rPr>
+              <a:t>tree_df</a:t>
+            </a:r>
+            <a:r>
+              <a:rPr i="1"/>
+              <a:t>)</a:t>
+            </a:r>
+          </a:p>
+          <a:p>
+            <a:pPr lvl="0" indent="-342900" marL="342900">
+              <a:buAutoNum type="arabicPeriod"/>
+            </a:pPr>
+            <a:r>
+              <a:rPr b="1"/>
+              <a:t>aes</a:t>
+            </a:r>
+            <a:r>
+              <a:rPr/>
+              <a:t> — which columns map to x and y</a:t>
+            </a:r>
+          </a:p>
+          <a:p>
+            <a:pPr lvl="0" indent="-342900" marL="342900">
+              <a:buAutoNum type="arabicPeriod"/>
+            </a:pPr>
+            <a:r>
+              <a:rPr b="1"/>
+              <a:t>geom</a:t>
+            </a:r>
+            <a:r>
+              <a:rPr/>
+              <a:t> — how to draw it</a:t>
+            </a:r>
+          </a:p>
+          <a:p>
+            <a:pPr lvl="0" indent="0" marL="0">
+              <a:buNone/>
+            </a:pPr>
+            <a:r>
+              <a:rPr/>
+              <a:t>Add the geom with </a:t>
+            </a:r>
+            <a:r>
+              <a:rPr>
+                <a:latin typeface="Courier"/>
+              </a:rPr>
+              <a:t>+</a:t>
+            </a:r>
+            <a:r>
+              <a:rPr/>
+              <a:t>:</a:t>
+            </a:r>
+          </a:p>
+          <a:p>
+            <a:pPr lvl="0" indent="0">
+              <a:buNone/>
+            </a:pPr>
+            <a:r>
+              <a:rPr>
+                <a:solidFill>
+                  <a:srgbClr val="4758AB"/>
+                </a:solidFill>
+                <a:latin typeface="Courier"/>
+              </a:rPr>
+              <a:t>ggplot</a:t>
+            </a:r>
+            <a:r>
+              <a:rPr>
+                <a:solidFill>
+                  <a:srgbClr val="003B4F"/>
+                </a:solidFill>
+                <a:latin typeface="Courier"/>
+              </a:rPr>
+              <a:t>(tree_df, </a:t>
+            </a:r>
+            <a:r>
+              <a:rPr>
+                <a:solidFill>
+                  <a:srgbClr val="4758AB"/>
+                </a:solidFill>
+                <a:latin typeface="Courier"/>
+              </a:rPr>
+              <a:t>aes</a:t>
+            </a:r>
+            <a:r>
+              <a:rPr>
+                <a:solidFill>
+                  <a:srgbClr val="003B4F"/>
+                </a:solidFill>
+                <a:latin typeface="Courier"/>
+              </a:rPr>
+              <a:t>(</a:t>
+            </a:r>
+            <a:r>
+              <a:rPr>
+                <a:solidFill>
+                  <a:srgbClr val="657422"/>
+                </a:solidFill>
+                <a:latin typeface="Courier"/>
+              </a:rPr>
+              <a:t>x =</a:t>
+            </a:r>
+            <a:r>
+              <a:rPr>
+                <a:solidFill>
+                  <a:srgbClr val="003B4F"/>
+                </a:solidFill>
+                <a:latin typeface="Courier"/>
+              </a:rPr>
+              <a:t> side, </a:t>
+            </a:r>
+            <a:r>
+              <a:rPr>
+                <a:solidFill>
+                  <a:srgbClr val="657422"/>
+                </a:solidFill>
+                <a:latin typeface="Courier"/>
+              </a:rPr>
+              <a:t>y =</a:t>
+            </a:r>
+            <a:r>
+              <a:rPr>
+                <a:solidFill>
+                  <a:srgbClr val="003B4F"/>
+                </a:solidFill>
+                <a:latin typeface="Courier"/>
+              </a:rPr>
+              <a:t> weight_g)) </a:t>
+            </a:r>
+            <a:r>
+              <a:rPr>
+                <a:solidFill>
+                  <a:srgbClr val="5E5E5E"/>
+                </a:solidFill>
+                <a:latin typeface="Courier"/>
+              </a:rPr>
+              <a:t>+</a:t>
+            </a:r>
+            <a:br/>
+            <a:r>
+              <a:rPr>
+                <a:solidFill>
+                  <a:srgbClr val="003B4F"/>
+                </a:solidFill>
+                <a:latin typeface="Courier"/>
+              </a:rPr>
+              <a:t>  </a:t>
+            </a:r>
+            <a:r>
+              <a:rPr>
+                <a:solidFill>
+                  <a:srgbClr val="4758AB"/>
+                </a:solidFill>
+                <a:latin typeface="Courier"/>
+              </a:rPr>
+              <a:t>geom_point</a:t>
+            </a:r>
+            <a:r>
+              <a:rPr>
+                <a:solidFill>
+                  <a:srgbClr val="003B4F"/>
+                </a:solidFill>
+                <a:latin typeface="Courier"/>
+              </a:rPr>
+              <a:t>()</a:t>
+            </a:r>
+          </a:p>
+          <a:p>
+            <a:pPr lvl="0" indent="0" marL="0">
+              <a:buNone/>
+            </a:pPr>
+            <a:r>
+              <a:rPr b="1"/>
+              <a:t>⚠️ Watch out!</a:t>
+            </a:r>
+          </a:p>
+          <a:p>
+            <a:pPr lvl="0" indent="0" marL="0">
+              <a:buNone/>
+            </a:pPr>
+            <a:r>
+              <a:rPr/>
+              <a:t>The </a:t>
+            </a:r>
+            <a:r>
+              <a:rPr>
+                <a:latin typeface="Courier"/>
+              </a:rPr>
+              <a:t>+</a:t>
+            </a:r>
+            <a:r>
+              <a:rPr/>
+              <a:t> must sit at the </a:t>
+            </a:r>
+            <a:r>
+              <a:rPr b="1"/>
+              <a:t>end</a:t>
+            </a:r>
+            <a:r>
+              <a:rPr/>
+              <a:t> of a line, never the start. </a:t>
+            </a:r>
+            <a:r>
+              <a:rPr>
+                <a:latin typeface="Courier"/>
+              </a:rPr>
+              <a:t>+</a:t>
+            </a:r>
+            <a:r>
+              <a:rPr/>
+              <a:t> at the start = error.</a:t>
+            </a:r>
+          </a:p>
+        </p:txBody>
+      </p:sp>
+      <p:pic>
+        <p:nvPicPr>
+          <p:cNvPr descr="images/diagram_ggplot_layers.png" id="0" name="Picture 1"/>
+          <p:cNvPicPr>
+            <a:picLocks noGrp="1" noChangeAspect="1"/>
+          </p:cNvPicPr>
+          <p:nvPr/>
+        </p:nvPicPr>
+        <p:blipFill>
+          <a:blip r:embed="rId2"/>
+          <a:stretch>
+            <a:fillRect/>
+          </a:stretch>
+        </p:blipFill>
+        <p:spPr bwMode="auto">
+          <a:xfrm>
+            <a:off x="6121400" y="1714500"/>
+            <a:ext cx="2781300" cy="2349500"/>
+          </a:xfrm>
+          <a:prstGeom prst="rect">
+            <a:avLst/>
+          </a:prstGeom>
+          <a:noFill/>
+          <a:ln w="9525">
+            <a:noFill/>
+            <a:headEnd/>
+            <a:tailEnd/>
+          </a:ln>
+        </p:spPr>
+      </p:pic>
+    </p:spTree>
+  </p:cSld>
+</p:sld>
+</file>
+
+<file path=ppt/slides/slide26.xml><?xml version="1.0" encoding="utf-8"?>
+<p:sld xmlns:a="http://schemas.openxmlformats.org/drawingml/2006/main" xmlns:r="http://schemas.openxmlformats.org/officeDocument/2006/relationships" xmlns:p="http://schemas.openxmlformats.org/presentationml/2006/main">
+  <p:cSld>
+    <p:spTree>
+      <p:nvGrpSpPr>
+        <p:cNvPr id="1" name=""/>
+        <p:cNvGrpSpPr/>
+        <p:nvPr/>
+      </p:nvGrpSpPr>
+      <p:grpSpPr>
+        <a:xfrm>
+          <a:off x="0" y="0"/>
+          <a:ext cx="0" cy="0"/>
+          <a:chOff x="0" y="0"/>
+          <a:chExt cx="0" cy="0"/>
+        </a:xfrm>
+      </p:grpSpPr>
+      <p:sp>
+        <p:nvSpPr>
+          <p:cNvPr id="2" name="Title 1"/>
+          <p:cNvSpPr>
+            <a:spLocks noGrp="1"/>
+          </p:cNvSpPr>
+          <p:nvPr>
+            <p:ph type="title"/>
+          </p:nvPr>
+        </p:nvSpPr>
+        <p:spPr>
+          <a:xfrm>
+            <a:off x="0" y="0"/>
+            <a:ext cx="9144000" cy="602780"/>
+          </a:xfrm>
+          <a:solidFill>
+            <a:srgbClr val="70121D"/>
+          </a:solidFill>
+        </p:spPr>
+        <p:txBody>
+          <a:bodyPr/>
+          <a:lstStyle/>
+          <a:p>
+            <a:pPr lvl="0" indent="0" marL="0">
+              <a:buNone/>
+            </a:pPr>
+            <a:r>
+              <a:rPr/>
+              <a:t>Improve it one layer at a time</a:t>
+            </a:r>
+          </a:p>
+        </p:txBody>
+      </p:sp>
+      <p:sp>
+        <p:nvSpPr>
+          <p:cNvPr id="3" name="Content Placeholder 2"/>
+          <p:cNvSpPr>
+            <a:spLocks noGrp="1"/>
+          </p:cNvSpPr>
+          <p:nvPr>
+            <p:ph idx="1" sz="half"/>
+          </p:nvPr>
+        </p:nvSpPr>
+        <p:spPr/>
+        <p:txBody>
+          <a:bodyPr/>
+          <a:lstStyle/>
+          <a:p>
+            <a:pPr lvl="0" indent="0" marL="0">
+              <a:buNone/>
+            </a:pPr>
+            <a:r>
+              <a:rPr/>
+              <a:t>Since </a:t>
+            </a:r>
+            <a:r>
+              <a:rPr>
+                <a:latin typeface="Courier"/>
+              </a:rPr>
+              <a:t>side</a:t>
+            </a:r>
+            <a:r>
+              <a:rPr/>
+              <a:t> is a category, a </a:t>
+            </a:r>
+            <a:r>
+              <a:rPr b="1"/>
+              <a:t>boxplot</a:t>
+            </a:r>
+            <a:r>
+              <a:rPr/>
+              <a:t> with the raw points on top tells the story well:</a:t>
+            </a:r>
+          </a:p>
+          <a:p>
+            <a:pPr lvl="0" indent="0">
+              <a:buNone/>
+            </a:pPr>
+            <a:r>
+              <a:rPr>
+                <a:solidFill>
+                  <a:srgbClr val="4758AB"/>
+                </a:solidFill>
+                <a:latin typeface="Courier"/>
+              </a:rPr>
+              <a:t>ggplot</a:t>
+            </a:r>
+            <a:r>
+              <a:rPr>
+                <a:solidFill>
+                  <a:srgbClr val="003B4F"/>
+                </a:solidFill>
+                <a:latin typeface="Courier"/>
+              </a:rPr>
+              <a:t>(tree_df, </a:t>
+            </a:r>
+            <a:r>
+              <a:rPr>
+                <a:solidFill>
+                  <a:srgbClr val="4758AB"/>
+                </a:solidFill>
+                <a:latin typeface="Courier"/>
+              </a:rPr>
+              <a:t>aes</a:t>
+            </a:r>
+            <a:r>
+              <a:rPr>
+                <a:solidFill>
+                  <a:srgbClr val="003B4F"/>
+                </a:solidFill>
+                <a:latin typeface="Courier"/>
+              </a:rPr>
+              <a:t>(</a:t>
+            </a:r>
+            <a:r>
+              <a:rPr>
+                <a:solidFill>
+                  <a:srgbClr val="657422"/>
+                </a:solidFill>
+                <a:latin typeface="Courier"/>
+              </a:rPr>
+              <a:t>x =</a:t>
+            </a:r>
+            <a:r>
+              <a:rPr>
+                <a:solidFill>
+                  <a:srgbClr val="003B4F"/>
+                </a:solidFill>
+                <a:latin typeface="Courier"/>
+              </a:rPr>
+              <a:t> side, </a:t>
+            </a:r>
+            <a:r>
+              <a:rPr>
+                <a:solidFill>
+                  <a:srgbClr val="657422"/>
+                </a:solidFill>
+                <a:latin typeface="Courier"/>
+              </a:rPr>
+              <a:t>y =</a:t>
+            </a:r>
+            <a:r>
+              <a:rPr>
+                <a:solidFill>
+                  <a:srgbClr val="003B4F"/>
+                </a:solidFill>
+                <a:latin typeface="Courier"/>
+              </a:rPr>
+              <a:t> weight_g)) </a:t>
+            </a:r>
+            <a:r>
+              <a:rPr>
+                <a:solidFill>
+                  <a:srgbClr val="5E5E5E"/>
+                </a:solidFill>
+                <a:latin typeface="Courier"/>
+              </a:rPr>
+              <a:t>+</a:t>
+            </a:r>
+            <a:br/>
+            <a:r>
+              <a:rPr>
+                <a:solidFill>
+                  <a:srgbClr val="003B4F"/>
+                </a:solidFill>
+                <a:latin typeface="Courier"/>
+              </a:rPr>
+              <a:t>  </a:t>
+            </a:r>
+            <a:r>
+              <a:rPr>
+                <a:solidFill>
+                  <a:srgbClr val="4758AB"/>
+                </a:solidFill>
+                <a:latin typeface="Courier"/>
+              </a:rPr>
+              <a:t>geom_boxplot</a:t>
+            </a:r>
+            <a:r>
+              <a:rPr>
+                <a:solidFill>
+                  <a:srgbClr val="003B4F"/>
+                </a:solidFill>
+                <a:latin typeface="Courier"/>
+              </a:rPr>
+              <a:t>() </a:t>
+            </a:r>
+            <a:r>
+              <a:rPr>
+                <a:solidFill>
+                  <a:srgbClr val="5E5E5E"/>
+                </a:solidFill>
+                <a:latin typeface="Courier"/>
+              </a:rPr>
+              <a:t>+</a:t>
+            </a:r>
+            <a:br/>
+            <a:r>
+              <a:rPr>
+                <a:solidFill>
+                  <a:srgbClr val="003B4F"/>
+                </a:solidFill>
+                <a:latin typeface="Courier"/>
+              </a:rPr>
+              <a:t>  </a:t>
+            </a:r>
+            <a:r>
+              <a:rPr>
+                <a:solidFill>
+                  <a:srgbClr val="4758AB"/>
+                </a:solidFill>
+                <a:latin typeface="Courier"/>
+              </a:rPr>
+              <a:t>geom_jitter</a:t>
+            </a:r>
+            <a:r>
+              <a:rPr>
+                <a:solidFill>
+                  <a:srgbClr val="003B4F"/>
+                </a:solidFill>
+                <a:latin typeface="Courier"/>
+              </a:rPr>
+              <a:t>(</a:t>
+            </a:r>
+            <a:r>
+              <a:rPr>
+                <a:solidFill>
+                  <a:srgbClr val="657422"/>
+                </a:solidFill>
+                <a:latin typeface="Courier"/>
+              </a:rPr>
+              <a:t>width =</a:t>
+            </a:r>
+            <a:r>
+              <a:rPr>
+                <a:solidFill>
+                  <a:srgbClr val="003B4F"/>
+                </a:solidFill>
+                <a:latin typeface="Courier"/>
+              </a:rPr>
+              <a:t> </a:t>
+            </a:r>
+            <a:r>
+              <a:rPr>
+                <a:solidFill>
+                  <a:srgbClr val="AD0000"/>
+                </a:solidFill>
+                <a:latin typeface="Courier"/>
+              </a:rPr>
+              <a:t>0.15</a:t>
+            </a:r>
+            <a:r>
+              <a:rPr>
+                <a:solidFill>
+                  <a:srgbClr val="003B4F"/>
+                </a:solidFill>
+                <a:latin typeface="Courier"/>
+              </a:rPr>
+              <a:t>, </a:t>
+            </a:r>
+            <a:r>
+              <a:rPr>
+                <a:solidFill>
+                  <a:srgbClr val="657422"/>
+                </a:solidFill>
+                <a:latin typeface="Courier"/>
+              </a:rPr>
+              <a:t>alpha =</a:t>
+            </a:r>
+            <a:r>
+              <a:rPr>
+                <a:solidFill>
+                  <a:srgbClr val="003B4F"/>
+                </a:solidFill>
+                <a:latin typeface="Courier"/>
+              </a:rPr>
+              <a:t> </a:t>
+            </a:r>
+            <a:r>
+              <a:rPr>
+                <a:solidFill>
+                  <a:srgbClr val="AD0000"/>
+                </a:solidFill>
+                <a:latin typeface="Courier"/>
+              </a:rPr>
+              <a:t>0.6</a:t>
+            </a:r>
+            <a:r>
+              <a:rPr>
+                <a:solidFill>
+                  <a:srgbClr val="003B4F"/>
+                </a:solidFill>
+                <a:latin typeface="Courier"/>
+              </a:rPr>
+              <a:t>, </a:t>
+            </a:r>
+            <a:r>
+              <a:rPr>
+                <a:solidFill>
+                  <a:srgbClr val="657422"/>
+                </a:solidFill>
+                <a:latin typeface="Courier"/>
+              </a:rPr>
+              <a:t>color =</a:t>
+            </a:r>
+            <a:r>
+              <a:rPr>
+                <a:solidFill>
+                  <a:srgbClr val="003B4F"/>
+                </a:solidFill>
+                <a:latin typeface="Courier"/>
+              </a:rPr>
+              <a:t> </a:t>
+            </a:r>
+            <a:r>
+              <a:rPr>
+                <a:solidFill>
+                  <a:srgbClr val="20794D"/>
+                </a:solidFill>
+                <a:latin typeface="Courier"/>
+              </a:rPr>
+              <a:t>"tomato"</a:t>
+            </a:r>
+            <a:r>
+              <a:rPr>
+                <a:solidFill>
+                  <a:srgbClr val="003B4F"/>
+                </a:solidFill>
+                <a:latin typeface="Courier"/>
+              </a:rPr>
+              <a:t>) </a:t>
+            </a:r>
+            <a:r>
+              <a:rPr>
+                <a:solidFill>
+                  <a:srgbClr val="5E5E5E"/>
+                </a:solidFill>
+                <a:latin typeface="Courier"/>
+              </a:rPr>
+              <a:t>+</a:t>
+            </a:r>
+            <a:br/>
+            <a:r>
+              <a:rPr>
+                <a:solidFill>
+                  <a:srgbClr val="003B4F"/>
+                </a:solidFill>
+                <a:latin typeface="Courier"/>
+              </a:rPr>
+              <a:t>  </a:t>
+            </a:r>
+            <a:r>
+              <a:rPr>
+                <a:solidFill>
+                  <a:srgbClr val="4758AB"/>
+                </a:solidFill>
+                <a:latin typeface="Courier"/>
+              </a:rPr>
+              <a:t>labs</a:t>
+            </a:r>
+            <a:r>
+              <a:rPr>
+                <a:solidFill>
+                  <a:srgbClr val="003B4F"/>
+                </a:solidFill>
+                <a:latin typeface="Courier"/>
+              </a:rPr>
+              <a:t>(</a:t>
+            </a:r>
+            <a:r>
+              <a:rPr>
+                <a:solidFill>
+                  <a:srgbClr val="657422"/>
+                </a:solidFill>
+                <a:latin typeface="Courier"/>
+              </a:rPr>
+              <a:t>x =</a:t>
+            </a:r>
+            <a:r>
+              <a:rPr>
+                <a:solidFill>
+                  <a:srgbClr val="003B4F"/>
+                </a:solidFill>
+                <a:latin typeface="Courier"/>
+              </a:rPr>
+              <a:t> </a:t>
+            </a:r>
+            <a:r>
+              <a:rPr>
+                <a:solidFill>
+                  <a:srgbClr val="20794D"/>
+                </a:solidFill>
+                <a:latin typeface="Courier"/>
+              </a:rPr>
+              <a:t>"Side of tree"</a:t>
+            </a:r>
+            <a:r>
+              <a:rPr>
+                <a:solidFill>
+                  <a:srgbClr val="003B4F"/>
+                </a:solidFill>
+                <a:latin typeface="Courier"/>
+              </a:rPr>
+              <a:t>,</a:t>
+            </a:r>
+            <a:br/>
+            <a:r>
+              <a:rPr>
+                <a:solidFill>
+                  <a:srgbClr val="003B4F"/>
+                </a:solidFill>
+                <a:latin typeface="Courier"/>
+              </a:rPr>
+              <a:t>       </a:t>
+            </a:r>
+            <a:r>
+              <a:rPr>
+                <a:solidFill>
+                  <a:srgbClr val="657422"/>
+                </a:solidFill>
+                <a:latin typeface="Courier"/>
+              </a:rPr>
+              <a:t>y =</a:t>
+            </a:r>
+            <a:r>
+              <a:rPr>
+                <a:solidFill>
+                  <a:srgbClr val="003B4F"/>
+                </a:solidFill>
+                <a:latin typeface="Courier"/>
+              </a:rPr>
+              <a:t> </a:t>
+            </a:r>
+            <a:r>
+              <a:rPr>
+                <a:solidFill>
+                  <a:srgbClr val="20794D"/>
+                </a:solidFill>
+                <a:latin typeface="Courier"/>
+              </a:rPr>
+              <a:t>"Leaf weight (g)"</a:t>
+            </a:r>
+            <a:r>
+              <a:rPr>
+                <a:solidFill>
+                  <a:srgbClr val="003B4F"/>
+                </a:solidFill>
+                <a:latin typeface="Courier"/>
+              </a:rPr>
+              <a:t>,</a:t>
+            </a:r>
+            <a:br/>
+            <a:r>
+              <a:rPr>
+                <a:solidFill>
+                  <a:srgbClr val="003B4F"/>
+                </a:solidFill>
+                <a:latin typeface="Courier"/>
+              </a:rPr>
+              <a:t>       </a:t>
+            </a:r>
+            <a:r>
+              <a:rPr>
+                <a:solidFill>
+                  <a:srgbClr val="657422"/>
+                </a:solidFill>
+                <a:latin typeface="Courier"/>
+              </a:rPr>
+              <a:t>title =</a:t>
+            </a:r>
+            <a:r>
+              <a:rPr>
+                <a:solidFill>
+                  <a:srgbClr val="003B4F"/>
+                </a:solidFill>
+                <a:latin typeface="Courier"/>
+              </a:rPr>
+              <a:t> </a:t>
+            </a:r>
+            <a:r>
+              <a:rPr>
+                <a:solidFill>
+                  <a:srgbClr val="20794D"/>
+                </a:solidFill>
+                <a:latin typeface="Courier"/>
+              </a:rPr>
+              <a:t>"Sunny vs. shady leaves"</a:t>
+            </a:r>
+            <a:r>
+              <a:rPr>
+                <a:solidFill>
+                  <a:srgbClr val="003B4F"/>
+                </a:solidFill>
+                <a:latin typeface="Courier"/>
+              </a:rPr>
+              <a:t>)</a:t>
+            </a:r>
+          </a:p>
+          <a:p>
+            <a:pPr lvl="0" indent="0" marL="0">
+              <a:buNone/>
+            </a:pPr>
+            <a:r>
+              <a:rPr b="1"/>
+              <a:t>🖐 Try it yourself</a:t>
+            </a:r>
+          </a:p>
+          <a:p>
+            <a:pPr lvl="0" indent="0" marL="0">
+              <a:buNone/>
+            </a:pPr>
+            <a:r>
+              <a:rPr/>
+              <a:t>Swap </a:t>
+            </a:r>
+            <a:r>
+              <a:rPr>
+                <a:latin typeface="Courier"/>
+              </a:rPr>
+              <a:t>weight_g</a:t>
+            </a:r>
+            <a:r>
+              <a:rPr/>
+              <a:t> for </a:t>
+            </a:r>
+            <a:r>
+              <a:rPr>
+                <a:latin typeface="Courier"/>
+              </a:rPr>
+              <a:t>height_cm</a:t>
+            </a:r>
+            <a:r>
+              <a:rPr/>
+              <a:t>. What changes? Now try </a:t>
+            </a:r>
+            <a:r>
+              <a:rPr>
+                <a:latin typeface="Courier"/>
+              </a:rPr>
+              <a:t>geom_violin()</a:t>
+            </a:r>
+            <a:r>
+              <a:rPr/>
+              <a:t> instead of </a:t>
+            </a:r>
+            <a:r>
+              <a:rPr>
+                <a:latin typeface="Courier"/>
+              </a:rPr>
+              <a:t>geom_boxplot()</a:t>
+            </a:r>
+            <a:r>
+              <a:rPr/>
+              <a:t>.</a:t>
+            </a:r>
+          </a:p>
+        </p:txBody>
+      </p:sp>
+      <p:pic>
+        <p:nvPicPr>
+          <p:cNvPr descr="images/paste-3.png" id="0" name="Picture 1"/>
+          <p:cNvPicPr>
+            <a:picLocks noGrp="1" noChangeAspect="1"/>
+          </p:cNvPicPr>
+          <p:nvPr/>
+        </p:nvPicPr>
+        <p:blipFill>
+          <a:blip r:embed="rId2"/>
+          <a:stretch>
+            <a:fillRect/>
+          </a:stretch>
+        </p:blipFill>
+        <p:spPr bwMode="auto">
+          <a:xfrm>
+            <a:off x="6121400" y="1828800"/>
+            <a:ext cx="2781300" cy="2133600"/>
+          </a:xfrm>
+          <a:prstGeom prst="rect">
+            <a:avLst/>
+          </a:prstGeom>
+          <a:noFill/>
+          <a:ln w="9525">
+            <a:noFill/>
+            <a:headEnd/>
+            <a:tailEnd/>
+          </a:ln>
+        </p:spPr>
+      </p:pic>
+    </p:spTree>
+  </p:cSld>
+</p:sld>
+</file>
+
+<file path=ppt/slides/slide27.xml><?xml version="1.0" encoding="utf-8"?>
+<p:sld xmlns:a="http://schemas.openxmlformats.org/drawingml/2006/main" xmlns:r="http://schemas.openxmlformats.org/officeDocument/2006/relationships" xmlns:p="http://schemas.openxmlformats.org/presentationml/2006/main">
+  <p:cSld>
+    <p:spTree>
+      <p:nvGrpSpPr>
+        <p:cNvPr id="1" name=""/>
+        <p:cNvGrpSpPr/>
+        <p:nvPr/>
+      </p:nvGrpSpPr>
+      <p:grpSpPr>
+        <a:xfrm>
+          <a:off x="0" y="0"/>
+          <a:ext cx="0" cy="0"/>
+          <a:chOff x="0" y="0"/>
+          <a:chExt cx="0" cy="0"/>
+        </a:xfrm>
+      </p:grpSpPr>
+      <p:sp>
+        <p:nvSpPr>
+          <p:cNvPr id="2" name="Title 1"/>
+          <p:cNvSpPr>
+            <a:spLocks noGrp="1"/>
+          </p:cNvSpPr>
+          <p:nvPr>
+            <p:ph type="title"/>
+          </p:nvPr>
+        </p:nvSpPr>
+        <p:spPr>
+          <a:xfrm>
+            <a:off x="0" y="0"/>
+            <a:ext cx="9144000" cy="602780"/>
+          </a:xfrm>
+          <a:solidFill>
+            <a:srgbClr val="70121D"/>
+          </a:solidFill>
+        </p:spPr>
+        <p:txBody>
+          <a:bodyPr/>
+          <a:lstStyle/>
+          <a:p>
+            <a:pPr lvl="0" indent="0" marL="0">
+              <a:buNone/>
+            </a:pPr>
+            <a:r>
+              <a:rPr/>
+              <a:t>Save your plot and your clean data</a:t>
+            </a:r>
+          </a:p>
+        </p:txBody>
+      </p:sp>
+      <p:sp>
+        <p:nvSpPr>
+          <p:cNvPr id="3" name="Content Placeholder 2"/>
+          <p:cNvSpPr>
+            <a:spLocks noGrp="1"/>
+          </p:cNvSpPr>
+          <p:nvPr>
+            <p:ph idx="1" sz="half"/>
+          </p:nvPr>
+        </p:nvSpPr>
+        <p:spPr/>
+        <p:txBody>
+          <a:bodyPr/>
+          <a:lstStyle/>
+          <a:p>
+            <a:pPr lvl="0" indent="0" marL="0">
+              <a:buNone/>
+            </a:pPr>
+            <a:r>
+              <a:rPr/>
+              <a:t>Store the plot in an object, then save it:</a:t>
+            </a:r>
+          </a:p>
+          <a:p>
+            <a:pPr lvl="0" indent="0">
+              <a:buNone/>
+            </a:pPr>
+            <a:r>
+              <a:rPr>
+                <a:solidFill>
+                  <a:srgbClr val="003B4F"/>
+                </a:solidFill>
+                <a:latin typeface="Courier"/>
+              </a:rPr>
+              <a:t>my_plot &lt;- </a:t>
+            </a:r>
+            <a:r>
+              <a:rPr>
+                <a:solidFill>
+                  <a:srgbClr val="4758AB"/>
+                </a:solidFill>
+                <a:latin typeface="Courier"/>
+              </a:rPr>
+              <a:t>ggplot</a:t>
+            </a:r>
+            <a:r>
+              <a:rPr>
+                <a:solidFill>
+                  <a:srgbClr val="003B4F"/>
+                </a:solidFill>
+                <a:latin typeface="Courier"/>
+              </a:rPr>
+              <a:t>(tree_df, </a:t>
+            </a:r>
+            <a:r>
+              <a:rPr>
+                <a:solidFill>
+                  <a:srgbClr val="4758AB"/>
+                </a:solidFill>
+                <a:latin typeface="Courier"/>
+              </a:rPr>
+              <a:t>aes</a:t>
+            </a:r>
+            <a:r>
+              <a:rPr>
+                <a:solidFill>
+                  <a:srgbClr val="003B4F"/>
+                </a:solidFill>
+                <a:latin typeface="Courier"/>
+              </a:rPr>
+              <a:t>(</a:t>
+            </a:r>
+            <a:r>
+              <a:rPr>
+                <a:solidFill>
+                  <a:srgbClr val="657422"/>
+                </a:solidFill>
+                <a:latin typeface="Courier"/>
+              </a:rPr>
+              <a:t>x =</a:t>
+            </a:r>
+            <a:r>
+              <a:rPr>
+                <a:solidFill>
+                  <a:srgbClr val="003B4F"/>
+                </a:solidFill>
+                <a:latin typeface="Courier"/>
+              </a:rPr>
+              <a:t> side, </a:t>
+            </a:r>
+            <a:r>
+              <a:rPr>
+                <a:solidFill>
+                  <a:srgbClr val="657422"/>
+                </a:solidFill>
+                <a:latin typeface="Courier"/>
+              </a:rPr>
+              <a:t>y =</a:t>
+            </a:r>
+            <a:r>
+              <a:rPr>
+                <a:solidFill>
+                  <a:srgbClr val="003B4F"/>
+                </a:solidFill>
+                <a:latin typeface="Courier"/>
+              </a:rPr>
+              <a:t> weight_g)) </a:t>
+            </a:r>
+            <a:r>
+              <a:rPr>
+                <a:solidFill>
+                  <a:srgbClr val="5E5E5E"/>
+                </a:solidFill>
+                <a:latin typeface="Courier"/>
+              </a:rPr>
+              <a:t>+</a:t>
+            </a:r>
+            <a:br/>
+            <a:r>
+              <a:rPr>
+                <a:solidFill>
+                  <a:srgbClr val="003B4F"/>
+                </a:solidFill>
+                <a:latin typeface="Courier"/>
+              </a:rPr>
+              <a:t>  </a:t>
+            </a:r>
+            <a:r>
+              <a:rPr>
+                <a:solidFill>
+                  <a:srgbClr val="4758AB"/>
+                </a:solidFill>
+                <a:latin typeface="Courier"/>
+              </a:rPr>
+              <a:t>geom_boxplot</a:t>
+            </a:r>
+            <a:r>
+              <a:rPr>
+                <a:solidFill>
+                  <a:srgbClr val="003B4F"/>
+                </a:solidFill>
+                <a:latin typeface="Courier"/>
+              </a:rPr>
+              <a:t>()</a:t>
+            </a:r>
+            <a:br/>
+            <a:br/>
+            <a:r>
+              <a:rPr>
+                <a:solidFill>
+                  <a:srgbClr val="4758AB"/>
+                </a:solidFill>
+                <a:latin typeface="Courier"/>
+              </a:rPr>
+              <a:t>ggsave</a:t>
+            </a:r>
+            <a:r>
+              <a:rPr>
+                <a:solidFill>
+                  <a:srgbClr val="003B4F"/>
+                </a:solidFill>
+                <a:latin typeface="Courier"/>
+              </a:rPr>
+              <a:t>(</a:t>
+            </a:r>
+            <a:r>
+              <a:rPr>
+                <a:solidFill>
+                  <a:srgbClr val="20794D"/>
+                </a:solidFill>
+                <a:latin typeface="Courier"/>
+              </a:rPr>
+              <a:t>"figures/leaf_weight.pdf"</a:t>
+            </a:r>
+            <a:r>
+              <a:rPr>
+                <a:solidFill>
+                  <a:srgbClr val="003B4F"/>
+                </a:solidFill>
+                <a:latin typeface="Courier"/>
+              </a:rPr>
+              <a:t>, </a:t>
+            </a:r>
+            <a:r>
+              <a:rPr>
+                <a:solidFill>
+                  <a:srgbClr val="657422"/>
+                </a:solidFill>
+                <a:latin typeface="Courier"/>
+              </a:rPr>
+              <a:t>plot =</a:t>
+            </a:r>
+            <a:r>
+              <a:rPr>
+                <a:solidFill>
+                  <a:srgbClr val="003B4F"/>
+                </a:solidFill>
+                <a:latin typeface="Courier"/>
+              </a:rPr>
+              <a:t> my_plot,</a:t>
+            </a:r>
+            <a:br/>
+            <a:r>
+              <a:rPr>
+                <a:solidFill>
+                  <a:srgbClr val="003B4F"/>
+                </a:solidFill>
+                <a:latin typeface="Courier"/>
+              </a:rPr>
+              <a:t>       </a:t>
+            </a:r>
+            <a:r>
+              <a:rPr>
+                <a:solidFill>
+                  <a:srgbClr val="657422"/>
+                </a:solidFill>
+                <a:latin typeface="Courier"/>
+              </a:rPr>
+              <a:t>width =</a:t>
+            </a:r>
+            <a:r>
+              <a:rPr>
+                <a:solidFill>
+                  <a:srgbClr val="003B4F"/>
+                </a:solidFill>
+                <a:latin typeface="Courier"/>
+              </a:rPr>
+              <a:t> </a:t>
+            </a:r>
+            <a:r>
+              <a:rPr>
+                <a:solidFill>
+                  <a:srgbClr val="AD0000"/>
+                </a:solidFill>
+                <a:latin typeface="Courier"/>
+              </a:rPr>
+              <a:t>6</a:t>
+            </a:r>
+            <a:r>
+              <a:rPr>
+                <a:solidFill>
+                  <a:srgbClr val="003B4F"/>
+                </a:solidFill>
+                <a:latin typeface="Courier"/>
+              </a:rPr>
+              <a:t>, </a:t>
+            </a:r>
+            <a:r>
+              <a:rPr>
+                <a:solidFill>
+                  <a:srgbClr val="657422"/>
+                </a:solidFill>
+                <a:latin typeface="Courier"/>
+              </a:rPr>
+              <a:t>height =</a:t>
+            </a:r>
+            <a:r>
+              <a:rPr>
+                <a:solidFill>
+                  <a:srgbClr val="003B4F"/>
+                </a:solidFill>
+                <a:latin typeface="Courier"/>
+              </a:rPr>
+              <a:t> </a:t>
+            </a:r>
+            <a:r>
+              <a:rPr>
+                <a:solidFill>
+                  <a:srgbClr val="AD0000"/>
+                </a:solidFill>
+                <a:latin typeface="Courier"/>
+              </a:rPr>
+              <a:t>6</a:t>
+            </a:r>
+            <a:r>
+              <a:rPr>
+                <a:solidFill>
+                  <a:srgbClr val="003B4F"/>
+                </a:solidFill>
+                <a:latin typeface="Courier"/>
+              </a:rPr>
+              <a:t>, </a:t>
+            </a:r>
+            <a:r>
+              <a:rPr>
+                <a:solidFill>
+                  <a:srgbClr val="657422"/>
+                </a:solidFill>
+                <a:latin typeface="Courier"/>
+              </a:rPr>
+              <a:t>units =</a:t>
+            </a:r>
+            <a:r>
+              <a:rPr>
+                <a:solidFill>
+                  <a:srgbClr val="003B4F"/>
+                </a:solidFill>
+                <a:latin typeface="Courier"/>
+              </a:rPr>
+              <a:t> </a:t>
+            </a:r>
+            <a:r>
+              <a:rPr>
+                <a:solidFill>
+                  <a:srgbClr val="20794D"/>
+                </a:solidFill>
+                <a:latin typeface="Courier"/>
+              </a:rPr>
+              <a:t>"in"</a:t>
+            </a:r>
+            <a:r>
+              <a:rPr>
+                <a:solidFill>
+                  <a:srgbClr val="003B4F"/>
+                </a:solidFill>
+                <a:latin typeface="Courier"/>
+              </a:rPr>
+              <a:t>)</a:t>
+            </a:r>
+          </a:p>
+          <a:p>
+            <a:pPr lvl="0" indent="0" marL="0">
+              <a:buNone/>
+            </a:pPr>
+            <a:r>
+              <a:rPr/>
+              <a:t>Save a tidy data file too:</a:t>
+            </a:r>
+          </a:p>
+          <a:p>
+            <a:pPr lvl="0" indent="0">
+              <a:buNone/>
+            </a:pPr>
+            <a:r>
+              <a:rPr>
+                <a:solidFill>
+                  <a:srgbClr val="4758AB"/>
+                </a:solidFill>
+                <a:latin typeface="Courier"/>
+              </a:rPr>
+              <a:t>write_csv</a:t>
+            </a:r>
+            <a:r>
+              <a:rPr>
+                <a:solidFill>
+                  <a:srgbClr val="003B4F"/>
+                </a:solidFill>
+                <a:latin typeface="Courier"/>
+              </a:rPr>
+              <a:t>(tree_df, </a:t>
+            </a:r>
+            <a:r>
+              <a:rPr>
+                <a:solidFill>
+                  <a:srgbClr val="20794D"/>
+                </a:solidFill>
+                <a:latin typeface="Courier"/>
+              </a:rPr>
+              <a:t>"data_clean/tree_clean.csv"</a:t>
+            </a:r>
+            <a:r>
+              <a:rPr>
+                <a:solidFill>
+                  <a:srgbClr val="003B4F"/>
+                </a:solidFill>
+                <a:latin typeface="Courier"/>
+              </a:rPr>
+              <a:t>)</a:t>
+            </a:r>
+          </a:p>
+          <a:p>
+            <a:pPr lvl="0" indent="0" marL="0">
+              <a:buNone/>
+            </a:pPr>
+            <a:r>
+              <a:rPr/>
+              <a:t>Or use the </a:t>
+            </a:r>
+            <a:r>
+              <a:rPr b="1"/>
+              <a:t>disk icon</a:t>
+            </a:r>
+            <a:r>
+              <a:rPr/>
+              <a:t> above the Plots pane → the Save dialog.</a:t>
+            </a:r>
+          </a:p>
+          <a:p>
+            <a:pPr lvl="0" indent="0" marL="0">
+              <a:buNone/>
+            </a:pPr>
+            <a:r>
+              <a:rPr b="1"/>
+              <a:t>⚠️ Watch out!</a:t>
+            </a:r>
+          </a:p>
+          <a:p>
+            <a:pPr lvl="0" indent="0" marL="0">
+              <a:buNone/>
+            </a:pPr>
+            <a:r>
+              <a:rPr>
+                <a:latin typeface="Courier"/>
+              </a:rPr>
+              <a:t>ggsave()</a:t>
+            </a:r>
+            <a:r>
+              <a:rPr/>
+              <a:t> wants the </a:t>
+            </a:r>
+            <a:r>
+              <a:rPr b="1"/>
+              <a:t>filename first</a:t>
+            </a:r>
+            <a:r>
+              <a:rPr/>
+              <a:t>, then </a:t>
+            </a:r>
+            <a:r>
+              <a:rPr>
+                <a:latin typeface="Courier"/>
+              </a:rPr>
+              <a:t>plot =</a:t>
+            </a:r>
+            <a:r>
+              <a:rPr/>
+              <a:t>. Mixing that order is the classic first save error.</a:t>
+            </a:r>
+          </a:p>
+        </p:txBody>
+      </p:sp>
+      <p:pic>
+        <p:nvPicPr>
+          <p:cNvPr descr="images/paste-3.png" id="0" name="Picture 1"/>
+          <p:cNvPicPr>
+            <a:picLocks noGrp="1" noChangeAspect="1"/>
+          </p:cNvPicPr>
+          <p:nvPr/>
+        </p:nvPicPr>
+        <p:blipFill>
+          <a:blip r:embed="rId2"/>
+          <a:stretch>
+            <a:fillRect/>
+          </a:stretch>
+        </p:blipFill>
+        <p:spPr bwMode="auto">
+          <a:xfrm>
+            <a:off x="6121400" y="1828800"/>
+            <a:ext cx="2781300" cy="2133600"/>
+          </a:xfrm>
+          <a:prstGeom prst="rect">
+            <a:avLst/>
+          </a:prstGeom>
+          <a:noFill/>
+          <a:ln w="9525">
+            <a:noFill/>
+            <a:headEnd/>
+            <a:tailEnd/>
+          </a:ln>
+        </p:spPr>
+      </p:pic>
+    </p:spTree>
+  </p:cSld>
+</p:sld>
+</file>
+
+<file path=ppt/slides/slide28.xml><?xml version="1.0" encoding="utf-8"?>
+<p:sld xmlns:a="http://schemas.openxmlformats.org/drawingml/2006/main" xmlns:r="http://schemas.openxmlformats.org/officeDocument/2006/relationships" xmlns:p="http://schemas.openxmlformats.org/presentationml/2006/main">
+  <p:cSld>
+    <p:spTree>
+      <p:nvGrpSpPr>
+        <p:cNvPr id="1" name=""/>
+        <p:cNvGrpSpPr/>
+        <p:nvPr/>
+      </p:nvGrpSpPr>
+      <p:grpSpPr>
+        <a:xfrm>
+          <a:off x="0" y="0"/>
+          <a:ext cx="0" cy="0"/>
+          <a:chOff x="0" y="0"/>
+          <a:chExt cx="0" cy="0"/>
+        </a:xfrm>
+      </p:grpSpPr>
+      <p:sp>
+        <p:nvSpPr>
+          <p:cNvPr id="2" name="Title 1"/>
+          <p:cNvSpPr>
+            <a:spLocks noGrp="1"/>
+          </p:cNvSpPr>
+          <p:nvPr>
+            <p:ph type="title"/>
+          </p:nvPr>
+        </p:nvSpPr>
+        <p:spPr>
+          <a:xfrm>
+            <a:off x="0" y="0"/>
+            <a:ext cx="9144000" cy="582780"/>
+          </a:xfrm>
+        </p:spPr>
+        <p:txBody>
+          <a:bodyPr/>
+          <a:lstStyle/>
+          <a:p>
+            <a:pPr lvl="0" indent="0" marL="0">
+              <a:buNone/>
+            </a:pPr>
+            <a:r>
+              <a:rPr/>
+              <a:t>Wrap-up</a:t>
+            </a:r>
+          </a:p>
+        </p:txBody>
+      </p:sp>
+      <p:sp>
+        <p:nvSpPr>
+          <p:cNvPr id="3" name="Content Placeholder 2"/>
+          <p:cNvSpPr>
+            <a:spLocks noGrp="1"/>
+          </p:cNvSpPr>
+          <p:nvPr>
+            <p:ph idx="1"/>
+          </p:nvPr>
+        </p:nvSpPr>
+        <p:spPr/>
+        <p:txBody>
+          <a:bodyPr/>
+          <a:lstStyle/>
+          <a:p>
+            <a:pPr lvl="0" indent="0" marL="0">
+              <a:spcBef>
+                <a:spcPts val="3000"/>
+              </a:spcBef>
+              <a:buNone/>
+            </a:pPr>
+            <a:r>
+              <a:rPr b="1"/>
+              <a:t>What you can now do</a:t>
+            </a:r>
+          </a:p>
+        </p:txBody>
+      </p:sp>
+    </p:spTree>
+  </p:cSld>
+</p:sld>
+</file>
+
+<file path=ppt/slides/slide29.xml><?xml version="1.0" encoding="utf-8"?>
+<p:sld xmlns:a="http://schemas.openxmlformats.org/drawingml/2006/main" xmlns:r="http://schemas.openxmlformats.org/officeDocument/2006/relationships" xmlns:p="http://schemas.openxmlformats.org/presentationml/2006/main">
+  <p:cSld>
+    <p:spTree>
+      <p:nvGrpSpPr>
+        <p:cNvPr id="1" name=""/>
+        <p:cNvGrpSpPr/>
+        <p:nvPr/>
+      </p:nvGrpSpPr>
+      <p:grpSpPr>
+        <a:xfrm>
+          <a:off x="0" y="0"/>
+          <a:ext cx="0" cy="0"/>
+          <a:chOff x="0" y="0"/>
+          <a:chExt cx="0" cy="0"/>
+        </a:xfrm>
+      </p:grpSpPr>
+      <p:sp>
+        <p:nvSpPr>
+          <p:cNvPr id="3" name="Content Placeholder 2"/>
+          <p:cNvSpPr>
+            <a:spLocks noGrp="1"/>
+          </p:cNvSpPr>
+          <p:nvPr>
+            <p:ph idx="1" sz="half"/>
+          </p:nvPr>
+        </p:nvSpPr>
+        <p:spPr/>
+        <p:txBody>
+          <a:bodyPr/>
+          <a:lstStyle/>
+          <a:p>
+            <a:pPr lvl="0"/>
+            <a:r>
+              <a:rPr/>
+              <a:t>Set up R + Positron and organize a project</a:t>
+            </a:r>
+          </a:p>
+          <a:p>
+            <a:pPr lvl="0"/>
+            <a:r>
+              <a:rPr/>
+              <a:t>Use R as a calculator and </a:t>
+            </a:r>
+            <a:r>
+              <a:rPr b="1"/>
+              <a:t>store values</a:t>
+            </a:r>
+            <a:r>
+              <a:rPr/>
+              <a:t> with </a:t>
+            </a:r>
+            <a:r>
+              <a:rPr>
+                <a:latin typeface="Courier"/>
+              </a:rPr>
+              <a:t>&lt;-</a:t>
+            </a:r>
+          </a:p>
+          <a:p>
+            <a:pPr lvl="0"/>
+            <a:r>
+              <a:rPr/>
+              <a:t>Write and run a </a:t>
+            </a:r>
+            <a:r>
+              <a:rPr b="1"/>
+              <a:t>script</a:t>
+            </a:r>
+            <a:r>
+              <a:rPr/>
+              <a:t>, with comments</a:t>
+            </a:r>
+          </a:p>
+          <a:p>
+            <a:pPr lvl="0"/>
+            <a:r>
+              <a:rPr/>
+              <a:t>Call </a:t>
+            </a:r>
+            <a:r>
+              <a:rPr b="1"/>
+              <a:t>functions</a:t>
+            </a:r>
+            <a:r>
+              <a:rPr/>
+              <a:t> and read their help</a:t>
+            </a:r>
+          </a:p>
+          <a:p>
+            <a:pPr lvl="0"/>
+            <a:r>
+              <a:rPr/>
+              <a:t>Build </a:t>
+            </a:r>
+            <a:r>
+              <a:rPr b="1"/>
+              <a:t>vectors</a:t>
+            </a:r>
+            <a:r>
+              <a:rPr/>
+              <a:t>, know their </a:t>
+            </a:r>
+            <a:r>
+              <a:rPr b="1"/>
+              <a:t>types</a:t>
+            </a:r>
+          </a:p>
+          <a:p>
+            <a:pPr lvl="0"/>
+            <a:r>
+              <a:rPr/>
+              <a:t>Load Excel data into a </a:t>
+            </a:r>
+            <a:r>
+              <a:rPr b="1"/>
+              <a:t>data frame</a:t>
+            </a:r>
+            <a:r>
+              <a:rPr/>
+              <a:t> and inspect it</a:t>
+            </a:r>
+          </a:p>
+          <a:p>
+            <a:pPr lvl="0"/>
+            <a:r>
+              <a:rPr/>
+              <a:t>Use the </a:t>
+            </a:r>
+            <a:r>
+              <a:rPr b="1"/>
+              <a:t>pipe</a:t>
+            </a:r>
+            <a:r>
+              <a:rPr/>
+              <a:t> </a:t>
+            </a:r>
+            <a:r>
+              <a:rPr>
+                <a:latin typeface="Courier"/>
+              </a:rPr>
+              <a:t>|&gt;</a:t>
+            </a:r>
+            <a:r>
+              <a:rPr/>
+              <a:t> to summarise</a:t>
+            </a:r>
+          </a:p>
+          <a:p>
+            <a:pPr lvl="0"/>
+            <a:r>
+              <a:rPr/>
+              <a:t>Make and </a:t>
+            </a:r>
+            <a:r>
+              <a:rPr b="1"/>
+              <a:t>save</a:t>
+            </a:r>
+            <a:r>
+              <a:rPr/>
+              <a:t> a first </a:t>
+            </a:r>
+            <a:r>
+              <a:rPr>
+                <a:latin typeface="Courier"/>
+              </a:rPr>
+              <a:t>ggplot</a:t>
+            </a:r>
+          </a:p>
+        </p:txBody>
+      </p:sp>
+      <p:sp>
+        <p:nvSpPr>
+          <p:cNvPr id="4" name="Content Placeholder 3"/>
+          <p:cNvSpPr>
+            <a:spLocks noGrp="1"/>
+          </p:cNvSpPr>
+          <p:nvPr>
+            <p:ph idx="2" sz="half"/>
+          </p:nvPr>
+        </p:nvSpPr>
+        <p:spPr/>
+        <p:txBody>
+          <a:bodyPr/>
+          <a:lstStyle/>
+          <a:p>
+            <a:pPr lvl="0" indent="0" marL="0">
+              <a:buNone/>
+            </a:pPr>
+            <a:r>
+              <a:rPr b="1"/>
+              <a:t>✅ Key idea</a:t>
+            </a:r>
+          </a:p>
+          <a:p>
+            <a:pPr lvl="0" indent="0" marL="0">
+              <a:buNone/>
+            </a:pPr>
+            <a:r>
+              <a:rPr/>
+              <a:t>You went from a blank console to a saved figure of </a:t>
+            </a:r>
+            <a:r>
+              <a:rPr b="1"/>
+              <a:t>our</a:t>
+            </a:r>
+            <a:r>
+              <a:rPr/>
+              <a:t> data. That’s the whole workflow in miniature.</a:t>
+            </a:r>
+          </a:p>
+          <a:p>
+            <a:pPr lvl="0" indent="0" marL="0">
+              <a:buNone/>
+            </a:pPr>
+            <a:r>
+              <a:rPr b="1"/>
+              <a:t>🖐 Try it yourself</a:t>
+            </a:r>
+          </a:p>
+          <a:p>
+            <a:pPr lvl="0" indent="0" marL="0">
+              <a:buNone/>
+            </a:pPr>
+            <a:r>
+              <a:rPr/>
+              <a:t>Before next class: load </a:t>
+            </a:r>
+            <a:r>
+              <a:rPr>
+                <a:latin typeface="Courier"/>
+              </a:rPr>
+              <a:t>tree_df</a:t>
+            </a:r>
+            <a:r>
+              <a:rPr/>
+              <a:t>, run </a:t>
+            </a:r>
+            <a:r>
+              <a:rPr>
+                <a:latin typeface="Courier"/>
+              </a:rPr>
+              <a:t>summary()</a:t>
+            </a:r>
+            <a:r>
+              <a:rPr/>
+              <a:t>, and make one plot of </a:t>
+            </a:r>
+            <a:r>
+              <a:rPr>
+                <a:latin typeface="Courier"/>
+              </a:rPr>
+              <a:t>width_cm</a:t>
+            </a:r>
+            <a:r>
+              <a:rPr/>
+              <a:t> by </a:t>
+            </a:r>
+            <a:r>
+              <a:rPr>
+                <a:latin typeface="Courier"/>
+              </a:rPr>
+              <a:t>side</a:t>
+            </a:r>
+            <a:r>
+              <a:rPr/>
+              <a:t>.</a:t>
+            </a:r>
+          </a:p>
+        </p:txBody>
+      </p:sp>
+    </p:spTree>
+  </p:cSld>
+</p:sld>
+</file>
+
+<file path=ppt/slides/slide3.xml><?xml version="1.0" encoding="utf-8"?>
+<p:sld xmlns:a="http://schemas.openxmlformats.org/drawingml/2006/main" xmlns:r="http://schemas.openxmlformats.org/officeDocument/2006/relationships" xmlns:p="http://schemas.openxmlformats.org/presentationml/2006/main">
+  <p:cSld>
+    <p:spTree>
+      <p:nvGrpSpPr>
+        <p:cNvPr id="1" name=""/>
+        <p:cNvGrpSpPr/>
+        <p:nvPr/>
+      </p:nvGrpSpPr>
+      <p:grpSpPr>
+        <a:xfrm>
+          <a:off x="0" y="0"/>
+          <a:ext cx="0" cy="0"/>
+          <a:chOff x="0" y="0"/>
+          <a:chExt cx="0" cy="0"/>
+        </a:xfrm>
+      </p:grpSpPr>
+      <p:sp>
+        <p:nvSpPr>
+          <p:cNvPr id="2" name="Title 1"/>
+          <p:cNvSpPr>
+            <a:spLocks noGrp="1"/>
+          </p:cNvSpPr>
+          <p:nvPr>
+            <p:ph type="title"/>
+          </p:nvPr>
+        </p:nvSpPr>
+        <p:spPr>
+          <a:xfrm>
+            <a:off x="0" y="0"/>
+            <a:ext cx="9144000" cy="602780"/>
+          </a:xfrm>
+          <a:solidFill>
+            <a:srgbClr val="70121D"/>
+          </a:solidFill>
+        </p:spPr>
+        <p:txBody>
+          <a:bodyPr/>
+          <a:lstStyle/>
+          <a:p>
+            <a:pPr lvl="0" indent="0" marL="0">
+              <a:buNone/>
+            </a:pPr>
+            <a:r>
+              <a:rPr/>
+              <a:t>Goals for today</a:t>
+            </a:r>
+          </a:p>
+        </p:txBody>
+      </p:sp>
+      <p:sp>
+        <p:nvSpPr>
+          <p:cNvPr id="3" name="Content Placeholder 2"/>
+          <p:cNvSpPr>
+            <a:spLocks noGrp="1"/>
+          </p:cNvSpPr>
+          <p:nvPr>
+            <p:ph idx="1" sz="half"/>
+          </p:nvPr>
+        </p:nvSpPr>
+        <p:spPr/>
+        <p:txBody>
+          <a:bodyPr/>
+          <a:lstStyle/>
+          <a:p>
+            <a:pPr lvl="0"/>
+            <a:r>
+              <a:rPr/>
+              <a:t>Get </a:t>
+            </a:r>
+            <a:r>
+              <a:rPr b="1"/>
+              <a:t>R</a:t>
+            </a:r>
+            <a:r>
+              <a:rPr/>
+              <a:t> and </a:t>
+            </a:r>
+            <a:r>
+              <a:rPr b="1"/>
+              <a:t>Positron</a:t>
+            </a:r>
+            <a:r>
+              <a:rPr/>
+              <a:t> set up and oriented</a:t>
+            </a:r>
+          </a:p>
+          <a:p>
+            <a:pPr lvl="0"/>
+            <a:r>
+              <a:rPr/>
+              <a:t>Organize a project so future-you can find things</a:t>
+            </a:r>
+          </a:p>
+          <a:p>
+            <a:pPr lvl="0"/>
+            <a:r>
+              <a:rPr/>
+              <a:t>Learn how R actually works:</a:t>
+            </a:r>
+          </a:p>
+          <a:p>
+            <a:pPr lvl="1"/>
+            <a:r>
+              <a:rPr/>
+              <a:t>using it as a </a:t>
+            </a:r>
+            <a:r>
+              <a:rPr b="1"/>
+              <a:t>calculator</a:t>
+            </a:r>
+          </a:p>
+          <a:p>
+            <a:pPr lvl="1"/>
+            <a:r>
+              <a:rPr/>
+              <a:t>storing things with the </a:t>
+            </a:r>
+            <a:r>
+              <a:rPr b="1"/>
+              <a:t>assignment operator</a:t>
+            </a:r>
+            <a:r>
+              <a:rPr/>
+              <a:t> </a:t>
+            </a:r>
+            <a:r>
+              <a:rPr>
+                <a:latin typeface="Courier"/>
+              </a:rPr>
+              <a:t>&lt;-</a:t>
+            </a:r>
+          </a:p>
+          <a:p>
+            <a:pPr lvl="1"/>
+            <a:r>
+              <a:rPr b="1"/>
+              <a:t>functions</a:t>
+            </a:r>
+            <a:r>
+              <a:rPr/>
+              <a:t>, </a:t>
+            </a:r>
+            <a:r>
+              <a:rPr b="1"/>
+              <a:t>vectors</a:t>
+            </a:r>
+            <a:r>
+              <a:rPr/>
+              <a:t>, and </a:t>
+            </a:r>
+            <a:r>
+              <a:rPr b="1"/>
+              <a:t>data types</a:t>
+            </a:r>
+          </a:p>
+          <a:p>
+            <a:pPr lvl="0"/>
+            <a:r>
+              <a:rPr/>
+              <a:t>Load our tree data and make a </a:t>
+            </a:r>
+            <a:r>
+              <a:rPr b="1"/>
+              <a:t>first plot</a:t>
+            </a:r>
+          </a:p>
+          <a:p>
+            <a:pPr lvl="0" indent="0" marL="0">
+              <a:buNone/>
+            </a:pPr>
+            <a:r>
+              <a:rPr b="1"/>
+              <a:t>🖐 Try it yourself</a:t>
+            </a:r>
+          </a:p>
+          <a:p>
+            <a:pPr lvl="0" indent="0" marL="0">
+              <a:buNone/>
+            </a:pPr>
+            <a:r>
+              <a:rPr/>
+              <a:t>By the end you’ll run real code on </a:t>
+            </a:r>
+            <a:r>
+              <a:rPr b="1"/>
+              <a:t>our</a:t>
+            </a:r>
+            <a:r>
+              <a:rPr/>
+              <a:t> leaf data — not a toy dataset.</a:t>
+            </a:r>
+          </a:p>
+        </p:txBody>
+      </p:sp>
+      <p:pic>
+        <p:nvPicPr>
+          <p:cNvPr descr="images/diagram_ggplot_layers.png" id="0" name="Picture 1"/>
+          <p:cNvPicPr>
+            <a:picLocks noGrp="1" noChangeAspect="1"/>
+          </p:cNvPicPr>
+          <p:nvPr/>
+        </p:nvPicPr>
+        <p:blipFill>
+          <a:blip r:embed="rId2"/>
+          <a:stretch>
+            <a:fillRect/>
+          </a:stretch>
+        </p:blipFill>
+        <p:spPr bwMode="auto">
+          <a:xfrm>
+            <a:off x="6121400" y="1714500"/>
+            <a:ext cx="2781300" cy="2349500"/>
+          </a:xfrm>
+          <a:prstGeom prst="rect">
+            <a:avLst/>
+          </a:prstGeom>
+          <a:noFill/>
+          <a:ln w="9525">
+            <a:noFill/>
+            <a:headEnd/>
+            <a:tailEnd/>
+          </a:ln>
+        </p:spPr>
+      </p:pic>
+    </p:spTree>
+  </p:cSld>
+</p:sld>
+</file>
+
+<file path=ppt/slides/slide30.xml><?xml version="1.0" encoding="utf-8"?>
+<p:sld xmlns:a="http://schemas.openxmlformats.org/drawingml/2006/main" xmlns:r="http://schemas.openxmlformats.org/officeDocument/2006/relationships" xmlns:p="http://schemas.openxmlformats.org/presentationml/2006/main">
+  <p:cSld>
+    <p:spTree>
+      <p:nvGrpSpPr>
+        <p:cNvPr id="1" name=""/>
+        <p:cNvGrpSpPr/>
+        <p:nvPr/>
+      </p:nvGrpSpPr>
+      <p:grpSpPr>
+        <a:xfrm>
+          <a:off x="0" y="0"/>
+          <a:ext cx="0" cy="0"/>
+          <a:chOff x="0" y="0"/>
+          <a:chExt cx="0" cy="0"/>
+        </a:xfrm>
+      </p:grpSpPr>
+      <p:sp>
+        <p:nvSpPr>
+          <p:cNvPr id="2" name="Title 1"/>
+          <p:cNvSpPr>
+            <a:spLocks noGrp="1"/>
+          </p:cNvSpPr>
+          <p:nvPr>
+            <p:ph type="title"/>
+          </p:nvPr>
+        </p:nvSpPr>
+        <p:spPr>
+          <a:xfrm>
+            <a:off x="0" y="0"/>
+            <a:ext cx="9144000" cy="602780"/>
+          </a:xfrm>
+          <a:solidFill>
+            <a:srgbClr val="70121D"/>
+          </a:solidFill>
+        </p:spPr>
+        <p:txBody>
+          <a:bodyPr/>
+          <a:lstStyle/>
+          <a:p>
+            <a:pPr lvl="0" indent="0" marL="0">
+              <a:buNone/>
+            </a:pPr>
+            <a:r>
+              <a:rPr/>
+              <a:t>Getting unstuck</a:t>
+            </a:r>
+          </a:p>
+        </p:txBody>
+      </p:sp>
+      <p:sp>
+        <p:nvSpPr>
+          <p:cNvPr id="3" name="Content Placeholder 2"/>
+          <p:cNvSpPr>
+            <a:spLocks noGrp="1"/>
+          </p:cNvSpPr>
+          <p:nvPr>
+            <p:ph idx="1" sz="half"/>
+          </p:nvPr>
+        </p:nvSpPr>
+        <p:spPr/>
+        <p:txBody>
+          <a:bodyPr/>
+          <a:lstStyle/>
+          <a:p>
+            <a:pPr lvl="0" indent="0" marL="0">
+              <a:buNone/>
+            </a:pPr>
+            <a:r>
+              <a:rPr/>
+              <a:t>When code breaks (it will — that’s normal):</a:t>
+            </a:r>
+          </a:p>
+          <a:p>
+            <a:pPr lvl="0"/>
+            <a:r>
+              <a:rPr>
+                <a:latin typeface="Courier"/>
+              </a:rPr>
+              <a:t>?function_name</a:t>
+            </a:r>
+            <a:r>
+              <a:rPr/>
+              <a:t> — the built-in help page</a:t>
+            </a:r>
+          </a:p>
+          <a:p>
+            <a:pPr lvl="0"/>
+            <a:r>
+              <a:rPr/>
+              <a:t>Read the </a:t>
+            </a:r>
+            <a:r>
+              <a:rPr b="1"/>
+              <a:t>error message</a:t>
+            </a:r>
+            <a:r>
+              <a:rPr/>
+              <a:t> out loud; it usually names the line</a:t>
+            </a:r>
+          </a:p>
+          <a:p>
+            <a:pPr lvl="0"/>
+            <a:r>
+              <a:rPr/>
+              <a:t>Check: did you load </a:t>
+            </a:r>
+            <a:r>
+              <a:rPr>
+                <a:latin typeface="Courier"/>
+              </a:rPr>
+              <a:t>library(tidyverse)</a:t>
+            </a:r>
+            <a:r>
+              <a:rPr/>
+              <a:t>? spelling? a missing </a:t>
+            </a:r>
+            <a:r>
+              <a:rPr>
+                <a:latin typeface="Courier"/>
+              </a:rPr>
+              <a:t>)</a:t>
+            </a:r>
+            <a:r>
+              <a:rPr/>
+              <a:t> or </a:t>
+            </a:r>
+            <a:r>
+              <a:rPr>
+                <a:latin typeface="Courier"/>
+              </a:rPr>
+              <a:t>+</a:t>
+            </a:r>
+            <a:r>
+              <a:rPr/>
+              <a:t>?</a:t>
+            </a:r>
+          </a:p>
+          <a:p>
+            <a:pPr lvl="0"/>
+            <a:r>
+              <a:rPr/>
+              <a:t>The </a:t>
+            </a:r>
+            <a:r>
+              <a:rPr b="1"/>
+              <a:t>posit/tidyverse cheatsheets</a:t>
+            </a:r>
+            <a:r>
+              <a:rPr/>
+              <a:t> are gold</a:t>
+            </a:r>
+          </a:p>
+          <a:p>
+            <a:pPr lvl="0"/>
+            <a:r>
+              <a:rPr/>
+              <a:t>Bring the exact error to class or office hours</a:t>
+            </a:r>
+          </a:p>
+          <a:p>
+            <a:pPr lvl="0" indent="0" marL="0">
+              <a:buNone/>
+            </a:pPr>
+            <a:r>
+              <a:rPr b="1"/>
+              <a:t>✅ Key idea</a:t>
+            </a:r>
+          </a:p>
+          <a:p>
+            <a:pPr lvl="0" indent="0" marL="0">
+              <a:buNone/>
+            </a:pPr>
+            <a:r>
+              <a:rPr/>
+              <a:t>Every coder googles error messages daily. Getting stuck isn’t failing — it’s the job.</a:t>
+            </a:r>
+          </a:p>
+        </p:txBody>
+      </p:sp>
+      <p:sp>
+        <p:nvSpPr>
+          <p:cNvPr id="4" name="Content Placeholder 3"/>
+          <p:cNvSpPr>
+            <a:spLocks noGrp="1"/>
+          </p:cNvSpPr>
+          <p:nvPr>
+            <p:ph idx="2" sz="half"/>
+          </p:nvPr>
+        </p:nvSpPr>
+        <p:spPr/>
+        <p:txBody>
+          <a:bodyPr/>
+          <a:lstStyle/>
+          <a:p>
+            <a:pPr lvl="0" indent="0" marL="0">
+              <a:buNone/>
+            </a:pPr>
+            <a:r>
+              <a:rPr b="1"/>
+              <a:t>📊 Coming from Excel?</a:t>
+            </a:r>
+          </a:p>
+          <a:p>
+            <a:pPr lvl="0" indent="0" marL="0">
+              <a:buNone/>
+            </a:pPr>
+            <a:r>
+              <a:rPr/>
+              <a:t>In Excel you fix errors by clicking around. In R you fix them by </a:t>
+            </a:r>
+            <a:r>
+              <a:rPr b="1"/>
+              <a:t>reading the message</a:t>
+            </a:r>
+            <a:r>
+              <a:rPr/>
+              <a:t> and editing one line. Slower at first, far more powerful soon.</a:t>
+            </a:r>
+          </a:p>
+        </p:txBody>
+      </p:sp>
+    </p:spTree>
+  </p:cSld>
+</p:sld>
+</file>
+
+<file path=ppt/slides/slide4.xml><?xml version="1.0" encoding="utf-8"?>
+<p:sld xmlns:a="http://schemas.openxmlformats.org/drawingml/2006/main" xmlns:r="http://schemas.openxmlformats.org/officeDocument/2006/relationships" xmlns:p="http://schemas.openxmlformats.org/presentationml/2006/main">
+  <p:cSld>
+    <p:spTree>
+      <p:nvGrpSpPr>
+        <p:cNvPr id="1" name=""/>
+        <p:cNvGrpSpPr/>
+        <p:nvPr/>
+      </p:nvGrpSpPr>
+      <p:grpSpPr>
+        <a:xfrm>
+          <a:off x="0" y="0"/>
+          <a:ext cx="0" cy="0"/>
+          <a:chOff x="0" y="0"/>
+          <a:chExt cx="0" cy="0"/>
+        </a:xfrm>
+      </p:grpSpPr>
+      <p:sp>
+        <p:nvSpPr>
+          <p:cNvPr id="2" name="Title 1"/>
+          <p:cNvSpPr>
+            <a:spLocks noGrp="1"/>
+          </p:cNvSpPr>
+          <p:nvPr>
+            <p:ph type="title"/>
+          </p:nvPr>
+        </p:nvSpPr>
+        <p:spPr>
+          <a:xfrm>
+            <a:off x="0" y="0"/>
+            <a:ext cx="9144000" cy="582780"/>
+          </a:xfrm>
+        </p:spPr>
+        <p:txBody>
+          <a:bodyPr/>
+          <a:lstStyle/>
+          <a:p>
+            <a:pPr lvl="0" indent="0" marL="0">
+              <a:buNone/>
+            </a:pPr>
+            <a:r>
+              <a:rPr/>
+              <a:t>Part 1 · Setting up</a:t>
+            </a:r>
+          </a:p>
+        </p:txBody>
+      </p:sp>
+      <p:sp>
+        <p:nvSpPr>
+          <p:cNvPr id="3" name="Content Placeholder 2"/>
+          <p:cNvSpPr>
+            <a:spLocks noGrp="1"/>
+          </p:cNvSpPr>
+          <p:nvPr>
+            <p:ph idx="1"/>
+          </p:nvPr>
+        </p:nvSpPr>
+        <p:spPr/>
+        <p:txBody>
+          <a:bodyPr/>
+          <a:lstStyle/>
+          <a:p>
+            <a:pPr lvl="0" indent="0" marL="0">
+              <a:spcBef>
+                <a:spcPts val="3000"/>
+              </a:spcBef>
+              <a:buNone/>
+            </a:pPr>
+            <a:r>
+              <a:rPr b="1"/>
+              <a:t>What is R, really?</a:t>
+            </a:r>
+          </a:p>
+        </p:txBody>
+      </p:sp>
+    </p:spTree>
+  </p:cSld>
+</p:sld>
+</file>
+
+<file path=ppt/slides/slide5.xml><?xml version="1.0" encoding="utf-8"?>
+<p:sld xmlns:a="http://schemas.openxmlformats.org/drawingml/2006/main" xmlns:r="http://schemas.openxmlformats.org/officeDocument/2006/relationships" xmlns:p="http://schemas.openxmlformats.org/presentationml/2006/main">
+  <p:cSld>
+    <p:spTree>
+      <p:nvGrpSpPr>
+        <p:cNvPr id="1" name=""/>
+        <p:cNvGrpSpPr/>
+        <p:nvPr/>
+      </p:nvGrpSpPr>
+      <p:grpSpPr>
+        <a:xfrm>
+          <a:off x="0" y="0"/>
+          <a:ext cx="0" cy="0"/>
+          <a:chOff x="0" y="0"/>
+          <a:chExt cx="0" cy="0"/>
+        </a:xfrm>
+      </p:grpSpPr>
+      <p:sp>
+        <p:nvSpPr>
+          <p:cNvPr id="3" name="Content Placeholder 2"/>
+          <p:cNvSpPr>
+            <a:spLocks noGrp="1"/>
+          </p:cNvSpPr>
+          <p:nvPr>
+            <p:ph idx="1" sz="half"/>
+          </p:nvPr>
+        </p:nvSpPr>
+        <p:spPr/>
+        <p:txBody>
+          <a:bodyPr/>
+          <a:lstStyle/>
+          <a:p>
+            <a:pPr lvl="0"/>
+            <a:r>
+              <a:rPr b="1"/>
+              <a:t>R</a:t>
+            </a:r>
+            <a:r>
+              <a:rPr/>
+              <a:t> is the engine — a free language for data and statistics. On its own it is plain; this plain version is called </a:t>
+            </a:r>
+            <a:r>
+              <a:rPr b="1"/>
+              <a:t>base R</a:t>
+            </a:r>
+            <a:r>
+              <a:rPr/>
+              <a:t>.</a:t>
+            </a:r>
+          </a:p>
+          <a:p>
+            <a:pPr lvl="0"/>
+            <a:r>
+              <a:rPr/>
+              <a:t>We drive that engine through a friendlier dashboard called an </a:t>
+            </a:r>
+            <a:r>
+              <a:rPr b="1"/>
+              <a:t>IDE</a:t>
+            </a:r>
+            <a:r>
+              <a:rPr/>
+              <a:t> (an editor for code).</a:t>
+            </a:r>
+          </a:p>
+          <a:p>
+            <a:pPr lvl="0"/>
+            <a:r>
+              <a:rPr/>
+              <a:t>Two good IDEs — you can try both:</a:t>
+            </a:r>
+          </a:p>
+          <a:p>
+            <a:pPr lvl="1"/>
+            <a:r>
+              <a:rPr b="1"/>
+              <a:t>Positron</a:t>
+            </a:r>
+            <a:r>
+              <a:rPr/>
+              <a:t> — what we’ll use </a:t>
+            </a:r>
+            <a:r>
+              <a:rPr i="1"/>
+              <a:t>(recommended)</a:t>
+            </a:r>
+          </a:p>
+          <a:p>
+            <a:pPr lvl="1"/>
+            <a:r>
+              <a:rPr b="1"/>
+              <a:t>RStudio</a:t>
+            </a:r>
+            <a:r>
+              <a:rPr/>
+              <a:t> — the long-time classic</a:t>
+            </a:r>
+          </a:p>
+          <a:p>
+            <a:pPr lvl="0" indent="0" marL="0">
+              <a:buNone/>
+            </a:pPr>
+            <a:r>
+              <a:rPr b="1"/>
+              <a:t>📖 New word</a:t>
+            </a:r>
+          </a:p>
+          <a:p>
+            <a:pPr lvl="0" indent="0" marL="0">
+              <a:buNone/>
+            </a:pPr>
+            <a:r>
+              <a:rPr b="1"/>
+              <a:t>IDE</a:t>
+            </a:r>
+            <a:r>
+              <a:rPr/>
+              <a:t> = </a:t>
+            </a:r>
+            <a:r>
+              <a:rPr i="1"/>
+              <a:t>Integrated Development Environment</a:t>
+            </a:r>
+            <a:r>
+              <a:rPr/>
+              <a:t>. Think of R as the car’s engine and the IDE as the seat, wheel, and dashboard.</a:t>
+            </a:r>
+          </a:p>
+        </p:txBody>
+      </p:sp>
+      <p:pic>
+        <p:nvPicPr>
+          <p:cNvPr descr="images/paste-1.png" id="0" name="Picture 1"/>
+          <p:cNvPicPr>
+            <a:picLocks noGrp="1" noChangeAspect="1"/>
+          </p:cNvPicPr>
+          <p:nvPr/>
+        </p:nvPicPr>
+        <p:blipFill>
+          <a:blip r:embed="rId2"/>
+          <a:stretch>
+            <a:fillRect/>
+          </a:stretch>
+        </p:blipFill>
+        <p:spPr bwMode="auto">
+          <a:xfrm>
+            <a:off x="6121400" y="1574800"/>
+            <a:ext cx="2781300" cy="2654300"/>
+          </a:xfrm>
+          <a:prstGeom prst="rect">
+            <a:avLst/>
+          </a:prstGeom>
+          <a:noFill/>
+          <a:ln w="9525">
+            <a:noFill/>
+            <a:headEnd/>
+            <a:tailEnd/>
+          </a:ln>
+        </p:spPr>
+      </p:pic>
+    </p:spTree>
+  </p:cSld>
+</p:sld>
+</file>
+
+<file path=ppt/slides/slide6.xml><?xml version="1.0" encoding="utf-8"?>
+<p:sld xmlns:a="http://schemas.openxmlformats.org/drawingml/2006/main" xmlns:r="http://schemas.openxmlformats.org/officeDocument/2006/relationships" xmlns:p="http://schemas.openxmlformats.org/presentationml/2006/main">
+  <p:cSld>
+    <p:spTree>
+      <p:nvGrpSpPr>
+        <p:cNvPr id="1" name=""/>
+        <p:cNvGrpSpPr/>
+        <p:nvPr/>
+      </p:nvGrpSpPr>
+      <p:grpSpPr>
+        <a:xfrm>
+          <a:off x="0" y="0"/>
+          <a:ext cx="0" cy="0"/>
+          <a:chOff x="0" y="0"/>
+          <a:chExt cx="0" cy="0"/>
+        </a:xfrm>
+      </p:grpSpPr>
+      <p:sp>
+        <p:nvSpPr>
+          <p:cNvPr id="2" name="Title 1"/>
+          <p:cNvSpPr>
+            <a:spLocks noGrp="1"/>
+          </p:cNvSpPr>
+          <p:nvPr>
+            <p:ph type="title"/>
+          </p:nvPr>
+        </p:nvSpPr>
+        <p:spPr>
+          <a:xfrm>
+            <a:off x="0" y="0"/>
+            <a:ext cx="9144000" cy="602780"/>
+          </a:xfrm>
+          <a:solidFill>
+            <a:srgbClr val="70121D"/>
+          </a:solidFill>
+        </p:spPr>
+        <p:txBody>
+          <a:bodyPr/>
+          <a:lstStyle/>
+          <a:p>
+            <a:pPr lvl="0" indent="0" marL="0">
+              <a:buNone/>
+            </a:pPr>
+            <a:r>
+              <a:rPr/>
+              <a:t>Download the two pieces</a:t>
+            </a:r>
+          </a:p>
+        </p:txBody>
+      </p:sp>
+      <p:sp>
+        <p:nvSpPr>
+          <p:cNvPr id="3" name="Content Placeholder 2"/>
+          <p:cNvSpPr>
+            <a:spLocks noGrp="1"/>
+          </p:cNvSpPr>
+          <p:nvPr>
+            <p:ph idx="1" sz="half"/>
+          </p:nvPr>
+        </p:nvSpPr>
+        <p:spPr/>
+        <p:txBody>
+          <a:bodyPr/>
+          <a:lstStyle/>
+          <a:p>
+            <a:pPr lvl="0" indent="-342900" marL="342900">
+              <a:buAutoNum type="arabicPeriod"/>
+            </a:pPr>
+            <a:r>
+              <a:rPr b="1"/>
+              <a:t>R</a:t>
+            </a:r>
+            <a:r>
+              <a:rPr/>
+              <a:t> (the engine) — </a:t>
+            </a:r>
+            <a:r>
+              <a:rPr>
+                <a:hlinkClick r:id="rId2"/>
+              </a:rPr>
+              <a:t>cran.r-project.org</a:t>
+            </a:r>
+          </a:p>
+          <a:p>
+            <a:pPr lvl="1"/>
+            <a:r>
+              <a:rPr i="1"/>
+              <a:t>Can you find the file after it downloads?</a:t>
+            </a:r>
+          </a:p>
+          <a:p>
+            <a:pPr lvl="0" indent="-342900" marL="342900">
+              <a:buAutoNum type="arabicPeriod"/>
+            </a:pPr>
+            <a:r>
+              <a:rPr b="1"/>
+              <a:t>Positron</a:t>
+            </a:r>
+            <a:r>
+              <a:rPr/>
+              <a:t> (the dashboard) — </a:t>
+            </a:r>
+            <a:r>
+              <a:rPr>
+                <a:hlinkClick r:id="rId3"/>
+              </a:rPr>
+              <a:t>positron.posit.co</a:t>
+            </a:r>
+          </a:p>
+          <a:p>
+            <a:pPr lvl="1"/>
+            <a:r>
+              <a:rPr i="1"/>
+              <a:t>Where did it land on your computer?</a:t>
+            </a:r>
+          </a:p>
+          <a:p>
+            <a:pPr lvl="0" indent="-342900" marL="342900">
+              <a:buAutoNum type="arabicPeriod"/>
+            </a:pPr>
+            <a:r>
+              <a:rPr i="1"/>
+              <a:t>(Optional)</a:t>
+            </a:r>
+            <a:r>
+              <a:rPr/>
+              <a:t> </a:t>
+            </a:r>
+            <a:r>
+              <a:rPr b="1"/>
+              <a:t>RStudio</a:t>
+            </a:r>
+            <a:r>
+              <a:rPr/>
+              <a:t>, if you want to compare — </a:t>
+            </a:r>
+            <a:r>
+              <a:rPr>
+                <a:hlinkClick r:id="rId4"/>
+              </a:rPr>
+              <a:t>posit.co</a:t>
+            </a:r>
+          </a:p>
+          <a:p>
+            <a:pPr lvl="0" indent="0" marL="0">
+              <a:buNone/>
+            </a:pPr>
+            <a:r>
+              <a:rPr b="1"/>
+              <a:t>⚠️ Watch out!</a:t>
+            </a:r>
+          </a:p>
+          <a:p>
+            <a:pPr lvl="0" indent="0" marL="0">
+              <a:buNone/>
+            </a:pPr>
+            <a:r>
+              <a:rPr/>
+              <a:t>Install </a:t>
+            </a:r>
+            <a:r>
+              <a:rPr b="1"/>
+              <a:t>R first</a:t>
+            </a:r>
+            <a:r>
+              <a:rPr/>
+              <a:t>, then Positron. Positron needs to find R already on your machine.</a:t>
+            </a:r>
+          </a:p>
+        </p:txBody>
+      </p:sp>
+      <p:pic>
+        <p:nvPicPr>
+          <p:cNvPr descr="images/paste-1.png" id="0" name="Picture 1"/>
+          <p:cNvPicPr>
+            <a:picLocks noGrp="1" noChangeAspect="1"/>
+          </p:cNvPicPr>
+          <p:nvPr/>
+        </p:nvPicPr>
+        <p:blipFill>
+          <a:blip r:embed="rId5"/>
+          <a:stretch>
+            <a:fillRect/>
+          </a:stretch>
+        </p:blipFill>
+        <p:spPr bwMode="auto">
+          <a:xfrm>
+            <a:off x="6121400" y="1574800"/>
+            <a:ext cx="2781300" cy="2654300"/>
+          </a:xfrm>
+          <a:prstGeom prst="rect">
+            <a:avLst/>
+          </a:prstGeom>
+          <a:noFill/>
+          <a:ln w="9525">
+            <a:noFill/>
+            <a:headEnd/>
+            <a:tailEnd/>
+          </a:ln>
+        </p:spPr>
+      </p:pic>
+    </p:spTree>
+  </p:cSld>
+</p:sld>
+</file>
+
+<file path=ppt/slides/slide7.xml><?xml version="1.0" encoding="utf-8"?>
+<p:sld xmlns:a="http://schemas.openxmlformats.org/drawingml/2006/main" xmlns:r="http://schemas.openxmlformats.org/officeDocument/2006/relationships" xmlns:p="http://schemas.openxmlformats.org/presentationml/2006/main">
+  <p:cSld>
+    <p:spTree>
+      <p:nvGrpSpPr>
+        <p:cNvPr id="1" name=""/>
+        <p:cNvGrpSpPr/>
+        <p:nvPr/>
+      </p:nvGrpSpPr>
+      <p:grpSpPr>
+        <a:xfrm>
+          <a:off x="0" y="0"/>
+          <a:ext cx="0" cy="0"/>
+          <a:chOff x="0" y="0"/>
+          <a:chExt cx="0" cy="0"/>
+        </a:xfrm>
+      </p:grpSpPr>
+      <p:sp>
+        <p:nvSpPr>
+          <p:cNvPr id="2" name="Title 1"/>
+          <p:cNvSpPr>
+            <a:spLocks noGrp="1"/>
+          </p:cNvSpPr>
+          <p:nvPr>
+            <p:ph type="title"/>
+          </p:nvPr>
+        </p:nvSpPr>
+        <p:spPr>
+          <a:xfrm>
+            <a:off x="0" y="0"/>
+            <a:ext cx="9144000" cy="602780"/>
+          </a:xfrm>
+          <a:solidFill>
+            <a:srgbClr val="70121D"/>
+          </a:solidFill>
+        </p:spPr>
+        <p:txBody>
+          <a:bodyPr/>
+          <a:lstStyle/>
+          <a:p>
+            <a:pPr lvl="0" indent="0" marL="0">
+              <a:buNone/>
+            </a:pPr>
+            <a:r>
+              <a:rPr/>
+              <a:t>Organize the project </a:t>
+            </a:r>
+            <a:r>
+              <a:rPr i="1"/>
+              <a:t>before</a:t>
+            </a:r>
+            <a:r>
+              <a:rPr/>
+              <a:t> you code</a:t>
+            </a:r>
+          </a:p>
+        </p:txBody>
+      </p:sp>
+      <p:sp>
+        <p:nvSpPr>
+          <p:cNvPr id="3" name="Content Placeholder 2"/>
+          <p:cNvSpPr>
+            <a:spLocks noGrp="1"/>
+          </p:cNvSpPr>
+          <p:nvPr>
+            <p:ph idx="1" sz="half"/>
+          </p:nvPr>
+        </p:nvSpPr>
+        <p:spPr/>
+        <p:txBody>
+          <a:bodyPr/>
+          <a:lstStyle/>
+          <a:p>
+            <a:pPr lvl="0" indent="0" marL="0">
+              <a:buNone/>
+            </a:pPr>
+            <a:r>
+              <a:rPr/>
+              <a:t>Make </a:t>
+            </a:r>
+            <a:r>
+              <a:rPr b="1"/>
+              <a:t>one folder per project</a:t>
+            </a:r>
+            <a:r>
+              <a:rPr/>
+              <a:t>. Everything for the tree experiment lives together:</a:t>
+            </a:r>
+          </a:p>
+          <a:p>
+            <a:pPr lvl="0" indent="0">
+              <a:buNone/>
+            </a:pPr>
+            <a:r>
+              <a:rPr>
+                <a:latin typeface="Courier"/>
+              </a:rPr>
+              <a:t>tree_project/
+├── data_raw/      &lt;- the untouched Excel file
+├── scripts/       &lt;- your .R code
+├── figures/       &lt;- plots you save
+└── data_clean/    &lt;- tidied files you create</a:t>
+            </a:r>
+          </a:p>
+          <a:p>
+            <a:pPr lvl="0"/>
+            <a:r>
+              <a:rPr/>
+              <a:t>In Positron: </a:t>
+            </a:r>
+            <a:r>
+              <a:rPr b="1"/>
+              <a:t>File → Open Folder…</a:t>
+            </a:r>
+            <a:r>
+              <a:rPr/>
+              <a:t> and pick this folder.</a:t>
+            </a:r>
+          </a:p>
+          <a:p>
+            <a:pPr lvl="0"/>
+            <a:r>
+              <a:rPr/>
+              <a:t>Now every path is relative to the project — no more </a:t>
+            </a:r>
+            <a:r>
+              <a:rPr>
+                <a:latin typeface="Courier"/>
+              </a:rPr>
+              <a:t>C:/Users/.../Desktop/...</a:t>
+            </a:r>
+            <a:r>
+              <a:rPr/>
+              <a:t> nightmares.</a:t>
+            </a:r>
+          </a:p>
+          <a:p>
+            <a:pPr lvl="0" indent="0" marL="0">
+              <a:buNone/>
+            </a:pPr>
+            <a:r>
+              <a:rPr b="1"/>
+              <a:t>✅ Key idea</a:t>
+            </a:r>
+          </a:p>
+          <a:p>
+            <a:pPr lvl="0" indent="0" marL="0">
+              <a:buNone/>
+            </a:pPr>
+            <a:r>
+              <a:rPr/>
+              <a:t>A tidy folder today saves an hour of “where did I put that file?” next week.</a:t>
+            </a:r>
+          </a:p>
+        </p:txBody>
+      </p:sp>
+      <p:sp>
+        <p:nvSpPr>
+          <p:cNvPr id="4" name="Content Placeholder 3"/>
+          <p:cNvSpPr>
+            <a:spLocks noGrp="1"/>
+          </p:cNvSpPr>
+          <p:nvPr>
+            <p:ph idx="2" sz="half"/>
+          </p:nvPr>
+        </p:nvSpPr>
+        <p:spPr/>
+        <p:txBody>
+          <a:bodyPr/>
+          <a:lstStyle/>
+          <a:p>
+            <a:pPr lvl="0" indent="0" marL="0">
+              <a:buNone/>
+            </a:pPr>
+            <a:r>
+              <a:rPr b="1"/>
+              <a:t>📊 Coming from Excel?</a:t>
+            </a:r>
+          </a:p>
+          <a:p>
+            <a:pPr lvl="0" indent="0" marL="0">
+              <a:buNone/>
+            </a:pPr>
+            <a:r>
+              <a:rPr/>
+              <a:t>In Excel you keep one big file. In R we keep </a:t>
+            </a:r>
+            <a:r>
+              <a:rPr b="1"/>
+              <a:t>raw data read-only</a:t>
+            </a:r>
+            <a:r>
+              <a:rPr/>
+              <a:t> and write </a:t>
+            </a:r>
+            <a:r>
+              <a:rPr i="1"/>
+              <a:t>new</a:t>
+            </a:r>
+            <a:r>
+              <a:rPr/>
+              <a:t> clean files — so you can always trace your steps and never overwrite your original numbers.</a:t>
+            </a:r>
+          </a:p>
+        </p:txBody>
+      </p:sp>
+    </p:spTree>
+  </p:cSld>
+</p:sld>
+</file>
+
+<file path=ppt/slides/slide8.xml><?xml version="1.0" encoding="utf-8"?>
+<p:sld xmlns:a="http://schemas.openxmlformats.org/drawingml/2006/main" xmlns:r="http://schemas.openxmlformats.org/officeDocument/2006/relationships" xmlns:p="http://schemas.openxmlformats.org/presentationml/2006/main">
+  <p:cSld>
+    <p:spTree>
+      <p:nvGrpSpPr>
+        <p:cNvPr id="1" name=""/>
+        <p:cNvGrpSpPr/>
+        <p:nvPr/>
+      </p:nvGrpSpPr>
+      <p:grpSpPr>
+        <a:xfrm>
+          <a:off x="0" y="0"/>
+          <a:ext cx="0" cy="0"/>
+          <a:chOff x="0" y="0"/>
+          <a:chExt cx="0" cy="0"/>
+        </a:xfrm>
+      </p:grpSpPr>
+      <p:sp>
+        <p:nvSpPr>
+          <p:cNvPr id="2" name="Title 1"/>
+          <p:cNvSpPr>
+            <a:spLocks noGrp="1"/>
+          </p:cNvSpPr>
+          <p:nvPr>
+            <p:ph type="title"/>
+          </p:nvPr>
+        </p:nvSpPr>
+        <p:spPr>
+          <a:xfrm>
+            <a:off x="0" y="0"/>
+            <a:ext cx="9144000" cy="602780"/>
+          </a:xfrm>
+          <a:solidFill>
+            <a:srgbClr val="70121D"/>
+          </a:solidFill>
+        </p:spPr>
+        <p:txBody>
+          <a:bodyPr/>
+          <a:lstStyle/>
+          <a:p>
+            <a:pPr lvl="0" indent="0" marL="0">
+              <a:buNone/>
+            </a:pPr>
+            <a:r>
+              <a:rPr/>
+              <a:t>A quick tour of Positron</a:t>
+            </a:r>
+          </a:p>
+        </p:txBody>
+      </p:sp>
+      <p:sp>
+        <p:nvSpPr>
+          <p:cNvPr id="3" name="Content Placeholder 2"/>
+          <p:cNvSpPr>
+            <a:spLocks noGrp="1"/>
+          </p:cNvSpPr>
+          <p:nvPr>
+            <p:ph idx="1" sz="half"/>
+          </p:nvPr>
+        </p:nvSpPr>
+        <p:spPr/>
+        <p:txBody>
+          <a:bodyPr/>
+          <a:lstStyle/>
+          <a:p>
+            <a:pPr lvl="0" indent="0" marL="0">
+              <a:buNone/>
+            </a:pPr>
+            <a:r>
+              <a:rPr/>
+              <a:t>Four panes you’ll use constantly:</a:t>
+            </a:r>
+          </a:p>
+          <a:p>
+            <a:pPr lvl="0"/>
+            <a:r>
+              <a:rPr b="1"/>
+              <a:t>Editor</a:t>
+            </a:r>
+            <a:r>
+              <a:rPr/>
+              <a:t> (top-left) — your scripts live here</a:t>
+            </a:r>
+          </a:p>
+          <a:p>
+            <a:pPr lvl="0"/>
+            <a:r>
+              <a:rPr b="1"/>
+              <a:t>Console / Terminal</a:t>
+            </a:r>
+            <a:r>
+              <a:rPr/>
+              <a:t> (bottom) — where code runs</a:t>
+            </a:r>
+          </a:p>
+          <a:p>
+            <a:pPr lvl="0"/>
+            <a:r>
+              <a:rPr b="1"/>
+              <a:t>Variables / Session</a:t>
+            </a:r>
+            <a:r>
+              <a:rPr/>
+              <a:t> (right) — everything you’ve stored</a:t>
+            </a:r>
+          </a:p>
+          <a:p>
+            <a:pPr lvl="0"/>
+            <a:r>
+              <a:rPr b="1"/>
+              <a:t>Plots</a:t>
+            </a:r>
+            <a:r>
+              <a:rPr/>
+              <a:t> (right) — your figures appear here</a:t>
+            </a:r>
+          </a:p>
+          <a:p>
+            <a:pPr lvl="0" indent="0" marL="0">
+              <a:buNone/>
+            </a:pPr>
+            <a:r>
+              <a:rPr b="1"/>
+              <a:t>🖐 Try it yourself</a:t>
+            </a:r>
+          </a:p>
+          <a:p>
+            <a:pPr lvl="0" indent="0" marL="0">
+              <a:buNone/>
+            </a:pPr>
+            <a:r>
+              <a:rPr/>
+              <a:t>Find each pane on your screen now. Click the </a:t>
+            </a:r>
+            <a:r>
+              <a:rPr b="1"/>
+              <a:t>Console</a:t>
+            </a:r>
+            <a:r>
+              <a:rPr/>
+              <a:t> tab — that’s where we start next.</a:t>
+            </a:r>
+          </a:p>
+        </p:txBody>
+      </p:sp>
+      <p:pic>
+        <p:nvPicPr>
+          <p:cNvPr descr="images/paste-1.png" id="0" name="Picture 1"/>
+          <p:cNvPicPr>
+            <a:picLocks noGrp="1" noChangeAspect="1"/>
+          </p:cNvPicPr>
+          <p:nvPr/>
+        </p:nvPicPr>
+        <p:blipFill>
+          <a:blip r:embed="rId2"/>
+          <a:stretch>
+            <a:fillRect/>
+          </a:stretch>
+        </p:blipFill>
+        <p:spPr bwMode="auto">
+          <a:xfrm>
+            <a:off x="6121400" y="1574800"/>
+            <a:ext cx="2781300" cy="2654300"/>
+          </a:xfrm>
+          <a:prstGeom prst="rect">
+            <a:avLst/>
+          </a:prstGeom>
+          <a:noFill/>
+          <a:ln w="9525">
+            <a:noFill/>
+            <a:headEnd/>
+            <a:tailEnd/>
+          </a:ln>
+        </p:spPr>
+      </p:pic>
+    </p:spTree>
+  </p:cSld>
+</p:sld>
+</file>
+
+<file path=ppt/slides/slide9.xml><?xml version="1.0" encoding="utf-8"?>
+<p:sld xmlns:a="http://schemas.openxmlformats.org/drawingml/2006/main" xmlns:r="http://schemas.openxmlformats.org/officeDocument/2006/relationships" xmlns:p="http://schemas.openxmlformats.org/presentationml/2006/main">
+  <p:cSld>
+    <p:spTree>
+      <p:nvGrpSpPr>
+        <p:cNvPr id="1" name=""/>
+        <p:cNvGrpSpPr/>
+        <p:nvPr/>
+      </p:nvGrpSpPr>
+      <p:grpSpPr>
+        <a:xfrm>
+          <a:off x="0" y="0"/>
+          <a:ext cx="0" cy="0"/>
+          <a:chOff x="0" y="0"/>
+          <a:chExt cx="0" cy="0"/>
+        </a:xfrm>
+      </p:grpSpPr>
+      <p:sp>
+        <p:nvSpPr>
+          <p:cNvPr id="2" name="Title 1"/>
+          <p:cNvSpPr>
+            <a:spLocks noGrp="1"/>
+          </p:cNvSpPr>
+          <p:nvPr>
+            <p:ph type="title"/>
+          </p:nvPr>
+        </p:nvSpPr>
+        <p:spPr>
+          <a:xfrm>
+            <a:off x="0" y="0"/>
+            <a:ext cx="9144000" cy="582780"/>
+          </a:xfrm>
+        </p:spPr>
+        <p:txBody>
+          <a:bodyPr/>
+          <a:lstStyle/>
+          <a:p>
+            <a:pPr lvl="0" indent="0" marL="0">
+              <a:buNone/>
+            </a:pPr>
+            <a:r>
+              <a:rPr/>
+              <a:t>Part 2 · How R works</a:t>
+            </a:r>
+          </a:p>
+        </p:txBody>
+      </p:sp>
+      <p:sp>
+        <p:nvSpPr>
+          <p:cNvPr id="3" name="Content Placeholder 2"/>
+          <p:cNvSpPr>
+            <a:spLocks noGrp="1"/>
+          </p:cNvSpPr>
+          <p:nvPr>
+            <p:ph idx="1"/>
+          </p:nvPr>
+        </p:nvSpPr>
+        <p:spPr/>
+        <p:txBody>
+          <a:bodyPr/>
+          <a:lstStyle/>
+          <a:p>
+            <a:pPr lvl="0" indent="0" marL="0">
+              <a:spcBef>
+                <a:spcPts val="3000"/>
+              </a:spcBef>
+              <a:buNone/>
+            </a:pPr>
+            <a:r>
+              <a:rPr b="1"/>
+              <a:t>R is a calculator</a:t>
             </a:r>
           </a:p>
         </p:txBody>

--- a/docs/lectures/lecture_02/02_lecture_powerpoint.pptx
+++ b/docs/lectures/lecture_02/02_lecture_powerpoint.pptx
@@ -34,7 +34,6 @@
     <p:sldId id="282" r:id="rId28"/>
     <p:sldId id="283" r:id="rId29"/>
     <p:sldId id="284" r:id="rId30"/>
-    <p:sldId id="285" r:id="rId31"/>
   </p:sldIdLst>
   <p:sldSz cx="9144000" cy="5143500" type="screen16x9"/>
   <p:notesSz cx="6858000" cy="9144000"/>
@@ -3340,6 +3339,37 @@
               <a:rPr/>
               <a:t>From the console to your first plot</a:t>
             </a:r>
+            <a:br/>
+            <a:br/>
+            <a:r>
+              <a:rPr/>
+              <a:t>Bill Perry</a:t>
+            </a:r>
+          </a:p>
+        </p:txBody>
+      </p:sp>
+      <p:sp>
+        <p:nvSpPr>
+          <p:cNvPr id="4" name="Date Placeholder 3"/>
+          <p:cNvSpPr>
+            <a:spLocks noGrp="1"/>
+          </p:cNvSpPr>
+          <p:nvPr>
+            <p:ph idx="10" sz="half" type="dt"/>
+          </p:nvPr>
+        </p:nvSpPr>
+        <p:spPr/>
+        <p:txBody>
+          <a:bodyPr/>
+          <a:lstStyle/>
+          <a:p>
+            <a:pPr lvl="0" indent="0" marL="0">
+              <a:buNone/>
+            </a:pPr>
+            <a:r>
+              <a:rPr/>
+              <a:t>2026-06-28</a:t>
+            </a:r>
           </a:p>
         </p:txBody>
       </p:sp>
@@ -3367,6 +3397,45 @@
       </p:grpSpPr>
       <p:sp>
         <p:nvSpPr>
+          <p:cNvPr id="2" name="Title 1"/>
+          <p:cNvSpPr>
+            <a:spLocks noGrp="1"/>
+          </p:cNvSpPr>
+          <p:nvPr>
+            <p:ph type="title"/>
+          </p:nvPr>
+        </p:nvSpPr>
+        <p:spPr>
+          <a:xfrm>
+            <a:off x="0" y="0"/>
+            <a:ext cx="9144000" cy="602780"/>
+          </a:xfrm>
+          <a:solidFill>
+            <a:srgbClr val="1A1A2E"/>
+          </a:solidFill>
+        </p:spPr>
+        <p:txBody>
+          <a:bodyPr/>
+          <a:lstStyle/>
+          <a:p>
+            <a:pPr lvl="0" indent="0" marL="0">
+              <a:buNone/>
+            </a:pPr>
+            <a:r>
+              <a:rPr/>
+              <a:t>Storing values with </a:t>
+            </a:r>
+            <a:r>
+              <a:rPr>
+                <a:latin typeface="Courier"/>
+              </a:rPr>
+              <a:t>&lt;-</a:t>
+            </a:r>
+          </a:p>
+        </p:txBody>
+      </p:sp>
+      <p:sp>
+        <p:nvSpPr>
           <p:cNvPr id="3" name="Content Placeholder 2"/>
           <p:cNvSpPr>
             <a:spLocks noGrp="1"/>
@@ -3385,15 +3454,25 @@
             </a:pPr>
             <a:r>
               <a:rPr/>
-              <a:t>Type math straight into the </a:t>
+              <a:t>To keep a value, give it a </a:t>
             </a:r>
             <a:r>
               <a:rPr b="1"/>
-              <a:t>console</a:t>
-            </a:r>
-            <a:r>
-              <a:rPr/>
-              <a:t> and press Enter:</a:t>
+              <a:t>name</a:t>
+            </a:r>
+            <a:r>
+              <a:rPr/>
+              <a:t> with the assignment operator </a:t>
+            </a:r>
+            <a:r>
+              <a:rPr>
+                <a:latin typeface="Courier"/>
+              </a:rPr>
+              <a:t>&lt;-</a:t>
+            </a:r>
+            <a:r>
+              <a:rPr/>
+              <a:t>:</a:t>
             </a:r>
           </a:p>
           <a:p>
@@ -3403,11 +3482,76 @@
             <a:r>
               <a:rPr>
                 <a:solidFill>
+                  <a:srgbClr val="003B4F"/>
+                </a:solidFill>
+                <a:latin typeface="Courier"/>
+              </a:rPr>
+              <a:t>x &lt;- </a:t>
+            </a:r>
+            <a:r>
+              <a:rPr>
+                <a:solidFill>
                   <a:srgbClr val="AD0000"/>
                 </a:solidFill>
                 <a:latin typeface="Courier"/>
               </a:rPr>
-              <a:t>3</a:t>
+              <a:t>7</a:t>
+            </a:r>
+            <a:r>
+              <a:rPr>
+                <a:solidFill>
+                  <a:srgbClr val="003B4F"/>
+                </a:solidFill>
+                <a:latin typeface="Courier"/>
+              </a:rPr>
+              <a:t>          </a:t>
+            </a:r>
+            <a:r>
+              <a:rPr>
+                <a:solidFill>
+                  <a:srgbClr val="5E5E5E"/>
+                </a:solidFill>
+                <a:latin typeface="Courier"/>
+              </a:rPr>
+              <a:t># store 7 under the name x</a:t>
+            </a:r>
+            <a:br/>
+            <a:r>
+              <a:rPr>
+                <a:solidFill>
+                  <a:srgbClr val="003B4F"/>
+                </a:solidFill>
+                <a:latin typeface="Courier"/>
+              </a:rPr>
+              <a:t>x               </a:t>
+            </a:r>
+            <a:r>
+              <a:rPr>
+                <a:solidFill>
+                  <a:srgbClr val="5E5E5E"/>
+                </a:solidFill>
+                <a:latin typeface="Courier"/>
+              </a:rPr>
+              <a:t># type the name to read it back</a:t>
+            </a:r>
+            <a:br/>
+            <a:r>
+              <a:rPr>
+                <a:solidFill>
+                  <a:srgbClr val="003B4F"/>
+                </a:solidFill>
+                <a:latin typeface="Courier"/>
+              </a:rPr>
+              <a:t>x </a:t>
+            </a:r>
+            <a:r>
+              <a:rPr>
+                <a:solidFill>
+                  <a:srgbClr val="5E5E5E"/>
+                </a:solidFill>
+                <a:latin typeface="Courier"/>
+              </a:rPr>
+              <a:t>*</a:t>
             </a:r>
             <a:r>
               <a:rPr>
@@ -3421,214 +3565,142 @@
             <a:r>
               <a:rPr>
                 <a:solidFill>
+                  <a:srgbClr val="AD0000"/>
+                </a:solidFill>
+                <a:latin typeface="Courier"/>
+              </a:rPr>
+              <a:t>2</a:t>
+            </a:r>
+            <a:r>
+              <a:rPr>
+                <a:solidFill>
+                  <a:srgbClr val="003B4F"/>
+                </a:solidFill>
+                <a:latin typeface="Courier"/>
+              </a:rPr>
+              <a:t>           </a:t>
+            </a:r>
+            <a:r>
+              <a:rPr>
+                <a:solidFill>
                   <a:srgbClr val="5E5E5E"/>
                 </a:solidFill>
                 <a:latin typeface="Courier"/>
               </a:rPr>
-              <a:t>+</a:t>
-            </a:r>
-            <a:r>
-              <a:rPr>
-                <a:solidFill>
-                  <a:srgbClr val="003B4F"/>
-                </a:solidFill>
-                <a:latin typeface="Courier"/>
-              </a:rPr>
+              <a:t># use it in math</a:t>
+            </a:r>
+          </a:p>
+          <a:p>
+            <a:pPr lvl="0"/>
+            <a:r>
+              <a:rPr>
+                <a:latin typeface="Courier"/>
+              </a:rPr>
+              <a:t>&lt;-</a:t>
+            </a:r>
+            <a:r>
+              <a:rPr/>
+              <a:t> puts the value into your </a:t>
+            </a:r>
+            <a:r>
+              <a:rPr b="1"/>
+              <a:t>environment</a:t>
+            </a:r>
+            <a:r>
+              <a:rPr/>
+              <a:t> (look in the Variables pane!)</a:t>
+            </a:r>
+          </a:p>
+          <a:p>
+            <a:pPr lvl="0"/>
+            <a:r>
+              <a:rPr/>
+              <a:t>Shortcut: Alt + - (Win) or Option + - (Mac) types </a:t>
+            </a:r>
+            <a:r>
+              <a:rPr>
+                <a:latin typeface="Courier"/>
+              </a:rPr>
+              <a:t>&lt;-</a:t>
+            </a:r>
+            <a:r>
+              <a:rPr/>
+              <a:t> for you</a:t>
+            </a:r>
+          </a:p>
+          <a:p>
+            <a:pPr lvl="0" indent="0" marL="1270000">
+              <a:buNone/>
+            </a:pPr>
+            <a:r>
+              <a:rPr sz="2000" b="1"/>
+              <a:t>Note</a:t>
+            </a:r>
+          </a:p>
+          <a:p>
+            <a:pPr lvl="0" indent="0" marL="1270000">
+              <a:buNone/>
+            </a:pPr>
+            <a:r>
+              <a:rPr sz="2000" b="1"/>
+              <a:t>📖 New word</a:t>
+            </a:r>
+          </a:p>
+          <a:p>
+            <a:pPr lvl="0" indent="0" marL="1270000">
+              <a:buNone/>
+            </a:pPr>
+            <a:r>
+              <a:rPr sz="2000" b="1"/>
+              <a:t>Assignment operator</a:t>
+            </a:r>
+            <a:r>
+              <a:rPr sz="2000"/>
               <a:t> </a:t>
             </a:r>
             <a:r>
-              <a:rPr>
-                <a:solidFill>
-                  <a:srgbClr val="AD0000"/>
-                </a:solidFill>
-                <a:latin typeface="Courier"/>
-              </a:rPr>
-              <a:t>5</a:t>
-            </a:r>
-            <a:br/>
-            <a:r>
-              <a:rPr>
-                <a:solidFill>
-                  <a:srgbClr val="AD0000"/>
-                </a:solidFill>
-                <a:latin typeface="Courier"/>
-              </a:rPr>
-              <a:t>12</a:t>
-            </a:r>
-            <a:r>
-              <a:rPr>
-                <a:solidFill>
-                  <a:srgbClr val="003B4F"/>
-                </a:solidFill>
-                <a:latin typeface="Courier"/>
-              </a:rPr>
-              <a:t> </a:t>
-            </a:r>
-            <a:r>
-              <a:rPr>
-                <a:solidFill>
-                  <a:srgbClr val="5E5E5E"/>
-                </a:solidFill>
-                <a:latin typeface="Courier"/>
-              </a:rPr>
-              <a:t>/</a:t>
-            </a:r>
-            <a:r>
-              <a:rPr>
-                <a:solidFill>
-                  <a:srgbClr val="003B4F"/>
-                </a:solidFill>
-                <a:latin typeface="Courier"/>
-              </a:rPr>
-              <a:t> </a:t>
-            </a:r>
-            <a:r>
-              <a:rPr>
-                <a:solidFill>
-                  <a:srgbClr val="AD0000"/>
-                </a:solidFill>
-                <a:latin typeface="Courier"/>
-              </a:rPr>
-              <a:t>7</a:t>
-            </a:r>
-            <a:br/>
-            <a:r>
-              <a:rPr>
-                <a:solidFill>
-                  <a:srgbClr val="AD0000"/>
-                </a:solidFill>
-                <a:latin typeface="Courier"/>
-              </a:rPr>
-              <a:t>2</a:t>
-            </a:r>
-            <a:r>
-              <a:rPr>
-                <a:solidFill>
-                  <a:srgbClr val="003B4F"/>
-                </a:solidFill>
-                <a:latin typeface="Courier"/>
-              </a:rPr>
-              <a:t> </a:t>
-            </a:r>
-            <a:r>
-              <a:rPr>
-                <a:solidFill>
-                  <a:srgbClr val="5E5E5E"/>
-                </a:solidFill>
-                <a:latin typeface="Courier"/>
-              </a:rPr>
-              <a:t>^</a:t>
-            </a:r>
-            <a:r>
-              <a:rPr>
-                <a:solidFill>
-                  <a:srgbClr val="003B4F"/>
-                </a:solidFill>
-                <a:latin typeface="Courier"/>
-              </a:rPr>
-              <a:t> </a:t>
-            </a:r>
-            <a:r>
-              <a:rPr>
-                <a:solidFill>
-                  <a:srgbClr val="AD0000"/>
-                </a:solidFill>
-                <a:latin typeface="Courier"/>
-              </a:rPr>
-              <a:t>10</a:t>
-            </a:r>
-          </a:p>
-          <a:p>
-            <a:pPr lvl="0" indent="0" marL="0">
-              <a:buNone/>
-            </a:pPr>
-            <a:r>
-              <a:rPr/>
-              <a:t>R answers immediately. The console is great for quick “what’s the answer?” questions.</a:t>
-            </a:r>
-          </a:p>
-          <a:p>
-            <a:pPr lvl="0" indent="0" marL="0">
-              <a:buNone/>
-            </a:pPr>
-            <a:r>
-              <a:rPr b="1"/>
-              <a:t>⚠️ Watch out!</a:t>
-            </a:r>
-          </a:p>
-          <a:p>
-            <a:pPr lvl="0" indent="0" marL="0">
-              <a:buNone/>
-            </a:pPr>
-            <a:r>
-              <a:rPr/>
-              <a:t>A </a:t>
-            </a:r>
-            <a:r>
-              <a:rPr>
-                <a:latin typeface="Courier"/>
-              </a:rPr>
-              <a:t>+</a:t>
-            </a:r>
-            <a:r>
-              <a:rPr/>
-              <a:t> at the start of the console line means R is </a:t>
-            </a:r>
-            <a:r>
-              <a:rPr b="1"/>
-              <a:t>still waiting</a:t>
-            </a:r>
-            <a:r>
-              <a:rPr/>
-              <a:t> for you to finish a command. Press Esc to start over.</a:t>
+              <a:rPr sz="2000">
+                <a:latin typeface="Courier"/>
+              </a:rPr>
+              <a:t>&lt;-</a:t>
+            </a:r>
+            <a:r>
+              <a:rPr sz="2000"/>
+              <a:t> = “take the thing on the right and store it under the name on the left.”</a:t>
             </a:r>
           </a:p>
         </p:txBody>
       </p:sp>
-      <p:sp>
-        <p:nvSpPr>
-          <p:cNvPr id="4" name="Content Placeholder 3"/>
-          <p:cNvSpPr>
-            <a:spLocks noGrp="1"/>
-          </p:cNvSpPr>
-          <p:nvPr>
-            <p:ph idx="2" sz="half"/>
-          </p:nvPr>
-        </p:nvSpPr>
-        <p:spPr/>
-        <p:txBody>
-          <a:bodyPr/>
-          <a:lstStyle/>
-          <a:p>
-            <a:pPr lvl="0" indent="0" marL="0">
-              <a:buNone/>
-            </a:pPr>
-            <a:r>
-              <a:rPr b="1"/>
-              <a:t>📊 Coming from Excel?</a:t>
-            </a:r>
-          </a:p>
-          <a:p>
-            <a:pPr lvl="0" indent="0" marL="0">
-              <a:buNone/>
-            </a:pPr>
-            <a:r>
-              <a:rPr/>
-              <a:t>This is just like typing </a:t>
-            </a:r>
-            <a:r>
-              <a:rPr>
-                <a:latin typeface="Courier"/>
-              </a:rPr>
-              <a:t>=3+5</a:t>
-            </a:r>
-            <a:r>
-              <a:rPr/>
-              <a:t> into an Excel cell — except there are no cells, just a line you type and run.</a:t>
-            </a:r>
-          </a:p>
-        </p:txBody>
-      </p:sp>
+      <p:pic>
+        <p:nvPicPr>
+          <p:cNvPr descr="images/diagram_assignment.png" id="0" name="Picture 1"/>
+          <p:cNvPicPr>
+            <a:picLocks noGrp="1" noChangeAspect="1"/>
+          </p:cNvPicPr>
+          <p:nvPr/>
+        </p:nvPicPr>
+        <p:blipFill>
+          <a:blip r:embed="rId2"/>
+          <a:stretch>
+            <a:fillRect/>
+          </a:stretch>
+        </p:blipFill>
+        <p:spPr bwMode="auto">
+          <a:xfrm>
+            <a:off x="4495800" y="787400"/>
+            <a:ext cx="4406900" cy="3556000"/>
+          </a:xfrm>
+          <a:prstGeom prst="rect">
+            <a:avLst/>
+          </a:prstGeom>
+          <a:noFill/>
+          <a:ln w="9525">
+            <a:noFill/>
+            <a:headEnd/>
+            <a:tailEnd/>
+          </a:ln>
+        </p:spPr>
+      </p:pic>
     </p:spTree>
   </p:cSld>
 </p:sld>
@@ -3679,21 +3751,7 @@
             </a:pPr>
             <a:r>
               <a:rPr/>
-              <a:t>Storing values: the </a:t>
-            </a:r>
-            <a:r>
-              <a:rPr b="1"/>
-              <a:t>ladder</a:t>
-            </a:r>
-            <a:r>
-              <a:rPr/>
-              <a:t> </a:t>
-            </a:r>
-            <a:r>
-              <a:rPr>
-                <a:latin typeface="Courier"/>
-              </a:rPr>
-              <a:t>&lt;-</a:t>
+              <a:t>Naming your objects well</a:t>
             </a:r>
           </a:p>
         </p:txBody>
@@ -3718,25 +3776,117 @@
             </a:pPr>
             <a:r>
               <a:rPr/>
-              <a:t>To keep a value, give it a </a:t>
+              <a:t>Good names make code readable months later:</a:t>
+            </a:r>
+          </a:p>
+          <a:p>
+            <a:pPr lvl="0"/>
+            <a:r>
+              <a:rPr/>
+              <a:t>Be </a:t>
             </a:r>
             <a:r>
               <a:rPr b="1"/>
-              <a:t>name</a:t>
-            </a:r>
-            <a:r>
-              <a:rPr/>
-              <a:t> with the assignment operator </a:t>
-            </a:r>
-            <a:r>
-              <a:rPr>
-                <a:latin typeface="Courier"/>
-              </a:rPr>
-              <a:t>&lt;-</a:t>
-            </a:r>
-            <a:r>
-              <a:rPr/>
-              <a:t>:</a:t>
+              <a:t>explicit</a:t>
+            </a:r>
+            <a:r>
+              <a:rPr/>
+              <a:t>, not too long: </a:t>
+            </a:r>
+            <a:r>
+              <a:rPr>
+                <a:latin typeface="Courier"/>
+              </a:rPr>
+              <a:t>leaf_mass</a:t>
+            </a:r>
+            <a:r>
+              <a:rPr/>
+              <a:t>, not </a:t>
+            </a:r>
+            <a:r>
+              <a:rPr>
+                <a:latin typeface="Courier"/>
+              </a:rPr>
+              <a:t>x2</a:t>
+            </a:r>
+          </a:p>
+          <a:p>
+            <a:pPr lvl="0"/>
+            <a:r>
+              <a:rPr b="1"/>
+              <a:t>Cannot start with a number</a:t>
+            </a:r>
+            <a:r>
+              <a:rPr/>
+              <a:t> — </a:t>
+            </a:r>
+            <a:r>
+              <a:rPr>
+                <a:latin typeface="Courier"/>
+              </a:rPr>
+              <a:t>x2</a:t>
+            </a:r>
+            <a:r>
+              <a:rPr/>
+              <a:t> ✅, </a:t>
+            </a:r>
+            <a:r>
+              <a:rPr>
+                <a:latin typeface="Courier"/>
+              </a:rPr>
+              <a:t>2x</a:t>
+            </a:r>
+            <a:r>
+              <a:rPr/>
+              <a:t> ❌</a:t>
+            </a:r>
+          </a:p>
+          <a:p>
+            <a:pPr lvl="0"/>
+            <a:r>
+              <a:rPr/>
+              <a:t>R is </a:t>
+            </a:r>
+            <a:r>
+              <a:rPr b="1"/>
+              <a:t>case-sensitive</a:t>
+            </a:r>
+            <a:r>
+              <a:rPr/>
+              <a:t> — </a:t>
+            </a:r>
+            <a:r>
+              <a:rPr>
+                <a:latin typeface="Courier"/>
+              </a:rPr>
+              <a:t>weight_g</a:t>
+            </a:r>
+            <a:r>
+              <a:rPr/>
+              <a:t> ≠ </a:t>
+            </a:r>
+            <a:r>
+              <a:rPr>
+                <a:latin typeface="Courier"/>
+              </a:rPr>
+              <a:t>Weight_g</a:t>
+            </a:r>
+          </a:p>
+          <a:p>
+            <a:pPr lvl="0"/>
+            <a:r>
+              <a:rPr/>
+              <a:t>Use </a:t>
+            </a:r>
+            <a:r>
+              <a:rPr b="1">
+                <a:latin typeface="Courier"/>
+              </a:rPr>
+              <a:t>lower_snake_case</a:t>
+            </a:r>
+            <a:r>
+              <a:rPr/>
+              <a:t> — words separated by underscores</a:t>
             </a:r>
           </a:p>
           <a:p>
@@ -3750,7 +3900,25 @@
                 </a:solidFill>
                 <a:latin typeface="Courier"/>
               </a:rPr>
-              <a:t>x &lt;- </a:t>
+              <a:t>leaf_mass   &lt;- </a:t>
+            </a:r>
+            <a:r>
+              <a:rPr>
+                <a:solidFill>
+                  <a:srgbClr val="4758AB"/>
+                </a:solidFill>
+                <a:latin typeface="Courier"/>
+              </a:rPr>
+              <a:t>c</a:t>
+            </a:r>
+            <a:r>
+              <a:rPr>
+                <a:solidFill>
+                  <a:srgbClr val="003B4F"/>
+                </a:solidFill>
+                <a:latin typeface="Courier"/>
+              </a:rPr>
+              <a:t>(</a:t>
             </a:r>
             <a:r>
               <a:rPr>
@@ -3759,6 +3927,60 @@
                 </a:solidFill>
                 <a:latin typeface="Courier"/>
               </a:rPr>
+              <a:t>4</a:t>
+            </a:r>
+            <a:r>
+              <a:rPr>
+                <a:solidFill>
+                  <a:srgbClr val="003B4F"/>
+                </a:solidFill>
+                <a:latin typeface="Courier"/>
+              </a:rPr>
+              <a:t>, </a:t>
+            </a:r>
+            <a:r>
+              <a:rPr>
+                <a:solidFill>
+                  <a:srgbClr val="AD0000"/>
+                </a:solidFill>
+                <a:latin typeface="Courier"/>
+              </a:rPr>
+              <a:t>3</a:t>
+            </a:r>
+            <a:r>
+              <a:rPr>
+                <a:solidFill>
+                  <a:srgbClr val="003B4F"/>
+                </a:solidFill>
+                <a:latin typeface="Courier"/>
+              </a:rPr>
+              <a:t>, </a:t>
+            </a:r>
+            <a:r>
+              <a:rPr>
+                <a:solidFill>
+                  <a:srgbClr val="AD0000"/>
+                </a:solidFill>
+                <a:latin typeface="Courier"/>
+              </a:rPr>
+              <a:t>5</a:t>
+            </a:r>
+            <a:r>
+              <a:rPr>
+                <a:solidFill>
+                  <a:srgbClr val="003B4F"/>
+                </a:solidFill>
+                <a:latin typeface="Courier"/>
+              </a:rPr>
+              <a:t>, </a:t>
+            </a:r>
+            <a:r>
+              <a:rPr>
+                <a:solidFill>
+                  <a:srgbClr val="AD0000"/>
+                </a:solidFill>
+                <a:latin typeface="Courier"/>
+              </a:rPr>
               <a:t>7</a:t>
             </a:r>
             <a:r>
@@ -3768,7 +3990,7 @@
                 </a:solidFill>
                 <a:latin typeface="Courier"/>
               </a:rPr>
-              <a:t>          </a:t>
+              <a:t>)   </a:t>
             </a:r>
             <a:r>
               <a:rPr>
@@ -3777,7 +3999,7 @@
                 </a:solidFill>
                 <a:latin typeface="Courier"/>
               </a:rPr>
-              <a:t># store 7 under the name x</a:t>
+              <a:t># good</a:t>
             </a:r>
             <a:br/>
             <a:r>
@@ -3787,7 +4009,97 @@
                 </a:solidFill>
                 <a:latin typeface="Courier"/>
               </a:rPr>
-              <a:t>x               </a:t>
+              <a:t>LeafMass    &lt;- </a:t>
+            </a:r>
+            <a:r>
+              <a:rPr>
+                <a:solidFill>
+                  <a:srgbClr val="4758AB"/>
+                </a:solidFill>
+                <a:latin typeface="Courier"/>
+              </a:rPr>
+              <a:t>c</a:t>
+            </a:r>
+            <a:r>
+              <a:rPr>
+                <a:solidFill>
+                  <a:srgbClr val="003B4F"/>
+                </a:solidFill>
+                <a:latin typeface="Courier"/>
+              </a:rPr>
+              <a:t>(</a:t>
+            </a:r>
+            <a:r>
+              <a:rPr>
+                <a:solidFill>
+                  <a:srgbClr val="AD0000"/>
+                </a:solidFill>
+                <a:latin typeface="Courier"/>
+              </a:rPr>
+              <a:t>4</a:t>
+            </a:r>
+            <a:r>
+              <a:rPr>
+                <a:solidFill>
+                  <a:srgbClr val="003B4F"/>
+                </a:solidFill>
+                <a:latin typeface="Courier"/>
+              </a:rPr>
+              <a:t>, </a:t>
+            </a:r>
+            <a:r>
+              <a:rPr>
+                <a:solidFill>
+                  <a:srgbClr val="AD0000"/>
+                </a:solidFill>
+                <a:latin typeface="Courier"/>
+              </a:rPr>
+              <a:t>3</a:t>
+            </a:r>
+            <a:r>
+              <a:rPr>
+                <a:solidFill>
+                  <a:srgbClr val="003B4F"/>
+                </a:solidFill>
+                <a:latin typeface="Courier"/>
+              </a:rPr>
+              <a:t>, </a:t>
+            </a:r>
+            <a:r>
+              <a:rPr>
+                <a:solidFill>
+                  <a:srgbClr val="AD0000"/>
+                </a:solidFill>
+                <a:latin typeface="Courier"/>
+              </a:rPr>
+              <a:t>5</a:t>
+            </a:r>
+            <a:r>
+              <a:rPr>
+                <a:solidFill>
+                  <a:srgbClr val="003B4F"/>
+                </a:solidFill>
+                <a:latin typeface="Courier"/>
+              </a:rPr>
+              <a:t>, </a:t>
+            </a:r>
+            <a:r>
+              <a:rPr>
+                <a:solidFill>
+                  <a:srgbClr val="AD0000"/>
+                </a:solidFill>
+                <a:latin typeface="Courier"/>
+              </a:rPr>
+              <a:t>7</a:t>
+            </a:r>
+            <a:r>
+              <a:rPr>
+                <a:solidFill>
+                  <a:srgbClr val="003B4F"/>
+                </a:solidFill>
+                <a:latin typeface="Courier"/>
+              </a:rPr>
+              <a:t>)   </a:t>
             </a:r>
             <a:r>
               <a:rPr>
@@ -3796,7 +4108,7 @@
                 </a:solidFill>
                 <a:latin typeface="Courier"/>
               </a:rPr>
-              <a:t># type the name to read it back</a:t>
+              <a:t># works but avoid</a:t>
             </a:r>
             <a:br/>
             <a:r>
@@ -3806,7 +4118,97 @@
                 </a:solidFill>
                 <a:latin typeface="Courier"/>
               </a:rPr>
-              <a:t>x </a:t>
+              <a:t>leaf.mass   &lt;- </a:t>
+            </a:r>
+            <a:r>
+              <a:rPr>
+                <a:solidFill>
+                  <a:srgbClr val="4758AB"/>
+                </a:solidFill>
+                <a:latin typeface="Courier"/>
+              </a:rPr>
+              <a:t>c</a:t>
+            </a:r>
+            <a:r>
+              <a:rPr>
+                <a:solidFill>
+                  <a:srgbClr val="003B4F"/>
+                </a:solidFill>
+                <a:latin typeface="Courier"/>
+              </a:rPr>
+              <a:t>(</a:t>
+            </a:r>
+            <a:r>
+              <a:rPr>
+                <a:solidFill>
+                  <a:srgbClr val="AD0000"/>
+                </a:solidFill>
+                <a:latin typeface="Courier"/>
+              </a:rPr>
+              <a:t>4</a:t>
+            </a:r>
+            <a:r>
+              <a:rPr>
+                <a:solidFill>
+                  <a:srgbClr val="003B4F"/>
+                </a:solidFill>
+                <a:latin typeface="Courier"/>
+              </a:rPr>
+              <a:t>, </a:t>
+            </a:r>
+            <a:r>
+              <a:rPr>
+                <a:solidFill>
+                  <a:srgbClr val="AD0000"/>
+                </a:solidFill>
+                <a:latin typeface="Courier"/>
+              </a:rPr>
+              <a:t>3</a:t>
+            </a:r>
+            <a:r>
+              <a:rPr>
+                <a:solidFill>
+                  <a:srgbClr val="003B4F"/>
+                </a:solidFill>
+                <a:latin typeface="Courier"/>
+              </a:rPr>
+              <a:t>, </a:t>
+            </a:r>
+            <a:r>
+              <a:rPr>
+                <a:solidFill>
+                  <a:srgbClr val="AD0000"/>
+                </a:solidFill>
+                <a:latin typeface="Courier"/>
+              </a:rPr>
+              <a:t>5</a:t>
+            </a:r>
+            <a:r>
+              <a:rPr>
+                <a:solidFill>
+                  <a:srgbClr val="003B4F"/>
+                </a:solidFill>
+                <a:latin typeface="Courier"/>
+              </a:rPr>
+              <a:t>, </a:t>
+            </a:r>
+            <a:r>
+              <a:rPr>
+                <a:solidFill>
+                  <a:srgbClr val="AD0000"/>
+                </a:solidFill>
+                <a:latin typeface="Courier"/>
+              </a:rPr>
+              <a:t>7</a:t>
+            </a:r>
+            <a:r>
+              <a:rPr>
+                <a:solidFill>
+                  <a:srgbClr val="003B4F"/>
+                </a:solidFill>
+                <a:latin typeface="Courier"/>
+              </a:rPr>
+              <a:t>)   </a:t>
             </a:r>
             <a:r>
               <a:rPr>
@@ -3815,147 +4217,152 @@
                 </a:solidFill>
                 <a:latin typeface="Courier"/>
               </a:rPr>
-              <a:t>*</a:t>
-            </a:r>
-            <a:r>
-              <a:rPr>
-                <a:solidFill>
-                  <a:srgbClr val="003B4F"/>
-                </a:solidFill>
-                <a:latin typeface="Courier"/>
-              </a:rPr>
-              <a:t> </a:t>
-            </a:r>
-            <a:r>
-              <a:rPr>
-                <a:solidFill>
-                  <a:srgbClr val="AD0000"/>
-                </a:solidFill>
-                <a:latin typeface="Courier"/>
-              </a:rPr>
-              <a:t>2</a:t>
-            </a:r>
-            <a:r>
-              <a:rPr>
-                <a:solidFill>
-                  <a:srgbClr val="003B4F"/>
-                </a:solidFill>
-                <a:latin typeface="Courier"/>
-              </a:rPr>
-              <a:t>           </a:t>
-            </a:r>
-            <a:r>
-              <a:rPr>
-                <a:solidFill>
-                  <a:srgbClr val="5E5E5E"/>
-                </a:solidFill>
-                <a:latin typeface="Courier"/>
-              </a:rPr>
-              <a:t># now use it in math</a:t>
-            </a:r>
-          </a:p>
-          <a:p>
-            <a:pPr lvl="0"/>
-            <a:r>
-              <a:rPr>
-                <a:latin typeface="Courier"/>
-              </a:rPr>
-              <a:t>&lt;-</a:t>
-            </a:r>
-            <a:r>
-              <a:rPr/>
-              <a:t> puts the value </a:t>
-            </a:r>
-            <a:r>
-              <a:rPr b="1"/>
-              <a:t>into your environment</a:t>
-            </a:r>
-            <a:r>
-              <a:rPr/>
-              <a:t> (look right!).</a:t>
-            </a:r>
-          </a:p>
-          <a:p>
-            <a:pPr lvl="0"/>
-            <a:r>
-              <a:rPr/>
-              <a:t>Shortcut: Alt + - (Win) or Option + - (Mac) types </a:t>
-            </a:r>
-            <a:r>
-              <a:rPr>
-                <a:latin typeface="Courier"/>
-              </a:rPr>
-              <a:t>&lt;-</a:t>
-            </a:r>
-            <a:r>
-              <a:rPr/>
-              <a:t> for you.</a:t>
-            </a:r>
-          </a:p>
-          <a:p>
-            <a:pPr lvl="0" indent="0" marL="0">
-              <a:buNone/>
-            </a:pPr>
-            <a:r>
-              <a:rPr b="1"/>
-              <a:t>📖 New word</a:t>
-            </a:r>
-          </a:p>
-          <a:p>
-            <a:pPr lvl="0" indent="0" marL="0">
-              <a:buNone/>
-            </a:pPr>
-            <a:r>
-              <a:rPr b="1"/>
-              <a:t>Assignment operator</a:t>
-            </a:r>
-            <a:r>
-              <a:rPr/>
-              <a:t> </a:t>
-            </a:r>
-            <a:r>
-              <a:rPr>
-                <a:latin typeface="Courier"/>
-              </a:rPr>
-              <a:t>&lt;-</a:t>
-            </a:r>
-            <a:r>
-              <a:rPr/>
-              <a:t> = “take the thing on the right and store it under the name on the left.”</a:t>
+              <a:t># avoid dots</a:t>
+            </a:r>
+          </a:p>
+          <a:p>
+            <a:pPr lvl="0" indent="0" marL="1270000">
+              <a:buNone/>
+            </a:pPr>
+            <a:r>
+              <a:rPr sz="2000" b="1"/>
+              <a:t>Warning</a:t>
+            </a:r>
+          </a:p>
+          <a:p>
+            <a:pPr lvl="0" indent="0" marL="1270000">
+              <a:buNone/>
+            </a:pPr>
+            <a:r>
+              <a:rPr sz="2000" b="1"/>
+              <a:t>⚠️ Watch out!</a:t>
+            </a:r>
+          </a:p>
+          <a:p>
+            <a:pPr lvl="0" indent="0" marL="1270000">
+              <a:buNone/>
+            </a:pPr>
+            <a:r>
+              <a:rPr sz="2000">
+                <a:latin typeface="Courier"/>
+              </a:rPr>
+              <a:t>weight_g</a:t>
+            </a:r>
+            <a:r>
+              <a:rPr sz="2000"/>
+              <a:t> and </a:t>
+            </a:r>
+            <a:r>
+              <a:rPr sz="2000">
+                <a:latin typeface="Courier"/>
+              </a:rPr>
+              <a:t>weight_G</a:t>
+            </a:r>
+            <a:r>
+              <a:rPr sz="2000"/>
+              <a:t> are two </a:t>
+            </a:r>
+            <a:r>
+              <a:rPr sz="2000" i="1"/>
+              <a:t>different</a:t>
+            </a:r>
+            <a:r>
+              <a:rPr sz="2000"/>
+              <a:t> objects. Pick one style and stick with it.</a:t>
             </a:r>
           </a:p>
         </p:txBody>
       </p:sp>
-      <p:pic>
-        <p:nvPicPr>
-          <p:cNvPr descr="images/diagram_assignment.png" id="0" name="Picture 1"/>
-          <p:cNvPicPr>
-            <a:picLocks noGrp="1" noChangeAspect="1"/>
-          </p:cNvPicPr>
-          <p:nvPr/>
-        </p:nvPicPr>
-        <p:blipFill>
-          <a:blip r:embed="rId2"/>
-          <a:stretch>
-            <a:fillRect/>
-          </a:stretch>
-        </p:blipFill>
-        <p:spPr bwMode="auto">
-          <a:xfrm>
-            <a:off x="4495800" y="787400"/>
-            <a:ext cx="4406900" cy="3556000"/>
-          </a:xfrm>
-          <a:prstGeom prst="rect">
-            <a:avLst/>
-          </a:prstGeom>
-          <a:noFill/>
-          <a:ln w="9525">
-            <a:noFill/>
-            <a:headEnd/>
-            <a:tailEnd/>
-          </a:ln>
-        </p:spPr>
-      </p:pic>
+      <p:sp>
+        <p:nvSpPr>
+          <p:cNvPr id="4" name="Content Placeholder 3"/>
+          <p:cNvSpPr>
+            <a:spLocks noGrp="1"/>
+          </p:cNvSpPr>
+          <p:nvPr>
+            <p:ph idx="2" sz="half"/>
+          </p:nvPr>
+        </p:nvSpPr>
+        <p:spPr/>
+        <p:txBody>
+          <a:bodyPr/>
+          <a:lstStyle/>
+          <a:p>
+            <a:pPr lvl="0" indent="0" marL="1270000">
+              <a:buNone/>
+            </a:pPr>
+            <a:r>
+              <a:rPr sz="2000" b="1"/>
+              <a:t>Note</a:t>
+            </a:r>
+          </a:p>
+          <a:p>
+            <a:pPr lvl="0" indent="0" marL="1270000">
+              <a:buNone/>
+            </a:pPr>
+            <a:r>
+              <a:rPr sz="2000" b="1"/>
+              <a:t>📖 New word</a:t>
+            </a:r>
+          </a:p>
+          <a:p>
+            <a:pPr lvl="0" indent="0" marL="1270000">
+              <a:buNone/>
+            </a:pPr>
+            <a:r>
+              <a:rPr sz="2000" b="1"/>
+              <a:t>Object</a:t>
+            </a:r>
+            <a:r>
+              <a:rPr sz="2000"/>
+              <a:t> (R) = </a:t>
+            </a:r>
+            <a:r>
+              <a:rPr sz="2000" b="1"/>
+              <a:t>variable</a:t>
+            </a:r>
+            <a:r>
+              <a:rPr sz="2000"/>
+              <a:t> (Excel/other languages). Same idea: a named container that holds something.</a:t>
+            </a:r>
+          </a:p>
+          <a:p>
+            <a:pPr lvl="0" indent="0" marL="1270000">
+              <a:buNone/>
+            </a:pPr>
+            <a:r>
+              <a:rPr sz="2000"/>
+              <a:t>Our naming convention throughout this course: - data frames → </a:t>
+            </a:r>
+            <a:r>
+              <a:rPr sz="2000">
+                <a:latin typeface="Courier"/>
+              </a:rPr>
+              <a:t>_df</a:t>
+            </a:r>
+            <a:r>
+              <a:rPr sz="2000"/>
+              <a:t> - plots → </a:t>
+            </a:r>
+            <a:r>
+              <a:rPr sz="2000">
+                <a:latin typeface="Courier"/>
+              </a:rPr>
+              <a:t>_plot</a:t>
+            </a:r>
+            <a:r>
+              <a:rPr sz="2000"/>
+              <a:t> - models → </a:t>
+            </a:r>
+            <a:r>
+              <a:rPr sz="2000">
+                <a:latin typeface="Courier"/>
+              </a:rPr>
+              <a:t>_model</a:t>
+            </a:r>
+          </a:p>
+        </p:txBody>
+      </p:sp>
     </p:spTree>
   </p:cSld>
 </p:sld>
@@ -4006,7 +4413,13 @@
             </a:pPr>
             <a:r>
               <a:rPr/>
-              <a:t>Naming your objects well</a:t>
+              <a:t>Leave notes with comments </a:t>
+            </a:r>
+            <a:r>
+              <a:rPr>
+                <a:latin typeface="Courier"/>
+              </a:rPr>
+              <a:t>#</a:t>
             </a:r>
           </a:p>
         </p:txBody>
@@ -4031,196 +4444,217 @@
             </a:pPr>
             <a:r>
               <a:rPr/>
-              <a:t>Good names make code readable months later:</a:t>
+              <a:t>Anything to the right of </a:t>
+            </a:r>
+            <a:r>
+              <a:rPr>
+                <a:latin typeface="Courier"/>
+              </a:rPr>
+              <a:t>#</a:t>
+            </a:r>
+            <a:r>
+              <a:rPr/>
+              <a:t> is </a:t>
+            </a:r>
+            <a:r>
+              <a:rPr b="1"/>
+              <a:t>ignored by R</a:t>
+            </a:r>
+            <a:r>
+              <a:rPr/>
+              <a:t> — it is a note for humans:</a:t>
+            </a:r>
+          </a:p>
+          <a:p>
+            <a:pPr lvl="0" indent="0">
+              <a:buNone/>
+            </a:pPr>
+            <a:r>
+              <a:rPr>
+                <a:solidFill>
+                  <a:srgbClr val="5E5E5E"/>
+                </a:solidFill>
+                <a:latin typeface="Courier"/>
+              </a:rPr>
+              <a:t># weights of four leaves, in grams</a:t>
+            </a:r>
+            <a:br/>
+            <a:r>
+              <a:rPr>
+                <a:solidFill>
+                  <a:srgbClr val="003B4F"/>
+                </a:solidFill>
+                <a:latin typeface="Courier"/>
+              </a:rPr>
+              <a:t>leaf_mass &lt;- </a:t>
+            </a:r>
+            <a:r>
+              <a:rPr>
+                <a:solidFill>
+                  <a:srgbClr val="4758AB"/>
+                </a:solidFill>
+                <a:latin typeface="Courier"/>
+              </a:rPr>
+              <a:t>c</a:t>
+            </a:r>
+            <a:r>
+              <a:rPr>
+                <a:solidFill>
+                  <a:srgbClr val="003B4F"/>
+                </a:solidFill>
+                <a:latin typeface="Courier"/>
+              </a:rPr>
+              <a:t>(</a:t>
+            </a:r>
+            <a:r>
+              <a:rPr>
+                <a:solidFill>
+                  <a:srgbClr val="AD0000"/>
+                </a:solidFill>
+                <a:latin typeface="Courier"/>
+              </a:rPr>
+              <a:t>4</a:t>
+            </a:r>
+            <a:r>
+              <a:rPr>
+                <a:solidFill>
+                  <a:srgbClr val="003B4F"/>
+                </a:solidFill>
+                <a:latin typeface="Courier"/>
+              </a:rPr>
+              <a:t>, </a:t>
+            </a:r>
+            <a:r>
+              <a:rPr>
+                <a:solidFill>
+                  <a:srgbClr val="AD0000"/>
+                </a:solidFill>
+                <a:latin typeface="Courier"/>
+              </a:rPr>
+              <a:t>3</a:t>
+            </a:r>
+            <a:r>
+              <a:rPr>
+                <a:solidFill>
+                  <a:srgbClr val="003B4F"/>
+                </a:solidFill>
+                <a:latin typeface="Courier"/>
+              </a:rPr>
+              <a:t>, </a:t>
+            </a:r>
+            <a:r>
+              <a:rPr>
+                <a:solidFill>
+                  <a:srgbClr val="AD0000"/>
+                </a:solidFill>
+                <a:latin typeface="Courier"/>
+              </a:rPr>
+              <a:t>5</a:t>
+            </a:r>
+            <a:r>
+              <a:rPr>
+                <a:solidFill>
+                  <a:srgbClr val="003B4F"/>
+                </a:solidFill>
+                <a:latin typeface="Courier"/>
+              </a:rPr>
+              <a:t>, </a:t>
+            </a:r>
+            <a:r>
+              <a:rPr>
+                <a:solidFill>
+                  <a:srgbClr val="AD0000"/>
+                </a:solidFill>
+                <a:latin typeface="Courier"/>
+              </a:rPr>
+              <a:t>7</a:t>
+            </a:r>
+            <a:r>
+              <a:rPr>
+                <a:solidFill>
+                  <a:srgbClr val="003B4F"/>
+                </a:solidFill>
+                <a:latin typeface="Courier"/>
+              </a:rPr>
+              <a:t>)</a:t>
+            </a:r>
+            <a:br/>
+            <a:br/>
+            <a:r>
+              <a:rPr>
+                <a:solidFill>
+                  <a:srgbClr val="4758AB"/>
+                </a:solidFill>
+                <a:latin typeface="Courier"/>
+              </a:rPr>
+              <a:t>mean</a:t>
+            </a:r>
+            <a:r>
+              <a:rPr>
+                <a:solidFill>
+                  <a:srgbClr val="003B4F"/>
+                </a:solidFill>
+                <a:latin typeface="Courier"/>
+              </a:rPr>
+              <a:t>(leaf_mass)   </a:t>
+            </a:r>
+            <a:r>
+              <a:rPr>
+                <a:solidFill>
+                  <a:srgbClr val="5E5E5E"/>
+                </a:solidFill>
+                <a:latin typeface="Courier"/>
+              </a:rPr>
+              <a:t># average leaf mass</a:t>
             </a:r>
           </a:p>
           <a:p>
             <a:pPr lvl="0"/>
             <a:r>
               <a:rPr/>
-              <a:t>Be </a:t>
-            </a:r>
-            <a:r>
-              <a:rPr b="1"/>
-              <a:t>explicit</a:t>
-            </a:r>
-            <a:r>
-              <a:rPr/>
-              <a:t>, not too long: </a:t>
-            </a:r>
-            <a:r>
-              <a:rPr>
-                <a:latin typeface="Courier"/>
-              </a:rPr>
-              <a:t>leaf_mass</a:t>
-            </a:r>
-            <a:r>
-              <a:rPr/>
-              <a:t>, not </a:t>
-            </a:r>
-            <a:r>
-              <a:rPr>
-                <a:latin typeface="Courier"/>
-              </a:rPr>
-              <a:t>x2</a:t>
+              <a:t>Comment generously — your future self will thank you</a:t>
             </a:r>
           </a:p>
           <a:p>
             <a:pPr lvl="0"/>
             <a:r>
-              <a:rPr b="1"/>
-              <a:t>Cannot start with a number</a:t>
-            </a:r>
-            <a:r>
-              <a:rPr/>
-              <a:t> — </a:t>
-            </a:r>
-            <a:r>
-              <a:rPr>
-                <a:latin typeface="Courier"/>
-              </a:rPr>
-              <a:t>x2</a:t>
-            </a:r>
-            <a:r>
-              <a:rPr/>
-              <a:t> ✅, </a:t>
-            </a:r>
-            <a:r>
-              <a:rPr>
-                <a:latin typeface="Courier"/>
-              </a:rPr>
-              <a:t>2x</a:t>
-            </a:r>
-            <a:r>
-              <a:rPr/>
-              <a:t> ❌</a:t>
-            </a:r>
-          </a:p>
-          <a:p>
-            <a:pPr lvl="0"/>
-            <a:r>
-              <a:rPr/>
-              <a:t>R is </a:t>
-            </a:r>
-            <a:r>
-              <a:rPr b="1"/>
-              <a:t>case-sensitive</a:t>
-            </a:r>
-            <a:r>
-              <a:rPr/>
-              <a:t> — </a:t>
-            </a:r>
-            <a:r>
-              <a:rPr>
-                <a:latin typeface="Courier"/>
-              </a:rPr>
-              <a:t>weight_kg</a:t>
-            </a:r>
-            <a:r>
-              <a:rPr/>
-              <a:t> ≠ </a:t>
-            </a:r>
-            <a:r>
-              <a:rPr>
-                <a:latin typeface="Courier"/>
-              </a:rPr>
-              <a:t>Weight_kg</a:t>
-            </a:r>
-          </a:p>
-          <a:p>
-            <a:pPr lvl="0"/>
-            <a:r>
-              <a:rPr/>
-              <a:t>Avoid names of built-in functions (</a:t>
-            </a:r>
-            <a:r>
-              <a:rPr>
-                <a:latin typeface="Courier"/>
-              </a:rPr>
-              <a:t>mean</a:t>
-            </a:r>
-            <a:r>
-              <a:rPr/>
-              <a:t>, </a:t>
-            </a:r>
-            <a:r>
-              <a:rPr>
-                <a:latin typeface="Courier"/>
-              </a:rPr>
-              <a:t>data</a:t>
-            </a:r>
-            <a:r>
-              <a:rPr/>
-              <a:t>, </a:t>
-            </a:r>
-            <a:r>
-              <a:rPr>
-                <a:latin typeface="Courier"/>
-              </a:rPr>
-              <a:t>c</a:t>
-            </a:r>
-            <a:r>
-              <a:rPr/>
-              <a:t>)</a:t>
-            </a:r>
-          </a:p>
-          <a:p>
-            <a:pPr lvl="0"/>
-            <a:r>
-              <a:rPr/>
-              <a:t>Avoid dots; use </a:t>
-            </a:r>
-            <a:r>
-              <a:rPr b="1">
-                <a:latin typeface="Courier"/>
-              </a:rPr>
-              <a:t>lower_snake_case</a:t>
-            </a:r>
-            <a:r>
-              <a:rPr/>
-              <a:t> like the tidyverse</a:t>
-            </a:r>
-          </a:p>
-          <a:p>
-            <a:pPr lvl="0" indent="0" marL="0">
-              <a:buNone/>
-            </a:pPr>
-            <a:r>
-              <a:rPr b="1"/>
-              <a:t>⚠️ Watch out!</a:t>
-            </a:r>
-          </a:p>
-          <a:p>
-            <a:pPr lvl="0" indent="0" marL="0">
-              <a:buNone/>
-            </a:pPr>
-            <a:r>
-              <a:rPr>
-                <a:latin typeface="Courier"/>
-              </a:rPr>
-              <a:t>weight_g</a:t>
-            </a:r>
-            <a:r>
-              <a:rPr/>
-              <a:t> and </a:t>
-            </a:r>
-            <a:r>
-              <a:rPr>
-                <a:latin typeface="Courier"/>
-              </a:rPr>
-              <a:t>weight_G</a:t>
-            </a:r>
-            <a:r>
-              <a:rPr/>
-              <a:t> are two </a:t>
-            </a:r>
-            <a:r>
-              <a:rPr i="1"/>
-              <a:t>different</a:t>
-            </a:r>
-            <a:r>
-              <a:rPr/>
-              <a:t> objects. Pick one style and stick with it.</a:t>
+              <a:rPr/>
+              <a:t>Shortcut to toggle: Ctrl/Cmd + Shift + C</a:t>
+            </a:r>
+          </a:p>
+          <a:p>
+            <a:pPr lvl="0" indent="0" marL="1270000">
+              <a:buNone/>
+            </a:pPr>
+            <a:r>
+              <a:rPr sz="2000" b="1"/>
+              <a:t>Note</a:t>
+            </a:r>
+          </a:p>
+          <a:p>
+            <a:pPr lvl="0" indent="0" marL="1270000">
+              <a:buNone/>
+            </a:pPr>
+            <a:r>
+              <a:rPr sz="2000" b="1"/>
+              <a:t>✅ Key idea</a:t>
+            </a:r>
+          </a:p>
+          <a:p>
+            <a:pPr lvl="0" indent="0" marL="1270000">
+              <a:buNone/>
+            </a:pPr>
+            <a:r>
+              <a:rPr sz="2000"/>
+              <a:t>If a line confused you while writing it, comment </a:t>
+            </a:r>
+            <a:r>
+              <a:rPr sz="2000" i="1"/>
+              <a:t>why</a:t>
+            </a:r>
+            <a:r>
+              <a:rPr sz="2000"/>
+              <a:t> you did it.</a:t>
             </a:r>
           </a:p>
         </p:txBody>
@@ -4240,71 +4674,30 @@
           <a:bodyPr/>
           <a:lstStyle/>
           <a:p>
-            <a:pPr lvl="0" indent="0" marL="0">
-              <a:buNone/>
-            </a:pPr>
-            <a:r>
-              <a:rPr b="1"/>
-              <a:t>📖 New word</a:t>
-            </a:r>
-          </a:p>
-          <a:p>
-            <a:pPr lvl="0" indent="0" marL="0">
-              <a:buNone/>
-            </a:pPr>
-            <a:r>
-              <a:rPr b="1"/>
-              <a:t>Object</a:t>
-            </a:r>
-            <a:r>
-              <a:rPr/>
-              <a:t> (R) = </a:t>
-            </a:r>
-            <a:r>
-              <a:rPr b="1"/>
-              <a:t>variable</a:t>
-            </a:r>
-            <a:r>
-              <a:rPr/>
-              <a:t> (Excel/other languages). Same idea: a named box that holds something.</a:t>
-            </a:r>
-          </a:p>
-          <a:p>
-            <a:pPr lvl="0" indent="0" marL="0">
-              <a:buNone/>
-            </a:pPr>
-            <a:r>
-              <a:rPr b="1"/>
-              <a:t>✅ Key idea</a:t>
-            </a:r>
-          </a:p>
-          <a:p>
-            <a:pPr lvl="0" indent="0" marL="0">
-              <a:buNone/>
-            </a:pPr>
-            <a:r>
-              <a:rPr/>
-              <a:t>Nouns for objects (</a:t>
-            </a:r>
-            <a:r>
-              <a:rPr>
-                <a:latin typeface="Courier"/>
-              </a:rPr>
-              <a:t>tree_df</a:t>
-            </a:r>
-            <a:r>
-              <a:rPr/>
-              <a:t>), verbs for functions (</a:t>
-            </a:r>
-            <a:r>
-              <a:rPr>
-                <a:latin typeface="Courier"/>
-              </a:rPr>
-              <a:t>filter</a:t>
-            </a:r>
-            <a:r>
-              <a:rPr/>
-              <a:t>).</a:t>
+            <a:pPr lvl="0" indent="0" marL="1270000">
+              <a:buNone/>
+            </a:pPr>
+            <a:r>
+              <a:rPr sz="2000" b="1"/>
+              <a:t>Note</a:t>
+            </a:r>
+          </a:p>
+          <a:p>
+            <a:pPr lvl="0" indent="0" marL="1270000">
+              <a:buNone/>
+            </a:pPr>
+            <a:r>
+              <a:rPr sz="2000" b="1"/>
+              <a:t>📊 Coming from Excel?</a:t>
+            </a:r>
+          </a:p>
+          <a:p>
+            <a:pPr lvl="0" indent="0" marL="1270000">
+              <a:buNone/>
+            </a:pPr>
+            <a:r>
+              <a:rPr sz="2000"/>
+              <a:t>Comments are like the notes you scribble in a cell — but they never get in the way of the numbers or the code.</a:t>
             </a:r>
           </a:p>
         </p:txBody>
@@ -4359,13 +4752,7 @@
             </a:pPr>
             <a:r>
               <a:rPr/>
-              <a:t>Leave notes with comments </a:t>
-            </a:r>
-            <a:r>
-              <a:rPr>
-                <a:latin typeface="Courier"/>
-              </a:rPr>
-              <a:t>#</a:t>
+              <a:t>Functions and their arguments</a:t>
             </a:r>
           </a:p>
         </p:txBody>
@@ -4390,25 +4777,31 @@
             </a:pPr>
             <a:r>
               <a:rPr/>
-              <a:t>Anything to the right of </a:t>
-            </a:r>
-            <a:r>
-              <a:rPr>
-                <a:latin typeface="Courier"/>
-              </a:rPr>
-              <a:t>#</a:t>
-            </a:r>
-            <a:r>
-              <a:rPr/>
-              <a:t> is </a:t>
+              <a:t>A </a:t>
             </a:r>
             <a:r>
               <a:rPr b="1"/>
-              <a:t>ignored by R</a:t>
-            </a:r>
-            <a:r>
-              <a:rPr/>
-              <a:t> — it’s a note to humans:</a:t>
+              <a:t>function</a:t>
+            </a:r>
+            <a:r>
+              <a:rPr/>
+              <a:t> is a canned script you call by name. You feed it </a:t>
+            </a:r>
+            <a:r>
+              <a:rPr b="1"/>
+              <a:t>arguments</a:t>
+            </a:r>
+            <a:r>
+              <a:rPr/>
+              <a:t> (inputs); it </a:t>
+            </a:r>
+            <a:r>
+              <a:rPr b="1"/>
+              <a:t>returns</a:t>
+            </a:r>
+            <a:r>
+              <a:rPr/>
+              <a:t> a result:</a:t>
             </a:r>
           </a:p>
           <a:p>
@@ -4418,30 +4811,57 @@
             <a:r>
               <a:rPr>
                 <a:solidFill>
+                  <a:srgbClr val="4758AB"/>
+                </a:solidFill>
+                <a:latin typeface="Courier"/>
+              </a:rPr>
+              <a:t>sqrt</a:t>
+            </a:r>
+            <a:r>
+              <a:rPr>
+                <a:solidFill>
+                  <a:srgbClr val="003B4F"/>
+                </a:solidFill>
+                <a:latin typeface="Courier"/>
+              </a:rPr>
+              <a:t>(</a:t>
+            </a:r>
+            <a:r>
+              <a:rPr>
+                <a:solidFill>
+                  <a:srgbClr val="AD0000"/>
+                </a:solidFill>
+                <a:latin typeface="Courier"/>
+              </a:rPr>
+              <a:t>10</a:t>
+            </a:r>
+            <a:r>
+              <a:rPr>
+                <a:solidFill>
+                  <a:srgbClr val="003B4F"/>
+                </a:solidFill>
+                <a:latin typeface="Courier"/>
+              </a:rPr>
+              <a:t>)                         </a:t>
+            </a:r>
+            <a:r>
+              <a:rPr>
+                <a:solidFill>
                   <a:srgbClr val="5E5E5E"/>
                 </a:solidFill>
                 <a:latin typeface="Courier"/>
               </a:rPr>
-              <a:t># weights of four leaves, in grams</a:t>
+              <a:t># one argument</a:t>
             </a:r>
             <a:br/>
             <a:r>
               <a:rPr>
                 <a:solidFill>
-                  <a:srgbClr val="003B4F"/>
-                </a:solidFill>
-                <a:latin typeface="Courier"/>
-              </a:rPr>
-              <a:t>leaf_mass &lt;- </a:t>
-            </a:r>
-            <a:r>
-              <a:rPr>
-                <a:solidFill>
                   <a:srgbClr val="4758AB"/>
                 </a:solidFill>
                 <a:latin typeface="Courier"/>
               </a:rPr>
-              <a:t>c</a:t>
+              <a:t>round</a:t>
             </a:r>
             <a:r>
               <a:rPr>
@@ -4459,7 +4879,53 @@
                 </a:solidFill>
                 <a:latin typeface="Courier"/>
               </a:rPr>
-              <a:t>4</a:t>
+              <a:t>3.14159</a:t>
+            </a:r>
+            <a:r>
+              <a:rPr>
+                <a:solidFill>
+                  <a:srgbClr val="003B4F"/>
+                </a:solidFill>
+                <a:latin typeface="Courier"/>
+              </a:rPr>
+              <a:t>)                   </a:t>
+            </a:r>
+            <a:r>
+              <a:rPr>
+                <a:solidFill>
+                  <a:srgbClr val="5E5E5E"/>
+                </a:solidFill>
+                <a:latin typeface="Courier"/>
+              </a:rPr>
+              <a:t># default: 0 digits → 3</a:t>
+            </a:r>
+            <a:br/>
+            <a:r>
+              <a:rPr>
+                <a:solidFill>
+                  <a:srgbClr val="4758AB"/>
+                </a:solidFill>
+                <a:latin typeface="Courier"/>
+              </a:rPr>
+              <a:t>round</a:t>
+            </a:r>
+            <a:r>
+              <a:rPr>
+                <a:solidFill>
+                  <a:srgbClr val="003B4F"/>
+                </a:solidFill>
+                <a:latin typeface="Courier"/>
+              </a:rPr>
+              <a:t>(</a:t>
+            </a:r>
+            <a:r>
+              <a:rPr>
+                <a:solidFill>
+                  <a:srgbClr val="AD0000"/>
+                </a:solidFill>
+                <a:latin typeface="Courier"/>
+              </a:rPr>
+              <a:t>3.14159</a:t>
             </a:r>
             <a:r>
               <a:rPr>
@@ -4477,7 +4943,71 @@
                 </a:solidFill>
                 <a:latin typeface="Courier"/>
               </a:rPr>
-              <a:t>3</a:t>
+              <a:t>2</a:t>
+            </a:r>
+            <a:r>
+              <a:rPr>
+                <a:solidFill>
+                  <a:srgbClr val="003B4F"/>
+                </a:solidFill>
+                <a:latin typeface="Courier"/>
+              </a:rPr>
+              <a:t>)                </a:t>
+            </a:r>
+            <a:r>
+              <a:rPr>
+                <a:solidFill>
+                  <a:srgbClr val="5E5E5E"/>
+                </a:solidFill>
+                <a:latin typeface="Courier"/>
+              </a:rPr>
+              <a:t># two digits → 3.14</a:t>
+            </a:r>
+            <a:br/>
+            <a:r>
+              <a:rPr>
+                <a:solidFill>
+                  <a:srgbClr val="4758AB"/>
+                </a:solidFill>
+                <a:latin typeface="Courier"/>
+              </a:rPr>
+              <a:t>round</a:t>
+            </a:r>
+            <a:r>
+              <a:rPr>
+                <a:solidFill>
+                  <a:srgbClr val="003B4F"/>
+                </a:solidFill>
+                <a:latin typeface="Courier"/>
+              </a:rPr>
+              <a:t>(</a:t>
+            </a:r>
+            <a:r>
+              <a:rPr>
+                <a:solidFill>
+                  <a:srgbClr val="657422"/>
+                </a:solidFill>
+                <a:latin typeface="Courier"/>
+              </a:rPr>
+              <a:t>x =</a:t>
+            </a:r>
+            <a:r>
+              <a:rPr>
+                <a:solidFill>
+                  <a:srgbClr val="003B4F"/>
+                </a:solidFill>
+                <a:latin typeface="Courier"/>
+              </a:rPr>
+              <a:t> </a:t>
+            </a:r>
+            <a:r>
+              <a:rPr>
+                <a:solidFill>
+                  <a:srgbClr val="AD0000"/>
+                </a:solidFill>
+                <a:latin typeface="Courier"/>
+              </a:rPr>
+              <a:t>3.14159</a:t>
             </a:r>
             <a:r>
               <a:rPr>
@@ -4491,41 +5021,81 @@
             <a:r>
               <a:rPr>
                 <a:solidFill>
+                  <a:srgbClr val="657422"/>
+                </a:solidFill>
+                <a:latin typeface="Courier"/>
+              </a:rPr>
+              <a:t>digits =</a:t>
+            </a:r>
+            <a:r>
+              <a:rPr>
+                <a:solidFill>
+                  <a:srgbClr val="003B4F"/>
+                </a:solidFill>
+                <a:latin typeface="Courier"/>
+              </a:rPr>
+              <a:t> </a:t>
+            </a:r>
+            <a:r>
+              <a:rPr>
+                <a:solidFill>
                   <a:srgbClr val="AD0000"/>
                 </a:solidFill>
                 <a:latin typeface="Courier"/>
               </a:rPr>
-              <a:t>5</a:t>
-            </a:r>
-            <a:r>
-              <a:rPr>
-                <a:solidFill>
-                  <a:srgbClr val="003B4F"/>
-                </a:solidFill>
-                <a:latin typeface="Courier"/>
-              </a:rPr>
-              <a:t>, </a:t>
-            </a:r>
-            <a:r>
-              <a:rPr>
-                <a:solidFill>
-                  <a:srgbClr val="AD0000"/>
-                </a:solidFill>
-                <a:latin typeface="Courier"/>
-              </a:rPr>
-              <a:t>7</a:t>
-            </a:r>
-            <a:r>
-              <a:rPr>
-                <a:solidFill>
-                  <a:srgbClr val="003B4F"/>
-                </a:solidFill>
-                <a:latin typeface="Courier"/>
-              </a:rPr>
-              <a:t>)</a:t>
+              <a:t>2</a:t>
+            </a:r>
+            <a:r>
+              <a:rPr>
+                <a:solidFill>
+                  <a:srgbClr val="003B4F"/>
+                </a:solidFill>
+                <a:latin typeface="Courier"/>
+              </a:rPr>
+              <a:t>)  </a:t>
+            </a:r>
+            <a:r>
+              <a:rPr>
+                <a:solidFill>
+                  <a:srgbClr val="5E5E5E"/>
+                </a:solidFill>
+                <a:latin typeface="Courier"/>
+              </a:rPr>
+              <a:t># named arguments</a:t>
+            </a:r>
+          </a:p>
+          <a:p>
+            <a:pPr lvl="0" indent="0" marL="0">
+              <a:buNone/>
+            </a:pPr>
+            <a:r>
+              <a:rPr/>
+              <a:t>Stuck on a function?</a:t>
+            </a:r>
+          </a:p>
+          <a:p>
+            <a:pPr lvl="0" indent="0">
+              <a:buNone/>
+            </a:pPr>
+            <a:r>
+              <a:rPr>
+                <a:solidFill>
+                  <a:srgbClr val="003B4F"/>
+                </a:solidFill>
+                <a:latin typeface="Courier"/>
+              </a:rPr>
+              <a:t>?round        </a:t>
+            </a:r>
+            <a:r>
+              <a:rPr>
+                <a:solidFill>
+                  <a:srgbClr val="5E5E5E"/>
+                </a:solidFill>
+                <a:latin typeface="Courier"/>
+              </a:rPr>
+              <a:t># open the help page</a:t>
             </a:r>
             <a:br/>
-            <a:br/>
             <a:r>
               <a:rPr>
                 <a:solidFill>
@@ -4533,16 +5103,16 @@
                 </a:solidFill>
                 <a:latin typeface="Courier"/>
               </a:rPr>
-              <a:t>mean</a:t>
-            </a:r>
-            <a:r>
-              <a:rPr>
-                <a:solidFill>
-                  <a:srgbClr val="003B4F"/>
-                </a:solidFill>
-                <a:latin typeface="Courier"/>
-              </a:rPr>
-              <a:t>(leaf_mass)   </a:t>
+              <a:t>args</a:t>
+            </a:r>
+            <a:r>
+              <a:rPr>
+                <a:solidFill>
+                  <a:srgbClr val="003B4F"/>
+                </a:solidFill>
+                <a:latin typeface="Courier"/>
+              </a:rPr>
+              <a:t>(round)   </a:t>
             </a:r>
             <a:r>
               <a:rPr>
@@ -4551,85 +5121,82 @@
                 </a:solidFill>
                 <a:latin typeface="Courier"/>
               </a:rPr>
-              <a:t># average leaf mass</a:t>
-            </a:r>
-          </a:p>
-          <a:p>
-            <a:pPr lvl="0"/>
-            <a:r>
-              <a:rPr/>
-              <a:t>Comment generously — your future self will thank you.</a:t>
-            </a:r>
-          </a:p>
-          <a:p>
-            <a:pPr lvl="0"/>
-            <a:r>
-              <a:rPr/>
-              <a:t>Shortcut to toggle a line: Ctrl/Cmd + Shift + C.</a:t>
-            </a:r>
-          </a:p>
-          <a:p>
-            <a:pPr lvl="0" indent="0" marL="0">
-              <a:buNone/>
-            </a:pPr>
-            <a:r>
-              <a:rPr b="1"/>
-              <a:t>✅ Key idea</a:t>
-            </a:r>
-          </a:p>
-          <a:p>
-            <a:pPr lvl="0" indent="0" marL="0">
-              <a:buNone/>
-            </a:pPr>
-            <a:r>
-              <a:rPr/>
-              <a:t>If a line confused you while writing it, comment </a:t>
-            </a:r>
-            <a:r>
-              <a:rPr i="1"/>
-              <a:t>why</a:t>
-            </a:r>
-            <a:r>
-              <a:rPr/>
-              <a:t> you did it.</a:t>
+              <a:t># what arguments does it take?</a:t>
+            </a:r>
+          </a:p>
+          <a:p>
+            <a:pPr lvl="0" indent="0" marL="1270000">
+              <a:buNone/>
+            </a:pPr>
+            <a:r>
+              <a:rPr sz="2000" b="1"/>
+              <a:t>Note</a:t>
+            </a:r>
+          </a:p>
+          <a:p>
+            <a:pPr lvl="0" indent="0" marL="1270000">
+              <a:buNone/>
+            </a:pPr>
+            <a:r>
+              <a:rPr sz="2000" b="1"/>
+              <a:t>📖 New word</a:t>
+            </a:r>
+          </a:p>
+          <a:p>
+            <a:pPr lvl="0" indent="0" marL="1270000">
+              <a:buNone/>
+            </a:pPr>
+            <a:r>
+              <a:rPr sz="2000" b="1"/>
+              <a:t>Argument</a:t>
+            </a:r>
+            <a:r>
+              <a:rPr sz="2000"/>
+              <a:t> = an input you hand to a function inside its </a:t>
+            </a:r>
+            <a:r>
+              <a:rPr sz="2000">
+                <a:latin typeface="Courier"/>
+              </a:rPr>
+              <a:t>( )</a:t>
+            </a:r>
+            <a:r>
+              <a:rPr sz="2000"/>
+              <a:t>.</a:t>
             </a:r>
           </a:p>
         </p:txBody>
       </p:sp>
-      <p:sp>
-        <p:nvSpPr>
-          <p:cNvPr id="4" name="Content Placeholder 3"/>
-          <p:cNvSpPr>
-            <a:spLocks noGrp="1"/>
-          </p:cNvSpPr>
-          <p:nvPr>
-            <p:ph idx="2" sz="half"/>
-          </p:nvPr>
-        </p:nvSpPr>
-        <p:spPr/>
-        <p:txBody>
-          <a:bodyPr/>
-          <a:lstStyle/>
-          <a:p>
-            <a:pPr lvl="0" indent="0" marL="0">
-              <a:buNone/>
-            </a:pPr>
-            <a:r>
-              <a:rPr b="1"/>
-              <a:t>📊 Coming from Excel?</a:t>
-            </a:r>
-          </a:p>
-          <a:p>
-            <a:pPr lvl="0" indent="0" marL="0">
-              <a:buNone/>
-            </a:pPr>
-            <a:r>
-              <a:rPr/>
-              <a:t>Comments are like the little notes you scribble in a spreadsheet cell — but they never get in the way of the numbers.</a:t>
-            </a:r>
-          </a:p>
-        </p:txBody>
-      </p:sp>
+      <p:pic>
+        <p:nvPicPr>
+          <p:cNvPr descr="images/diagram_function.png" id="0" name="Picture 1"/>
+          <p:cNvPicPr>
+            <a:picLocks noGrp="1" noChangeAspect="1"/>
+          </p:cNvPicPr>
+          <p:nvPr/>
+        </p:nvPicPr>
+        <p:blipFill>
+          <a:blip r:embed="rId2"/>
+          <a:stretch>
+            <a:fillRect/>
+          </a:stretch>
+        </p:blipFill>
+        <p:spPr bwMode="auto">
+          <a:xfrm>
+            <a:off x="4495800" y="876300"/>
+            <a:ext cx="4406900" cy="3390900"/>
+          </a:xfrm>
+          <a:prstGeom prst="rect">
+            <a:avLst/>
+          </a:prstGeom>
+          <a:noFill/>
+          <a:ln w="9525">
+            <a:noFill/>
+            <a:headEnd/>
+            <a:tailEnd/>
+          </a:ln>
+        </p:spPr>
+      </p:pic>
     </p:spTree>
   </p:cSld>
 </p:sld>
@@ -4680,7 +5247,7 @@
             </a:pPr>
             <a:r>
               <a:rPr/>
-              <a:t>Functions and their arguments</a:t>
+              <a:t>Vectors — a row of values</a:t>
             </a:r>
           </a:p>
         </p:txBody>
@@ -4709,27 +5276,21 @@
             </a:r>
             <a:r>
               <a:rPr b="1"/>
-              <a:t>function</a:t>
-            </a:r>
-            <a:r>
-              <a:rPr/>
-              <a:t> is a canned script you call by name. You feed it </a:t>
-            </a:r>
-            <a:r>
-              <a:rPr b="1"/>
-              <a:t>arguments</a:t>
-            </a:r>
-            <a:r>
-              <a:rPr/>
-              <a:t> (inputs); it </a:t>
-            </a:r>
-            <a:r>
-              <a:rPr b="1"/>
-              <a:t>returns</a:t>
-            </a:r>
-            <a:r>
-              <a:rPr/>
-              <a:t> a result.</a:t>
+              <a:t>vector</a:t>
+            </a:r>
+            <a:r>
+              <a:rPr/>
+              <a:t> is a series of values built with </a:t>
+            </a:r>
+            <a:r>
+              <a:rPr>
+                <a:latin typeface="Courier"/>
+              </a:rPr>
+              <a:t>c()</a:t>
+            </a:r>
+            <a:r>
+              <a:rPr/>
+              <a:t> (“combine”):</a:t>
             </a:r>
           </a:p>
           <a:p>
@@ -4739,11 +5300,20 @@
             <a:r>
               <a:rPr>
                 <a:solidFill>
+                  <a:srgbClr val="003B4F"/>
+                </a:solidFill>
+                <a:latin typeface="Courier"/>
+              </a:rPr>
+              <a:t>weight_g &lt;- </a:t>
+            </a:r>
+            <a:r>
+              <a:rPr>
+                <a:solidFill>
                   <a:srgbClr val="4758AB"/>
                 </a:solidFill>
                 <a:latin typeface="Courier"/>
               </a:rPr>
-              <a:t>sqrt</a:t>
+              <a:t>c</a:t>
             </a:r>
             <a:r>
               <a:rPr>
@@ -4761,16 +5331,70 @@
                 </a:solidFill>
                 <a:latin typeface="Courier"/>
               </a:rPr>
-              <a:t>10</a:t>
-            </a:r>
-            <a:r>
-              <a:rPr>
-                <a:solidFill>
-                  <a:srgbClr val="003B4F"/>
-                </a:solidFill>
-                <a:latin typeface="Courier"/>
-              </a:rPr>
-              <a:t>)               </a:t>
+              <a:t>4</a:t>
+            </a:r>
+            <a:r>
+              <a:rPr>
+                <a:solidFill>
+                  <a:srgbClr val="003B4F"/>
+                </a:solidFill>
+                <a:latin typeface="Courier"/>
+              </a:rPr>
+              <a:t>, </a:t>
+            </a:r>
+            <a:r>
+              <a:rPr>
+                <a:solidFill>
+                  <a:srgbClr val="AD0000"/>
+                </a:solidFill>
+                <a:latin typeface="Courier"/>
+              </a:rPr>
+              <a:t>3</a:t>
+            </a:r>
+            <a:r>
+              <a:rPr>
+                <a:solidFill>
+                  <a:srgbClr val="003B4F"/>
+                </a:solidFill>
+                <a:latin typeface="Courier"/>
+              </a:rPr>
+              <a:t>, </a:t>
+            </a:r>
+            <a:r>
+              <a:rPr>
+                <a:solidFill>
+                  <a:srgbClr val="AD0000"/>
+                </a:solidFill>
+                <a:latin typeface="Courier"/>
+              </a:rPr>
+              <a:t>5</a:t>
+            </a:r>
+            <a:r>
+              <a:rPr>
+                <a:solidFill>
+                  <a:srgbClr val="003B4F"/>
+                </a:solidFill>
+                <a:latin typeface="Courier"/>
+              </a:rPr>
+              <a:t>, </a:t>
+            </a:r>
+            <a:r>
+              <a:rPr>
+                <a:solidFill>
+                  <a:srgbClr val="AD0000"/>
+                </a:solidFill>
+                <a:latin typeface="Courier"/>
+              </a:rPr>
+              <a:t>7</a:t>
+            </a:r>
+            <a:r>
+              <a:rPr>
+                <a:solidFill>
+                  <a:srgbClr val="003B4F"/>
+                </a:solidFill>
+                <a:latin typeface="Courier"/>
+              </a:rPr>
+              <a:t>)          </a:t>
             </a:r>
             <a:r>
               <a:rPr>
@@ -4779,17 +5403,26 @@
                 </a:solidFill>
                 <a:latin typeface="Courier"/>
               </a:rPr>
-              <a:t># one argument</a:t>
+              <a:t># numbers</a:t>
             </a:r>
             <a:br/>
             <a:r>
               <a:rPr>
                 <a:solidFill>
+                  <a:srgbClr val="003B4F"/>
+                </a:solidFill>
+                <a:latin typeface="Courier"/>
+              </a:rPr>
+              <a:t>side     &lt;- </a:t>
+            </a:r>
+            <a:r>
+              <a:rPr>
+                <a:solidFill>
                   <a:srgbClr val="4758AB"/>
                 </a:solidFill>
                 <a:latin typeface="Courier"/>
               </a:rPr>
-              <a:t>round</a:t>
+              <a:t>c</a:t>
             </a:r>
             <a:r>
               <a:rPr>
@@ -4803,20 +5436,38 @@
             <a:r>
               <a:rPr>
                 <a:solidFill>
-                  <a:srgbClr val="AD0000"/>
-                </a:solidFill>
-                <a:latin typeface="Courier"/>
-              </a:rPr>
-              <a:t>3.14159</a:t>
-            </a:r>
-            <a:r>
-              <a:rPr>
-                <a:solidFill>
-                  <a:srgbClr val="003B4F"/>
-                </a:solidFill>
-                <a:latin typeface="Courier"/>
-              </a:rPr>
-              <a:t>)         </a:t>
+                  <a:srgbClr val="20794D"/>
+                </a:solidFill>
+                <a:latin typeface="Courier"/>
+              </a:rPr>
+              <a:t>"sunny"</a:t>
+            </a:r>
+            <a:r>
+              <a:rPr>
+                <a:solidFill>
+                  <a:srgbClr val="003B4F"/>
+                </a:solidFill>
+                <a:latin typeface="Courier"/>
+              </a:rPr>
+              <a:t>, </a:t>
+            </a:r>
+            <a:r>
+              <a:rPr>
+                <a:solidFill>
+                  <a:srgbClr val="20794D"/>
+                </a:solidFill>
+                <a:latin typeface="Courier"/>
+              </a:rPr>
+              <a:t>"shady"</a:t>
+            </a:r>
+            <a:r>
+              <a:rPr>
+                <a:solidFill>
+                  <a:srgbClr val="003B4F"/>
+                </a:solidFill>
+                <a:latin typeface="Courier"/>
+              </a:rPr>
+              <a:t>)     </a:t>
             </a:r>
             <a:r>
               <a:rPr>
@@ -4825,7 +5476,48 @@
                 </a:solidFill>
                 <a:latin typeface="Courier"/>
               </a:rPr>
-              <a:t># default: 0 digits -&gt; 3</a:t>
+              <a:t># text needs quotes</a:t>
+            </a:r>
+          </a:p>
+          <a:p>
+            <a:pPr lvl="0" indent="0" marL="0">
+              <a:buNone/>
+            </a:pPr>
+            <a:r>
+              <a:rPr/>
+              <a:t>Inspect any vector:</a:t>
+            </a:r>
+          </a:p>
+          <a:p>
+            <a:pPr lvl="0" indent="0">
+              <a:buNone/>
+            </a:pPr>
+            <a:r>
+              <a:rPr>
+                <a:solidFill>
+                  <a:srgbClr val="4758AB"/>
+                </a:solidFill>
+                <a:latin typeface="Courier"/>
+              </a:rPr>
+              <a:t>length</a:t>
+            </a:r>
+            <a:r>
+              <a:rPr>
+                <a:solidFill>
+                  <a:srgbClr val="003B4F"/>
+                </a:solidFill>
+                <a:latin typeface="Courier"/>
+              </a:rPr>
+              <a:t>(weight_g)   </a:t>
+            </a:r>
+            <a:r>
+              <a:rPr>
+                <a:solidFill>
+                  <a:srgbClr val="5E5E5E"/>
+                </a:solidFill>
+                <a:latin typeface="Courier"/>
+              </a:rPr>
+              <a:t># how many values?</a:t>
             </a:r>
             <a:br/>
             <a:r>
@@ -4835,52 +5527,16 @@
                 </a:solidFill>
                 <a:latin typeface="Courier"/>
               </a:rPr>
-              <a:t>round</a:t>
-            </a:r>
-            <a:r>
-              <a:rPr>
-                <a:solidFill>
-                  <a:srgbClr val="003B4F"/>
-                </a:solidFill>
-                <a:latin typeface="Courier"/>
-              </a:rPr>
-              <a:t>(</a:t>
-            </a:r>
-            <a:r>
-              <a:rPr>
-                <a:solidFill>
-                  <a:srgbClr val="AD0000"/>
-                </a:solidFill>
-                <a:latin typeface="Courier"/>
-              </a:rPr>
-              <a:t>3.14159</a:t>
-            </a:r>
-            <a:r>
-              <a:rPr>
-                <a:solidFill>
-                  <a:srgbClr val="003B4F"/>
-                </a:solidFill>
-                <a:latin typeface="Courier"/>
-              </a:rPr>
-              <a:t>, </a:t>
-            </a:r>
-            <a:r>
-              <a:rPr>
-                <a:solidFill>
-                  <a:srgbClr val="AD0000"/>
-                </a:solidFill>
-                <a:latin typeface="Courier"/>
-              </a:rPr>
-              <a:t>2</a:t>
-            </a:r>
-            <a:r>
-              <a:rPr>
-                <a:solidFill>
-                  <a:srgbClr val="003B4F"/>
-                </a:solidFill>
-                <a:latin typeface="Courier"/>
-              </a:rPr>
-              <a:t>)      </a:t>
+              <a:t>class</a:t>
+            </a:r>
+            <a:r>
+              <a:rPr>
+                <a:solidFill>
+                  <a:srgbClr val="003B4F"/>
+                </a:solidFill>
+                <a:latin typeface="Courier"/>
+              </a:rPr>
+              <a:t>(weight_g)    </a:t>
             </a:r>
             <a:r>
               <a:rPr>
@@ -4889,7 +5545,7 @@
                 </a:solidFill>
                 <a:latin typeface="Courier"/>
               </a:rPr>
-              <a:t># two digits     -&gt; 3.14</a:t>
+              <a:t># what type?</a:t>
             </a:r>
             <a:br/>
             <a:r>
@@ -4899,88 +5555,16 @@
                 </a:solidFill>
                 <a:latin typeface="Courier"/>
               </a:rPr>
-              <a:t>round</a:t>
-            </a:r>
-            <a:r>
-              <a:rPr>
-                <a:solidFill>
-                  <a:srgbClr val="003B4F"/>
-                </a:solidFill>
-                <a:latin typeface="Courier"/>
-              </a:rPr>
-              <a:t>(</a:t>
-            </a:r>
-            <a:r>
-              <a:rPr>
-                <a:solidFill>
-                  <a:srgbClr val="657422"/>
-                </a:solidFill>
-                <a:latin typeface="Courier"/>
-              </a:rPr>
-              <a:t>x =</a:t>
-            </a:r>
-            <a:r>
-              <a:rPr>
-                <a:solidFill>
-                  <a:srgbClr val="003B4F"/>
-                </a:solidFill>
-                <a:latin typeface="Courier"/>
-              </a:rPr>
-              <a:t> </a:t>
-            </a:r>
-            <a:r>
-              <a:rPr>
-                <a:solidFill>
-                  <a:srgbClr val="AD0000"/>
-                </a:solidFill>
-                <a:latin typeface="Courier"/>
-              </a:rPr>
-              <a:t>3.14159</a:t>
-            </a:r>
-            <a:r>
-              <a:rPr>
-                <a:solidFill>
-                  <a:srgbClr val="003B4F"/>
-                </a:solidFill>
-                <a:latin typeface="Courier"/>
-              </a:rPr>
-              <a:t>, </a:t>
-            </a:r>
-            <a:r>
-              <a:rPr>
-                <a:solidFill>
-                  <a:srgbClr val="657422"/>
-                </a:solidFill>
-                <a:latin typeface="Courier"/>
-              </a:rPr>
-              <a:t>digits =</a:t>
-            </a:r>
-            <a:r>
-              <a:rPr>
-                <a:solidFill>
-                  <a:srgbClr val="003B4F"/>
-                </a:solidFill>
-                <a:latin typeface="Courier"/>
-              </a:rPr>
-              <a:t> </a:t>
-            </a:r>
-            <a:r>
-              <a:rPr>
-                <a:solidFill>
-                  <a:srgbClr val="AD0000"/>
-                </a:solidFill>
-                <a:latin typeface="Courier"/>
-              </a:rPr>
-              <a:t>2</a:t>
-            </a:r>
-            <a:r>
-              <a:rPr>
-                <a:solidFill>
-                  <a:srgbClr val="003B4F"/>
-                </a:solidFill>
-                <a:latin typeface="Courier"/>
-              </a:rPr>
-              <a:t>)   </a:t>
+              <a:t>str</a:t>
+            </a:r>
+            <a:r>
+              <a:rPr>
+                <a:solidFill>
+                  <a:srgbClr val="003B4F"/>
+                </a:solidFill>
+                <a:latin typeface="Courier"/>
+              </a:rPr>
+              <a:t>(weight_g)      </a:t>
             </a:r>
             <a:r>
               <a:rPr>
@@ -4989,133 +5573,117 @@
                 </a:solidFill>
                 <a:latin typeface="Courier"/>
               </a:rPr>
-              <a:t># named</a:t>
-            </a:r>
-          </a:p>
-          <a:p>
-            <a:pPr lvl="0" indent="0" marL="0">
-              <a:buNone/>
-            </a:pPr>
-            <a:r>
-              <a:rPr/>
-              <a:t>Stuck on a function? Ask R:</a:t>
-            </a:r>
-          </a:p>
-          <a:p>
-            <a:pPr lvl="0" indent="0">
-              <a:buNone/>
-            </a:pPr>
-            <a:r>
-              <a:rPr>
-                <a:solidFill>
-                  <a:srgbClr val="003B4F"/>
-                </a:solidFill>
-                <a:latin typeface="Courier"/>
-              </a:rPr>
-              <a:t>?round        </a:t>
-            </a:r>
-            <a:r>
-              <a:rPr>
-                <a:solidFill>
-                  <a:srgbClr val="5E5E5E"/>
-                </a:solidFill>
-                <a:latin typeface="Courier"/>
-              </a:rPr>
-              <a:t># open the help page</a:t>
-            </a:r>
-            <a:br/>
-            <a:r>
-              <a:rPr>
-                <a:solidFill>
-                  <a:srgbClr val="4758AB"/>
-                </a:solidFill>
-                <a:latin typeface="Courier"/>
-              </a:rPr>
-              <a:t>args</a:t>
-            </a:r>
-            <a:r>
-              <a:rPr>
-                <a:solidFill>
-                  <a:srgbClr val="003B4F"/>
-                </a:solidFill>
-                <a:latin typeface="Courier"/>
-              </a:rPr>
-              <a:t>(round)   </a:t>
-            </a:r>
-            <a:r>
-              <a:rPr>
-                <a:solidFill>
-                  <a:srgbClr val="5E5E5E"/>
-                </a:solidFill>
-                <a:latin typeface="Courier"/>
-              </a:rPr>
-              <a:t># what arguments does it take?</a:t>
-            </a:r>
-          </a:p>
-          <a:p>
-            <a:pPr lvl="0" indent="0" marL="0">
-              <a:buNone/>
-            </a:pPr>
-            <a:r>
-              <a:rPr b="1"/>
-              <a:t>📖 New word</a:t>
-            </a:r>
-          </a:p>
-          <a:p>
-            <a:pPr lvl="0" indent="0" marL="0">
-              <a:buNone/>
-            </a:pPr>
-            <a:r>
-              <a:rPr b="1"/>
-              <a:t>Argument</a:t>
-            </a:r>
-            <a:r>
-              <a:rPr/>
-              <a:t> = an input you hand to a function, inside its </a:t>
-            </a:r>
-            <a:r>
-              <a:rPr>
-                <a:latin typeface="Courier"/>
-              </a:rPr>
-              <a:t>( )</a:t>
-            </a:r>
-            <a:r>
-              <a:rPr/>
-              <a:t>.</a:t>
+              <a:t># quick structure overview</a:t>
+            </a:r>
+          </a:p>
+          <a:p>
+            <a:pPr lvl="0" indent="0" marL="1270000">
+              <a:buNone/>
+            </a:pPr>
+            <a:r>
+              <a:rPr sz="2000" b="1"/>
+              <a:t>Warning</a:t>
+            </a:r>
+          </a:p>
+          <a:p>
+            <a:pPr lvl="0" indent="0" marL="1270000">
+              <a:buNone/>
+            </a:pPr>
+            <a:r>
+              <a:rPr sz="2000" b="1"/>
+              <a:t>⚠️ Watch out!</a:t>
+            </a:r>
+          </a:p>
+          <a:p>
+            <a:pPr lvl="0" indent="0" marL="1270000">
+              <a:buNone/>
+            </a:pPr>
+            <a:r>
+              <a:rPr sz="2000"/>
+              <a:t>Quotes matter: </a:t>
+            </a:r>
+            <a:r>
+              <a:rPr sz="2000">
+                <a:latin typeface="Courier"/>
+              </a:rPr>
+              <a:t>"sunny"</a:t>
+            </a:r>
+            <a:r>
+              <a:rPr sz="2000"/>
+              <a:t> is text. Without quotes, R hunts for an </a:t>
+            </a:r>
+            <a:r>
+              <a:rPr sz="2000" b="1"/>
+              <a:t>object</a:t>
+            </a:r>
+            <a:r>
+              <a:rPr sz="2000"/>
+              <a:t> named </a:t>
+            </a:r>
+            <a:r>
+              <a:rPr sz="2000">
+                <a:latin typeface="Courier"/>
+              </a:rPr>
+              <a:t>sunny</a:t>
+            </a:r>
+            <a:r>
+              <a:rPr sz="2000"/>
+              <a:t> and errors when it cannot find one.</a:t>
             </a:r>
           </a:p>
         </p:txBody>
       </p:sp>
-      <p:pic>
-        <p:nvPicPr>
-          <p:cNvPr descr="images/diagram_function.png" id="0" name="Picture 1"/>
-          <p:cNvPicPr>
-            <a:picLocks noGrp="1" noChangeAspect="1"/>
-          </p:cNvPicPr>
-          <p:nvPr/>
-        </p:nvPicPr>
-        <p:blipFill>
-          <a:blip r:embed="rId2"/>
-          <a:stretch>
-            <a:fillRect/>
-          </a:stretch>
-        </p:blipFill>
-        <p:spPr bwMode="auto">
-          <a:xfrm>
-            <a:off x="4495800" y="876300"/>
-            <a:ext cx="4406900" cy="3390900"/>
-          </a:xfrm>
-          <a:prstGeom prst="rect">
-            <a:avLst/>
-          </a:prstGeom>
-          <a:noFill/>
-          <a:ln w="9525">
-            <a:noFill/>
-            <a:headEnd/>
-            <a:tailEnd/>
-          </a:ln>
-        </p:spPr>
-      </p:pic>
+      <p:sp>
+        <p:nvSpPr>
+          <p:cNvPr id="4" name="Content Placeholder 3"/>
+          <p:cNvSpPr>
+            <a:spLocks noGrp="1"/>
+          </p:cNvSpPr>
+          <p:nvPr>
+            <p:ph idx="2" sz="half"/>
+          </p:nvPr>
+        </p:nvSpPr>
+        <p:spPr/>
+        <p:txBody>
+          <a:bodyPr/>
+          <a:lstStyle/>
+          <a:p>
+            <a:pPr lvl="0" indent="0" marL="1270000">
+              <a:buNone/>
+            </a:pPr>
+            <a:r>
+              <a:rPr sz="2000" b="1"/>
+              <a:t>Note</a:t>
+            </a:r>
+          </a:p>
+          <a:p>
+            <a:pPr lvl="0" indent="0" marL="1270000">
+              <a:buNone/>
+            </a:pPr>
+            <a:r>
+              <a:rPr sz="2000" b="1"/>
+              <a:t>✅ Key idea</a:t>
+            </a:r>
+          </a:p>
+          <a:p>
+            <a:pPr lvl="0" indent="0" marL="1270000">
+              <a:buNone/>
+            </a:pPr>
+            <a:r>
+              <a:rPr sz="2000"/>
+              <a:t>A vector is the workhorse of R. A spreadsheet </a:t>
+            </a:r>
+            <a:r>
+              <a:rPr sz="2000" b="1"/>
+              <a:t>column</a:t>
+            </a:r>
+            <a:r>
+              <a:rPr sz="2000"/>
+              <a:t> is really just a vector.</a:t>
+            </a:r>
+          </a:p>
+        </p:txBody>
+      </p:sp>
     </p:spTree>
   </p:cSld>
 </p:sld>
@@ -5166,7 +5734,7 @@
             </a:pPr>
             <a:r>
               <a:rPr/>
-              <a:t>Vectors — a row of values</a:t>
+              <a:t>Data types live inside vectors</a:t>
             </a:r>
           </a:p>
         </p:txBody>
@@ -5191,25 +5759,109 @@
             </a:pPr>
             <a:r>
               <a:rPr/>
-              <a:t>A </a:t>
+              <a:t>Every vector holds </a:t>
             </a:r>
             <a:r>
               <a:rPr b="1"/>
-              <a:t>vector</a:t>
-            </a:r>
-            <a:r>
-              <a:rPr/>
-              <a:t> is a series of values built with </a:t>
-            </a:r>
-            <a:r>
-              <a:rPr>
-                <a:latin typeface="Courier"/>
-              </a:rPr>
-              <a:t>c()</a:t>
-            </a:r>
-            <a:r>
-              <a:rPr/>
-              <a:t> (“combine”):</a:t>
+              <a:t>one type</a:t>
+            </a:r>
+            <a:r>
+              <a:rPr/>
+              <a:t>:</a:t>
+            </a:r>
+          </a:p>
+          <a:p>
+            <a:pPr lvl="0"/>
+            <a:r>
+              <a:rPr>
+                <a:latin typeface="Courier"/>
+              </a:rPr>
+              <a:t>numeric</a:t>
+            </a:r>
+            <a:r>
+              <a:rPr/>
+              <a:t> — </a:t>
+            </a:r>
+            <a:r>
+              <a:rPr>
+                <a:latin typeface="Courier"/>
+              </a:rPr>
+              <a:t>4</a:t>
+            </a:r>
+            <a:r>
+              <a:rPr/>
+              <a:t>, </a:t>
+            </a:r>
+            <a:r>
+              <a:rPr>
+                <a:latin typeface="Courier"/>
+              </a:rPr>
+              <a:t>3.5</a:t>
+            </a:r>
+          </a:p>
+          <a:p>
+            <a:pPr lvl="0"/>
+            <a:r>
+              <a:rPr>
+                <a:latin typeface="Courier"/>
+              </a:rPr>
+              <a:t>character</a:t>
+            </a:r>
+            <a:r>
+              <a:rPr/>
+              <a:t> — </a:t>
+            </a:r>
+            <a:r>
+              <a:rPr>
+                <a:latin typeface="Courier"/>
+              </a:rPr>
+              <a:t>"sunny"</a:t>
+            </a:r>
+          </a:p>
+          <a:p>
+            <a:pPr lvl="0"/>
+            <a:r>
+              <a:rPr>
+                <a:latin typeface="Courier"/>
+              </a:rPr>
+              <a:t>logical</a:t>
+            </a:r>
+            <a:r>
+              <a:rPr/>
+              <a:t> — </a:t>
+            </a:r>
+            <a:r>
+              <a:rPr>
+                <a:latin typeface="Courier"/>
+              </a:rPr>
+              <a:t>TRUE</a:t>
+            </a:r>
+            <a:r>
+              <a:rPr/>
+              <a:t> / </a:t>
+            </a:r>
+            <a:r>
+              <a:rPr>
+                <a:latin typeface="Courier"/>
+              </a:rPr>
+              <a:t>FALSE</a:t>
+            </a:r>
+          </a:p>
+          <a:p>
+            <a:pPr lvl="0" indent="0" marL="0">
+              <a:buNone/>
+            </a:pPr>
+            <a:r>
+              <a:rPr/>
+              <a:t>Mix types and R quietly </a:t>
+            </a:r>
+            <a:r>
+              <a:rPr b="1"/>
+              <a:t>coerces</a:t>
+            </a:r>
+            <a:r>
+              <a:rPr/>
+              <a:t> them all to one:</a:t>
             </a:r>
           </a:p>
           <a:p>
@@ -5219,15 +5871,6 @@
             <a:r>
               <a:rPr>
                 <a:solidFill>
-                  <a:srgbClr val="003B4F"/>
-                </a:solidFill>
-                <a:latin typeface="Courier"/>
-              </a:rPr>
-              <a:t>weight_g &lt;- </a:t>
-            </a:r>
-            <a:r>
-              <a:rPr>
-                <a:solidFill>
                   <a:srgbClr val="4758AB"/>
                 </a:solidFill>
                 <a:latin typeface="Courier"/>
@@ -5250,7 +5893,7 @@
                 </a:solidFill>
                 <a:latin typeface="Courier"/>
               </a:rPr>
-              <a:t>4</a:t>
+              <a:t>1</a:t>
             </a:r>
             <a:r>
               <a:rPr>
@@ -5268,6 +5911,24 @@
                 </a:solidFill>
                 <a:latin typeface="Courier"/>
               </a:rPr>
+              <a:t>2</a:t>
+            </a:r>
+            <a:r>
+              <a:rPr>
+                <a:solidFill>
+                  <a:srgbClr val="003B4F"/>
+                </a:solidFill>
+                <a:latin typeface="Courier"/>
+              </a:rPr>
+              <a:t>, </a:t>
+            </a:r>
+            <a:r>
+              <a:rPr>
+                <a:solidFill>
+                  <a:srgbClr val="AD0000"/>
+                </a:solidFill>
+                <a:latin typeface="Courier"/>
+              </a:rPr>
               <a:t>3</a:t>
             </a:r>
             <a:r>
@@ -5282,11 +5943,57 @@
             <a:r>
               <a:rPr>
                 <a:solidFill>
+                  <a:srgbClr val="20794D"/>
+                </a:solidFill>
+                <a:latin typeface="Courier"/>
+              </a:rPr>
+              <a:t>"a"</a:t>
+            </a:r>
+            <a:r>
+              <a:rPr>
+                <a:solidFill>
+                  <a:srgbClr val="003B4F"/>
+                </a:solidFill>
+                <a:latin typeface="Courier"/>
+              </a:rPr>
+              <a:t>)     </a:t>
+            </a:r>
+            <a:r>
+              <a:rPr>
+                <a:solidFill>
+                  <a:srgbClr val="5E5E5E"/>
+                </a:solidFill>
+                <a:latin typeface="Courier"/>
+              </a:rPr>
+              <a:t># all become character</a:t>
+            </a:r>
+            <a:br/>
+            <a:r>
+              <a:rPr>
+                <a:solidFill>
+                  <a:srgbClr val="4758AB"/>
+                </a:solidFill>
+                <a:latin typeface="Courier"/>
+              </a:rPr>
+              <a:t>c</a:t>
+            </a:r>
+            <a:r>
+              <a:rPr>
+                <a:solidFill>
+                  <a:srgbClr val="003B4F"/>
+                </a:solidFill>
+                <a:latin typeface="Courier"/>
+              </a:rPr>
+              <a:t>(</a:t>
+            </a:r>
+            <a:r>
+              <a:rPr>
+                <a:solidFill>
                   <a:srgbClr val="AD0000"/>
                 </a:solidFill>
                 <a:latin typeface="Courier"/>
               </a:rPr>
-              <a:t>5</a:t>
+              <a:t>1</a:t>
             </a:r>
             <a:r>
               <a:rPr>
@@ -5304,16 +6011,52 @@
                 </a:solidFill>
                 <a:latin typeface="Courier"/>
               </a:rPr>
-              <a:t>7</a:t>
-            </a:r>
-            <a:r>
-              <a:rPr>
-                <a:solidFill>
-                  <a:srgbClr val="003B4F"/>
-                </a:solidFill>
-                <a:latin typeface="Courier"/>
-              </a:rPr>
-              <a:t>)     </a:t>
+              <a:t>2</a:t>
+            </a:r>
+            <a:r>
+              <a:rPr>
+                <a:solidFill>
+                  <a:srgbClr val="003B4F"/>
+                </a:solidFill>
+                <a:latin typeface="Courier"/>
+              </a:rPr>
+              <a:t>, </a:t>
+            </a:r>
+            <a:r>
+              <a:rPr>
+                <a:solidFill>
+                  <a:srgbClr val="AD0000"/>
+                </a:solidFill>
+                <a:latin typeface="Courier"/>
+              </a:rPr>
+              <a:t>3</a:t>
+            </a:r>
+            <a:r>
+              <a:rPr>
+                <a:solidFill>
+                  <a:srgbClr val="003B4F"/>
+                </a:solidFill>
+                <a:latin typeface="Courier"/>
+              </a:rPr>
+              <a:t>, </a:t>
+            </a:r>
+            <a:r>
+              <a:rPr>
+                <a:solidFill>
+                  <a:srgbClr val="8F5902"/>
+                </a:solidFill>
+                <a:latin typeface="Courier"/>
+              </a:rPr>
+              <a:t>TRUE</a:t>
+            </a:r>
+            <a:r>
+              <a:rPr>
+                <a:solidFill>
+                  <a:srgbClr val="003B4F"/>
+                </a:solidFill>
+                <a:latin typeface="Courier"/>
+              </a:rPr>
+              <a:t>)    </a:t>
             </a:r>
             <a:r>
               <a:rPr>
@@ -5322,25 +6065,34 @@
                 </a:solidFill>
                 <a:latin typeface="Courier"/>
               </a:rPr>
-              <a:t># numbers</a:t>
+              <a:t># TRUE becomes 1</a:t>
             </a:r>
             <a:br/>
             <a:r>
               <a:rPr>
                 <a:solidFill>
-                  <a:srgbClr val="003B4F"/>
-                </a:solidFill>
-                <a:latin typeface="Courier"/>
-              </a:rPr>
-              <a:t>side     &lt;- </a:t>
-            </a:r>
-            <a:r>
-              <a:rPr>
-                <a:solidFill>
                   <a:srgbClr val="4758AB"/>
                 </a:solidFill>
                 <a:latin typeface="Courier"/>
               </a:rPr>
+              <a:t>class</a:t>
+            </a:r>
+            <a:r>
+              <a:rPr>
+                <a:solidFill>
+                  <a:srgbClr val="003B4F"/>
+                </a:solidFill>
+                <a:latin typeface="Courier"/>
+              </a:rPr>
+              <a:t>(</a:t>
+            </a:r>
+            <a:r>
+              <a:rPr>
+                <a:solidFill>
+                  <a:srgbClr val="4758AB"/>
+                </a:solidFill>
+                <a:latin typeface="Courier"/>
+              </a:rPr>
               <a:t>c</a:t>
             </a:r>
             <a:r>
@@ -5355,202 +6107,199 @@
             <a:r>
               <a:rPr>
                 <a:solidFill>
+                  <a:srgbClr val="AD0000"/>
+                </a:solidFill>
+                <a:latin typeface="Courier"/>
+              </a:rPr>
+              <a:t>1</a:t>
+            </a:r>
+            <a:r>
+              <a:rPr>
+                <a:solidFill>
+                  <a:srgbClr val="003B4F"/>
+                </a:solidFill>
+                <a:latin typeface="Courier"/>
+              </a:rPr>
+              <a:t>, </a:t>
+            </a:r>
+            <a:r>
+              <a:rPr>
+                <a:solidFill>
+                  <a:srgbClr val="AD0000"/>
+                </a:solidFill>
+                <a:latin typeface="Courier"/>
+              </a:rPr>
+              <a:t>2</a:t>
+            </a:r>
+            <a:r>
+              <a:rPr>
+                <a:solidFill>
+                  <a:srgbClr val="003B4F"/>
+                </a:solidFill>
+                <a:latin typeface="Courier"/>
+              </a:rPr>
+              <a:t>, </a:t>
+            </a:r>
+            <a:r>
+              <a:rPr>
+                <a:solidFill>
+                  <a:srgbClr val="AD0000"/>
+                </a:solidFill>
+                <a:latin typeface="Courier"/>
+              </a:rPr>
+              <a:t>3</a:t>
+            </a:r>
+            <a:r>
+              <a:rPr>
+                <a:solidFill>
+                  <a:srgbClr val="003B4F"/>
+                </a:solidFill>
+                <a:latin typeface="Courier"/>
+              </a:rPr>
+              <a:t>, </a:t>
+            </a:r>
+            <a:r>
+              <a:rPr>
+                <a:solidFill>
                   <a:srgbClr val="20794D"/>
                 </a:solidFill>
                 <a:latin typeface="Courier"/>
               </a:rPr>
-              <a:t>"sunny"</a:t>
-            </a:r>
-            <a:r>
-              <a:rPr>
-                <a:solidFill>
-                  <a:srgbClr val="003B4F"/>
-                </a:solidFill>
-                <a:latin typeface="Courier"/>
-              </a:rPr>
-              <a:t>, </a:t>
-            </a:r>
-            <a:r>
-              <a:rPr>
-                <a:solidFill>
-                  <a:srgbClr val="20794D"/>
-                </a:solidFill>
-                <a:latin typeface="Courier"/>
-              </a:rPr>
-              <a:t>"shady"</a:t>
-            </a:r>
-            <a:r>
-              <a:rPr>
-                <a:solidFill>
-                  <a:srgbClr val="003B4F"/>
-                </a:solidFill>
-                <a:latin typeface="Courier"/>
-              </a:rPr>
-              <a:t>)  </a:t>
-            </a:r>
-            <a:r>
-              <a:rPr>
-                <a:solidFill>
-                  <a:srgbClr val="5E5E5E"/>
-                </a:solidFill>
-                <a:latin typeface="Courier"/>
-              </a:rPr>
-              <a:t># text needs quotes</a:t>
-            </a:r>
-          </a:p>
+              <a:t>"a"</a:t>
+            </a:r>
+            <a:r>
+              <a:rPr>
+                <a:solidFill>
+                  <a:srgbClr val="003B4F"/>
+                </a:solidFill>
+                <a:latin typeface="Courier"/>
+              </a:rPr>
+              <a:t>))</a:t>
+            </a:r>
+          </a:p>
+          <a:p>
+            <a:pPr lvl="0" indent="0" marL="1270000">
+              <a:buNone/>
+            </a:pPr>
+            <a:r>
+              <a:rPr sz="2000" b="1"/>
+              <a:t>Note</a:t>
+            </a:r>
+          </a:p>
+          <a:p>
+            <a:pPr lvl="0" indent="0" marL="1270000">
+              <a:buNone/>
+            </a:pPr>
+            <a:r>
+              <a:rPr sz="2000" b="1"/>
+              <a:t>📖 New word</a:t>
+            </a:r>
+          </a:p>
+          <a:p>
+            <a:pPr lvl="0" indent="0" marL="1270000">
+              <a:buNone/>
+            </a:pPr>
+            <a:r>
+              <a:rPr sz="2000" b="1"/>
+              <a:t>Coercion</a:t>
+            </a:r>
+            <a:r>
+              <a:rPr sz="2000"/>
+              <a:t> = R automatically converting everything in a vector to a single shared type.</a:t>
+            </a:r>
+          </a:p>
+        </p:txBody>
+      </p:sp>
+      <p:pic>
+        <p:nvPicPr>
+          <p:cNvPr descr="images/diagram_datatypes.png" id="0" name="Picture 1"/>
+          <p:cNvPicPr>
+            <a:picLocks noGrp="1" noChangeAspect="1"/>
+          </p:cNvPicPr>
+          <p:nvPr/>
+        </p:nvPicPr>
+        <p:blipFill>
+          <a:blip r:embed="rId2"/>
+          <a:stretch>
+            <a:fillRect/>
+          </a:stretch>
+        </p:blipFill>
+        <p:spPr bwMode="auto">
+          <a:xfrm>
+            <a:off x="4495800" y="787400"/>
+            <a:ext cx="4406900" cy="3556000"/>
+          </a:xfrm>
+          <a:prstGeom prst="rect">
+            <a:avLst/>
+          </a:prstGeom>
+          <a:noFill/>
+          <a:ln w="9525">
+            <a:noFill/>
+            <a:headEnd/>
+            <a:tailEnd/>
+          </a:ln>
+        </p:spPr>
+      </p:pic>
+    </p:spTree>
+  </p:cSld>
+</p:sld>
+</file>
+
+<file path=ppt/slides/slide16.xml><?xml version="1.0" encoding="utf-8"?>
+<p:sld xmlns:a="http://schemas.openxmlformats.org/drawingml/2006/main" xmlns:r="http://schemas.openxmlformats.org/officeDocument/2006/relationships" xmlns:p="http://schemas.openxmlformats.org/presentationml/2006/main">
+  <p:cSld>
+    <p:spTree>
+      <p:nvGrpSpPr>
+        <p:cNvPr id="1" name=""/>
+        <p:cNvGrpSpPr/>
+        <p:nvPr/>
+      </p:nvGrpSpPr>
+      <p:grpSpPr>
+        <a:xfrm>
+          <a:off x="0" y="0"/>
+          <a:ext cx="0" cy="0"/>
+          <a:chOff x="0" y="0"/>
+          <a:chExt cx="0" cy="0"/>
+        </a:xfrm>
+      </p:grpSpPr>
+      <p:sp>
+        <p:nvSpPr>
+          <p:cNvPr id="2" name="Title 1"/>
+          <p:cNvSpPr>
+            <a:spLocks noGrp="1"/>
+          </p:cNvSpPr>
+          <p:nvPr>
+            <p:ph type="title"/>
+          </p:nvPr>
+        </p:nvSpPr>
+        <p:spPr>
+          <a:xfrm>
+            <a:off x="0" y="0"/>
+            <a:ext cx="9144000" cy="582780"/>
+          </a:xfrm>
+        </p:spPr>
+        <p:txBody>
+          <a:bodyPr/>
+          <a:lstStyle/>
           <a:p>
             <a:pPr lvl="0" indent="0" marL="0">
               <a:buNone/>
             </a:pPr>
             <a:r>
               <a:rPr/>
-              <a:t>Inspect any vector:</a:t>
-            </a:r>
-          </a:p>
-          <a:p>
-            <a:pPr lvl="0" indent="0">
-              <a:buNone/>
-            </a:pPr>
-            <a:r>
-              <a:rPr>
-                <a:solidFill>
-                  <a:srgbClr val="4758AB"/>
-                </a:solidFill>
-                <a:latin typeface="Courier"/>
-              </a:rPr>
-              <a:t>length</a:t>
-            </a:r>
-            <a:r>
-              <a:rPr>
-                <a:solidFill>
-                  <a:srgbClr val="003B4F"/>
-                </a:solidFill>
-                <a:latin typeface="Courier"/>
-              </a:rPr>
-              <a:t>(weight_g)   </a:t>
-            </a:r>
-            <a:r>
-              <a:rPr>
-                <a:solidFill>
-                  <a:srgbClr val="5E5E5E"/>
-                </a:solidFill>
-                <a:latin typeface="Courier"/>
-              </a:rPr>
-              <a:t># how many values?</a:t>
-            </a:r>
-            <a:br/>
-            <a:r>
-              <a:rPr>
-                <a:solidFill>
-                  <a:srgbClr val="4758AB"/>
-                </a:solidFill>
-                <a:latin typeface="Courier"/>
-              </a:rPr>
-              <a:t>class</a:t>
-            </a:r>
-            <a:r>
-              <a:rPr>
-                <a:solidFill>
-                  <a:srgbClr val="003B4F"/>
-                </a:solidFill>
-                <a:latin typeface="Courier"/>
-              </a:rPr>
-              <a:t>(weight_g)    </a:t>
-            </a:r>
-            <a:r>
-              <a:rPr>
-                <a:solidFill>
-                  <a:srgbClr val="5E5E5E"/>
-                </a:solidFill>
-                <a:latin typeface="Courier"/>
-              </a:rPr>
-              <a:t># what type?</a:t>
-            </a:r>
-            <a:br/>
-            <a:r>
-              <a:rPr>
-                <a:solidFill>
-                  <a:srgbClr val="4758AB"/>
-                </a:solidFill>
-                <a:latin typeface="Courier"/>
-              </a:rPr>
-              <a:t>str</a:t>
-            </a:r>
-            <a:r>
-              <a:rPr>
-                <a:solidFill>
-                  <a:srgbClr val="003B4F"/>
-                </a:solidFill>
-                <a:latin typeface="Courier"/>
-              </a:rPr>
-              <a:t>(weight_g)      </a:t>
-            </a:r>
-            <a:r>
-              <a:rPr>
-                <a:solidFill>
-                  <a:srgbClr val="5E5E5E"/>
-                </a:solidFill>
-                <a:latin typeface="Courier"/>
-              </a:rPr>
-              <a:t># quick structure overview</a:t>
-            </a:r>
-          </a:p>
-          <a:p>
-            <a:pPr lvl="0" indent="0" marL="0">
-              <a:buNone/>
-            </a:pPr>
-            <a:r>
-              <a:rPr b="1"/>
-              <a:t>⚠️ Watch out!</a:t>
-            </a:r>
-          </a:p>
-          <a:p>
-            <a:pPr lvl="0" indent="0" marL="0">
-              <a:buNone/>
-            </a:pPr>
-            <a:r>
-              <a:rPr/>
-              <a:t>Quotes matter: </a:t>
-            </a:r>
-            <a:r>
-              <a:rPr>
-                <a:latin typeface="Courier"/>
-              </a:rPr>
-              <a:t>"sunny"</a:t>
-            </a:r>
-            <a:r>
-              <a:rPr/>
-              <a:t> is text. Without quotes, R hunts for an </a:t>
-            </a:r>
-            <a:r>
-              <a:rPr b="1"/>
-              <a:t>object</a:t>
-            </a:r>
-            <a:r>
-              <a:rPr/>
-              <a:t> named </a:t>
-            </a:r>
-            <a:r>
-              <a:rPr>
-                <a:latin typeface="Courier"/>
-              </a:rPr>
-              <a:t>sunny</a:t>
-            </a:r>
-            <a:r>
-              <a:rPr/>
-              <a:t> and errors when it can’t find one.</a:t>
+              <a:t>Part 3 · From console to script</a:t>
             </a:r>
           </a:p>
         </p:txBody>
       </p:sp>
       <p:sp>
         <p:nvSpPr>
-          <p:cNvPr id="4" name="Content Placeholder 3"/>
+          <p:cNvPr id="3" name="Content Placeholder 2"/>
           <p:cNvSpPr>
             <a:spLocks noGrp="1"/>
           </p:cNvSpPr>
           <p:nvPr>
-            <p:ph idx="2" sz="half"/>
+            <p:ph idx="1"/>
           </p:nvPr>
         </p:nvSpPr>
         <p:spPr/>
@@ -5559,28 +6308,14 @@
           <a:lstStyle/>
           <a:p>
             <a:pPr lvl="0" indent="0" marL="0">
+              <a:spcBef>
+                <a:spcPts val="3000"/>
+              </a:spcBef>
               <a:buNone/>
             </a:pPr>
             <a:r>
               <a:rPr b="1"/>
-              <a:t>✅ Key idea</a:t>
-            </a:r>
-          </a:p>
-          <a:p>
-            <a:pPr lvl="0" indent="0" marL="0">
-              <a:buNone/>
-            </a:pPr>
-            <a:r>
-              <a:rPr/>
-              <a:t>A vector is the workhorse of R. A spreadsheet </a:t>
-            </a:r>
-            <a:r>
-              <a:rPr b="1"/>
-              <a:t>column</a:t>
-            </a:r>
-            <a:r>
-              <a:rPr/>
-              <a:t> is really just a vector.</a:t>
+              <a:t>Do not retype — use a script</a:t>
             </a:r>
           </a:p>
         </p:txBody>
@@ -5590,7 +6325,235 @@
 </p:sld>
 </file>
 
-<file path=ppt/slides/slide16.xml><?xml version="1.0" encoding="utf-8"?>
+<file path=ppt/slides/slide17.xml><?xml version="1.0" encoding="utf-8"?>
+<p:sld xmlns:a="http://schemas.openxmlformats.org/drawingml/2006/main" xmlns:r="http://schemas.openxmlformats.org/officeDocument/2006/relationships" xmlns:p="http://schemas.openxmlformats.org/presentationml/2006/main">
+  <p:cSld>
+    <p:spTree>
+      <p:nvGrpSpPr>
+        <p:cNvPr id="1" name=""/>
+        <p:cNvGrpSpPr/>
+        <p:nvPr/>
+      </p:nvGrpSpPr>
+      <p:grpSpPr>
+        <a:xfrm>
+          <a:off x="0" y="0"/>
+          <a:ext cx="0" cy="0"/>
+          <a:chOff x="0" y="0"/>
+          <a:chExt cx="0" cy="0"/>
+        </a:xfrm>
+      </p:grpSpPr>
+      <p:sp>
+        <p:nvSpPr>
+          <p:cNvPr id="3" name="Content Placeholder 2"/>
+          <p:cNvSpPr>
+            <a:spLocks noGrp="1"/>
+          </p:cNvSpPr>
+          <p:nvPr>
+            <p:ph idx="1" sz="half"/>
+          </p:nvPr>
+        </p:nvSpPr>
+        <p:spPr/>
+        <p:txBody>
+          <a:bodyPr/>
+          <a:lstStyle/>
+          <a:p>
+            <a:pPr lvl="0" indent="0" marL="0">
+              <a:buNone/>
+            </a:pPr>
+            <a:r>
+              <a:rPr/>
+              <a:t>The console forgets. A </a:t>
+            </a:r>
+            <a:r>
+              <a:rPr b="1"/>
+              <a:t>script</a:t>
+            </a:r>
+            <a:r>
+              <a:rPr/>
+              <a:t> (</a:t>
+            </a:r>
+            <a:r>
+              <a:rPr>
+                <a:latin typeface="Courier"/>
+              </a:rPr>
+              <a:t>.R</a:t>
+            </a:r>
+            <a:r>
+              <a:rPr/>
+              <a:t> file) remembers and re-runs.</a:t>
+            </a:r>
+          </a:p>
+          <a:p>
+            <a:pPr lvl="0"/>
+            <a:r>
+              <a:rPr b="1"/>
+              <a:t>File → New File → R File</a:t>
+            </a:r>
+            <a:r>
+              <a:rPr/>
+              <a:t> opens a blank script</a:t>
+            </a:r>
+          </a:p>
+          <a:p>
+            <a:pPr lvl="0"/>
+            <a:r>
+              <a:rPr/>
+              <a:t>Type your commands, one per line</a:t>
+            </a:r>
+          </a:p>
+          <a:p>
+            <a:pPr lvl="0"/>
+            <a:r>
+              <a:rPr/>
+              <a:t>Put the cursor on a line and press Ctrl/Cmd + Enter to run it</a:t>
+            </a:r>
+          </a:p>
+          <a:p>
+            <a:pPr lvl="0"/>
+            <a:r>
+              <a:rPr b="1"/>
+              <a:t>Save</a:t>
+            </a:r>
+            <a:r>
+              <a:rPr/>
+              <a:t> with Ctrl/Cmd + S — reopen later and re-run everything</a:t>
+            </a:r>
+          </a:p>
+          <a:p>
+            <a:pPr lvl="0" indent="0">
+              <a:buNone/>
+            </a:pPr>
+            <a:r>
+              <a:rPr>
+                <a:solidFill>
+                  <a:srgbClr val="003B4F"/>
+                </a:solidFill>
+                <a:latin typeface="Courier"/>
+              </a:rPr>
+              <a:t>x    &lt;- </a:t>
+            </a:r>
+            <a:r>
+              <a:rPr>
+                <a:solidFill>
+                  <a:srgbClr val="AD0000"/>
+                </a:solidFill>
+                <a:latin typeface="Courier"/>
+              </a:rPr>
+              <a:t>7</a:t>
+            </a:r>
+            <a:br/>
+            <a:r>
+              <a:rPr>
+                <a:solidFill>
+                  <a:srgbClr val="003B4F"/>
+                </a:solidFill>
+                <a:latin typeface="Courier"/>
+              </a:rPr>
+              <a:t>y    &lt;- </a:t>
+            </a:r>
+            <a:r>
+              <a:rPr>
+                <a:solidFill>
+                  <a:srgbClr val="AD0000"/>
+                </a:solidFill>
+                <a:latin typeface="Courier"/>
+              </a:rPr>
+              <a:t>5</a:t>
+            </a:r>
+            <a:br/>
+            <a:r>
+              <a:rPr>
+                <a:solidFill>
+                  <a:srgbClr val="003B4F"/>
+                </a:solidFill>
+                <a:latin typeface="Courier"/>
+              </a:rPr>
+              <a:t>x </a:t>
+            </a:r>
+            <a:r>
+              <a:rPr>
+                <a:solidFill>
+                  <a:srgbClr val="5E5E5E"/>
+                </a:solidFill>
+                <a:latin typeface="Courier"/>
+              </a:rPr>
+              <a:t>+</a:t>
+            </a:r>
+            <a:r>
+              <a:rPr>
+                <a:solidFill>
+                  <a:srgbClr val="003B4F"/>
+                </a:solidFill>
+                <a:latin typeface="Courier"/>
+              </a:rPr>
+              <a:t> y</a:t>
+            </a:r>
+          </a:p>
+          <a:p>
+            <a:pPr lvl="0" indent="0" marL="1270000">
+              <a:buNone/>
+            </a:pPr>
+            <a:r>
+              <a:rPr sz="2000" b="1"/>
+              <a:t>Note</a:t>
+            </a:r>
+          </a:p>
+          <a:p>
+            <a:pPr lvl="0" indent="0" marL="1270000">
+              <a:buNone/>
+            </a:pPr>
+            <a:r>
+              <a:rPr sz="2000" b="1"/>
+              <a:t>✅ Key idea</a:t>
+            </a:r>
+          </a:p>
+          <a:p>
+            <a:pPr lvl="0" indent="0" marL="1270000">
+              <a:buNone/>
+            </a:pPr>
+            <a:r>
+              <a:rPr sz="2000"/>
+              <a:t>Console = scratch paper. Script = the lab notebook you keep.</a:t>
+            </a:r>
+          </a:p>
+        </p:txBody>
+      </p:sp>
+      <p:pic>
+        <p:nvPicPr>
+          <p:cNvPr descr="images/paste-2.png" id="0" name="Picture 1"/>
+          <p:cNvPicPr>
+            <a:picLocks noGrp="1" noChangeAspect="1"/>
+          </p:cNvPicPr>
+          <p:nvPr/>
+        </p:nvPicPr>
+        <p:blipFill>
+          <a:blip r:embed="rId2"/>
+          <a:stretch>
+            <a:fillRect/>
+          </a:stretch>
+        </p:blipFill>
+        <p:spPr bwMode="auto">
+          <a:xfrm>
+            <a:off x="4495800" y="838200"/>
+            <a:ext cx="4406900" cy="3441700"/>
+          </a:xfrm>
+          <a:prstGeom prst="rect">
+            <a:avLst/>
+          </a:prstGeom>
+          <a:noFill/>
+          <a:ln w="9525">
+            <a:noFill/>
+            <a:headEnd/>
+            <a:tailEnd/>
+          </a:ln>
+        </p:spPr>
+      </p:pic>
+    </p:spTree>
+  </p:cSld>
+</p:sld>
+</file>
+
+<file path=ppt/slides/slide18.xml><?xml version="1.0" encoding="utf-8"?>
 <p:sld xmlns:a="http://schemas.openxmlformats.org/drawingml/2006/main" xmlns:r="http://schemas.openxmlformats.org/officeDocument/2006/relationships" xmlns:p="http://schemas.openxmlformats.org/presentationml/2006/main">
   <p:cSld>
     <p:spTree>
@@ -5635,7 +6598,7 @@
             </a:pPr>
             <a:r>
               <a:rPr/>
-              <a:t>Data types live inside vectors</a:t>
+              <a:t>Packages — extending what R can do</a:t>
             </a:r>
           </a:p>
         </p:txBody>
@@ -5660,111 +6623,15 @@
             </a:pPr>
             <a:r>
               <a:rPr/>
-              <a:t>Every vector holds </a:t>
+              <a:t>Like apps for your phone, </a:t>
             </a:r>
             <a:r>
               <a:rPr b="1"/>
-              <a:t>one type</a:t>
-            </a:r>
-            <a:r>
-              <a:rPr/>
-              <a:t>:</a:t>
-            </a:r>
-          </a:p>
-          <a:p>
-            <a:pPr lvl="0"/>
-            <a:r>
-              <a:rPr>
-                <a:latin typeface="Courier"/>
-              </a:rPr>
-              <a:t>numeric</a:t>
-            </a:r>
-            <a:r>
-              <a:rPr/>
-              <a:t> — </a:t>
-            </a:r>
-            <a:r>
-              <a:rPr>
-                <a:latin typeface="Courier"/>
-              </a:rPr>
-              <a:t>4</a:t>
-            </a:r>
-            <a:r>
-              <a:rPr/>
-              <a:t>, </a:t>
-            </a:r>
-            <a:r>
-              <a:rPr>
-                <a:latin typeface="Courier"/>
-              </a:rPr>
-              <a:t>3.5</a:t>
-            </a:r>
-          </a:p>
-          <a:p>
-            <a:pPr lvl="0"/>
-            <a:r>
-              <a:rPr>
-                <a:latin typeface="Courier"/>
-              </a:rPr>
-              <a:t>character</a:t>
-            </a:r>
-            <a:r>
-              <a:rPr/>
-              <a:t> — </a:t>
-            </a:r>
-            <a:r>
-              <a:rPr>
-                <a:latin typeface="Courier"/>
-              </a:rPr>
-              <a:t>"sunny"</a:t>
-            </a:r>
-          </a:p>
-          <a:p>
-            <a:pPr lvl="0"/>
-            <a:r>
-              <a:rPr>
-                <a:latin typeface="Courier"/>
-              </a:rPr>
-              <a:t>logical</a:t>
-            </a:r>
-            <a:r>
-              <a:rPr/>
-              <a:t> — </a:t>
-            </a:r>
-            <a:r>
-              <a:rPr>
-                <a:latin typeface="Courier"/>
-              </a:rPr>
-              <a:t>TRUE</a:t>
-            </a:r>
-            <a:r>
-              <a:rPr/>
-              <a:t> / </a:t>
-            </a:r>
-            <a:r>
-              <a:rPr>
-                <a:latin typeface="Courier"/>
-              </a:rPr>
-              <a:t>FALSE</a:t>
-            </a:r>
-          </a:p>
-          <a:p>
-            <a:pPr lvl="0"/>
-            <a:r>
-              <a:rPr>
-                <a:latin typeface="Courier"/>
-              </a:rPr>
-              <a:t>integer</a:t>
-            </a:r>
-            <a:r>
-              <a:rPr/>
-              <a:t> — </a:t>
-            </a:r>
-            <a:r>
-              <a:rPr>
-                <a:latin typeface="Courier"/>
-              </a:rPr>
-              <a:t>2L</a:t>
+              <a:t>packages</a:t>
+            </a:r>
+            <a:r>
+              <a:rPr/>
+              <a:t> add new abilities to R.</a:t>
             </a:r>
           </a:p>
           <a:p>
@@ -5772,16 +6639,12 @@
               <a:buNone/>
             </a:pPr>
             <a:r>
-              <a:rPr/>
-              <a:t>Mix types and R quietly </a:t>
-            </a:r>
-            <a:r>
               <a:rPr b="1"/>
-              <a:t>coerces</a:t>
-            </a:r>
-            <a:r>
-              <a:rPr/>
-              <a:t> them all to one:</a:t>
+              <a:t>Install once</a:t>
+            </a:r>
+            <a:r>
+              <a:rPr/>
+              <a:t> — downloads to your computer (do this in the Console, not in your script):</a:t>
             </a:r>
           </a:p>
           <a:p>
@@ -5795,7 +6658,7 @@
                 </a:solidFill>
                 <a:latin typeface="Courier"/>
               </a:rPr>
-              <a:t>c</a:t>
+              <a:t>install.packages</a:t>
             </a:r>
             <a:r>
               <a:rPr>
@@ -5809,74 +6672,93 @@
             <a:r>
               <a:rPr>
                 <a:solidFill>
-                  <a:srgbClr val="AD0000"/>
-                </a:solidFill>
-                <a:latin typeface="Courier"/>
-              </a:rPr>
-              <a:t>1</a:t>
-            </a:r>
-            <a:r>
-              <a:rPr>
-                <a:solidFill>
-                  <a:srgbClr val="003B4F"/>
-                </a:solidFill>
-                <a:latin typeface="Courier"/>
-              </a:rPr>
-              <a:t>, </a:t>
-            </a:r>
-            <a:r>
-              <a:rPr>
-                <a:solidFill>
-                  <a:srgbClr val="AD0000"/>
-                </a:solidFill>
-                <a:latin typeface="Courier"/>
-              </a:rPr>
-              <a:t>2</a:t>
-            </a:r>
-            <a:r>
-              <a:rPr>
-                <a:solidFill>
-                  <a:srgbClr val="003B4F"/>
-                </a:solidFill>
-                <a:latin typeface="Courier"/>
-              </a:rPr>
-              <a:t>, </a:t>
-            </a:r>
-            <a:r>
-              <a:rPr>
-                <a:solidFill>
-                  <a:srgbClr val="AD0000"/>
-                </a:solidFill>
-                <a:latin typeface="Courier"/>
-              </a:rPr>
-              <a:t>3</a:t>
-            </a:r>
-            <a:r>
-              <a:rPr>
-                <a:solidFill>
-                  <a:srgbClr val="003B4F"/>
-                </a:solidFill>
-                <a:latin typeface="Courier"/>
-              </a:rPr>
-              <a:t>, </a:t>
-            </a:r>
-            <a:r>
-              <a:rPr>
-                <a:solidFill>
                   <a:srgbClr val="20794D"/>
                 </a:solidFill>
                 <a:latin typeface="Courier"/>
               </a:rPr>
-              <a:t>"a"</a:t>
-            </a:r>
-            <a:r>
-              <a:rPr>
-                <a:solidFill>
-                  <a:srgbClr val="003B4F"/>
-                </a:solidFill>
-                <a:latin typeface="Courier"/>
-              </a:rPr>
-              <a:t>)     </a:t>
+              <a:t>"tidyverse"</a:t>
+            </a:r>
+            <a:r>
+              <a:rPr>
+                <a:solidFill>
+                  <a:srgbClr val="003B4F"/>
+                </a:solidFill>
+                <a:latin typeface="Courier"/>
+              </a:rPr>
+              <a:t>)</a:t>
+            </a:r>
+            <a:br/>
+            <a:r>
+              <a:rPr>
+                <a:solidFill>
+                  <a:srgbClr val="4758AB"/>
+                </a:solidFill>
+                <a:latin typeface="Courier"/>
+              </a:rPr>
+              <a:t>install.packages</a:t>
+            </a:r>
+            <a:r>
+              <a:rPr>
+                <a:solidFill>
+                  <a:srgbClr val="003B4F"/>
+                </a:solidFill>
+                <a:latin typeface="Courier"/>
+              </a:rPr>
+              <a:t>(</a:t>
+            </a:r>
+            <a:r>
+              <a:rPr>
+                <a:solidFill>
+                  <a:srgbClr val="20794D"/>
+                </a:solidFill>
+                <a:latin typeface="Courier"/>
+              </a:rPr>
+              <a:t>"readxl"</a:t>
+            </a:r>
+            <a:r>
+              <a:rPr>
+                <a:solidFill>
+                  <a:srgbClr val="003B4F"/>
+                </a:solidFill>
+                <a:latin typeface="Courier"/>
+              </a:rPr>
+              <a:t>)</a:t>
+            </a:r>
+          </a:p>
+          <a:p>
+            <a:pPr lvl="0" indent="0" marL="0">
+              <a:buNone/>
+            </a:pPr>
+            <a:r>
+              <a:rPr b="1"/>
+              <a:t>Load every session</a:t>
+            </a:r>
+            <a:r>
+              <a:rPr/>
+              <a:t> — activates it for today (put this at the top of every script):</a:t>
+            </a:r>
+          </a:p>
+          <a:p>
+            <a:pPr lvl="0" indent="0">
+              <a:buNone/>
+            </a:pPr>
+            <a:r>
+              <a:rPr>
+                <a:solidFill>
+                  <a:srgbClr val="4758AB"/>
+                </a:solidFill>
+                <a:latin typeface="Courier"/>
+              </a:rPr>
+              <a:t>library</a:t>
+            </a:r>
+            <a:r>
+              <a:rPr>
+                <a:solidFill>
+                  <a:srgbClr val="003B4F"/>
+                </a:solidFill>
+                <a:latin typeface="Courier"/>
+              </a:rPr>
+              <a:t>(tidyverse)   </a:t>
             </a:r>
             <a:r>
               <a:rPr>
@@ -5885,7 +6767,7 @@
                 </a:solidFill>
                 <a:latin typeface="Courier"/>
               </a:rPr>
-              <a:t># all become character</a:t>
+              <a:t># data wrangling + plotting</a:t>
             </a:r>
             <a:br/>
             <a:r>
@@ -5895,88 +6777,16 @@
                 </a:solidFill>
                 <a:latin typeface="Courier"/>
               </a:rPr>
-              <a:t>c</a:t>
-            </a:r>
-            <a:r>
-              <a:rPr>
-                <a:solidFill>
-                  <a:srgbClr val="003B4F"/>
-                </a:solidFill>
-                <a:latin typeface="Courier"/>
-              </a:rPr>
-              <a:t>(</a:t>
-            </a:r>
-            <a:r>
-              <a:rPr>
-                <a:solidFill>
-                  <a:srgbClr val="AD0000"/>
-                </a:solidFill>
-                <a:latin typeface="Courier"/>
-              </a:rPr>
-              <a:t>1</a:t>
-            </a:r>
-            <a:r>
-              <a:rPr>
-                <a:solidFill>
-                  <a:srgbClr val="003B4F"/>
-                </a:solidFill>
-                <a:latin typeface="Courier"/>
-              </a:rPr>
-              <a:t>, </a:t>
-            </a:r>
-            <a:r>
-              <a:rPr>
-                <a:solidFill>
-                  <a:srgbClr val="AD0000"/>
-                </a:solidFill>
-                <a:latin typeface="Courier"/>
-              </a:rPr>
-              <a:t>2</a:t>
-            </a:r>
-            <a:r>
-              <a:rPr>
-                <a:solidFill>
-                  <a:srgbClr val="003B4F"/>
-                </a:solidFill>
-                <a:latin typeface="Courier"/>
-              </a:rPr>
-              <a:t>, </a:t>
-            </a:r>
-            <a:r>
-              <a:rPr>
-                <a:solidFill>
-                  <a:srgbClr val="AD0000"/>
-                </a:solidFill>
-                <a:latin typeface="Courier"/>
-              </a:rPr>
-              <a:t>3</a:t>
-            </a:r>
-            <a:r>
-              <a:rPr>
-                <a:solidFill>
-                  <a:srgbClr val="003B4F"/>
-                </a:solidFill>
-                <a:latin typeface="Courier"/>
-              </a:rPr>
-              <a:t>, </a:t>
-            </a:r>
-            <a:r>
-              <a:rPr>
-                <a:solidFill>
-                  <a:srgbClr val="8F5902"/>
-                </a:solidFill>
-                <a:latin typeface="Courier"/>
-              </a:rPr>
-              <a:t>TRUE</a:t>
-            </a:r>
-            <a:r>
-              <a:rPr>
-                <a:solidFill>
-                  <a:srgbClr val="003B4F"/>
-                </a:solidFill>
-                <a:latin typeface="Courier"/>
-              </a:rPr>
-              <a:t>)    </a:t>
+              <a:t>library</a:t>
+            </a:r>
+            <a:r>
+              <a:rPr>
+                <a:solidFill>
+                  <a:srgbClr val="003B4F"/>
+                </a:solidFill>
+                <a:latin typeface="Courier"/>
+              </a:rPr>
+              <a:t>(readxl)      </a:t>
             </a:r>
             <a:r>
               <a:rPr>
@@ -5985,178 +6795,132 @@
                 </a:solidFill>
                 <a:latin typeface="Courier"/>
               </a:rPr>
-              <a:t># all become numeric</a:t>
-            </a:r>
-            <a:br/>
-            <a:r>
-              <a:rPr>
-                <a:solidFill>
-                  <a:srgbClr val="4758AB"/>
-                </a:solidFill>
-                <a:latin typeface="Courier"/>
-              </a:rPr>
-              <a:t>class</a:t>
-            </a:r>
-            <a:r>
-              <a:rPr>
-                <a:solidFill>
-                  <a:srgbClr val="003B4F"/>
-                </a:solidFill>
-                <a:latin typeface="Courier"/>
-              </a:rPr>
-              <a:t>(</a:t>
-            </a:r>
-            <a:r>
-              <a:rPr>
-                <a:solidFill>
-                  <a:srgbClr val="4758AB"/>
-                </a:solidFill>
-                <a:latin typeface="Courier"/>
-              </a:rPr>
-              <a:t>c</a:t>
-            </a:r>
-            <a:r>
-              <a:rPr>
-                <a:solidFill>
-                  <a:srgbClr val="003B4F"/>
-                </a:solidFill>
-                <a:latin typeface="Courier"/>
-              </a:rPr>
-              <a:t>(</a:t>
-            </a:r>
-            <a:r>
-              <a:rPr>
-                <a:solidFill>
-                  <a:srgbClr val="AD0000"/>
-                </a:solidFill>
-                <a:latin typeface="Courier"/>
-              </a:rPr>
-              <a:t>1</a:t>
-            </a:r>
-            <a:r>
-              <a:rPr>
-                <a:solidFill>
-                  <a:srgbClr val="003B4F"/>
-                </a:solidFill>
-                <a:latin typeface="Courier"/>
-              </a:rPr>
-              <a:t>, </a:t>
-            </a:r>
-            <a:r>
-              <a:rPr>
-                <a:solidFill>
-                  <a:srgbClr val="AD0000"/>
-                </a:solidFill>
-                <a:latin typeface="Courier"/>
-              </a:rPr>
-              <a:t>2</a:t>
-            </a:r>
-            <a:r>
-              <a:rPr>
-                <a:solidFill>
-                  <a:srgbClr val="003B4F"/>
-                </a:solidFill>
-                <a:latin typeface="Courier"/>
-              </a:rPr>
-              <a:t>, </a:t>
-            </a:r>
-            <a:r>
-              <a:rPr>
-                <a:solidFill>
-                  <a:srgbClr val="AD0000"/>
-                </a:solidFill>
-                <a:latin typeface="Courier"/>
-              </a:rPr>
-              <a:t>3</a:t>
-            </a:r>
-            <a:r>
-              <a:rPr>
-                <a:solidFill>
-                  <a:srgbClr val="003B4F"/>
-                </a:solidFill>
-                <a:latin typeface="Courier"/>
-              </a:rPr>
-              <a:t>, </a:t>
-            </a:r>
-            <a:r>
-              <a:rPr>
-                <a:solidFill>
-                  <a:srgbClr val="20794D"/>
-                </a:solidFill>
-                <a:latin typeface="Courier"/>
-              </a:rPr>
-              <a:t>"a"</a:t>
-            </a:r>
-            <a:r>
-              <a:rPr>
-                <a:solidFill>
-                  <a:srgbClr val="003B4F"/>
-                </a:solidFill>
-                <a:latin typeface="Courier"/>
-              </a:rPr>
-              <a:t>))</a:t>
-            </a:r>
-          </a:p>
-          <a:p>
-            <a:pPr lvl="0" indent="0" marL="0">
-              <a:buNone/>
-            </a:pPr>
-            <a:r>
-              <a:rPr b="1"/>
-              <a:t>📖 New word</a:t>
-            </a:r>
-          </a:p>
-          <a:p>
-            <a:pPr lvl="0" indent="0" marL="0">
-              <a:buNone/>
-            </a:pPr>
-            <a:r>
-              <a:rPr b="1"/>
-              <a:t>Coercion</a:t>
-            </a:r>
-            <a:r>
-              <a:rPr/>
-              <a:t> = R automatically converting everything in a vector to a single shared type.</a:t>
+              <a:t># read Excel files</a:t>
+            </a:r>
+          </a:p>
+          <a:p>
+            <a:pPr lvl="0" indent="0" marL="1270000">
+              <a:buNone/>
+            </a:pPr>
+            <a:r>
+              <a:rPr sz="2000" b="1"/>
+              <a:t>Warning</a:t>
+            </a:r>
+          </a:p>
+          <a:p>
+            <a:pPr lvl="0" indent="0" marL="1270000">
+              <a:buNone/>
+            </a:pPr>
+            <a:r>
+              <a:rPr sz="2000" b="1"/>
+              <a:t>⚠️ Watch out!</a:t>
+            </a:r>
+          </a:p>
+          <a:p>
+            <a:pPr lvl="0" indent="0" marL="1270000">
+              <a:buNone/>
+            </a:pPr>
+            <a:r>
+              <a:rPr sz="2000"/>
+              <a:t>If R says </a:t>
+            </a:r>
+            <a:r>
+              <a:rPr sz="2000" i="1"/>
+              <a:t>“could not find function </a:t>
+            </a:r>
+            <a:r>
+              <a:rPr sz="2000" i="1">
+                <a:latin typeface="Courier"/>
+              </a:rPr>
+              <a:t>read_excel</a:t>
+            </a:r>
+            <a:r>
+              <a:rPr sz="2000" i="1"/>
+              <a:t>”</a:t>
+            </a:r>
+            <a:r>
+              <a:rPr sz="2000"/>
+              <a:t>, you forgot the </a:t>
+            </a:r>
+            <a:r>
+              <a:rPr sz="2000">
+                <a:latin typeface="Courier"/>
+              </a:rPr>
+              <a:t>library(readxl)</a:t>
+            </a:r>
+            <a:r>
+              <a:rPr sz="2000"/>
+              <a:t> line.</a:t>
             </a:r>
           </a:p>
         </p:txBody>
       </p:sp>
-      <p:pic>
-        <p:nvPicPr>
-          <p:cNvPr descr="images/diagram_datatypes.png" id="0" name="Picture 1"/>
-          <p:cNvPicPr>
-            <a:picLocks noGrp="1" noChangeAspect="1"/>
-          </p:cNvPicPr>
-          <p:nvPr/>
-        </p:nvPicPr>
-        <p:blipFill>
-          <a:blip r:embed="rId2"/>
-          <a:stretch>
-            <a:fillRect/>
-          </a:stretch>
-        </p:blipFill>
-        <p:spPr bwMode="auto">
-          <a:xfrm>
-            <a:off x="4495800" y="787400"/>
-            <a:ext cx="4406900" cy="3556000"/>
-          </a:xfrm>
-          <a:prstGeom prst="rect">
-            <a:avLst/>
-          </a:prstGeom>
-          <a:noFill/>
-          <a:ln w="9525">
-            <a:noFill/>
-            <a:headEnd/>
-            <a:tailEnd/>
-          </a:ln>
-        </p:spPr>
-      </p:pic>
+      <p:sp>
+        <p:nvSpPr>
+          <p:cNvPr id="4" name="Content Placeholder 3"/>
+          <p:cNvSpPr>
+            <a:spLocks noGrp="1"/>
+          </p:cNvSpPr>
+          <p:nvPr>
+            <p:ph idx="2" sz="half"/>
+          </p:nvPr>
+        </p:nvSpPr>
+        <p:spPr/>
+        <p:txBody>
+          <a:bodyPr/>
+          <a:lstStyle/>
+          <a:p>
+            <a:pPr lvl="0" indent="0" marL="1270000">
+              <a:buNone/>
+            </a:pPr>
+            <a:r>
+              <a:rPr sz="2000" b="1"/>
+              <a:t>Note</a:t>
+            </a:r>
+          </a:p>
+          <a:p>
+            <a:pPr lvl="0" indent="0" marL="1270000">
+              <a:buNone/>
+            </a:pPr>
+            <a:r>
+              <a:rPr sz="2000" b="1"/>
+              <a:t>📖 New words</a:t>
+            </a:r>
+          </a:p>
+          <a:p>
+            <a:pPr lvl="0" indent="0" marL="1270000">
+              <a:buNone/>
+            </a:pPr>
+            <a:r>
+              <a:rPr sz="2000" b="1"/>
+              <a:t>Package</a:t>
+            </a:r>
+            <a:r>
+              <a:rPr sz="2000"/>
+              <a:t> = the installed toolbox (install once).</a:t>
+            </a:r>
+          </a:p>
+          <a:p>
+            <a:pPr lvl="0" indent="0" marL="1270000">
+              <a:buNone/>
+            </a:pPr>
+            <a:r>
+              <a:rPr sz="2000" b="1"/>
+              <a:t>Library</a:t>
+            </a:r>
+            <a:r>
+              <a:rPr sz="2000"/>
+              <a:t> = loading that toolbox into today’s session (every session).</a:t>
+            </a:r>
+          </a:p>
+        </p:txBody>
+      </p:sp>
     </p:spTree>
   </p:cSld>
 </p:sld>
 </file>
 
-<file path=ppt/slides/slide17.xml><?xml version="1.0" encoding="utf-8"?>
+<file path=ppt/slides/slide19.xml><?xml version="1.0" encoding="utf-8"?>
 <p:sld xmlns:a="http://schemas.openxmlformats.org/drawingml/2006/main" xmlns:r="http://schemas.openxmlformats.org/officeDocument/2006/relationships" xmlns:p="http://schemas.openxmlformats.org/presentationml/2006/main">
   <p:cSld>
     <p:spTree>
@@ -6198,7 +6962,7 @@
             </a:pPr>
             <a:r>
               <a:rPr/>
-              <a:t>Part 3 · From console to script</a:t>
+              <a:t>Part 4 · Loading our data</a:t>
             </a:r>
           </a:p>
         </p:txBody>
@@ -6226,601 +6990,7 @@
             </a:pPr>
             <a:r>
               <a:rPr b="1"/>
-              <a:t>Don’t retype — use a script</a:t>
-            </a:r>
-          </a:p>
-        </p:txBody>
-      </p:sp>
-    </p:spTree>
-  </p:cSld>
-</p:sld>
-</file>
-
-<file path=ppt/slides/slide18.xml><?xml version="1.0" encoding="utf-8"?>
-<p:sld xmlns:a="http://schemas.openxmlformats.org/drawingml/2006/main" xmlns:r="http://schemas.openxmlformats.org/officeDocument/2006/relationships" xmlns:p="http://schemas.openxmlformats.org/presentationml/2006/main">
-  <p:cSld>
-    <p:spTree>
-      <p:nvGrpSpPr>
-        <p:cNvPr id="1" name=""/>
-        <p:cNvGrpSpPr/>
-        <p:nvPr/>
-      </p:nvGrpSpPr>
-      <p:grpSpPr>
-        <a:xfrm>
-          <a:off x="0" y="0"/>
-          <a:ext cx="0" cy="0"/>
-          <a:chOff x="0" y="0"/>
-          <a:chExt cx="0" cy="0"/>
-        </a:xfrm>
-      </p:grpSpPr>
-      <p:sp>
-        <p:nvSpPr>
-          <p:cNvPr id="3" name="Content Placeholder 2"/>
-          <p:cNvSpPr>
-            <a:spLocks noGrp="1"/>
-          </p:cNvSpPr>
-          <p:nvPr>
-            <p:ph idx="1" sz="half"/>
-          </p:nvPr>
-        </p:nvSpPr>
-        <p:spPr/>
-        <p:txBody>
-          <a:bodyPr/>
-          <a:lstStyle/>
-          <a:p>
-            <a:pPr lvl="0" indent="0" marL="0">
-              <a:buNone/>
-            </a:pPr>
-            <a:r>
-              <a:rPr/>
-              <a:t>The console forgets. A </a:t>
-            </a:r>
-            <a:r>
-              <a:rPr b="1"/>
-              <a:t>script</a:t>
-            </a:r>
-            <a:r>
-              <a:rPr/>
-              <a:t> (</a:t>
-            </a:r>
-            <a:r>
-              <a:rPr>
-                <a:latin typeface="Courier"/>
-              </a:rPr>
-              <a:t>.R</a:t>
-            </a:r>
-            <a:r>
-              <a:rPr/>
-              <a:t> file) remembers and re-runs.</a:t>
-            </a:r>
-          </a:p>
-          <a:p>
-            <a:pPr lvl="0"/>
-            <a:r>
-              <a:rPr b="1"/>
-              <a:t>File → New File → R File</a:t>
-            </a:r>
-            <a:r>
-              <a:rPr/>
-              <a:t> opens </a:t>
-            </a:r>
-            <a:r>
-              <a:rPr>
-                <a:latin typeface="Courier"/>
-              </a:rPr>
-              <a:t>Untitled-1</a:t>
-            </a:r>
-          </a:p>
-          <a:p>
-            <a:pPr lvl="0"/>
-            <a:r>
-              <a:rPr/>
-              <a:t>Type your commands, one per line</a:t>
-            </a:r>
-          </a:p>
-          <a:p>
-            <a:pPr lvl="0"/>
-            <a:r>
-              <a:rPr/>
-              <a:t>Put the cursor on a line and press Ctrl/Cmd + Enter to run it</a:t>
-            </a:r>
-          </a:p>
-          <a:p>
-            <a:pPr lvl="0"/>
-            <a:r>
-              <a:rPr b="1"/>
-              <a:t>Save</a:t>
-            </a:r>
-            <a:r>
-              <a:rPr/>
-              <a:t> with Ctrl/Cmd + S — reopen later and rerun everything</a:t>
-            </a:r>
-          </a:p>
-          <a:p>
-            <a:pPr lvl="0" indent="0">
-              <a:buNone/>
-            </a:pPr>
-            <a:r>
-              <a:rPr>
-                <a:solidFill>
-                  <a:srgbClr val="003B4F"/>
-                </a:solidFill>
-                <a:latin typeface="Courier"/>
-              </a:rPr>
-              <a:t>x    &lt;- </a:t>
-            </a:r>
-            <a:r>
-              <a:rPr>
-                <a:solidFill>
-                  <a:srgbClr val="AD0000"/>
-                </a:solidFill>
-                <a:latin typeface="Courier"/>
-              </a:rPr>
-              <a:t>7</a:t>
-            </a:r>
-            <a:br/>
-            <a:r>
-              <a:rPr>
-                <a:solidFill>
-                  <a:srgbClr val="003B4F"/>
-                </a:solidFill>
-                <a:latin typeface="Courier"/>
-              </a:rPr>
-              <a:t>y    &lt;- </a:t>
-            </a:r>
-            <a:r>
-              <a:rPr>
-                <a:solidFill>
-                  <a:srgbClr val="AD0000"/>
-                </a:solidFill>
-                <a:latin typeface="Courier"/>
-              </a:rPr>
-              <a:t>5</a:t>
-            </a:r>
-            <a:br/>
-            <a:r>
-              <a:rPr>
-                <a:solidFill>
-                  <a:srgbClr val="003B4F"/>
-                </a:solidFill>
-                <a:latin typeface="Courier"/>
-              </a:rPr>
-              <a:t>text &lt;- </a:t>
-            </a:r>
-            <a:r>
-              <a:rPr>
-                <a:solidFill>
-                  <a:srgbClr val="20794D"/>
-                </a:solidFill>
-                <a:latin typeface="Courier"/>
-              </a:rPr>
-              <a:t>"say hello"</a:t>
-            </a:r>
-            <a:br/>
-            <a:r>
-              <a:rPr>
-                <a:solidFill>
-                  <a:srgbClr val="003B4F"/>
-                </a:solidFill>
-                <a:latin typeface="Courier"/>
-              </a:rPr>
-              <a:t>x </a:t>
-            </a:r>
-            <a:r>
-              <a:rPr>
-                <a:solidFill>
-                  <a:srgbClr val="5E5E5E"/>
-                </a:solidFill>
-                <a:latin typeface="Courier"/>
-              </a:rPr>
-              <a:t>+</a:t>
-            </a:r>
-            <a:r>
-              <a:rPr>
-                <a:solidFill>
-                  <a:srgbClr val="003B4F"/>
-                </a:solidFill>
-                <a:latin typeface="Courier"/>
-              </a:rPr>
-              <a:t> y</a:t>
-            </a:r>
-          </a:p>
-          <a:p>
-            <a:pPr lvl="0" indent="0" marL="0">
-              <a:buNone/>
-            </a:pPr>
-            <a:r>
-              <a:rPr b="1"/>
-              <a:t>✅ Key idea</a:t>
-            </a:r>
-          </a:p>
-          <a:p>
-            <a:pPr lvl="0" indent="0" marL="0">
-              <a:buNone/>
-            </a:pPr>
-            <a:r>
-              <a:rPr/>
-              <a:t>Console = scratch paper. Script = the lab notebook you keep.</a:t>
-            </a:r>
-          </a:p>
-        </p:txBody>
-      </p:sp>
-      <p:pic>
-        <p:nvPicPr>
-          <p:cNvPr descr="images/paste-2.png" id="0" name="Picture 1"/>
-          <p:cNvPicPr>
-            <a:picLocks noGrp="1" noChangeAspect="1"/>
-          </p:cNvPicPr>
-          <p:nvPr/>
-        </p:nvPicPr>
-        <p:blipFill>
-          <a:blip r:embed="rId2"/>
-          <a:stretch>
-            <a:fillRect/>
-          </a:stretch>
-        </p:blipFill>
-        <p:spPr bwMode="auto">
-          <a:xfrm>
-            <a:off x="4495800" y="838200"/>
-            <a:ext cx="4406900" cy="3441700"/>
-          </a:xfrm>
-          <a:prstGeom prst="rect">
-            <a:avLst/>
-          </a:prstGeom>
-          <a:noFill/>
-          <a:ln w="9525">
-            <a:noFill/>
-            <a:headEnd/>
-            <a:tailEnd/>
-          </a:ln>
-        </p:spPr>
-      </p:pic>
-    </p:spTree>
-  </p:cSld>
-</p:sld>
-</file>
-
-<file path=ppt/slides/slide19.xml><?xml version="1.0" encoding="utf-8"?>
-<p:sld xmlns:a="http://schemas.openxmlformats.org/drawingml/2006/main" xmlns:r="http://schemas.openxmlformats.org/officeDocument/2006/relationships" xmlns:p="http://schemas.openxmlformats.org/presentationml/2006/main">
-  <p:cSld>
-    <p:spTree>
-      <p:nvGrpSpPr>
-        <p:cNvPr id="1" name=""/>
-        <p:cNvGrpSpPr/>
-        <p:nvPr/>
-      </p:nvGrpSpPr>
-      <p:grpSpPr>
-        <a:xfrm>
-          <a:off x="0" y="0"/>
-          <a:ext cx="0" cy="0"/>
-          <a:chOff x="0" y="0"/>
-          <a:chExt cx="0" cy="0"/>
-        </a:xfrm>
-      </p:grpSpPr>
-      <p:sp>
-        <p:nvSpPr>
-          <p:cNvPr id="2" name="Title 1"/>
-          <p:cNvSpPr>
-            <a:spLocks noGrp="1"/>
-          </p:cNvSpPr>
-          <p:nvPr>
-            <p:ph type="title"/>
-          </p:nvPr>
-        </p:nvSpPr>
-        <p:spPr>
-          <a:xfrm>
-            <a:off x="0" y="0"/>
-            <a:ext cx="9144000" cy="602780"/>
-          </a:xfrm>
-          <a:solidFill>
-            <a:srgbClr val="1A1A2E"/>
-          </a:solidFill>
-        </p:spPr>
-        <p:txBody>
-          <a:bodyPr/>
-          <a:lstStyle/>
-          <a:p>
-            <a:pPr lvl="0" indent="0" marL="0">
-              <a:buNone/>
-            </a:pPr>
-            <a:r>
-              <a:rPr/>
-              <a:t>Packages vs. libraries</a:t>
-            </a:r>
-          </a:p>
-        </p:txBody>
-      </p:sp>
-      <p:sp>
-        <p:nvSpPr>
-          <p:cNvPr id="3" name="Content Placeholder 2"/>
-          <p:cNvSpPr>
-            <a:spLocks noGrp="1"/>
-          </p:cNvSpPr>
-          <p:nvPr>
-            <p:ph idx="1" sz="half"/>
-          </p:nvPr>
-        </p:nvSpPr>
-        <p:spPr/>
-        <p:txBody>
-          <a:bodyPr/>
-          <a:lstStyle/>
-          <a:p>
-            <a:pPr lvl="0" indent="0" marL="0">
-              <a:buNone/>
-            </a:pPr>
-            <a:r>
-              <a:rPr/>
-              <a:t>Like apps for your phone, </a:t>
-            </a:r>
-            <a:r>
-              <a:rPr b="1"/>
-              <a:t>packages</a:t>
-            </a:r>
-            <a:r>
-              <a:rPr/>
-              <a:t> add new abilities to R.</a:t>
-            </a:r>
-          </a:p>
-          <a:p>
-            <a:pPr lvl="0"/>
-            <a:r>
-              <a:rPr b="1"/>
-              <a:t>Install once</a:t>
-            </a:r>
-            <a:r>
-              <a:rPr/>
-              <a:t> (download the app):</a:t>
-            </a:r>
-          </a:p>
-          <a:p>
-            <a:pPr lvl="0" indent="0">
-              <a:buNone/>
-            </a:pPr>
-            <a:r>
-              <a:rPr>
-                <a:solidFill>
-                  <a:srgbClr val="4758AB"/>
-                </a:solidFill>
-                <a:latin typeface="Courier"/>
-              </a:rPr>
-              <a:t>install.packages</a:t>
-            </a:r>
-            <a:r>
-              <a:rPr>
-                <a:solidFill>
-                  <a:srgbClr val="003B4F"/>
-                </a:solidFill>
-                <a:latin typeface="Courier"/>
-              </a:rPr>
-              <a:t>(</a:t>
-            </a:r>
-            <a:r>
-              <a:rPr>
-                <a:solidFill>
-                  <a:srgbClr val="20794D"/>
-                </a:solidFill>
-                <a:latin typeface="Courier"/>
-              </a:rPr>
-              <a:t>"tidyverse"</a:t>
-            </a:r>
-            <a:r>
-              <a:rPr>
-                <a:solidFill>
-                  <a:srgbClr val="003B4F"/>
-                </a:solidFill>
-                <a:latin typeface="Courier"/>
-              </a:rPr>
-              <a:t>)</a:t>
-            </a:r>
-            <a:br/>
-            <a:r>
-              <a:rPr>
-                <a:solidFill>
-                  <a:srgbClr val="4758AB"/>
-                </a:solidFill>
-                <a:latin typeface="Courier"/>
-              </a:rPr>
-              <a:t>install.packages</a:t>
-            </a:r>
-            <a:r>
-              <a:rPr>
-                <a:solidFill>
-                  <a:srgbClr val="003B4F"/>
-                </a:solidFill>
-                <a:latin typeface="Courier"/>
-              </a:rPr>
-              <a:t>(</a:t>
-            </a:r>
-            <a:r>
-              <a:rPr>
-                <a:solidFill>
-                  <a:srgbClr val="20794D"/>
-                </a:solidFill>
-                <a:latin typeface="Courier"/>
-              </a:rPr>
-              <a:t>"readxl"</a:t>
-            </a:r>
-            <a:r>
-              <a:rPr>
-                <a:solidFill>
-                  <a:srgbClr val="003B4F"/>
-                </a:solidFill>
-                <a:latin typeface="Courier"/>
-              </a:rPr>
-              <a:t>)</a:t>
-            </a:r>
-          </a:p>
-          <a:p>
-            <a:pPr lvl="0"/>
-            <a:r>
-              <a:rPr b="1"/>
-              <a:t>Load every session</a:t>
-            </a:r>
-            <a:r>
-              <a:rPr/>
-              <a:t> (open the app):</a:t>
-            </a:r>
-          </a:p>
-          <a:p>
-            <a:pPr lvl="0" indent="0">
-              <a:buNone/>
-            </a:pPr>
-            <a:r>
-              <a:rPr>
-                <a:solidFill>
-                  <a:srgbClr val="4758AB"/>
-                </a:solidFill>
-                <a:latin typeface="Courier"/>
-              </a:rPr>
-              <a:t>library</a:t>
-            </a:r>
-            <a:r>
-              <a:rPr>
-                <a:solidFill>
-                  <a:srgbClr val="003B4F"/>
-                </a:solidFill>
-                <a:latin typeface="Courier"/>
-              </a:rPr>
-              <a:t>(tidyverse)   </a:t>
-            </a:r>
-            <a:r>
-              <a:rPr>
-                <a:solidFill>
-                  <a:srgbClr val="5E5E5E"/>
-                </a:solidFill>
-                <a:latin typeface="Courier"/>
-              </a:rPr>
-              <a:t># data wrangling + plotting</a:t>
-            </a:r>
-            <a:br/>
-            <a:r>
-              <a:rPr>
-                <a:solidFill>
-                  <a:srgbClr val="4758AB"/>
-                </a:solidFill>
-                <a:latin typeface="Courier"/>
-              </a:rPr>
-              <a:t>library</a:t>
-            </a:r>
-            <a:r>
-              <a:rPr>
-                <a:solidFill>
-                  <a:srgbClr val="003B4F"/>
-                </a:solidFill>
-                <a:latin typeface="Courier"/>
-              </a:rPr>
-              <a:t>(readxl)      </a:t>
-            </a:r>
-            <a:r>
-              <a:rPr>
-                <a:solidFill>
-                  <a:srgbClr val="5E5E5E"/>
-                </a:solidFill>
-                <a:latin typeface="Courier"/>
-              </a:rPr>
-              <a:t># read Excel files</a:t>
-            </a:r>
-          </a:p>
-          <a:p>
-            <a:pPr lvl="0" indent="0" marL="0">
-              <a:buNone/>
-            </a:pPr>
-            <a:r>
-              <a:rPr b="1"/>
-              <a:t>⚠️ Watch out!</a:t>
-            </a:r>
-          </a:p>
-          <a:p>
-            <a:pPr lvl="0" indent="0" marL="0">
-              <a:buNone/>
-            </a:pPr>
-            <a:r>
-              <a:rPr/>
-              <a:t>A common first-day error: forgetting </a:t>
-            </a:r>
-            <a:r>
-              <a:rPr>
-                <a:latin typeface="Courier"/>
-              </a:rPr>
-              <a:t>library(tidyverse)</a:t>
-            </a:r>
-            <a:r>
-              <a:rPr/>
-              <a:t>. If R says </a:t>
-            </a:r>
-            <a:r>
-              <a:rPr i="1"/>
-              <a:t>“could not find function </a:t>
-            </a:r>
-            <a:r>
-              <a:rPr i="1">
-                <a:latin typeface="Courier"/>
-              </a:rPr>
-              <a:t>read_excel</a:t>
-            </a:r>
-            <a:r>
-              <a:rPr i="1"/>
-              <a:t>”</a:t>
-            </a:r>
-            <a:r>
-              <a:rPr/>
-              <a:t>, you skipped the </a:t>
-            </a:r>
-            <a:r>
-              <a:rPr>
-                <a:latin typeface="Courier"/>
-              </a:rPr>
-              <a:t>library()</a:t>
-            </a:r>
-            <a:r>
-              <a:rPr/>
-              <a:t> line.</a:t>
-            </a:r>
-          </a:p>
-        </p:txBody>
-      </p:sp>
-      <p:sp>
-        <p:nvSpPr>
-          <p:cNvPr id="4" name="Content Placeholder 3"/>
-          <p:cNvSpPr>
-            <a:spLocks noGrp="1"/>
-          </p:cNvSpPr>
-          <p:nvPr>
-            <p:ph idx="2" sz="half"/>
-          </p:nvPr>
-        </p:nvSpPr>
-        <p:spPr/>
-        <p:txBody>
-          <a:bodyPr/>
-          <a:lstStyle/>
-          <a:p>
-            <a:pPr lvl="0" indent="0" marL="0">
-              <a:buNone/>
-            </a:pPr>
-            <a:r>
-              <a:rPr b="1"/>
-              <a:t>📖 New word</a:t>
-            </a:r>
-          </a:p>
-          <a:p>
-            <a:pPr lvl="0" indent="0" marL="0">
-              <a:buNone/>
-            </a:pPr>
-            <a:r>
-              <a:rPr b="1"/>
-              <a:t>Package</a:t>
-            </a:r>
-            <a:r>
-              <a:rPr/>
-              <a:t> = the installed toolbox (one time). </a:t>
-            </a:r>
-            <a:r>
-              <a:rPr b="1"/>
-              <a:t>Library</a:t>
-            </a:r>
-            <a:r>
-              <a:rPr/>
-              <a:t> = loading that toolbox into today’s session (every time).</a:t>
+              <a:t>Two functions for two file types</a:t>
             </a:r>
           </a:p>
         </p:txBody>
@@ -6895,17 +7065,6 @@
             <a:pPr lvl="0"/>
             <a:r>
               <a:rPr b="1"/>
-              <a:t>Learning goals</a:t>
-            </a:r>
-            <a:r>
-              <a:rPr/>
-              <a:t> — data organization, Excel → R workflow, hypothesis testing, interpretation</a:t>
-            </a:r>
-          </a:p>
-          <a:p>
-            <a:pPr lvl="0"/>
-            <a:r>
-              <a:rPr b="1"/>
               <a:t>Science fundamentals</a:t>
             </a:r>
             <a:r>
@@ -6962,24 +7121,44 @@
             </a:r>
             <a:r>
               <a:rPr/>
-              <a:t> — metadata, consistent terms, units, clean sheet design</a:t>
-            </a:r>
-          </a:p>
-          <a:p>
-            <a:pPr lvl="0" indent="0" marL="0">
-              <a:buNone/>
-            </a:pPr>
+              <a:t> — metadata, consistent column names, units, clean sheet design</a:t>
+            </a:r>
+          </a:p>
+          <a:p>
+            <a:pPr lvl="0"/>
             <a:r>
               <a:rPr b="1"/>
+              <a:t>Installed</a:t>
+            </a:r>
+            <a:r>
+              <a:rPr/>
+              <a:t> R and Positron before today</a:t>
+            </a:r>
+          </a:p>
+          <a:p>
+            <a:pPr lvl="0" indent="0" marL="1270000">
+              <a:buNone/>
+            </a:pPr>
+            <a:r>
+              <a:rPr sz="2000" b="1"/>
+              <a:t>Note</a:t>
+            </a:r>
+          </a:p>
+          <a:p>
+            <a:pPr lvl="0" indent="0" marL="1270000">
+              <a:buNone/>
+            </a:pPr>
+            <a:r>
+              <a:rPr sz="2000" b="1"/>
               <a:t>✅ Key idea</a:t>
             </a:r>
           </a:p>
           <a:p>
-            <a:pPr lvl="0" indent="0" marL="0">
-              <a:buNone/>
-            </a:pPr>
-            <a:r>
-              <a:rPr/>
+            <a:pPr lvl="0" indent="0" marL="1270000">
+              <a:buNone/>
+            </a:pPr>
+            <a:r>
+              <a:rPr sz="2000"/>
               <a:t>Today we take that tidy spreadsheet and bring it to life in R.</a:t>
             </a:r>
           </a:p>
@@ -7009,39 +7188,6 @@
       </p:grpSpPr>
       <p:sp>
         <p:nvSpPr>
-          <p:cNvPr id="2" name="Title 1"/>
-          <p:cNvSpPr>
-            <a:spLocks noGrp="1"/>
-          </p:cNvSpPr>
-          <p:nvPr>
-            <p:ph type="title"/>
-          </p:nvPr>
-        </p:nvSpPr>
-        <p:spPr>
-          <a:xfrm>
-            <a:off x="0" y="0"/>
-            <a:ext cx="9144000" cy="602780"/>
-          </a:xfrm>
-          <a:solidFill>
-            <a:srgbClr val="1A1A2E"/>
-          </a:solidFill>
-        </p:spPr>
-        <p:txBody>
-          <a:bodyPr/>
-          <a:lstStyle/>
-          <a:p>
-            <a:pPr lvl="0" indent="0" marL="0">
-              <a:buNone/>
-            </a:pPr>
-            <a:r>
-              <a:rPr/>
-              <a:t>Load our tree data</a:t>
-            </a:r>
-          </a:p>
-        </p:txBody>
-      </p:sp>
-      <p:sp>
-        <p:nvSpPr>
           <p:cNvPr id="3" name="Content Placeholder 2"/>
           <p:cNvSpPr>
             <a:spLocks noGrp="1"/>
@@ -7060,13 +7206,13 @@
             </a:pPr>
             <a:r>
               <a:rPr/>
-              <a:t>Put the Excel file in your project’s </a:t>
-            </a:r>
-            <a:r>
-              <a:rPr>
-                <a:latin typeface="Courier"/>
-              </a:rPr>
-              <a:t>data_raw/</a:t>
+              <a:t>Put your files in the project’s </a:t>
+            </a:r>
+            <a:r>
+              <a:rPr>
+                <a:latin typeface="Courier"/>
+              </a:rPr>
+              <a:t>data/</a:t>
             </a:r>
             <a:r>
               <a:rPr/>
@@ -7123,7 +7269,7 @@
                 </a:solidFill>
                 <a:latin typeface="Courier"/>
               </a:rPr>
-              <a:t># read the Excel file into a data frame</a:t>
+              <a:t># Excel files (.xlsx)</a:t>
             </a:r>
             <a:br/>
             <a:r>
@@ -7160,7 +7306,7 @@
                 </a:solidFill>
                 <a:latin typeface="Courier"/>
               </a:rPr>
-              <a:t>"data_raw/2026_06_25_tree_experiment_raw_data.xlsx"</a:t>
+              <a:t>"data/2026_06_25_tree_experiment_raw_data.xlsx"</a:t>
             </a:r>
             <a:r>
               <a:rPr>
@@ -7176,50 +7322,120 @@
             <a:r>
               <a:rPr>
                 <a:solidFill>
-                  <a:srgbClr val="003B4F"/>
-                </a:solidFill>
-                <a:latin typeface="Courier"/>
-              </a:rPr>
-              <a:t>tree_df          </a:t>
-            </a:r>
-            <a:r>
-              <a:rPr>
-                <a:solidFill>
                   <a:srgbClr val="5E5E5E"/>
                 </a:solidFill>
                 <a:latin typeface="Courier"/>
               </a:rPr>
-              <a:t># print it to the console</a:t>
-            </a:r>
-          </a:p>
-          <a:p>
-            <a:pPr lvl="0" indent="0" marL="0">
-              <a:buNone/>
-            </a:pPr>
-            <a:r>
-              <a:rPr b="1"/>
-              <a:t>🖐 Try it yourself</a:t>
-            </a:r>
-          </a:p>
-          <a:p>
-            <a:pPr lvl="0" indent="0" marL="0">
-              <a:buNone/>
-            </a:pPr>
-            <a:r>
-              <a:rPr b="1"/>
-              <a:t>What did you name your project folder?</a:t>
-            </a:r>
-            <a:r>
-              <a:rPr/>
-              <a:t> </a:t>
-            </a:r>
-            <a:r>
-              <a:rPr b="1"/>
-              <a:t>What did you call your script?</a:t>
-            </a:r>
-            <a:r>
-              <a:rPr/>
-              <a:t> Write them down — we’ll reuse them all term.</a:t>
+              <a:t># CSV files (.csv) — used by NOAA, iNaturalist, many databases</a:t>
+            </a:r>
+            <a:br/>
+            <a:r>
+              <a:rPr>
+                <a:solidFill>
+                  <a:srgbClr val="003B4F"/>
+                </a:solidFill>
+                <a:latin typeface="Courier"/>
+              </a:rPr>
+              <a:t>noaa_df &lt;- </a:t>
+            </a:r>
+            <a:r>
+              <a:rPr>
+                <a:solidFill>
+                  <a:srgbClr val="4758AB"/>
+                </a:solidFill>
+                <a:latin typeface="Courier"/>
+              </a:rPr>
+              <a:t>read_csv</a:t>
+            </a:r>
+            <a:r>
+              <a:rPr>
+                <a:solidFill>
+                  <a:srgbClr val="003B4F"/>
+                </a:solidFill>
+                <a:latin typeface="Courier"/>
+              </a:rPr>
+              <a:t>(</a:t>
+            </a:r>
+            <a:r>
+              <a:rPr>
+                <a:solidFill>
+                  <a:srgbClr val="20794D"/>
+                </a:solidFill>
+                <a:latin typeface="Courier"/>
+              </a:rPr>
+              <a:t>"data/noaa_global_yearly_temps.csv"</a:t>
+            </a:r>
+            <a:r>
+              <a:rPr>
+                <a:solidFill>
+                  <a:srgbClr val="003B4F"/>
+                </a:solidFill>
+                <a:latin typeface="Courier"/>
+              </a:rPr>
+              <a:t>)</a:t>
+            </a:r>
+          </a:p>
+          <a:p>
+            <a:pPr lvl="0" indent="0" marL="1270000">
+              <a:buNone/>
+            </a:pPr>
+            <a:r>
+              <a:rPr sz="2000" b="1"/>
+              <a:t>Note</a:t>
+            </a:r>
+          </a:p>
+          <a:p>
+            <a:pPr lvl="0" indent="0" marL="1270000">
+              <a:buNone/>
+            </a:pPr>
+            <a:r>
+              <a:rPr sz="2000" b="1"/>
+              <a:t>✅ Key idea</a:t>
+            </a:r>
+          </a:p>
+          <a:p>
+            <a:pPr lvl="0" indent="0" marL="1270000">
+              <a:buNone/>
+            </a:pPr>
+            <a:r>
+              <a:rPr sz="2000">
+                <a:latin typeface="Courier"/>
+              </a:rPr>
+              <a:t>read_excel()</a:t>
+            </a:r>
+            <a:r>
+              <a:rPr sz="2000"/>
+              <a:t> needs </a:t>
+            </a:r>
+            <a:r>
+              <a:rPr sz="2000">
+                <a:latin typeface="Courier"/>
+              </a:rPr>
+              <a:t>library(readxl)</a:t>
+            </a:r>
+            <a:r>
+              <a:rPr sz="2000"/>
+              <a:t>. </a:t>
+            </a:r>
+            <a:r>
+              <a:rPr sz="2000">
+                <a:latin typeface="Courier"/>
+              </a:rPr>
+              <a:t>read_csv()</a:t>
+            </a:r>
+            <a:r>
+              <a:rPr sz="2000"/>
+              <a:t> comes with </a:t>
+            </a:r>
+            <a:r>
+              <a:rPr sz="2000">
+                <a:latin typeface="Courier"/>
+              </a:rPr>
+              <a:t>library(tidyverse)</a:t>
+            </a:r>
+            <a:r>
+              <a:rPr sz="2000"/>
+              <a:t> — no extra install needed.</a:t>
             </a:r>
           </a:p>
         </p:txBody>
@@ -7239,35 +7455,54 @@
           <a:bodyPr/>
           <a:lstStyle/>
           <a:p>
-            <a:pPr lvl="0" indent="0" marL="0">
-              <a:buNone/>
-            </a:pPr>
-            <a:r>
-              <a:rPr b="1"/>
+            <a:pPr lvl="0" indent="0" marL="1270000">
+              <a:buNone/>
+            </a:pPr>
+            <a:r>
+              <a:rPr sz="2000" b="1"/>
+              <a:t>Note</a:t>
+            </a:r>
+          </a:p>
+          <a:p>
+            <a:pPr lvl="0" indent="0" marL="1270000">
+              <a:buNone/>
+            </a:pPr>
+            <a:r>
+              <a:rPr sz="2000" b="1"/>
               <a:t>📊 Coming from Excel?</a:t>
             </a:r>
           </a:p>
           <a:p>
-            <a:pPr lvl="0" indent="0" marL="0">
-              <a:buNone/>
-            </a:pPr>
-            <a:r>
-              <a:rPr>
+            <a:pPr lvl="0" indent="0" marL="1270000">
+              <a:buNone/>
+            </a:pPr>
+            <a:r>
+              <a:rPr sz="2000">
                 <a:latin typeface="Courier"/>
               </a:rPr>
               <a:t>read_excel()</a:t>
             </a:r>
             <a:r>
-              <a:rPr/>
-              <a:t> is the bridge from your spreadsheet into R. Your sheet’s first row becomes the </a:t>
-            </a:r>
-            <a:r>
-              <a:rPr b="1"/>
+              <a:rPr sz="2000"/>
+              <a:t> and </a:t>
+            </a:r>
+            <a:r>
+              <a:rPr sz="2000">
+                <a:latin typeface="Courier"/>
+              </a:rPr>
+              <a:t>read_csv()</a:t>
+            </a:r>
+            <a:r>
+              <a:rPr sz="2000"/>
+              <a:t> are the bridge from your file into R. Your file’s first row becomes the </a:t>
+            </a:r>
+            <a:r>
+              <a:rPr sz="2000" b="1"/>
               <a:t>column names</a:t>
             </a:r>
             <a:r>
-              <a:rPr/>
-              <a:t>.</a:t>
+              <a:rPr sz="2000"/>
+              <a:t> in R.</a:t>
             </a:r>
           </a:p>
         </p:txBody>
@@ -7537,24 +7772,33 @@
             </a:r>
           </a:p>
           <a:p>
-            <a:pPr lvl="0" indent="0" marL="0">
-              <a:buNone/>
-            </a:pPr>
-            <a:r>
-              <a:rPr b="1"/>
+            <a:pPr lvl="0" indent="0" marL="1270000">
+              <a:buNone/>
+            </a:pPr>
+            <a:r>
+              <a:rPr sz="2000" b="1"/>
+              <a:t>Note</a:t>
+            </a:r>
+          </a:p>
+          <a:p>
+            <a:pPr lvl="0" indent="0" marL="1270000">
+              <a:buNone/>
+            </a:pPr>
+            <a:r>
+              <a:rPr sz="2000" b="1"/>
               <a:t>📖 New word</a:t>
             </a:r>
           </a:p>
           <a:p>
-            <a:pPr lvl="0" indent="0" marL="0">
-              <a:buNone/>
-            </a:pPr>
-            <a:r>
-              <a:rPr b="1"/>
+            <a:pPr lvl="0" indent="0" marL="1270000">
+              <a:buNone/>
+            </a:pPr>
+            <a:r>
+              <a:rPr sz="2000" b="1"/>
               <a:t>Data frame</a:t>
             </a:r>
             <a:r>
-              <a:rPr/>
+              <a:rPr sz="2000"/>
               <a:t> = R’s word for a spreadsheet-style table.</a:t>
             </a:r>
           </a:p>
@@ -7688,6 +7932,90 @@
                 </a:solidFill>
                 <a:latin typeface="Courier"/>
               </a:rPr>
+              <a:t>(tree_df)      </a:t>
+            </a:r>
+            <a:r>
+              <a:rPr>
+                <a:solidFill>
+                  <a:srgbClr val="5E5E5E"/>
+                </a:solidFill>
+                <a:latin typeface="Courier"/>
+              </a:rPr>
+              <a:t># first 6 rows</a:t>
+            </a:r>
+            <a:br/>
+            <a:r>
+              <a:rPr>
+                <a:solidFill>
+                  <a:srgbClr val="4758AB"/>
+                </a:solidFill>
+                <a:latin typeface="Courier"/>
+              </a:rPr>
+              <a:t>tail</a:t>
+            </a:r>
+            <a:r>
+              <a:rPr>
+                <a:solidFill>
+                  <a:srgbClr val="003B4F"/>
+                </a:solidFill>
+                <a:latin typeface="Courier"/>
+              </a:rPr>
+              <a:t>(tree_df)      </a:t>
+            </a:r>
+            <a:r>
+              <a:rPr>
+                <a:solidFill>
+                  <a:srgbClr val="5E5E5E"/>
+                </a:solidFill>
+                <a:latin typeface="Courier"/>
+              </a:rPr>
+              <a:t># last 6 rows</a:t>
+            </a:r>
+            <a:br/>
+            <a:r>
+              <a:rPr>
+                <a:solidFill>
+                  <a:srgbClr val="4758AB"/>
+                </a:solidFill>
+                <a:latin typeface="Courier"/>
+              </a:rPr>
+              <a:t>dim</a:t>
+            </a:r>
+            <a:r>
+              <a:rPr>
+                <a:solidFill>
+                  <a:srgbClr val="003B4F"/>
+                </a:solidFill>
+                <a:latin typeface="Courier"/>
+              </a:rPr>
+              <a:t>(tree_df)       </a:t>
+            </a:r>
+            <a:r>
+              <a:rPr>
+                <a:solidFill>
+                  <a:srgbClr val="5E5E5E"/>
+                </a:solidFill>
+                <a:latin typeface="Courier"/>
+              </a:rPr>
+              <a:t># rows, columns  → 20  5</a:t>
+            </a:r>
+            <a:br/>
+            <a:r>
+              <a:rPr>
+                <a:solidFill>
+                  <a:srgbClr val="4758AB"/>
+                </a:solidFill>
+                <a:latin typeface="Courier"/>
+              </a:rPr>
+              <a:t>names</a:t>
+            </a:r>
+            <a:r>
+              <a:rPr>
+                <a:solidFill>
+                  <a:srgbClr val="003B4F"/>
+                </a:solidFill>
+                <a:latin typeface="Courier"/>
+              </a:rPr>
               <a:t>(tree_df)     </a:t>
             </a:r>
             <a:r>
@@ -7697,9 +8025,20 @@
                 </a:solidFill>
                 <a:latin typeface="Courier"/>
               </a:rPr>
-              <a:t># first 6 rows</a:t>
+              <a:t># column names</a:t>
             </a:r>
             <a:br/>
+            <a:br/>
+            <a:r>
+              <a:rPr>
+                <a:solidFill>
+                  <a:srgbClr val="5E5E5E"/>
+                </a:solidFill>
+                <a:latin typeface="Courier"/>
+              </a:rPr>
+              <a:t># Tidyverse-style structure check (prefer this over str):</a:t>
+            </a:r>
+            <a:br/>
             <a:r>
               <a:rPr>
                 <a:solidFill>
@@ -7707,16 +8046,16 @@
                 </a:solidFill>
                 <a:latin typeface="Courier"/>
               </a:rPr>
-              <a:t>tail</a:t>
-            </a:r>
-            <a:r>
-              <a:rPr>
-                <a:solidFill>
-                  <a:srgbClr val="003B4F"/>
-                </a:solidFill>
-                <a:latin typeface="Courier"/>
-              </a:rPr>
-              <a:t>(tree_df)     </a:t>
+              <a:t>glimpse</a:t>
+            </a:r>
+            <a:r>
+              <a:rPr>
+                <a:solidFill>
+                  <a:srgbClr val="003B4F"/>
+                </a:solidFill>
+                <a:latin typeface="Courier"/>
+              </a:rPr>
+              <a:t>(tree_df)   </a:t>
             </a:r>
             <a:r>
               <a:rPr>
@@ -7725,9 +8064,20 @@
                 </a:solidFill>
                 <a:latin typeface="Courier"/>
               </a:rPr>
-              <a:t># last 6 rows</a:t>
+              <a:t># one line per column: name, type, first values</a:t>
             </a:r>
             <a:br/>
+            <a:br/>
+            <a:r>
+              <a:rPr>
+                <a:solidFill>
+                  <a:srgbClr val="5E5E5E"/>
+                </a:solidFill>
+                <a:latin typeface="Courier"/>
+              </a:rPr>
+              <a:t># Base R equivalent:</a:t>
+            </a:r>
+            <a:br/>
             <a:r>
               <a:rPr>
                 <a:solidFill>
@@ -7735,16 +8085,16 @@
                 </a:solidFill>
                 <a:latin typeface="Courier"/>
               </a:rPr>
-              <a:t>dim</a:t>
-            </a:r>
-            <a:r>
-              <a:rPr>
-                <a:solidFill>
-                  <a:srgbClr val="003B4F"/>
-                </a:solidFill>
-                <a:latin typeface="Courier"/>
-              </a:rPr>
-              <a:t>(tree_df)      </a:t>
+              <a:t>str</a:t>
+            </a:r>
+            <a:r>
+              <a:rPr>
+                <a:solidFill>
+                  <a:srgbClr val="003B4F"/>
+                </a:solidFill>
+                <a:latin typeface="Courier"/>
+              </a:rPr>
+              <a:t>(tree_df)       </a:t>
             </a:r>
             <a:r>
               <a:rPr>
@@ -7753,132 +8103,53 @@
                 </a:solidFill>
                 <a:latin typeface="Courier"/>
               </a:rPr>
-              <a:t># rows, columns  -&gt; 20  5</a:t>
-            </a:r>
-            <a:br/>
-            <a:r>
-              <a:rPr>
-                <a:solidFill>
-                  <a:srgbClr val="4758AB"/>
-                </a:solidFill>
-                <a:latin typeface="Courier"/>
-              </a:rPr>
-              <a:t>names</a:t>
-            </a:r>
-            <a:r>
-              <a:rPr>
-                <a:solidFill>
-                  <a:srgbClr val="003B4F"/>
-                </a:solidFill>
-                <a:latin typeface="Courier"/>
-              </a:rPr>
-              <a:t>(tree_df)    </a:t>
-            </a:r>
-            <a:r>
-              <a:rPr>
-                <a:solidFill>
-                  <a:srgbClr val="5E5E5E"/>
-                </a:solidFill>
-                <a:latin typeface="Courier"/>
-              </a:rPr>
-              <a:t># column names</a:t>
-            </a:r>
-            <a:br/>
-            <a:r>
-              <a:rPr>
-                <a:solidFill>
-                  <a:srgbClr val="4758AB"/>
-                </a:solidFill>
-                <a:latin typeface="Courier"/>
-              </a:rPr>
-              <a:t>str</a:t>
-            </a:r>
-            <a:r>
-              <a:rPr>
-                <a:solidFill>
-                  <a:srgbClr val="003B4F"/>
-                </a:solidFill>
-                <a:latin typeface="Courier"/>
-              </a:rPr>
-              <a:t>(tree_df)      </a:t>
-            </a:r>
-            <a:r>
-              <a:rPr>
-                <a:solidFill>
-                  <a:srgbClr val="5E5E5E"/>
-                </a:solidFill>
-                <a:latin typeface="Courier"/>
-              </a:rPr>
-              <a:t># type of every column</a:t>
-            </a:r>
-            <a:br/>
-            <a:r>
-              <a:rPr>
-                <a:solidFill>
-                  <a:srgbClr val="4758AB"/>
-                </a:solidFill>
-                <a:latin typeface="Courier"/>
-              </a:rPr>
-              <a:t>summary</a:t>
-            </a:r>
-            <a:r>
-              <a:rPr>
-                <a:solidFill>
-                  <a:srgbClr val="003B4F"/>
-                </a:solidFill>
-                <a:latin typeface="Courier"/>
-              </a:rPr>
-              <a:t>(tree_df)  </a:t>
-            </a:r>
-            <a:r>
-              <a:rPr>
-                <a:solidFill>
-                  <a:srgbClr val="5E5E5E"/>
-                </a:solidFill>
-                <a:latin typeface="Courier"/>
-              </a:rPr>
-              <a:t># min/mean/max per column</a:t>
-            </a:r>
-          </a:p>
-          <a:p>
-            <a:pPr lvl="0" indent="0" marL="0">
-              <a:buNone/>
-            </a:pPr>
-            <a:r>
-              <a:rPr b="1"/>
+              <a:t># same information, different layout</a:t>
+            </a:r>
+          </a:p>
+          <a:p>
+            <a:pPr lvl="0" indent="0" marL="1270000">
+              <a:buNone/>
+            </a:pPr>
+            <a:r>
+              <a:rPr sz="2000" b="1"/>
+              <a:t>Tip</a:t>
+            </a:r>
+          </a:p>
+          <a:p>
+            <a:pPr lvl="0" indent="0" marL="1270000">
+              <a:buNone/>
+            </a:pPr>
+            <a:r>
+              <a:rPr sz="2000" b="1"/>
               <a:t>🖐 Try it yourself</a:t>
             </a:r>
           </a:p>
           <a:p>
-            <a:pPr lvl="0" indent="0" marL="0">
-              <a:buNone/>
-            </a:pPr>
-            <a:r>
-              <a:rPr/>
+            <a:pPr lvl="0" indent="0" marL="1270000">
+              <a:buNone/>
+            </a:pPr>
+            <a:r>
+              <a:rPr sz="2000"/>
               <a:t>Run </a:t>
             </a:r>
             <a:r>
-              <a:rPr>
-                <a:latin typeface="Courier"/>
-              </a:rPr>
-              <a:t>str(tree_df)</a:t>
-            </a:r>
-            <a:r>
-              <a:rPr/>
-              <a:t>. </a:t>
-            </a:r>
-            <a:r>
-              <a:rPr b="1"/>
-              <a:t>How many rows? What type is </a:t>
-            </a:r>
-            <a:r>
-              <a:rPr b="1">
+              <a:rPr sz="2000">
+                <a:latin typeface="Courier"/>
+              </a:rPr>
+              <a:t>glimpse(tree_df)</a:t>
+            </a:r>
+            <a:r>
+              <a:rPr sz="2000"/>
+              <a:t>. How many rows? What type is </a:t>
+            </a:r>
+            <a:r>
+              <a:rPr sz="2000">
                 <a:latin typeface="Courier"/>
               </a:rPr>
               <a:t>side</a:t>
             </a:r>
             <a:r>
-              <a:rPr b="1"/>
+              <a:rPr sz="2000"/>
               <a:t>?</a:t>
             </a:r>
           </a:p>
@@ -7899,68 +8170,86 @@
           <a:bodyPr/>
           <a:lstStyle/>
           <a:p>
-            <a:pPr lvl="0" indent="0" marL="0">
-              <a:buNone/>
-            </a:pPr>
-            <a:r>
-              <a:rPr b="1"/>
+            <a:pPr lvl="0" indent="0" marL="1270000">
+              <a:buNone/>
+            </a:pPr>
+            <a:r>
+              <a:rPr sz="2000" b="1"/>
+              <a:t>Note</a:t>
+            </a:r>
+          </a:p>
+          <a:p>
+            <a:pPr lvl="0" indent="0" marL="1270000">
+              <a:buNone/>
+            </a:pPr>
+            <a:r>
+              <a:rPr sz="2000" b="1"/>
               <a:t>✅ Key idea</a:t>
             </a:r>
           </a:p>
           <a:p>
-            <a:pPr lvl="0" indent="0" marL="0">
-              <a:buNone/>
-            </a:pPr>
-            <a:r>
-              <a:rPr/>
+            <a:pPr lvl="0" indent="0" marL="1270000">
+              <a:buNone/>
+            </a:pPr>
+            <a:r>
+              <a:rPr sz="2000"/>
               <a:t>Check </a:t>
             </a:r>
             <a:r>
-              <a:rPr>
+              <a:rPr sz="2000">
                 <a:latin typeface="Courier"/>
               </a:rPr>
               <a:t>dim()</a:t>
             </a:r>
             <a:r>
-              <a:rPr/>
+              <a:rPr sz="2000"/>
               <a:t> and </a:t>
             </a:r>
             <a:r>
-              <a:rPr>
-                <a:latin typeface="Courier"/>
-              </a:rPr>
-              <a:t>str()</a:t>
-            </a:r>
-            <a:r>
-              <a:rPr/>
-              <a:t> every single time you load data. Typos and wrong types hide here.</a:t>
-            </a:r>
-          </a:p>
-          <a:p>
-            <a:pPr lvl="0" indent="0" marL="0">
-              <a:buNone/>
-            </a:pPr>
-            <a:r>
-              <a:rPr b="1"/>
+              <a:rPr sz="2000">
+                <a:latin typeface="Courier"/>
+              </a:rPr>
+              <a:t>glimpse()</a:t>
+            </a:r>
+            <a:r>
+              <a:rPr sz="2000"/>
+              <a:t> every single time you load data. Typos and wrong column types hide here.</a:t>
+            </a:r>
+          </a:p>
+          <a:p>
+            <a:pPr lvl="0" indent="0" marL="1270000">
+              <a:buNone/>
+            </a:pPr>
+            <a:r>
+              <a:rPr sz="2000" b="1"/>
+              <a:t>Warning</a:t>
+            </a:r>
+          </a:p>
+          <a:p>
+            <a:pPr lvl="0" indent="0" marL="1270000">
+              <a:buNone/>
+            </a:pPr>
+            <a:r>
+              <a:rPr sz="2000" b="1"/>
               <a:t>⚠️ Watch out!</a:t>
             </a:r>
           </a:p>
           <a:p>
-            <a:pPr lvl="0" indent="0" marL="0">
-              <a:buNone/>
-            </a:pPr>
-            <a:r>
-              <a:rPr/>
+            <a:pPr lvl="0" indent="0" marL="1270000">
+              <a:buNone/>
+            </a:pPr>
+            <a:r>
+              <a:rPr sz="2000"/>
               <a:t>If a number column shows as </a:t>
             </a:r>
             <a:r>
-              <a:rPr>
-                <a:latin typeface="Courier"/>
-              </a:rPr>
-              <a:t>character</a:t>
-            </a:r>
-            <a:r>
-              <a:rPr/>
+              <a:rPr sz="2000">
+                <a:latin typeface="Courier"/>
+              </a:rPr>
+              <a:t>&lt;chr&gt;</a:t>
+            </a:r>
+            <a:r>
+              <a:rPr sz="2000"/>
               <a:t>, a stray letter or comma snuck into your spreadsheet.</a:t>
             </a:r>
           </a:p>
@@ -8016,25 +8305,17 @@
             </a:pPr>
             <a:r>
               <a:rPr/>
-              <a:t>The </a:t>
-            </a:r>
-            <a:r>
-              <a:rPr b="1"/>
-              <a:t>chute</a:t>
-            </a:r>
-            <a:r>
-              <a:rPr/>
-              <a:t> </a:t>
-            </a:r>
-            <a:r>
-              <a:rPr>
-                <a:latin typeface="Courier"/>
-              </a:rPr>
-              <a:t>|&gt;</a:t>
-            </a:r>
-            <a:r>
-              <a:rPr/>
-              <a:t> — the pipe</a:t>
+              <a:t>The pipe </a:t>
+            </a:r>
+            <a:r>
+              <a:rPr>
+                <a:latin typeface="Courier"/>
+              </a:rPr>
+              <a:t>%&gt;%</a:t>
+            </a:r>
+            <a:r>
+              <a:rPr/>
+              <a:t> — read it as “then”</a:t>
             </a:r>
           </a:p>
         </p:txBody>
@@ -8067,7 +8348,17 @@
             </a:r>
             <a:r>
               <a:rPr/>
-              <a:t> sends a result straight into the next command. Read it as the word </a:t>
+              <a:t> sends a result straight into the next function. Read </a:t>
+            </a:r>
+            <a:r>
+              <a:rPr>
+                <a:latin typeface="Courier"/>
+              </a:rPr>
+              <a:t>%&gt;%</a:t>
+            </a:r>
+            <a:r>
+              <a:rPr/>
+              <a:t> as the word </a:t>
             </a:r>
             <a:r>
               <a:rPr b="1"/>
@@ -8085,6 +8376,16 @@
             <a:r>
               <a:rPr>
                 <a:solidFill>
+                  <a:srgbClr val="5E5E5E"/>
+                </a:solidFill>
+                <a:latin typeface="Courier"/>
+              </a:rPr>
+              <a:t># Start with simple examples:</a:t>
+            </a:r>
+            <a:br/>
+            <a:r>
+              <a:rPr>
+                <a:solidFill>
                   <a:srgbClr val="003B4F"/>
                 </a:solidFill>
                 <a:latin typeface="Courier"/>
@@ -8098,7 +8399,43 @@
                 </a:solidFill>
                 <a:latin typeface="Courier"/>
               </a:rPr>
-              <a:t>|&gt;</a:t>
+              <a:t>%&gt;%</a:t>
+            </a:r>
+            <a:r>
+              <a:rPr>
+                <a:solidFill>
+                  <a:srgbClr val="003B4F"/>
+                </a:solidFill>
+                <a:latin typeface="Courier"/>
+              </a:rPr>
+              <a:t> </a:t>
+            </a:r>
+            <a:r>
+              <a:rPr>
+                <a:solidFill>
+                  <a:srgbClr val="4758AB"/>
+                </a:solidFill>
+                <a:latin typeface="Courier"/>
+              </a:rPr>
+              <a:t>nrow</a:t>
+            </a:r>
+            <a:r>
+              <a:rPr>
+                <a:solidFill>
+                  <a:srgbClr val="003B4F"/>
+                </a:solidFill>
+                <a:latin typeface="Courier"/>
+              </a:rPr>
+              <a:t>()         </a:t>
+            </a:r>
+            <a:r>
+              <a:rPr>
+                <a:solidFill>
+                  <a:srgbClr val="5E5E5E"/>
+                </a:solidFill>
+                <a:latin typeface="Courier"/>
+              </a:rPr>
+              <a:t># take tree_df, THEN count rows</a:t>
             </a:r>
             <a:br/>
             <a:r>
@@ -8108,6 +8445,146 @@
                 </a:solidFill>
                 <a:latin typeface="Courier"/>
               </a:rPr>
+              <a:t>tree_df </a:t>
+            </a:r>
+            <a:r>
+              <a:rPr>
+                <a:solidFill>
+                  <a:srgbClr val="5E5E5E"/>
+                </a:solidFill>
+                <a:latin typeface="Courier"/>
+              </a:rPr>
+              <a:t>%&gt;%</a:t>
+            </a:r>
+            <a:r>
+              <a:rPr>
+                <a:solidFill>
+                  <a:srgbClr val="003B4F"/>
+                </a:solidFill>
+                <a:latin typeface="Courier"/>
+              </a:rPr>
+              <a:t> </a:t>
+            </a:r>
+            <a:r>
+              <a:rPr>
+                <a:solidFill>
+                  <a:srgbClr val="4758AB"/>
+                </a:solidFill>
+                <a:latin typeface="Courier"/>
+              </a:rPr>
+              <a:t>names</a:t>
+            </a:r>
+            <a:r>
+              <a:rPr>
+                <a:solidFill>
+                  <a:srgbClr val="003B4F"/>
+                </a:solidFill>
+                <a:latin typeface="Courier"/>
+              </a:rPr>
+              <a:t>()        </a:t>
+            </a:r>
+            <a:r>
+              <a:rPr>
+                <a:solidFill>
+                  <a:srgbClr val="5E5E5E"/>
+                </a:solidFill>
+                <a:latin typeface="Courier"/>
+              </a:rPr>
+              <a:t># take tree_df, THEN list column names</a:t>
+            </a:r>
+            <a:br/>
+            <a:r>
+              <a:rPr>
+                <a:solidFill>
+                  <a:srgbClr val="003B4F"/>
+                </a:solidFill>
+                <a:latin typeface="Courier"/>
+              </a:rPr>
+              <a:t>tree_df </a:t>
+            </a:r>
+            <a:r>
+              <a:rPr>
+                <a:solidFill>
+                  <a:srgbClr val="5E5E5E"/>
+                </a:solidFill>
+                <a:latin typeface="Courier"/>
+              </a:rPr>
+              <a:t>%&gt;%</a:t>
+            </a:r>
+            <a:r>
+              <a:rPr>
+                <a:solidFill>
+                  <a:srgbClr val="003B4F"/>
+                </a:solidFill>
+                <a:latin typeface="Courier"/>
+              </a:rPr>
+              <a:t> </a:t>
+            </a:r>
+            <a:r>
+              <a:rPr>
+                <a:solidFill>
+                  <a:srgbClr val="4758AB"/>
+                </a:solidFill>
+                <a:latin typeface="Courier"/>
+              </a:rPr>
+              <a:t>summary</a:t>
+            </a:r>
+            <a:r>
+              <a:rPr>
+                <a:solidFill>
+                  <a:srgbClr val="003B4F"/>
+                </a:solidFill>
+                <a:latin typeface="Courier"/>
+              </a:rPr>
+              <a:t>()      </a:t>
+            </a:r>
+            <a:r>
+              <a:rPr>
+                <a:solidFill>
+                  <a:srgbClr val="5E5E5E"/>
+                </a:solidFill>
+                <a:latin typeface="Courier"/>
+              </a:rPr>
+              <a:t># take tree_df, THEN summarize</a:t>
+            </a:r>
+            <a:br/>
+            <a:br/>
+            <a:r>
+              <a:rPr>
+                <a:solidFill>
+                  <a:srgbClr val="5E5E5E"/>
+                </a:solidFill>
+                <a:latin typeface="Courier"/>
+              </a:rPr>
+              <a:t># Chain two steps:</a:t>
+            </a:r>
+            <a:br/>
+            <a:r>
+              <a:rPr>
+                <a:solidFill>
+                  <a:srgbClr val="003B4F"/>
+                </a:solidFill>
+                <a:latin typeface="Courier"/>
+              </a:rPr>
+              <a:t>tree_df </a:t>
+            </a:r>
+            <a:r>
+              <a:rPr>
+                <a:solidFill>
+                  <a:srgbClr val="5E5E5E"/>
+                </a:solidFill>
+                <a:latin typeface="Courier"/>
+              </a:rPr>
+              <a:t>%&gt;%</a:t>
+            </a:r>
+            <a:br/>
+            <a:r>
+              <a:rPr>
+                <a:solidFill>
+                  <a:srgbClr val="003B4F"/>
+                </a:solidFill>
+                <a:latin typeface="Courier"/>
+              </a:rPr>
               <a:t>  </a:t>
             </a:r>
             <a:r>
@@ -8117,16 +8594,34 @@
                 </a:solidFill>
                 <a:latin typeface="Courier"/>
               </a:rPr>
-              <a:t>group_by</a:t>
-            </a:r>
-            <a:r>
-              <a:rPr>
-                <a:solidFill>
-                  <a:srgbClr val="003B4F"/>
-                </a:solidFill>
-                <a:latin typeface="Courier"/>
-              </a:rPr>
-              <a:t>(side) </a:t>
+              <a:t>head</a:t>
+            </a:r>
+            <a:r>
+              <a:rPr>
+                <a:solidFill>
+                  <a:srgbClr val="003B4F"/>
+                </a:solidFill>
+                <a:latin typeface="Courier"/>
+              </a:rPr>
+              <a:t>(</a:t>
+            </a:r>
+            <a:r>
+              <a:rPr>
+                <a:solidFill>
+                  <a:srgbClr val="AD0000"/>
+                </a:solidFill>
+                <a:latin typeface="Courier"/>
+              </a:rPr>
+              <a:t>3</a:t>
+            </a:r>
+            <a:r>
+              <a:rPr>
+                <a:solidFill>
+                  <a:srgbClr val="003B4F"/>
+                </a:solidFill>
+                <a:latin typeface="Courier"/>
+              </a:rPr>
+              <a:t>)                  </a:t>
             </a:r>
             <a:r>
               <a:rPr>
@@ -8135,148 +8630,57 @@
                 </a:solidFill>
                 <a:latin typeface="Courier"/>
               </a:rPr>
-              <a:t>|&gt;</a:t>
-            </a:r>
-            <a:br/>
-            <a:r>
-              <a:rPr>
-                <a:solidFill>
-                  <a:srgbClr val="003B4F"/>
-                </a:solidFill>
-                <a:latin typeface="Courier"/>
-              </a:rPr>
-              <a:t>  </a:t>
-            </a:r>
-            <a:r>
-              <a:rPr>
-                <a:solidFill>
-                  <a:srgbClr val="4758AB"/>
-                </a:solidFill>
-                <a:latin typeface="Courier"/>
-              </a:rPr>
-              <a:t>summarise</a:t>
-            </a:r>
-            <a:r>
-              <a:rPr>
-                <a:solidFill>
-                  <a:srgbClr val="003B4F"/>
-                </a:solidFill>
-                <a:latin typeface="Courier"/>
-              </a:rPr>
-              <a:t>(</a:t>
-            </a:r>
-            <a:r>
-              <a:rPr>
-                <a:solidFill>
-                  <a:srgbClr val="657422"/>
-                </a:solidFill>
-                <a:latin typeface="Courier"/>
-              </a:rPr>
-              <a:t>mean_weight =</a:t>
-            </a:r>
-            <a:r>
-              <a:rPr>
-                <a:solidFill>
-                  <a:srgbClr val="003B4F"/>
-                </a:solidFill>
-                <a:latin typeface="Courier"/>
-              </a:rPr>
+              <a:t># take tree_df, THEN show first 3 rows</a:t>
+            </a:r>
+          </a:p>
+          <a:p>
+            <a:pPr lvl="0" indent="0" marL="0">
+              <a:buNone/>
+            </a:pPr>
+            <a:r>
+              <a:rPr/>
+              <a:t>In Lecture 03 we will chain more steps together.</a:t>
+            </a:r>
+          </a:p>
+          <a:p>
+            <a:pPr lvl="0" indent="0" marL="1270000">
+              <a:buNone/>
+            </a:pPr>
+            <a:r>
+              <a:rPr sz="2000" b="1"/>
+              <a:t>Note</a:t>
+            </a:r>
+          </a:p>
+          <a:p>
+            <a:pPr lvl="0" indent="0" marL="1270000">
+              <a:buNone/>
+            </a:pPr>
+            <a:r>
+              <a:rPr sz="2000" b="1"/>
+              <a:t>📖 New word</a:t>
+            </a:r>
+          </a:p>
+          <a:p>
+            <a:pPr lvl="0" indent="0" marL="1270000">
+              <a:buNone/>
+            </a:pPr>
+            <a:r>
+              <a:rPr sz="2000" b="1"/>
+              <a:t>Pipe</a:t>
+            </a:r>
+            <a:r>
+              <a:rPr sz="2000"/>
               <a:t> </a:t>
             </a:r>
             <a:r>
-              <a:rPr>
-                <a:solidFill>
-                  <a:srgbClr val="4758AB"/>
-                </a:solidFill>
-                <a:latin typeface="Courier"/>
-              </a:rPr>
-              <a:t>mean</a:t>
-            </a:r>
-            <a:r>
-              <a:rPr>
-                <a:solidFill>
-                  <a:srgbClr val="003B4F"/>
-                </a:solidFill>
-                <a:latin typeface="Courier"/>
-              </a:rPr>
-              <a:t>(weight_g))</a:t>
-            </a:r>
-          </a:p>
-          <a:p>
-            <a:pPr lvl="0" indent="0" marL="1270000">
-              <a:buNone/>
-            </a:pPr>
+              <a:rPr sz="2000">
+                <a:latin typeface="Courier"/>
+              </a:rPr>
+              <a:t>%&gt;%</a:t>
+            </a:r>
             <a:r>
               <a:rPr sz="2000"/>
-              <a:t>Take </a:t>
-            </a:r>
-            <a:r>
-              <a:rPr sz="2000">
-                <a:latin typeface="Courier"/>
-              </a:rPr>
-              <a:t>tree_df</a:t>
-            </a:r>
-            <a:r>
-              <a:rPr sz="2000"/>
-              <a:t>, </a:t>
-            </a:r>
-            <a:r>
-              <a:rPr sz="2000" b="1"/>
-              <a:t>then</a:t>
-            </a:r>
-            <a:r>
-              <a:rPr sz="2000"/>
-              <a:t> group by side, </a:t>
-            </a:r>
-            <a:r>
-              <a:rPr sz="2000" b="1"/>
-              <a:t>then</a:t>
-            </a:r>
-            <a:r>
-              <a:rPr sz="2000"/>
-              <a:t> average the weights.</a:t>
-            </a:r>
-          </a:p>
-          <a:p>
-            <a:pPr lvl="0" indent="0" marL="0">
-              <a:buNone/>
-            </a:pPr>
-            <a:r>
-              <a:rPr b="1"/>
-              <a:t>📖 New word</a:t>
-            </a:r>
-          </a:p>
-          <a:p>
-            <a:pPr lvl="0" indent="0" marL="0">
-              <a:buNone/>
-            </a:pPr>
-            <a:r>
-              <a:rPr b="1"/>
-              <a:t>Pipe</a:t>
-            </a:r>
-            <a:r>
-              <a:rPr/>
-              <a:t> </a:t>
-            </a:r>
-            <a:r>
-              <a:rPr>
-                <a:latin typeface="Courier"/>
-              </a:rPr>
-              <a:t>|&gt;</a:t>
-            </a:r>
-            <a:r>
-              <a:rPr/>
-              <a:t> = “take what’s on the left and feed it to the function on the right.” You may also see </a:t>
-            </a:r>
-            <a:r>
-              <a:rPr>
-                <a:latin typeface="Courier"/>
-              </a:rPr>
-              <a:t>%&gt;%</a:t>
-            </a:r>
-            <a:r>
-              <a:rPr/>
-              <a:t> from the tidyverse — same idea.</a:t>
+              <a:t> = “take what is on the left and feed it to the function on the right.”</a:t>
             </a:r>
           </a:p>
         </p:txBody>
@@ -8358,7 +8762,7 @@
             </a:pPr>
             <a:r>
               <a:rPr/>
-              <a:t>Part 4 · Your first plot</a:t>
+              <a:t>Part 5 · Your first plot</a:t>
             </a:r>
           </a:p>
         </p:txBody>
@@ -8433,7 +8837,7 @@
             </a:pPr>
             <a:r>
               <a:rPr/>
-              <a:t>Plots are built from three core layers, joined with </a:t>
+              <a:t>Plots are built from three core pieces, joined with </a:t>
             </a:r>
             <a:r>
               <a:rPr>
@@ -8533,20 +8937,16 @@
             </a:r>
             <a:r>
               <a:rPr/>
-              <a:t> — which data frame </a:t>
-            </a:r>
-            <a:r>
-              <a:rPr i="1"/>
-              <a:t>(</a:t>
-            </a:r>
-            <a:r>
-              <a:rPr i="1">
+              <a:t> — which data frame (</a:t>
+            </a:r>
+            <a:r>
+              <a:rPr>
                 <a:latin typeface="Courier"/>
               </a:rPr>
               <a:t>tree_df</a:t>
             </a:r>
             <a:r>
-              <a:rPr i="1"/>
+              <a:rPr/>
               <a:t>)</a:t>
             </a:r>
           </a:p>
@@ -8573,16 +8973,7 @@
             </a:r>
             <a:r>
               <a:rPr/>
-              <a:t> — how to draw it</a:t>
-            </a:r>
-          </a:p>
-          <a:p>
-            <a:pPr lvl="0" indent="0" marL="0">
-              <a:buNone/>
-            </a:pPr>
-            <a:r>
-              <a:rPr/>
-              <a:t>Add the geom with </a:t>
+              <a:t> — how to draw it (add with </a:t>
             </a:r>
             <a:r>
               <a:rPr>
@@ -8592,7 +8983,7 @@
             </a:r>
             <a:r>
               <a:rPr/>
-              <a:t>:</a:t>
+              <a:t>)</a:t>
             </a:r>
           </a:p>
           <a:p>
@@ -8710,48 +9101,57 @@
             </a:r>
           </a:p>
           <a:p>
-            <a:pPr lvl="0" indent="0" marL="0">
-              <a:buNone/>
-            </a:pPr>
-            <a:r>
-              <a:rPr b="1"/>
+            <a:pPr lvl="0" indent="0" marL="1270000">
+              <a:buNone/>
+            </a:pPr>
+            <a:r>
+              <a:rPr sz="2000" b="1"/>
+              <a:t>Warning</a:t>
+            </a:r>
+          </a:p>
+          <a:p>
+            <a:pPr lvl="0" indent="0" marL="1270000">
+              <a:buNone/>
+            </a:pPr>
+            <a:r>
+              <a:rPr sz="2000" b="1"/>
               <a:t>⚠️ Watch out!</a:t>
             </a:r>
           </a:p>
           <a:p>
-            <a:pPr lvl="0" indent="0" marL="0">
-              <a:buNone/>
-            </a:pPr>
-            <a:r>
-              <a:rPr/>
+            <a:pPr lvl="0" indent="0" marL="1270000">
+              <a:buNone/>
+            </a:pPr>
+            <a:r>
+              <a:rPr sz="2000"/>
               <a:t>The </a:t>
             </a:r>
             <a:r>
-              <a:rPr>
+              <a:rPr sz="2000">
                 <a:latin typeface="Courier"/>
               </a:rPr>
               <a:t>+</a:t>
             </a:r>
             <a:r>
-              <a:rPr/>
+              <a:rPr sz="2000"/>
               <a:t> must sit at the </a:t>
             </a:r>
             <a:r>
-              <a:rPr b="1"/>
+              <a:rPr sz="2000" b="1"/>
               <a:t>end</a:t>
             </a:r>
             <a:r>
-              <a:rPr/>
+              <a:rPr sz="2000"/>
               <a:t> of a line, never the start. </a:t>
             </a:r>
             <a:r>
-              <a:rPr>
+              <a:rPr sz="2000">
                 <a:latin typeface="Courier"/>
               </a:rPr>
               <a:t>+</a:t>
             </a:r>
             <a:r>
-              <a:rPr/>
+              <a:rPr sz="2000"/>
               <a:t> at the start = error.</a:t>
             </a:r>
           </a:p>
@@ -9308,60 +9708,69 @@
             </a:r>
           </a:p>
           <a:p>
-            <a:pPr lvl="0" indent="0" marL="0">
-              <a:buNone/>
-            </a:pPr>
-            <a:r>
-              <a:rPr b="1"/>
+            <a:pPr lvl="0" indent="0" marL="1270000">
+              <a:buNone/>
+            </a:pPr>
+            <a:r>
+              <a:rPr sz="2000" b="1"/>
+              <a:t>Tip</a:t>
+            </a:r>
+          </a:p>
+          <a:p>
+            <a:pPr lvl="0" indent="0" marL="1270000">
+              <a:buNone/>
+            </a:pPr>
+            <a:r>
+              <a:rPr sz="2000" b="1"/>
               <a:t>🖐 Try it yourself</a:t>
             </a:r>
           </a:p>
           <a:p>
-            <a:pPr lvl="0" indent="0" marL="0">
-              <a:buNone/>
-            </a:pPr>
-            <a:r>
-              <a:rPr/>
+            <a:pPr lvl="0" indent="0" marL="1270000">
+              <a:buNone/>
+            </a:pPr>
+            <a:r>
+              <a:rPr sz="2000"/>
               <a:t>Swap </a:t>
             </a:r>
             <a:r>
-              <a:rPr>
+              <a:rPr sz="2000">
                 <a:latin typeface="Courier"/>
               </a:rPr>
               <a:t>weight_g</a:t>
             </a:r>
             <a:r>
-              <a:rPr/>
+              <a:rPr sz="2000"/>
               <a:t> for </a:t>
             </a:r>
             <a:r>
-              <a:rPr>
+              <a:rPr sz="2000">
                 <a:latin typeface="Courier"/>
               </a:rPr>
               <a:t>height_cm</a:t>
             </a:r>
             <a:r>
-              <a:rPr/>
-              <a:t>. What changes? Now try </a:t>
-            </a:r>
-            <a:r>
-              <a:rPr>
+              <a:rPr sz="2000"/>
+              <a:t>. What changes? Try </a:t>
+            </a:r>
+            <a:r>
+              <a:rPr sz="2000">
                 <a:latin typeface="Courier"/>
               </a:rPr>
               <a:t>geom_violin()</a:t>
             </a:r>
             <a:r>
-              <a:rPr/>
+              <a:rPr sz="2000"/>
               <a:t> instead of </a:t>
             </a:r>
             <a:r>
-              <a:rPr>
+              <a:rPr sz="2000">
                 <a:latin typeface="Courier"/>
               </a:rPr>
               <a:t>geom_boxplot()</a:t>
             </a:r>
             <a:r>
-              <a:rPr/>
+              <a:rPr sz="2000"/>
               <a:t>.</a:t>
             </a:r>
           </a:p>
@@ -9447,7 +9856,7 @@
             </a:pPr>
             <a:r>
               <a:rPr/>
-              <a:t>Save your plot and your clean data</a:t>
+              <a:t>Save your plot and your script</a:t>
             </a:r>
           </a:p>
         </p:txBody>
@@ -9472,7 +9881,7 @@
             </a:pPr>
             <a:r>
               <a:rPr/>
-              <a:t>Store the plot in an object, then save it:</a:t>
+              <a:t>Store the plot in an object, then save it as a PNG:</a:t>
             </a:r>
           </a:p>
           <a:p>
@@ -9486,7 +9895,7 @@
                 </a:solidFill>
                 <a:latin typeface="Courier"/>
               </a:rPr>
-              <a:t>my_plot &lt;- </a:t>
+              <a:t>leaf_plot &lt;- </a:t>
             </a:r>
             <a:r>
               <a:rPr>
@@ -9602,6 +10011,16 @@
             <a:r>
               <a:rPr>
                 <a:solidFill>
+                  <a:srgbClr val="5E5E5E"/>
+                </a:solidFill>
+                <a:latin typeface="Courier"/>
+              </a:rPr>
+              <a:t># Save to the figures/ folder — always use PNG, dpi = 300</a:t>
+            </a:r>
+            <a:br/>
+            <a:r>
+              <a:rPr>
+                <a:solidFill>
                   <a:srgbClr val="4758AB"/>
                 </a:solidFill>
                 <a:latin typeface="Courier"/>
@@ -9624,16 +10043,26 @@
                 </a:solidFill>
                 <a:latin typeface="Courier"/>
               </a:rPr>
-              <a:t>"figures/leaf_weight.pdf"</a:t>
-            </a:r>
-            <a:r>
-              <a:rPr>
-                <a:solidFill>
-                  <a:srgbClr val="003B4F"/>
-                </a:solidFill>
-                <a:latin typeface="Courier"/>
-              </a:rPr>
-              <a:t>, </a:t>
+              <a:t>"figures/leaf_weight.png"</a:t>
+            </a:r>
+            <a:r>
+              <a:rPr>
+                <a:solidFill>
+                  <a:srgbClr val="003B4F"/>
+                </a:solidFill>
+                <a:latin typeface="Courier"/>
+              </a:rPr>
+              <a:t>,</a:t>
+            </a:r>
+            <a:br/>
+            <a:r>
+              <a:rPr>
+                <a:solidFill>
+                  <a:srgbClr val="003B4F"/>
+                </a:solidFill>
+                <a:latin typeface="Courier"/>
+              </a:rPr>
+              <a:t>       </a:t>
             </a:r>
             <a:r>
               <a:rPr>
@@ -9642,277 +10071,341 @@
                 </a:solidFill>
                 <a:latin typeface="Courier"/>
               </a:rPr>
+              <a:t>plot   =</a:t>
+            </a:r>
+            <a:r>
+              <a:rPr>
+                <a:solidFill>
+                  <a:srgbClr val="003B4F"/>
+                </a:solidFill>
+                <a:latin typeface="Courier"/>
+              </a:rPr>
+              <a:t> leaf_plot,</a:t>
+            </a:r>
+            <a:br/>
+            <a:r>
+              <a:rPr>
+                <a:solidFill>
+                  <a:srgbClr val="003B4F"/>
+                </a:solidFill>
+                <a:latin typeface="Courier"/>
+              </a:rPr>
+              <a:t>       </a:t>
+            </a:r>
+            <a:r>
+              <a:rPr>
+                <a:solidFill>
+                  <a:srgbClr val="657422"/>
+                </a:solidFill>
+                <a:latin typeface="Courier"/>
+              </a:rPr>
+              <a:t>width  =</a:t>
+            </a:r>
+            <a:r>
+              <a:rPr>
+                <a:solidFill>
+                  <a:srgbClr val="003B4F"/>
+                </a:solidFill>
+                <a:latin typeface="Courier"/>
+              </a:rPr>
+              <a:t> </a:t>
+            </a:r>
+            <a:r>
+              <a:rPr>
+                <a:solidFill>
+                  <a:srgbClr val="AD0000"/>
+                </a:solidFill>
+                <a:latin typeface="Courier"/>
+              </a:rPr>
+              <a:t>6</a:t>
+            </a:r>
+            <a:r>
+              <a:rPr>
+                <a:solidFill>
+                  <a:srgbClr val="003B4F"/>
+                </a:solidFill>
+                <a:latin typeface="Courier"/>
+              </a:rPr>
+              <a:t>,</a:t>
+            </a:r>
+            <a:br/>
+            <a:r>
+              <a:rPr>
+                <a:solidFill>
+                  <a:srgbClr val="003B4F"/>
+                </a:solidFill>
+                <a:latin typeface="Courier"/>
+              </a:rPr>
+              <a:t>       </a:t>
+            </a:r>
+            <a:r>
+              <a:rPr>
+                <a:solidFill>
+                  <a:srgbClr val="657422"/>
+                </a:solidFill>
+                <a:latin typeface="Courier"/>
+              </a:rPr>
+              <a:t>height =</a:t>
+            </a:r>
+            <a:r>
+              <a:rPr>
+                <a:solidFill>
+                  <a:srgbClr val="003B4F"/>
+                </a:solidFill>
+                <a:latin typeface="Courier"/>
+              </a:rPr>
+              <a:t> </a:t>
+            </a:r>
+            <a:r>
+              <a:rPr>
+                <a:solidFill>
+                  <a:srgbClr val="AD0000"/>
+                </a:solidFill>
+                <a:latin typeface="Courier"/>
+              </a:rPr>
+              <a:t>6</a:t>
+            </a:r>
+            <a:r>
+              <a:rPr>
+                <a:solidFill>
+                  <a:srgbClr val="003B4F"/>
+                </a:solidFill>
+                <a:latin typeface="Courier"/>
+              </a:rPr>
+              <a:t>,</a:t>
+            </a:r>
+            <a:br/>
+            <a:r>
+              <a:rPr>
+                <a:solidFill>
+                  <a:srgbClr val="003B4F"/>
+                </a:solidFill>
+                <a:latin typeface="Courier"/>
+              </a:rPr>
+              <a:t>       </a:t>
+            </a:r>
+            <a:r>
+              <a:rPr>
+                <a:solidFill>
+                  <a:srgbClr val="657422"/>
+                </a:solidFill>
+                <a:latin typeface="Courier"/>
+              </a:rPr>
+              <a:t>units  =</a:t>
+            </a:r>
+            <a:r>
+              <a:rPr>
+                <a:solidFill>
+                  <a:srgbClr val="003B4F"/>
+                </a:solidFill>
+                <a:latin typeface="Courier"/>
+              </a:rPr>
+              <a:t> </a:t>
+            </a:r>
+            <a:r>
+              <a:rPr>
+                <a:solidFill>
+                  <a:srgbClr val="20794D"/>
+                </a:solidFill>
+                <a:latin typeface="Courier"/>
+              </a:rPr>
+              <a:t>"in"</a:t>
+            </a:r>
+            <a:r>
+              <a:rPr>
+                <a:solidFill>
+                  <a:srgbClr val="003B4F"/>
+                </a:solidFill>
+                <a:latin typeface="Courier"/>
+              </a:rPr>
+              <a:t>,</a:t>
+            </a:r>
+            <a:br/>
+            <a:r>
+              <a:rPr>
+                <a:solidFill>
+                  <a:srgbClr val="003B4F"/>
+                </a:solidFill>
+                <a:latin typeface="Courier"/>
+              </a:rPr>
+              <a:t>       </a:t>
+            </a:r>
+            <a:r>
+              <a:rPr>
+                <a:solidFill>
+                  <a:srgbClr val="657422"/>
+                </a:solidFill>
+                <a:latin typeface="Courier"/>
+              </a:rPr>
+              <a:t>dpi    =</a:t>
+            </a:r>
+            <a:r>
+              <a:rPr>
+                <a:solidFill>
+                  <a:srgbClr val="003B4F"/>
+                </a:solidFill>
+                <a:latin typeface="Courier"/>
+              </a:rPr>
+              <a:t> </a:t>
+            </a:r>
+            <a:r>
+              <a:rPr>
+                <a:solidFill>
+                  <a:srgbClr val="AD0000"/>
+                </a:solidFill>
+                <a:latin typeface="Courier"/>
+              </a:rPr>
+              <a:t>300</a:t>
+            </a:r>
+            <a:r>
+              <a:rPr>
+                <a:solidFill>
+                  <a:srgbClr val="003B4F"/>
+                </a:solidFill>
+                <a:latin typeface="Courier"/>
+              </a:rPr>
+              <a:t>)</a:t>
+            </a:r>
+          </a:p>
+          <a:p>
+            <a:pPr lvl="0" indent="0" marL="1270000">
+              <a:buNone/>
+            </a:pPr>
+            <a:r>
+              <a:rPr sz="2000" b="1"/>
+              <a:t>Warning</a:t>
+            </a:r>
+          </a:p>
+          <a:p>
+            <a:pPr lvl="0" indent="0" marL="1270000">
+              <a:buNone/>
+            </a:pPr>
+            <a:r>
+              <a:rPr sz="2000" b="1"/>
+              <a:t>⚠️ Watch out!</a:t>
+            </a:r>
+          </a:p>
+          <a:p>
+            <a:pPr lvl="0" indent="0" marL="1270000">
+              <a:buNone/>
+            </a:pPr>
+            <a:r>
+              <a:rPr sz="2000">
+                <a:latin typeface="Courier"/>
+              </a:rPr>
+              <a:t>ggsave()</a:t>
+            </a:r>
+            <a:r>
+              <a:rPr sz="2000"/>
+              <a:t> wants the </a:t>
+            </a:r>
+            <a:r>
+              <a:rPr sz="2000" b="1"/>
+              <a:t>filename first</a:t>
+            </a:r>
+            <a:r>
+              <a:rPr sz="2000"/>
+              <a:t>, then </a:t>
+            </a:r>
+            <a:r>
+              <a:rPr sz="2000">
+                <a:latin typeface="Courier"/>
+              </a:rPr>
               <a:t>plot =</a:t>
             </a:r>
             <a:r>
-              <a:rPr>
-                <a:solidFill>
-                  <a:srgbClr val="003B4F"/>
-                </a:solidFill>
-                <a:latin typeface="Courier"/>
-              </a:rPr>
-              <a:t> my_plot,</a:t>
-            </a:r>
-            <a:br/>
-            <a:r>
-              <a:rPr>
-                <a:solidFill>
-                  <a:srgbClr val="003B4F"/>
-                </a:solidFill>
-                <a:latin typeface="Courier"/>
-              </a:rPr>
-              <a:t>       </a:t>
-            </a:r>
-            <a:r>
-              <a:rPr>
-                <a:solidFill>
-                  <a:srgbClr val="657422"/>
-                </a:solidFill>
-                <a:latin typeface="Courier"/>
-              </a:rPr>
-              <a:t>width =</a:t>
-            </a:r>
-            <a:r>
-              <a:rPr>
-                <a:solidFill>
-                  <a:srgbClr val="003B4F"/>
-                </a:solidFill>
-                <a:latin typeface="Courier"/>
-              </a:rPr>
-              <a:t> </a:t>
-            </a:r>
-            <a:r>
-              <a:rPr>
-                <a:solidFill>
-                  <a:srgbClr val="AD0000"/>
-                </a:solidFill>
-                <a:latin typeface="Courier"/>
-              </a:rPr>
-              <a:t>6</a:t>
-            </a:r>
-            <a:r>
-              <a:rPr>
-                <a:solidFill>
-                  <a:srgbClr val="003B4F"/>
-                </a:solidFill>
-                <a:latin typeface="Courier"/>
-              </a:rPr>
-              <a:t>, </a:t>
-            </a:r>
-            <a:r>
-              <a:rPr>
-                <a:solidFill>
-                  <a:srgbClr val="657422"/>
-                </a:solidFill>
-                <a:latin typeface="Courier"/>
-              </a:rPr>
-              <a:t>height =</a:t>
-            </a:r>
-            <a:r>
-              <a:rPr>
-                <a:solidFill>
-                  <a:srgbClr val="003B4F"/>
-                </a:solidFill>
-                <a:latin typeface="Courier"/>
-              </a:rPr>
-              <a:t> </a:t>
-            </a:r>
-            <a:r>
-              <a:rPr>
-                <a:solidFill>
-                  <a:srgbClr val="AD0000"/>
-                </a:solidFill>
-                <a:latin typeface="Courier"/>
-              </a:rPr>
-              <a:t>6</a:t>
-            </a:r>
-            <a:r>
-              <a:rPr>
-                <a:solidFill>
-                  <a:srgbClr val="003B4F"/>
-                </a:solidFill>
-                <a:latin typeface="Courier"/>
-              </a:rPr>
-              <a:t>, </a:t>
-            </a:r>
-            <a:r>
-              <a:rPr>
-                <a:solidFill>
-                  <a:srgbClr val="657422"/>
-                </a:solidFill>
-                <a:latin typeface="Courier"/>
-              </a:rPr>
-              <a:t>units =</a:t>
-            </a:r>
-            <a:r>
-              <a:rPr>
-                <a:solidFill>
-                  <a:srgbClr val="003B4F"/>
-                </a:solidFill>
-                <a:latin typeface="Courier"/>
-              </a:rPr>
-              <a:t> </a:t>
-            </a:r>
-            <a:r>
-              <a:rPr>
-                <a:solidFill>
-                  <a:srgbClr val="20794D"/>
-                </a:solidFill>
-                <a:latin typeface="Courier"/>
-              </a:rPr>
-              <a:t>"in"</a:t>
-            </a:r>
-            <a:r>
-              <a:rPr>
-                <a:solidFill>
-                  <a:srgbClr val="003B4F"/>
-                </a:solidFill>
-                <a:latin typeface="Courier"/>
-              </a:rPr>
-              <a:t>)</a:t>
-            </a:r>
-          </a:p>
-          <a:p>
-            <a:pPr lvl="0" indent="0" marL="0">
-              <a:buNone/>
-            </a:pPr>
-            <a:r>
-              <a:rPr/>
-              <a:t>Save a tidy data file too:</a:t>
-            </a:r>
-          </a:p>
-          <a:p>
-            <a:pPr lvl="0" indent="0">
-              <a:buNone/>
-            </a:pPr>
-            <a:r>
-              <a:rPr>
-                <a:solidFill>
-                  <a:srgbClr val="4758AB"/>
-                </a:solidFill>
-                <a:latin typeface="Courier"/>
-              </a:rPr>
-              <a:t>write_csv</a:t>
-            </a:r>
-            <a:r>
-              <a:rPr>
-                <a:solidFill>
-                  <a:srgbClr val="003B4F"/>
-                </a:solidFill>
-                <a:latin typeface="Courier"/>
-              </a:rPr>
-              <a:t>(tree_df, </a:t>
-            </a:r>
-            <a:r>
-              <a:rPr>
-                <a:solidFill>
-                  <a:srgbClr val="20794D"/>
-                </a:solidFill>
-                <a:latin typeface="Courier"/>
-              </a:rPr>
-              <a:t>"data_clean/tree_clean.csv"</a:t>
-            </a:r>
-            <a:r>
-              <a:rPr>
-                <a:solidFill>
-                  <a:srgbClr val="003B4F"/>
-                </a:solidFill>
-                <a:latin typeface="Courier"/>
-              </a:rPr>
-              <a:t>)</a:t>
-            </a:r>
-          </a:p>
-          <a:p>
-            <a:pPr lvl="0" indent="0" marL="0">
-              <a:buNone/>
-            </a:pPr>
-            <a:r>
-              <a:rPr/>
-              <a:t>Or use the </a:t>
-            </a:r>
-            <a:r>
-              <a:rPr b="1"/>
-              <a:t>disk icon</a:t>
-            </a:r>
-            <a:r>
-              <a:rPr/>
-              <a:t> above the Plots pane → the Save dialog.</a:t>
-            </a:r>
-          </a:p>
-          <a:p>
-            <a:pPr lvl="0" indent="0" marL="0">
-              <a:buNone/>
-            </a:pPr>
-            <a:r>
-              <a:rPr b="1"/>
-              <a:t>⚠️ Watch out!</a:t>
-            </a:r>
-          </a:p>
-          <a:p>
-            <a:pPr lvl="0" indent="0" marL="0">
-              <a:buNone/>
-            </a:pPr>
-            <a:r>
-              <a:rPr>
-                <a:latin typeface="Courier"/>
-              </a:rPr>
-              <a:t>ggsave()</a:t>
-            </a:r>
-            <a:r>
-              <a:rPr/>
-              <a:t> wants the </a:t>
-            </a:r>
-            <a:r>
-              <a:rPr b="1"/>
-              <a:t>filename first</a:t>
-            </a:r>
-            <a:r>
-              <a:rPr/>
-              <a:t>, then </a:t>
-            </a:r>
-            <a:r>
-              <a:rPr>
-                <a:latin typeface="Courier"/>
-              </a:rPr>
-              <a:t>plot =</a:t>
-            </a:r>
-            <a:r>
-              <a:rPr/>
-              <a:t>. Mixing that order is the classic first save error.</a:t>
+              <a:rPr sz="2000"/>
+              <a:t>. Also: </a:t>
+            </a:r>
+            <a:r>
+              <a:rPr sz="2000">
+                <a:latin typeface="Courier"/>
+              </a:rPr>
+              <a:t>dpi = 300</a:t>
+            </a:r>
+            <a:r>
+              <a:rPr sz="2000"/>
+              <a:t> is publication quality — always use it.</a:t>
             </a:r>
           </a:p>
         </p:txBody>
       </p:sp>
-      <p:pic>
-        <p:nvPicPr>
-          <p:cNvPr descr="images/paste-3.png" id="0" name="Picture 1"/>
-          <p:cNvPicPr>
-            <a:picLocks noGrp="1" noChangeAspect="1"/>
-          </p:cNvPicPr>
-          <p:nvPr/>
-        </p:nvPicPr>
-        <p:blipFill>
-          <a:blip r:embed="rId2"/>
-          <a:stretch>
-            <a:fillRect/>
-          </a:stretch>
-        </p:blipFill>
-        <p:spPr bwMode="auto">
-          <a:xfrm>
-            <a:off x="4495800" y="876300"/>
-            <a:ext cx="4406900" cy="3390900"/>
-          </a:xfrm>
-          <a:prstGeom prst="rect">
-            <a:avLst/>
-          </a:prstGeom>
-          <a:noFill/>
-          <a:ln w="9525">
-            <a:noFill/>
-            <a:headEnd/>
-            <a:tailEnd/>
-          </a:ln>
-        </p:spPr>
-      </p:pic>
+      <p:sp>
+        <p:nvSpPr>
+          <p:cNvPr id="4" name="Content Placeholder 3"/>
+          <p:cNvSpPr>
+            <a:spLocks noGrp="1"/>
+          </p:cNvSpPr>
+          <p:nvPr>
+            <p:ph idx="2" sz="half"/>
+          </p:nvPr>
+        </p:nvSpPr>
+        <p:spPr/>
+        <p:txBody>
+          <a:bodyPr/>
+          <a:lstStyle/>
+          <a:p>
+            <a:pPr lvl="0" indent="0" marL="1270000">
+              <a:buNone/>
+            </a:pPr>
+            <a:r>
+              <a:rPr sz="2000" b="1"/>
+              <a:t>Note</a:t>
+            </a:r>
+          </a:p>
+          <a:p>
+            <a:pPr lvl="0" indent="0" marL="1270000">
+              <a:buNone/>
+            </a:pPr>
+            <a:r>
+              <a:rPr sz="2000" b="1"/>
+              <a:t>📖 File format tip</a:t>
+            </a:r>
+          </a:p>
+          <a:p>
+            <a:pPr lvl="0" indent="0" marL="1270000">
+              <a:buNone/>
+            </a:pPr>
+            <a:r>
+              <a:rPr sz="2000"/>
+              <a:t>Save figures as </a:t>
+            </a:r>
+            <a:r>
+              <a:rPr sz="2000" b="1"/>
+              <a:t>PNG</a:t>
+            </a:r>
+            <a:r>
+              <a:rPr sz="2000"/>
+              <a:t> (</a:t>
+            </a:r>
+            <a:r>
+              <a:rPr sz="2000">
+                <a:latin typeface="Courier"/>
+              </a:rPr>
+              <a:t>.png</a:t>
+            </a:r>
+            <a:r>
+              <a:rPr sz="2000"/>
+              <a:t>) for reports and Canvas submissions.</a:t>
+            </a:r>
+          </a:p>
+          <a:p>
+            <a:pPr lvl="0" indent="0" marL="1270000">
+              <a:buNone/>
+            </a:pPr>
+            <a:r>
+              <a:rPr sz="2000">
+                <a:latin typeface="Courier"/>
+              </a:rPr>
+              <a:t>dpi = 300</a:t>
+            </a:r>
+            <a:r>
+              <a:rPr sz="2000"/>
+              <a:t> means 300 dots per inch — high enough for print and posters.</a:t>
+            </a:r>
+          </a:p>
+        </p:txBody>
+      </p:sp>
     </p:spTree>
   </p:cSld>
 </p:sld>
@@ -9948,8 +10441,11 @@
         <p:spPr>
           <a:xfrm>
             <a:off x="0" y="0"/>
-            <a:ext cx="9144000" cy="582780"/>
+            <a:ext cx="9144000" cy="602780"/>
           </a:xfrm>
+          <a:solidFill>
+            <a:srgbClr val="1A1A2E"/>
+          </a:solidFill>
         </p:spPr>
         <p:txBody>
           <a:bodyPr/>
@@ -9960,7 +10456,7 @@
             </a:pPr>
             <a:r>
               <a:rPr/>
-              <a:t>Wrap-up</a:t>
+              <a:t>Wrap-up · What you can now do</a:t>
             </a:r>
           </a:p>
         </p:txBody>
@@ -9972,7 +10468,7 @@
             <a:spLocks noGrp="1"/>
           </p:cNvSpPr>
           <p:nvPr>
-            <p:ph idx="1"/>
+            <p:ph idx="1" sz="half"/>
           </p:nvPr>
         </p:nvSpPr>
         <p:spPr/>
@@ -9980,15 +10476,394 @@
           <a:bodyPr/>
           <a:lstStyle/>
           <a:p>
+            <a:pPr lvl="0"/>
+            <a:r>
+              <a:rPr/>
+              <a:t>Set up R + Positron and organize a project folder</a:t>
+            </a:r>
+          </a:p>
+          <a:p>
+            <a:pPr lvl="0"/>
+            <a:r>
+              <a:rPr/>
+              <a:t>Use R as a calculator and </a:t>
+            </a:r>
+            <a:r>
+              <a:rPr b="1"/>
+              <a:t>store values</a:t>
+            </a:r>
+            <a:r>
+              <a:rPr/>
+              <a:t> with </a:t>
+            </a:r>
+            <a:r>
+              <a:rPr>
+                <a:latin typeface="Courier"/>
+              </a:rPr>
+              <a:t>&lt;-</a:t>
+            </a:r>
+          </a:p>
+          <a:p>
+            <a:pPr lvl="0"/>
+            <a:r>
+              <a:rPr/>
+              <a:t>Write and run a </a:t>
+            </a:r>
+            <a:r>
+              <a:rPr b="1"/>
+              <a:t>script</a:t>
+            </a:r>
+            <a:r>
+              <a:rPr/>
+              <a:t>, with </a:t>
+            </a:r>
+            <a:r>
+              <a:rPr>
+                <a:latin typeface="Courier"/>
+              </a:rPr>
+              <a:t>#</a:t>
+            </a:r>
+            <a:r>
+              <a:rPr/>
+              <a:t> comments</a:t>
+            </a:r>
+          </a:p>
+          <a:p>
+            <a:pPr lvl="0"/>
+            <a:r>
+              <a:rPr/>
+              <a:t>Call </a:t>
+            </a:r>
+            <a:r>
+              <a:rPr b="1"/>
+              <a:t>functions</a:t>
+            </a:r>
+            <a:r>
+              <a:rPr/>
+              <a:t> and read their help with </a:t>
+            </a:r>
+            <a:r>
+              <a:rPr>
+                <a:latin typeface="Courier"/>
+              </a:rPr>
+              <a:t>?</a:t>
+            </a:r>
+          </a:p>
+          <a:p>
+            <a:pPr lvl="0"/>
+            <a:r>
+              <a:rPr/>
+              <a:t>Build </a:t>
+            </a:r>
+            <a:r>
+              <a:rPr b="1"/>
+              <a:t>vectors</a:t>
+            </a:r>
+            <a:r>
+              <a:rPr/>
+              <a:t>, know their types</a:t>
+            </a:r>
+          </a:p>
+          <a:p>
+            <a:pPr lvl="0"/>
+            <a:r>
+              <a:rPr/>
+              <a:t>Load Excel and CSV data with </a:t>
+            </a:r>
+            <a:r>
+              <a:rPr>
+                <a:latin typeface="Courier"/>
+              </a:rPr>
+              <a:t>read_excel()</a:t>
+            </a:r>
+            <a:r>
+              <a:rPr/>
+              <a:t> and </a:t>
+            </a:r>
+            <a:r>
+              <a:rPr>
+                <a:latin typeface="Courier"/>
+              </a:rPr>
+              <a:t>read_csv()</a:t>
+            </a:r>
+          </a:p>
+          <a:p>
+            <a:pPr lvl="0"/>
+            <a:r>
+              <a:rPr/>
+              <a:t>Inspect a data frame with </a:t>
+            </a:r>
+            <a:r>
+              <a:rPr>
+                <a:latin typeface="Courier"/>
+              </a:rPr>
+              <a:t>glimpse()</a:t>
+            </a:r>
+            <a:r>
+              <a:rPr/>
+              <a:t>, </a:t>
+            </a:r>
+            <a:r>
+              <a:rPr>
+                <a:latin typeface="Courier"/>
+              </a:rPr>
+              <a:t>head()</a:t>
+            </a:r>
+            <a:r>
+              <a:rPr/>
+              <a:t>, </a:t>
+            </a:r>
+            <a:r>
+              <a:rPr>
+                <a:latin typeface="Courier"/>
+              </a:rPr>
+              <a:t>dim()</a:t>
+            </a:r>
+          </a:p>
+          <a:p>
+            <a:pPr lvl="0"/>
+            <a:r>
+              <a:rPr/>
+              <a:t>Use the </a:t>
+            </a:r>
+            <a:r>
+              <a:rPr b="1"/>
+              <a:t>pipe</a:t>
+            </a:r>
+            <a:r>
+              <a:rPr/>
+              <a:t> </a:t>
+            </a:r>
+            <a:r>
+              <a:rPr>
+                <a:latin typeface="Courier"/>
+              </a:rPr>
+              <a:t>%&gt;%</a:t>
+            </a:r>
+            <a:r>
+              <a:rPr/>
+              <a:t> to chain steps</a:t>
+            </a:r>
+          </a:p>
+          <a:p>
+            <a:pPr lvl="0"/>
+            <a:r>
+              <a:rPr/>
+              <a:t>Make and </a:t>
+            </a:r>
+            <a:r>
+              <a:rPr b="1"/>
+              <a:t>save</a:t>
+            </a:r>
+            <a:r>
+              <a:rPr/>
+              <a:t> a first </a:t>
+            </a:r>
+            <a:r>
+              <a:rPr>
+                <a:latin typeface="Courier"/>
+              </a:rPr>
+              <a:t>ggplot</a:t>
+            </a:r>
+            <a:r>
+              <a:rPr/>
+              <a:t> as a PNG</a:t>
+            </a:r>
+          </a:p>
+          <a:p>
+            <a:pPr lvl="0" indent="0" marL="1270000">
+              <a:buNone/>
+            </a:pPr>
+            <a:r>
+              <a:rPr sz="2000" b="1"/>
+              <a:t>Tip</a:t>
+            </a:r>
+          </a:p>
+          <a:p>
+            <a:pPr lvl="0" indent="0" marL="1270000">
+              <a:buNone/>
+            </a:pPr>
+            <a:r>
+              <a:rPr sz="2000" b="1"/>
+              <a:t>🖐 Before next class</a:t>
+            </a:r>
+          </a:p>
+          <a:p>
+            <a:pPr lvl="0" indent="0" marL="1270000">
+              <a:buNone/>
+            </a:pPr>
+            <a:r>
+              <a:rPr sz="2000"/>
+              <a:t>Load </a:t>
+            </a:r>
+            <a:r>
+              <a:rPr sz="2000">
+                <a:latin typeface="Courier"/>
+              </a:rPr>
+              <a:t>tree_df</a:t>
+            </a:r>
+            <a:r>
+              <a:rPr sz="2000"/>
+              <a:t>, run </a:t>
+            </a:r>
+            <a:r>
+              <a:rPr sz="2000">
+                <a:latin typeface="Courier"/>
+              </a:rPr>
+              <a:t>glimpse()</a:t>
+            </a:r>
+            <a:r>
+              <a:rPr sz="2000"/>
+              <a:t>, and make one plot of </a:t>
+            </a:r>
+            <a:r>
+              <a:rPr sz="2000">
+                <a:latin typeface="Courier"/>
+              </a:rPr>
+              <a:t>width_cm</a:t>
+            </a:r>
+            <a:r>
+              <a:rPr sz="2000"/>
+              <a:t> by </a:t>
+            </a:r>
+            <a:r>
+              <a:rPr sz="2000">
+                <a:latin typeface="Courier"/>
+              </a:rPr>
+              <a:t>side</a:t>
+            </a:r>
+            <a:r>
+              <a:rPr sz="2000"/>
+              <a:t>. Save it to </a:t>
+            </a:r>
+            <a:r>
+              <a:rPr sz="2000">
+                <a:latin typeface="Courier"/>
+              </a:rPr>
+              <a:t>figures/</a:t>
+            </a:r>
+            <a:r>
+              <a:rPr sz="2000"/>
+              <a:t>.</a:t>
+            </a:r>
+          </a:p>
+        </p:txBody>
+      </p:sp>
+      <p:sp>
+        <p:nvSpPr>
+          <p:cNvPr id="4" name="Content Placeholder 3"/>
+          <p:cNvSpPr>
+            <a:spLocks noGrp="1"/>
+          </p:cNvSpPr>
+          <p:nvPr>
+            <p:ph idx="2" sz="half"/>
+          </p:nvPr>
+        </p:nvSpPr>
+        <p:spPr/>
+        <p:txBody>
+          <a:bodyPr/>
+          <a:lstStyle/>
+          <a:p>
+            <a:pPr lvl="0" indent="0" marL="1270000">
+              <a:buNone/>
+            </a:pPr>
+            <a:r>
+              <a:rPr sz="2000" b="1"/>
+              <a:t>Note</a:t>
+            </a:r>
+          </a:p>
+          <a:p>
+            <a:pPr lvl="0" indent="0" marL="1270000">
+              <a:buNone/>
+            </a:pPr>
+            <a:r>
+              <a:rPr sz="2000" b="1"/>
+              <a:t>✅ Key idea</a:t>
+            </a:r>
+          </a:p>
+          <a:p>
+            <a:pPr lvl="0" indent="0" marL="1270000">
+              <a:buNone/>
+            </a:pPr>
+            <a:r>
+              <a:rPr sz="2000"/>
+              <a:t>You went from a blank console to a saved figure of </a:t>
+            </a:r>
+            <a:r>
+              <a:rPr sz="2000" b="1"/>
+              <a:t>our</a:t>
+            </a:r>
+            <a:r>
+              <a:rPr sz="2000"/>
+              <a:t> data. That is the whole workflow in miniature.</a:t>
+            </a:r>
+          </a:p>
+          <a:p>
             <a:pPr lvl="0" indent="0" marL="0">
-              <a:spcBef>
-                <a:spcPts val="3000"/>
-              </a:spcBef>
               <a:buNone/>
             </a:pPr>
             <a:r>
               <a:rPr b="1"/>
-              <a:t>What you can now do</a:t>
+              <a:t>Up next — Lecture 03:</a:t>
+            </a:r>
+          </a:p>
+          <a:p>
+            <a:pPr lvl="0"/>
+            <a:r>
+              <a:rPr>
+                <a:latin typeface="Courier"/>
+              </a:rPr>
+              <a:t>filter()</a:t>
+            </a:r>
+            <a:r>
+              <a:rPr/>
+              <a:t> — pick rows</a:t>
+            </a:r>
+          </a:p>
+          <a:p>
+            <a:pPr lvl="0"/>
+            <a:r>
+              <a:rPr>
+                <a:latin typeface="Courier"/>
+              </a:rPr>
+              <a:t>select()</a:t>
+            </a:r>
+            <a:r>
+              <a:rPr/>
+              <a:t> — pick columns</a:t>
+            </a:r>
+          </a:p>
+          <a:p>
+            <a:pPr lvl="0"/>
+            <a:r>
+              <a:rPr>
+                <a:latin typeface="Courier"/>
+              </a:rPr>
+              <a:t>mutate()</a:t>
+            </a:r>
+            <a:r>
+              <a:rPr/>
+              <a:t> — create new columns</a:t>
+            </a:r>
+          </a:p>
+          <a:p>
+            <a:pPr lvl="0"/>
+            <a:r>
+              <a:rPr>
+                <a:latin typeface="Courier"/>
+              </a:rPr>
+              <a:t>arrange()</a:t>
+            </a:r>
+            <a:r>
+              <a:rPr/>
+              <a:t> — sort rows</a:t>
+            </a:r>
+          </a:p>
+          <a:p>
+            <a:pPr lvl="0"/>
+            <a:r>
+              <a:rPr/>
+              <a:t>Then: descriptive statistics on our leaf data</a:t>
             </a:r>
           </a:p>
         </p:txBody>
@@ -10017,6 +10892,39 @@
       </p:grpSpPr>
       <p:sp>
         <p:nvSpPr>
+          <p:cNvPr id="2" name="Title 1"/>
+          <p:cNvSpPr>
+            <a:spLocks noGrp="1"/>
+          </p:cNvSpPr>
+          <p:nvPr>
+            <p:ph type="title"/>
+          </p:nvPr>
+        </p:nvSpPr>
+        <p:spPr>
+          <a:xfrm>
+            <a:off x="0" y="0"/>
+            <a:ext cx="9144000" cy="602780"/>
+          </a:xfrm>
+          <a:solidFill>
+            <a:srgbClr val="1A1A2E"/>
+          </a:solidFill>
+        </p:spPr>
+        <p:txBody>
+          <a:bodyPr/>
+          <a:lstStyle/>
+          <a:p>
+            <a:pPr lvl="0" indent="0" marL="0">
+              <a:buNone/>
+            </a:pPr>
+            <a:r>
+              <a:rPr/>
+              <a:t>Getting unstuck</a:t>
+            </a:r>
+          </a:p>
+        </p:txBody>
+      </p:sp>
+      <p:sp>
+        <p:nvSpPr>
           <p:cNvPr id="3" name="Content Placeholder 2"/>
           <p:cNvSpPr>
             <a:spLocks noGrp="1"/>
@@ -10030,141 +10938,149 @@
           <a:bodyPr/>
           <a:lstStyle/>
           <a:p>
+            <a:pPr lvl="0" indent="0" marL="0">
+              <a:buNone/>
+            </a:pPr>
+            <a:r>
+              <a:rPr/>
+              <a:t>When code breaks (it will — that is normal):</a:t>
+            </a:r>
+          </a:p>
+          <a:p>
             <a:pPr lvl="0"/>
             <a:r>
-              <a:rPr/>
-              <a:t>Set up R + Positron and organize a project</a:t>
+              <a:rPr>
+                <a:latin typeface="Courier"/>
+              </a:rPr>
+              <a:t>?function_name</a:t>
+            </a:r>
+            <a:r>
+              <a:rPr/>
+              <a:t> — the built-in help page</a:t>
             </a:r>
           </a:p>
           <a:p>
             <a:pPr lvl="0"/>
             <a:r>
               <a:rPr/>
-              <a:t>Use R as a calculator and </a:t>
+              <a:t>Read the </a:t>
             </a:r>
             <a:r>
               <a:rPr b="1"/>
-              <a:t>store values</a:t>
-            </a:r>
-            <a:r>
-              <a:rPr/>
-              <a:t> with </a:t>
-            </a:r>
-            <a:r>
-              <a:rPr>
-                <a:latin typeface="Courier"/>
-              </a:rPr>
-              <a:t>&lt;-</a:t>
+              <a:t>error message</a:t>
+            </a:r>
+            <a:r>
+              <a:rPr/>
+              <a:t> out loud; it usually names the line</a:t>
             </a:r>
           </a:p>
           <a:p>
             <a:pPr lvl="0"/>
             <a:r>
               <a:rPr/>
-              <a:t>Write and run a </a:t>
+              <a:t>Check: did you load </a:t>
+            </a:r>
+            <a:r>
+              <a:rPr>
+                <a:latin typeface="Courier"/>
+              </a:rPr>
+              <a:t>library(tidyverse)</a:t>
+            </a:r>
+            <a:r>
+              <a:rPr/>
+              <a:t> and </a:t>
+            </a:r>
+            <a:r>
+              <a:rPr>
+                <a:latin typeface="Courier"/>
+              </a:rPr>
+              <a:t>library(readxl)</a:t>
+            </a:r>
+            <a:r>
+              <a:rPr/>
+              <a:t>?</a:t>
+            </a:r>
+          </a:p>
+          <a:p>
+            <a:pPr lvl="0"/>
+            <a:r>
+              <a:rPr/>
+              <a:t>Check: spelling? A missing </a:t>
+            </a:r>
+            <a:r>
+              <a:rPr>
+                <a:latin typeface="Courier"/>
+              </a:rPr>
+              <a:t>)</a:t>
+            </a:r>
+            <a:r>
+              <a:rPr/>
+              <a:t> or </a:t>
+            </a:r>
+            <a:r>
+              <a:rPr>
+                <a:latin typeface="Courier"/>
+              </a:rPr>
+              <a:t>+</a:t>
+            </a:r>
+            <a:r>
+              <a:rPr/>
+              <a:t>?</a:t>
+            </a:r>
+          </a:p>
+          <a:p>
+            <a:pPr lvl="0"/>
+            <a:r>
+              <a:rPr/>
+              <a:t>The </a:t>
             </a:r>
             <a:r>
               <a:rPr b="1"/>
-              <a:t>script</a:t>
-            </a:r>
-            <a:r>
-              <a:rPr/>
-              <a:t>, with comments</a:t>
+              <a:t>posit/tidyverse cheatsheets</a:t>
+            </a:r>
+            <a:r>
+              <a:rPr/>
+              <a:t> are excellent: </a:t>
+            </a:r>
+            <a:r>
+              <a:rPr>
+                <a:hlinkClick r:id="rId2"/>
+              </a:rPr>
+              <a:t>posit.co/resources/cheatsheets</a:t>
             </a:r>
           </a:p>
           <a:p>
             <a:pPr lvl="0"/>
             <a:r>
               <a:rPr/>
-              <a:t>Call </a:t>
-            </a:r>
-            <a:r>
-              <a:rPr b="1"/>
-              <a:t>functions</a:t>
-            </a:r>
-            <a:r>
-              <a:rPr/>
-              <a:t> and read their help</a:t>
-            </a:r>
-          </a:p>
-          <a:p>
-            <a:pPr lvl="0"/>
-            <a:r>
-              <a:rPr/>
-              <a:t>Build </a:t>
-            </a:r>
-            <a:r>
-              <a:rPr b="1"/>
-              <a:t>vectors</a:t>
-            </a:r>
-            <a:r>
-              <a:rPr/>
-              <a:t>, know their </a:t>
-            </a:r>
-            <a:r>
-              <a:rPr b="1"/>
-              <a:t>types</a:t>
-            </a:r>
-          </a:p>
-          <a:p>
-            <a:pPr lvl="0"/>
-            <a:r>
-              <a:rPr/>
-              <a:t>Load Excel data into a </a:t>
-            </a:r>
-            <a:r>
-              <a:rPr b="1"/>
-              <a:t>data frame</a:t>
-            </a:r>
-            <a:r>
-              <a:rPr/>
-              <a:t> and inspect it</a:t>
-            </a:r>
-          </a:p>
-          <a:p>
-            <a:pPr lvl="0"/>
-            <a:r>
-              <a:rPr/>
-              <a:t>Use the </a:t>
-            </a:r>
-            <a:r>
-              <a:rPr b="1"/>
-              <a:t>pipe</a:t>
-            </a:r>
-            <a:r>
-              <a:rPr/>
-              <a:t> </a:t>
-            </a:r>
-            <a:r>
-              <a:rPr>
-                <a:latin typeface="Courier"/>
-              </a:rPr>
-              <a:t>|&gt;</a:t>
-            </a:r>
-            <a:r>
-              <a:rPr/>
-              <a:t> to summarise</a:t>
-            </a:r>
-          </a:p>
-          <a:p>
-            <a:pPr lvl="0"/>
-            <a:r>
-              <a:rPr/>
-              <a:t>Make and </a:t>
-            </a:r>
-            <a:r>
-              <a:rPr b="1"/>
-              <a:t>save</a:t>
-            </a:r>
-            <a:r>
-              <a:rPr/>
-              <a:t> a first </a:t>
-            </a:r>
-            <a:r>
-              <a:rPr>
-                <a:latin typeface="Courier"/>
-              </a:rPr>
-              <a:t>ggplot</a:t>
+              <a:t>Bring the exact error (copy-paste it) to class or office hours</a:t>
+            </a:r>
+          </a:p>
+          <a:p>
+            <a:pPr lvl="0" indent="0" marL="1270000">
+              <a:buNone/>
+            </a:pPr>
+            <a:r>
+              <a:rPr sz="2000" b="1"/>
+              <a:t>Note</a:t>
+            </a:r>
+          </a:p>
+          <a:p>
+            <a:pPr lvl="0" indent="0" marL="1270000">
+              <a:buNone/>
+            </a:pPr>
+            <a:r>
+              <a:rPr sz="2000" b="1"/>
+              <a:t>✅ Key idea</a:t>
+            </a:r>
+          </a:p>
+          <a:p>
+            <a:pPr lvl="0" indent="0" marL="1270000">
+              <a:buNone/>
+            </a:pPr>
+            <a:r>
+              <a:rPr sz="2000"/>
+              <a:t>Every coder googles error messages daily. Getting stuck is not failing — it is the job.</a:t>
             </a:r>
           </a:p>
         </p:txBody>
@@ -10184,87 +11100,38 @@
           <a:bodyPr/>
           <a:lstStyle/>
           <a:p>
-            <a:pPr lvl="0" indent="0" marL="0">
-              <a:buNone/>
-            </a:pPr>
-            <a:r>
-              <a:rPr b="1"/>
-              <a:t>✅ Key idea</a:t>
-            </a:r>
-          </a:p>
-          <a:p>
-            <a:pPr lvl="0" indent="0" marL="0">
-              <a:buNone/>
-            </a:pPr>
-            <a:r>
-              <a:rPr/>
-              <a:t>You went from a blank console to a saved figure of </a:t>
-            </a:r>
-            <a:r>
-              <a:rPr b="1"/>
-              <a:t>our</a:t>
-            </a:r>
-            <a:r>
-              <a:rPr/>
-              <a:t> data. That’s the whole workflow in miniature.</a:t>
-            </a:r>
-          </a:p>
-          <a:p>
-            <a:pPr lvl="0" indent="0" marL="0">
-              <a:buNone/>
-            </a:pPr>
-            <a:r>
-              <a:rPr b="1"/>
-              <a:t>🖐 Try it yourself</a:t>
-            </a:r>
-          </a:p>
-          <a:p>
-            <a:pPr lvl="0" indent="0" marL="0">
-              <a:buNone/>
-            </a:pPr>
-            <a:r>
-              <a:rPr/>
-              <a:t>Before next class: load </a:t>
-            </a:r>
-            <a:r>
-              <a:rPr>
-                <a:latin typeface="Courier"/>
-              </a:rPr>
-              <a:t>tree_df</a:t>
-            </a:r>
-            <a:r>
-              <a:rPr/>
-              <a:t>, run </a:t>
-            </a:r>
-            <a:r>
-              <a:rPr>
-                <a:latin typeface="Courier"/>
-              </a:rPr>
-              <a:t>summary()</a:t>
-            </a:r>
-            <a:r>
-              <a:rPr/>
-              <a:t>, and make one plot of </a:t>
-            </a:r>
-            <a:r>
-              <a:rPr>
-                <a:latin typeface="Courier"/>
-              </a:rPr>
-              <a:t>width_cm</a:t>
-            </a:r>
-            <a:r>
-              <a:rPr/>
-              <a:t> by </a:t>
-            </a:r>
-            <a:r>
-              <a:rPr>
-                <a:latin typeface="Courier"/>
-              </a:rPr>
-              <a:t>side</a:t>
-            </a:r>
-            <a:r>
-              <a:rPr/>
-              <a:t>.</a:t>
+            <a:pPr lvl="0" indent="0" marL="1270000">
+              <a:buNone/>
+            </a:pPr>
+            <a:r>
+              <a:rPr sz="2000" b="1"/>
+              <a:t>Note</a:t>
+            </a:r>
+          </a:p>
+          <a:p>
+            <a:pPr lvl="0" indent="0" marL="1270000">
+              <a:buNone/>
+            </a:pPr>
+            <a:r>
+              <a:rPr sz="2000" b="1"/>
+              <a:t>📊 Coming from Excel?</a:t>
+            </a:r>
+          </a:p>
+          <a:p>
+            <a:pPr lvl="0" indent="0" marL="1270000">
+              <a:buNone/>
+            </a:pPr>
+            <a:r>
+              <a:rPr sz="2000"/>
+              <a:t>In Excel you fix errors by clicking around. In R you fix them by </a:t>
+            </a:r>
+            <a:r>
+              <a:rPr sz="2000" b="1"/>
+              <a:t>reading the message</a:t>
+            </a:r>
+            <a:r>
+              <a:rPr sz="2000"/>
+              <a:t> and editing one line. Slower at first, far more powerful soon.</a:t>
             </a:r>
           </a:p>
         </p:txBody>
@@ -10358,7 +11225,7 @@
             </a:r>
             <a:r>
               <a:rPr/>
-              <a:t> set up and oriented</a:t>
+              <a:t> oriented — the four panes</a:t>
             </a:r>
           </a:p>
           <a:p>
@@ -10390,15 +11257,7 @@
             <a:pPr lvl="1"/>
             <a:r>
               <a:rPr/>
-              <a:t>storing things with the </a:t>
-            </a:r>
-            <a:r>
-              <a:rPr b="1"/>
-              <a:t>assignment operator</a:t>
-            </a:r>
-            <a:r>
-              <a:rPr/>
-              <a:t> </a:t>
+              <a:t>storing things with </a:t>
             </a:r>
             <a:r>
               <a:rPr>
@@ -10431,6 +11290,17 @@
             </a:r>
           </a:p>
           <a:p>
+            <a:pPr lvl="1"/>
+            <a:r>
+              <a:rPr/>
+              <a:t>writing a </a:t>
+            </a:r>
+            <a:r>
+              <a:rPr b="1"/>
+              <a:t>script</a:t>
+            </a:r>
+          </a:p>
+          <a:p>
             <a:pPr lvl="0"/>
             <a:r>
               <a:rPr/>
@@ -10442,28 +11312,37 @@
             </a:r>
           </a:p>
           <a:p>
-            <a:pPr lvl="0" indent="0" marL="0">
-              <a:buNone/>
-            </a:pPr>
-            <a:r>
-              <a:rPr b="1"/>
+            <a:pPr lvl="0" indent="0" marL="1270000">
+              <a:buNone/>
+            </a:pPr>
+            <a:r>
+              <a:rPr sz="2000" b="1"/>
+              <a:t>Tip</a:t>
+            </a:r>
+          </a:p>
+          <a:p>
+            <a:pPr lvl="0" indent="0" marL="1270000">
+              <a:buNone/>
+            </a:pPr>
+            <a:r>
+              <a:rPr sz="2000" b="1"/>
               <a:t>🖐 Try it yourself</a:t>
             </a:r>
           </a:p>
           <a:p>
-            <a:pPr lvl="0" indent="0" marL="0">
-              <a:buNone/>
-            </a:pPr>
-            <a:r>
-              <a:rPr/>
-              <a:t>By the end you’ll run real code on </a:t>
-            </a:r>
-            <a:r>
-              <a:rPr b="1"/>
+            <a:pPr lvl="0" indent="0" marL="1270000">
+              <a:buNone/>
+            </a:pPr>
+            <a:r>
+              <a:rPr sz="2000"/>
+              <a:t>By the end you will run real code on </a:t>
+            </a:r>
+            <a:r>
+              <a:rPr sz="2000" b="1"/>
               <a:t>our</a:t>
             </a:r>
             <a:r>
-              <a:rPr/>
+              <a:rPr sz="2000"/>
               <a:t> leaf data — not a toy dataset.</a:t>
             </a:r>
           </a:p>
@@ -10499,233 +11378,6 @@
           </a:ln>
         </p:spPr>
       </p:pic>
-    </p:spTree>
-  </p:cSld>
-</p:sld>
-</file>
-
-<file path=ppt/slides/slide30.xml><?xml version="1.0" encoding="utf-8"?>
-<p:sld xmlns:a="http://schemas.openxmlformats.org/drawingml/2006/main" xmlns:r="http://schemas.openxmlformats.org/officeDocument/2006/relationships" xmlns:p="http://schemas.openxmlformats.org/presentationml/2006/main">
-  <p:cSld>
-    <p:spTree>
-      <p:nvGrpSpPr>
-        <p:cNvPr id="1" name=""/>
-        <p:cNvGrpSpPr/>
-        <p:nvPr/>
-      </p:nvGrpSpPr>
-      <p:grpSpPr>
-        <a:xfrm>
-          <a:off x="0" y="0"/>
-          <a:ext cx="0" cy="0"/>
-          <a:chOff x="0" y="0"/>
-          <a:chExt cx="0" cy="0"/>
-        </a:xfrm>
-      </p:grpSpPr>
-      <p:sp>
-        <p:nvSpPr>
-          <p:cNvPr id="2" name="Title 1"/>
-          <p:cNvSpPr>
-            <a:spLocks noGrp="1"/>
-          </p:cNvSpPr>
-          <p:nvPr>
-            <p:ph type="title"/>
-          </p:nvPr>
-        </p:nvSpPr>
-        <p:spPr>
-          <a:xfrm>
-            <a:off x="0" y="0"/>
-            <a:ext cx="9144000" cy="602780"/>
-          </a:xfrm>
-          <a:solidFill>
-            <a:srgbClr val="1A1A2E"/>
-          </a:solidFill>
-        </p:spPr>
-        <p:txBody>
-          <a:bodyPr/>
-          <a:lstStyle/>
-          <a:p>
-            <a:pPr lvl="0" indent="0" marL="0">
-              <a:buNone/>
-            </a:pPr>
-            <a:r>
-              <a:rPr/>
-              <a:t>Getting unstuck</a:t>
-            </a:r>
-          </a:p>
-        </p:txBody>
-      </p:sp>
-      <p:sp>
-        <p:nvSpPr>
-          <p:cNvPr id="3" name="Content Placeholder 2"/>
-          <p:cNvSpPr>
-            <a:spLocks noGrp="1"/>
-          </p:cNvSpPr>
-          <p:nvPr>
-            <p:ph idx="1" sz="half"/>
-          </p:nvPr>
-        </p:nvSpPr>
-        <p:spPr/>
-        <p:txBody>
-          <a:bodyPr/>
-          <a:lstStyle/>
-          <a:p>
-            <a:pPr lvl="0" indent="0" marL="0">
-              <a:buNone/>
-            </a:pPr>
-            <a:r>
-              <a:rPr/>
-              <a:t>When code breaks (it will — that’s normal):</a:t>
-            </a:r>
-          </a:p>
-          <a:p>
-            <a:pPr lvl="0"/>
-            <a:r>
-              <a:rPr>
-                <a:latin typeface="Courier"/>
-              </a:rPr>
-              <a:t>?function_name</a:t>
-            </a:r>
-            <a:r>
-              <a:rPr/>
-              <a:t> — the built-in help page</a:t>
-            </a:r>
-          </a:p>
-          <a:p>
-            <a:pPr lvl="0"/>
-            <a:r>
-              <a:rPr/>
-              <a:t>Read the </a:t>
-            </a:r>
-            <a:r>
-              <a:rPr b="1"/>
-              <a:t>error message</a:t>
-            </a:r>
-            <a:r>
-              <a:rPr/>
-              <a:t> out loud; it usually names the line</a:t>
-            </a:r>
-          </a:p>
-          <a:p>
-            <a:pPr lvl="0"/>
-            <a:r>
-              <a:rPr/>
-              <a:t>Check: did you load </a:t>
-            </a:r>
-            <a:r>
-              <a:rPr>
-                <a:latin typeface="Courier"/>
-              </a:rPr>
-              <a:t>library(tidyverse)</a:t>
-            </a:r>
-            <a:r>
-              <a:rPr/>
-              <a:t>? spelling? a missing </a:t>
-            </a:r>
-            <a:r>
-              <a:rPr>
-                <a:latin typeface="Courier"/>
-              </a:rPr>
-              <a:t>)</a:t>
-            </a:r>
-            <a:r>
-              <a:rPr/>
-              <a:t> or </a:t>
-            </a:r>
-            <a:r>
-              <a:rPr>
-                <a:latin typeface="Courier"/>
-              </a:rPr>
-              <a:t>+</a:t>
-            </a:r>
-            <a:r>
-              <a:rPr/>
-              <a:t>?</a:t>
-            </a:r>
-          </a:p>
-          <a:p>
-            <a:pPr lvl="0"/>
-            <a:r>
-              <a:rPr/>
-              <a:t>The </a:t>
-            </a:r>
-            <a:r>
-              <a:rPr b="1"/>
-              <a:t>posit/tidyverse cheatsheets</a:t>
-            </a:r>
-            <a:r>
-              <a:rPr/>
-              <a:t> are gold</a:t>
-            </a:r>
-          </a:p>
-          <a:p>
-            <a:pPr lvl="0"/>
-            <a:r>
-              <a:rPr/>
-              <a:t>Bring the exact error to class or office hours</a:t>
-            </a:r>
-          </a:p>
-          <a:p>
-            <a:pPr lvl="0" indent="0" marL="0">
-              <a:buNone/>
-            </a:pPr>
-            <a:r>
-              <a:rPr b="1"/>
-              <a:t>✅ Key idea</a:t>
-            </a:r>
-          </a:p>
-          <a:p>
-            <a:pPr lvl="0" indent="0" marL="0">
-              <a:buNone/>
-            </a:pPr>
-            <a:r>
-              <a:rPr/>
-              <a:t>Every coder googles error messages daily. Getting stuck isn’t failing — it’s the job.</a:t>
-            </a:r>
-          </a:p>
-        </p:txBody>
-      </p:sp>
-      <p:sp>
-        <p:nvSpPr>
-          <p:cNvPr id="4" name="Content Placeholder 3"/>
-          <p:cNvSpPr>
-            <a:spLocks noGrp="1"/>
-          </p:cNvSpPr>
-          <p:nvPr>
-            <p:ph idx="2" sz="half"/>
-          </p:nvPr>
-        </p:nvSpPr>
-        <p:spPr/>
-        <p:txBody>
-          <a:bodyPr/>
-          <a:lstStyle/>
-          <a:p>
-            <a:pPr lvl="0" indent="0" marL="0">
-              <a:buNone/>
-            </a:pPr>
-            <a:r>
-              <a:rPr b="1"/>
-              <a:t>📊 Coming from Excel?</a:t>
-            </a:r>
-          </a:p>
-          <a:p>
-            <a:pPr lvl="0" indent="0" marL="0">
-              <a:buNone/>
-            </a:pPr>
-            <a:r>
-              <a:rPr/>
-              <a:t>In Excel you fix errors by clicking around. In R you fix them by </a:t>
-            </a:r>
-            <a:r>
-              <a:rPr b="1"/>
-              <a:t>reading the message</a:t>
-            </a:r>
-            <a:r>
-              <a:rPr/>
-              <a:t> and editing one line. Slower at first, far more powerful soon.</a:t>
-            </a:r>
-          </a:p>
-        </p:txBody>
-      </p:sp>
     </p:spTree>
   </p:cSld>
 </p:sld>
@@ -10850,22 +11502,14 @@
             </a:r>
             <a:r>
               <a:rPr/>
-              <a:t> is the engine — a free language for data and statistics. On its own it is plain; this plain version is called </a:t>
-            </a:r>
-            <a:r>
-              <a:rPr b="1"/>
-              <a:t>base R</a:t>
-            </a:r>
-            <a:r>
-              <a:rPr/>
-              <a:t>.</a:t>
+              <a:t> is the engine — a free language for data and statistics</a:t>
             </a:r>
           </a:p>
           <a:p>
             <a:pPr lvl="0"/>
             <a:r>
               <a:rPr/>
-              <a:t>We drive that engine through a friendlier dashboard called an </a:t>
+              <a:t>We drive that engine through an </a:t>
             </a:r>
             <a:r>
               <a:rPr b="1"/>
@@ -10873,14 +11517,14 @@
             </a:r>
             <a:r>
               <a:rPr/>
-              <a:t> (an editor for code).</a:t>
+              <a:t> (a code editor)</a:t>
             </a:r>
           </a:p>
           <a:p>
             <a:pPr lvl="0"/>
             <a:r>
               <a:rPr/>
-              <a:t>Two good IDEs — you can try both:</a:t>
+              <a:t>Two good IDEs — you may try both:</a:t>
             </a:r>
           </a:p>
           <a:p>
@@ -10891,7 +11535,7 @@
             </a:r>
             <a:r>
               <a:rPr/>
-              <a:t> — what we’ll use </a:t>
+              <a:t> — what we use </a:t>
             </a:r>
             <a:r>
               <a:rPr i="1"/>
@@ -10910,33 +11554,42 @@
             </a:r>
           </a:p>
           <a:p>
-            <a:pPr lvl="0" indent="0" marL="0">
-              <a:buNone/>
-            </a:pPr>
-            <a:r>
-              <a:rPr b="1"/>
+            <a:pPr lvl="0" indent="0" marL="1270000">
+              <a:buNone/>
+            </a:pPr>
+            <a:r>
+              <a:rPr sz="2000" b="1"/>
+              <a:t>Note</a:t>
+            </a:r>
+          </a:p>
+          <a:p>
+            <a:pPr lvl="0" indent="0" marL="1270000">
+              <a:buNone/>
+            </a:pPr>
+            <a:r>
+              <a:rPr sz="2000" b="1"/>
               <a:t>📖 New word</a:t>
             </a:r>
           </a:p>
           <a:p>
-            <a:pPr lvl="0" indent="0" marL="0">
-              <a:buNone/>
-            </a:pPr>
-            <a:r>
-              <a:rPr b="1"/>
+            <a:pPr lvl="0" indent="0" marL="1270000">
+              <a:buNone/>
+            </a:pPr>
+            <a:r>
+              <a:rPr sz="2000" b="1"/>
               <a:t>IDE</a:t>
             </a:r>
             <a:r>
-              <a:rPr/>
+              <a:rPr sz="2000"/>
               <a:t> = </a:t>
             </a:r>
             <a:r>
-              <a:rPr i="1"/>
+              <a:rPr sz="2000" i="1"/>
               <a:t>Integrated Development Environment</a:t>
             </a:r>
             <a:r>
-              <a:rPr/>
-              <a:t>. Think of R as the car’s engine and the IDE as the seat, wheel, and dashboard.</a:t>
+              <a:rPr sz="2000"/>
+              <a:t>. Think of R as the car engine and the IDE as the seat, wheel, and dashboard.</a:t>
             </a:r>
           </a:p>
         </p:txBody>
@@ -11021,7 +11674,15 @@
             </a:pPr>
             <a:r>
               <a:rPr/>
-              <a:t>Download the two pieces</a:t>
+              <a:t>Organize the project </a:t>
+            </a:r>
+            <a:r>
+              <a:rPr i="1"/>
+              <a:t>before</a:t>
+            </a:r>
+            <a:r>
+              <a:rPr/>
+              <a:t> you code</a:t>
             </a:r>
           </a:p>
         </p:txBody>
@@ -11041,142 +11702,164 @@
           <a:bodyPr/>
           <a:lstStyle/>
           <a:p>
-            <a:pPr lvl="0" indent="-342900" marL="342900">
-              <a:buAutoNum type="arabicPeriod"/>
-            </a:pPr>
+            <a:pPr lvl="0" indent="0" marL="0">
+              <a:buNone/>
+            </a:pPr>
+            <a:r>
+              <a:rPr/>
+              <a:t>Make </a:t>
+            </a:r>
             <a:r>
               <a:rPr b="1"/>
-              <a:t>R</a:t>
-            </a:r>
-            <a:r>
-              <a:rPr/>
-              <a:t> (the engine) — </a:t>
-            </a:r>
-            <a:r>
-              <a:rPr>
-                <a:hlinkClick r:id="rId2"/>
-              </a:rPr>
-              <a:t>cran.r-project.org</a:t>
-            </a:r>
-          </a:p>
-          <a:p>
-            <a:pPr lvl="1"/>
-            <a:r>
-              <a:rPr i="1"/>
-              <a:t>Can you find the file after it downloads?</a:t>
-            </a:r>
-          </a:p>
-          <a:p>
-            <a:pPr lvl="0" indent="-342900" marL="342900">
-              <a:buAutoNum type="arabicPeriod"/>
-            </a:pPr>
+              <a:t>one folder per project</a:t>
+            </a:r>
+            <a:r>
+              <a:rPr/>
+              <a:t>. Everything for the tree experiment lives together:</a:t>
+            </a:r>
+          </a:p>
+          <a:p>
+            <a:pPr lvl="0" indent="0">
+              <a:buNone/>
+            </a:pPr>
+            <a:r>
+              <a:rPr>
+                <a:latin typeface="Courier"/>
+              </a:rPr>
+              <a:t>tree_project/
+├── data/          ← your Excel and CSV files
+├── scripts/       ← your .R code files
+└── figures/       ← plots you save</a:t>
+            </a:r>
+          </a:p>
+          <a:p>
+            <a:pPr lvl="0"/>
+            <a:r>
+              <a:rPr/>
+              <a:t>In Positron: </a:t>
+            </a:r>
             <a:r>
               <a:rPr b="1"/>
-              <a:t>Positron</a:t>
-            </a:r>
-            <a:r>
-              <a:rPr/>
-              <a:t> (the dashboard) — </a:t>
-            </a:r>
-            <a:r>
-              <a:rPr>
-                <a:hlinkClick r:id="rId3"/>
-              </a:rPr>
-              <a:t>positron.posit.co</a:t>
-            </a:r>
-          </a:p>
-          <a:p>
-            <a:pPr lvl="1"/>
-            <a:r>
-              <a:rPr i="1"/>
-              <a:t>Where did it land on your computer?</a:t>
-            </a:r>
-          </a:p>
-          <a:p>
-            <a:pPr lvl="0" indent="-342900" marL="342900">
-              <a:buAutoNum type="arabicPeriod"/>
-            </a:pPr>
-            <a:r>
-              <a:rPr i="1"/>
-              <a:t>(Optional)</a:t>
-            </a:r>
-            <a:r>
-              <a:rPr/>
-              <a:t> </a:t>
+              <a:t>File → Open Folder…</a:t>
+            </a:r>
+            <a:r>
+              <a:rPr/>
+              <a:t> and pick this folder</a:t>
+            </a:r>
+          </a:p>
+          <a:p>
+            <a:pPr lvl="0"/>
+            <a:r>
+              <a:rPr/>
+              <a:t>Every path is then </a:t>
             </a:r>
             <a:r>
               <a:rPr b="1"/>
-              <a:t>RStudio</a:t>
-            </a:r>
-            <a:r>
-              <a:rPr/>
-              <a:t>, if you want to compare — </a:t>
-            </a:r>
-            <a:r>
-              <a:rPr>
-                <a:hlinkClick r:id="rId4"/>
-              </a:rPr>
-              <a:t>posit.co</a:t>
-            </a:r>
-          </a:p>
-          <a:p>
-            <a:pPr lvl="0" indent="0" marL="0">
-              <a:buNone/>
-            </a:pPr>
-            <a:r>
-              <a:rPr b="1"/>
-              <a:t>⚠️ Watch out!</a:t>
-            </a:r>
-          </a:p>
-          <a:p>
-            <a:pPr lvl="0" indent="0" marL="0">
-              <a:buNone/>
-            </a:pPr>
-            <a:r>
-              <a:rPr/>
-              <a:t>Install </a:t>
-            </a:r>
-            <a:r>
-              <a:rPr b="1"/>
-              <a:t>R first</a:t>
-            </a:r>
-            <a:r>
-              <a:rPr/>
-              <a:t>, then Positron. Positron needs to find R already on your machine.</a:t>
+              <a:t>relative</a:t>
+            </a:r>
+            <a:r>
+              <a:rPr/>
+              <a:t> to the project — no more </a:t>
+            </a:r>
+            <a:r>
+              <a:rPr>
+                <a:latin typeface="Courier"/>
+              </a:rPr>
+              <a:t>C:/Users/.../Desktop/...</a:t>
+            </a:r>
+            <a:r>
+              <a:rPr/>
+              <a:t> nightmares</a:t>
+            </a:r>
+          </a:p>
+          <a:p>
+            <a:pPr lvl="0" indent="0" marL="1270000">
+              <a:buNone/>
+            </a:pPr>
+            <a:r>
+              <a:rPr sz="2000" b="1"/>
+              <a:t>Note</a:t>
+            </a:r>
+          </a:p>
+          <a:p>
+            <a:pPr lvl="0" indent="0" marL="1270000">
+              <a:buNone/>
+            </a:pPr>
+            <a:r>
+              <a:rPr sz="2000" b="1"/>
+              <a:t>✅ Key idea</a:t>
+            </a:r>
+          </a:p>
+          <a:p>
+            <a:pPr lvl="0" indent="0" marL="1270000">
+              <a:buNone/>
+            </a:pPr>
+            <a:r>
+              <a:rPr sz="2000"/>
+              <a:t>A tidy folder today saves an hour of “where did I put that file?” next week.</a:t>
             </a:r>
           </a:p>
         </p:txBody>
       </p:sp>
-      <p:pic>
-        <p:nvPicPr>
-          <p:cNvPr descr="images/paste-1.png" id="0" name="Picture 1"/>
-          <p:cNvPicPr>
-            <a:picLocks noGrp="1" noChangeAspect="1"/>
-          </p:cNvPicPr>
-          <p:nvPr/>
-        </p:nvPicPr>
-        <p:blipFill>
-          <a:blip r:embed="rId5"/>
-          <a:stretch>
-            <a:fillRect/>
-          </a:stretch>
-        </p:blipFill>
-        <p:spPr bwMode="auto">
-          <a:xfrm>
-            <a:off x="4699000" y="660400"/>
-            <a:ext cx="4000500" cy="3810000"/>
-          </a:xfrm>
-          <a:prstGeom prst="rect">
-            <a:avLst/>
-          </a:prstGeom>
-          <a:noFill/>
-          <a:ln w="9525">
-            <a:noFill/>
-            <a:headEnd/>
-            <a:tailEnd/>
-          </a:ln>
-        </p:spPr>
-      </p:pic>
+      <p:sp>
+        <p:nvSpPr>
+          <p:cNvPr id="4" name="Content Placeholder 3"/>
+          <p:cNvSpPr>
+            <a:spLocks noGrp="1"/>
+          </p:cNvSpPr>
+          <p:nvPr>
+            <p:ph idx="2" sz="half"/>
+          </p:nvPr>
+        </p:nvSpPr>
+        <p:spPr/>
+        <p:txBody>
+          <a:bodyPr/>
+          <a:lstStyle/>
+          <a:p>
+            <a:pPr lvl="0" indent="0" marL="1270000">
+              <a:buNone/>
+            </a:pPr>
+            <a:r>
+              <a:rPr sz="2000" b="1"/>
+              <a:t>Note</a:t>
+            </a:r>
+          </a:p>
+          <a:p>
+            <a:pPr lvl="0" indent="0" marL="1270000">
+              <a:buNone/>
+            </a:pPr>
+            <a:r>
+              <a:rPr sz="2000" b="1"/>
+              <a:t>📊 Coming from Excel?</a:t>
+            </a:r>
+          </a:p>
+          <a:p>
+            <a:pPr lvl="0" indent="0" marL="1270000">
+              <a:buNone/>
+            </a:pPr>
+            <a:r>
+              <a:rPr sz="2000"/>
+              <a:t>In Excel you keep one big file. In R we keep </a:t>
+            </a:r>
+            <a:r>
+              <a:rPr sz="2000" b="1"/>
+              <a:t>raw data untouched</a:t>
+            </a:r>
+            <a:r>
+              <a:rPr sz="2000"/>
+              <a:t> and write </a:t>
+            </a:r>
+            <a:r>
+              <a:rPr sz="2000" i="1"/>
+              <a:t>new</a:t>
+            </a:r>
+            <a:r>
+              <a:rPr sz="2000"/>
+              <a:t> processed files — so you can always trace your steps and never overwrite your original numbers.</a:t>
+            </a:r>
+          </a:p>
+        </p:txBody>
+      </p:sp>
     </p:spTree>
   </p:cSld>
 </p:sld>
@@ -11227,15 +11910,7 @@
             </a:pPr>
             <a:r>
               <a:rPr/>
-              <a:t>Organize the project </a:t>
-            </a:r>
-            <a:r>
-              <a:rPr i="1"/>
-              <a:t>before</a:t>
-            </a:r>
-            <a:r>
-              <a:rPr/>
-              <a:t> you code</a:t>
+              <a:t>A quick tour of Positron</a:t>
             </a:r>
           </a:p>
         </p:txBody>
@@ -11260,210 +11935,7 @@
             </a:pPr>
             <a:r>
               <a:rPr/>
-              <a:t>Make </a:t>
-            </a:r>
-            <a:r>
-              <a:rPr b="1"/>
-              <a:t>one folder per project</a:t>
-            </a:r>
-            <a:r>
-              <a:rPr/>
-              <a:t>. Everything for the tree experiment lives together:</a:t>
-            </a:r>
-          </a:p>
-          <a:p>
-            <a:pPr lvl="0" indent="0">
-              <a:buNone/>
-            </a:pPr>
-            <a:r>
-              <a:rPr>
-                <a:latin typeface="Courier"/>
-              </a:rPr>
-              <a:t>tree_project/
-├── data_raw/      &lt;- the untouched Excel file
-├── scripts/       &lt;- your .R code
-├── figures/       &lt;- plots you save
-└── data_clean/    &lt;- tidied files you create</a:t>
-            </a:r>
-          </a:p>
-          <a:p>
-            <a:pPr lvl="0"/>
-            <a:r>
-              <a:rPr/>
-              <a:t>In Positron: </a:t>
-            </a:r>
-            <a:r>
-              <a:rPr b="1"/>
-              <a:t>File → Open Folder…</a:t>
-            </a:r>
-            <a:r>
-              <a:rPr/>
-              <a:t> and pick this folder.</a:t>
-            </a:r>
-          </a:p>
-          <a:p>
-            <a:pPr lvl="0"/>
-            <a:r>
-              <a:rPr/>
-              <a:t>Now every path is relative to the project — no more </a:t>
-            </a:r>
-            <a:r>
-              <a:rPr>
-                <a:latin typeface="Courier"/>
-              </a:rPr>
-              <a:t>C:/Users/.../Desktop/...</a:t>
-            </a:r>
-            <a:r>
-              <a:rPr/>
-              <a:t> nightmares.</a:t>
-            </a:r>
-          </a:p>
-          <a:p>
-            <a:pPr lvl="0" indent="0" marL="0">
-              <a:buNone/>
-            </a:pPr>
-            <a:r>
-              <a:rPr b="1"/>
-              <a:t>✅ Key idea</a:t>
-            </a:r>
-          </a:p>
-          <a:p>
-            <a:pPr lvl="0" indent="0" marL="0">
-              <a:buNone/>
-            </a:pPr>
-            <a:r>
-              <a:rPr/>
-              <a:t>A tidy folder today saves an hour of “where did I put that file?” next week.</a:t>
-            </a:r>
-          </a:p>
-        </p:txBody>
-      </p:sp>
-      <p:sp>
-        <p:nvSpPr>
-          <p:cNvPr id="4" name="Content Placeholder 3"/>
-          <p:cNvSpPr>
-            <a:spLocks noGrp="1"/>
-          </p:cNvSpPr>
-          <p:nvPr>
-            <p:ph idx="2" sz="half"/>
-          </p:nvPr>
-        </p:nvSpPr>
-        <p:spPr/>
-        <p:txBody>
-          <a:bodyPr/>
-          <a:lstStyle/>
-          <a:p>
-            <a:pPr lvl="0" indent="0" marL="0">
-              <a:buNone/>
-            </a:pPr>
-            <a:r>
-              <a:rPr b="1"/>
-              <a:t>📊 Coming from Excel?</a:t>
-            </a:r>
-          </a:p>
-          <a:p>
-            <a:pPr lvl="0" indent="0" marL="0">
-              <a:buNone/>
-            </a:pPr>
-            <a:r>
-              <a:rPr/>
-              <a:t>In Excel you keep one big file. In R we keep </a:t>
-            </a:r>
-            <a:r>
-              <a:rPr b="1"/>
-              <a:t>raw data read-only</a:t>
-            </a:r>
-            <a:r>
-              <a:rPr/>
-              <a:t> and write </a:t>
-            </a:r>
-            <a:r>
-              <a:rPr i="1"/>
-              <a:t>new</a:t>
-            </a:r>
-            <a:r>
-              <a:rPr/>
-              <a:t> clean files — so you can always trace your steps and never overwrite your original numbers.</a:t>
-            </a:r>
-          </a:p>
-        </p:txBody>
-      </p:sp>
-    </p:spTree>
-  </p:cSld>
-</p:sld>
-</file>
-
-<file path=ppt/slides/slide8.xml><?xml version="1.0" encoding="utf-8"?>
-<p:sld xmlns:a="http://schemas.openxmlformats.org/drawingml/2006/main" xmlns:r="http://schemas.openxmlformats.org/officeDocument/2006/relationships" xmlns:p="http://schemas.openxmlformats.org/presentationml/2006/main">
-  <p:cSld>
-    <p:spTree>
-      <p:nvGrpSpPr>
-        <p:cNvPr id="1" name=""/>
-        <p:cNvGrpSpPr/>
-        <p:nvPr/>
-      </p:nvGrpSpPr>
-      <p:grpSpPr>
-        <a:xfrm>
-          <a:off x="0" y="0"/>
-          <a:ext cx="0" cy="0"/>
-          <a:chOff x="0" y="0"/>
-          <a:chExt cx="0" cy="0"/>
-        </a:xfrm>
-      </p:grpSpPr>
-      <p:sp>
-        <p:nvSpPr>
-          <p:cNvPr id="2" name="Title 1"/>
-          <p:cNvSpPr>
-            <a:spLocks noGrp="1"/>
-          </p:cNvSpPr>
-          <p:nvPr>
-            <p:ph type="title"/>
-          </p:nvPr>
-        </p:nvSpPr>
-        <p:spPr>
-          <a:xfrm>
-            <a:off x="0" y="0"/>
-            <a:ext cx="9144000" cy="602780"/>
-          </a:xfrm>
-          <a:solidFill>
-            <a:srgbClr val="1A1A2E"/>
-          </a:solidFill>
-        </p:spPr>
-        <p:txBody>
-          <a:bodyPr/>
-          <a:lstStyle/>
-          <a:p>
-            <a:pPr lvl="0" indent="0" marL="0">
-              <a:buNone/>
-            </a:pPr>
-            <a:r>
-              <a:rPr/>
-              <a:t>A quick tour of Positron</a:t>
-            </a:r>
-          </a:p>
-        </p:txBody>
-      </p:sp>
-      <p:sp>
-        <p:nvSpPr>
-          <p:cNvPr id="3" name="Content Placeholder 2"/>
-          <p:cNvSpPr>
-            <a:spLocks noGrp="1"/>
-          </p:cNvSpPr>
-          <p:nvPr>
-            <p:ph idx="1" sz="half"/>
-          </p:nvPr>
-        </p:nvSpPr>
-        <p:spPr/>
-        <p:txBody>
-          <a:bodyPr/>
-          <a:lstStyle/>
-          <a:p>
-            <a:pPr lvl="0" indent="0" marL="0">
-              <a:buNone/>
-            </a:pPr>
-            <a:r>
-              <a:rPr/>
-              <a:t>Four panes you’ll use constantly:</a:t>
+              <a:t>Four panes you will use constantly:</a:t>
             </a:r>
           </a:p>
           <a:p>
@@ -11496,7 +11968,7 @@
             </a:r>
             <a:r>
               <a:rPr/>
-              <a:t> (right) — everything you’ve stored</a:t>
+              <a:t> (right) — everything you have stored</a:t>
             </a:r>
           </a:p>
           <a:p>
@@ -11511,29 +11983,38 @@
             </a:r>
           </a:p>
           <a:p>
-            <a:pPr lvl="0" indent="0" marL="0">
-              <a:buNone/>
-            </a:pPr>
-            <a:r>
-              <a:rPr b="1"/>
+            <a:pPr lvl="0" indent="0" marL="1270000">
+              <a:buNone/>
+            </a:pPr>
+            <a:r>
+              <a:rPr sz="2000" b="1"/>
+              <a:t>Tip</a:t>
+            </a:r>
+          </a:p>
+          <a:p>
+            <a:pPr lvl="0" indent="0" marL="1270000">
+              <a:buNone/>
+            </a:pPr>
+            <a:r>
+              <a:rPr sz="2000" b="1"/>
               <a:t>🖐 Try it yourself</a:t>
             </a:r>
           </a:p>
           <a:p>
-            <a:pPr lvl="0" indent="0" marL="0">
-              <a:buNone/>
-            </a:pPr>
-            <a:r>
-              <a:rPr/>
+            <a:pPr lvl="0" indent="0" marL="1270000">
+              <a:buNone/>
+            </a:pPr>
+            <a:r>
+              <a:rPr sz="2000"/>
               <a:t>Find each pane on your screen now. Click the </a:t>
             </a:r>
             <a:r>
-              <a:rPr b="1"/>
+              <a:rPr sz="2000" b="1"/>
               <a:t>Console</a:t>
             </a:r>
             <a:r>
-              <a:rPr/>
-              <a:t> tab — that’s where we start next.</a:t>
+              <a:rPr sz="2000"/>
+              <a:t> tab — that is where we start next.</a:t>
             </a:r>
           </a:p>
         </p:txBody>
@@ -11573,7 +12054,7 @@
 </p:sld>
 </file>
 
-<file path=ppt/slides/slide9.xml><?xml version="1.0" encoding="utf-8"?>
+<file path=ppt/slides/slide8.xml><?xml version="1.0" encoding="utf-8"?>
 <p:sld xmlns:a="http://schemas.openxmlformats.org/drawingml/2006/main" xmlns:r="http://schemas.openxmlformats.org/officeDocument/2006/relationships" xmlns:p="http://schemas.openxmlformats.org/presentationml/2006/main">
   <p:cSld>
     <p:spTree>
@@ -11644,6 +12125,310 @@
             <a:r>
               <a:rPr b="1"/>
               <a:t>R is a calculator</a:t>
+            </a:r>
+          </a:p>
+        </p:txBody>
+      </p:sp>
+    </p:spTree>
+  </p:cSld>
+</p:sld>
+</file>
+
+<file path=ppt/slides/slide9.xml><?xml version="1.0" encoding="utf-8"?>
+<p:sld xmlns:a="http://schemas.openxmlformats.org/drawingml/2006/main" xmlns:r="http://schemas.openxmlformats.org/officeDocument/2006/relationships" xmlns:p="http://schemas.openxmlformats.org/presentationml/2006/main">
+  <p:cSld>
+    <p:spTree>
+      <p:nvGrpSpPr>
+        <p:cNvPr id="1" name=""/>
+        <p:cNvGrpSpPr/>
+        <p:nvPr/>
+      </p:nvGrpSpPr>
+      <p:grpSpPr>
+        <a:xfrm>
+          <a:off x="0" y="0"/>
+          <a:ext cx="0" cy="0"/>
+          <a:chOff x="0" y="0"/>
+          <a:chExt cx="0" cy="0"/>
+        </a:xfrm>
+      </p:grpSpPr>
+      <p:sp>
+        <p:nvSpPr>
+          <p:cNvPr id="3" name="Content Placeholder 2"/>
+          <p:cNvSpPr>
+            <a:spLocks noGrp="1"/>
+          </p:cNvSpPr>
+          <p:nvPr>
+            <p:ph idx="1" sz="half"/>
+          </p:nvPr>
+        </p:nvSpPr>
+        <p:spPr/>
+        <p:txBody>
+          <a:bodyPr/>
+          <a:lstStyle/>
+          <a:p>
+            <a:pPr lvl="0" indent="0" marL="0">
+              <a:buNone/>
+            </a:pPr>
+            <a:r>
+              <a:rPr/>
+              <a:t>Type math straight into the </a:t>
+            </a:r>
+            <a:r>
+              <a:rPr b="1"/>
+              <a:t>console</a:t>
+            </a:r>
+            <a:r>
+              <a:rPr/>
+              <a:t> and press Enter:</a:t>
+            </a:r>
+          </a:p>
+          <a:p>
+            <a:pPr lvl="0" indent="0">
+              <a:buNone/>
+            </a:pPr>
+            <a:r>
+              <a:rPr>
+                <a:solidFill>
+                  <a:srgbClr val="AD0000"/>
+                </a:solidFill>
+                <a:latin typeface="Courier"/>
+              </a:rPr>
+              <a:t>3</a:t>
+            </a:r>
+            <a:r>
+              <a:rPr>
+                <a:solidFill>
+                  <a:srgbClr val="003B4F"/>
+                </a:solidFill>
+                <a:latin typeface="Courier"/>
+              </a:rPr>
+              <a:t> </a:t>
+            </a:r>
+            <a:r>
+              <a:rPr>
+                <a:solidFill>
+                  <a:srgbClr val="5E5E5E"/>
+                </a:solidFill>
+                <a:latin typeface="Courier"/>
+              </a:rPr>
+              <a:t>+</a:t>
+            </a:r>
+            <a:r>
+              <a:rPr>
+                <a:solidFill>
+                  <a:srgbClr val="003B4F"/>
+                </a:solidFill>
+                <a:latin typeface="Courier"/>
+              </a:rPr>
+              <a:t> </a:t>
+            </a:r>
+            <a:r>
+              <a:rPr>
+                <a:solidFill>
+                  <a:srgbClr val="AD0000"/>
+                </a:solidFill>
+                <a:latin typeface="Courier"/>
+              </a:rPr>
+              <a:t>5</a:t>
+            </a:r>
+            <a:br/>
+            <a:r>
+              <a:rPr>
+                <a:solidFill>
+                  <a:srgbClr val="AD0000"/>
+                </a:solidFill>
+                <a:latin typeface="Courier"/>
+              </a:rPr>
+              <a:t>12</a:t>
+            </a:r>
+            <a:r>
+              <a:rPr>
+                <a:solidFill>
+                  <a:srgbClr val="003B4F"/>
+                </a:solidFill>
+                <a:latin typeface="Courier"/>
+              </a:rPr>
+              <a:t> </a:t>
+            </a:r>
+            <a:r>
+              <a:rPr>
+                <a:solidFill>
+                  <a:srgbClr val="5E5E5E"/>
+                </a:solidFill>
+                <a:latin typeface="Courier"/>
+              </a:rPr>
+              <a:t>/</a:t>
+            </a:r>
+            <a:r>
+              <a:rPr>
+                <a:solidFill>
+                  <a:srgbClr val="003B4F"/>
+                </a:solidFill>
+                <a:latin typeface="Courier"/>
+              </a:rPr>
+              <a:t> </a:t>
+            </a:r>
+            <a:r>
+              <a:rPr>
+                <a:solidFill>
+                  <a:srgbClr val="AD0000"/>
+                </a:solidFill>
+                <a:latin typeface="Courier"/>
+              </a:rPr>
+              <a:t>7</a:t>
+            </a:r>
+            <a:br/>
+            <a:r>
+              <a:rPr>
+                <a:solidFill>
+                  <a:srgbClr val="AD0000"/>
+                </a:solidFill>
+                <a:latin typeface="Courier"/>
+              </a:rPr>
+              <a:t>2</a:t>
+            </a:r>
+            <a:r>
+              <a:rPr>
+                <a:solidFill>
+                  <a:srgbClr val="003B4F"/>
+                </a:solidFill>
+                <a:latin typeface="Courier"/>
+              </a:rPr>
+              <a:t> </a:t>
+            </a:r>
+            <a:r>
+              <a:rPr>
+                <a:solidFill>
+                  <a:srgbClr val="5E5E5E"/>
+                </a:solidFill>
+                <a:latin typeface="Courier"/>
+              </a:rPr>
+              <a:t>^</a:t>
+            </a:r>
+            <a:r>
+              <a:rPr>
+                <a:solidFill>
+                  <a:srgbClr val="003B4F"/>
+                </a:solidFill>
+                <a:latin typeface="Courier"/>
+              </a:rPr>
+              <a:t> </a:t>
+            </a:r>
+            <a:r>
+              <a:rPr>
+                <a:solidFill>
+                  <a:srgbClr val="AD0000"/>
+                </a:solidFill>
+                <a:latin typeface="Courier"/>
+              </a:rPr>
+              <a:t>10</a:t>
+            </a:r>
+          </a:p>
+          <a:p>
+            <a:pPr lvl="0" indent="0" marL="0">
+              <a:buNone/>
+            </a:pPr>
+            <a:r>
+              <a:rPr/>
+              <a:t>R answers immediately. The console is great for quick “what is the answer?” questions.</a:t>
+            </a:r>
+          </a:p>
+          <a:p>
+            <a:pPr lvl="0" indent="0" marL="1270000">
+              <a:buNone/>
+            </a:pPr>
+            <a:r>
+              <a:rPr sz="2000" b="1"/>
+              <a:t>Warning</a:t>
+            </a:r>
+          </a:p>
+          <a:p>
+            <a:pPr lvl="0" indent="0" marL="1270000">
+              <a:buNone/>
+            </a:pPr>
+            <a:r>
+              <a:rPr sz="2000" b="1"/>
+              <a:t>⚠️ Watch out!</a:t>
+            </a:r>
+          </a:p>
+          <a:p>
+            <a:pPr lvl="0" indent="0" marL="1270000">
+              <a:buNone/>
+            </a:pPr>
+            <a:r>
+              <a:rPr sz="2000"/>
+              <a:t>A </a:t>
+            </a:r>
+            <a:r>
+              <a:rPr sz="2000">
+                <a:latin typeface="Courier"/>
+              </a:rPr>
+              <a:t>+</a:t>
+            </a:r>
+            <a:r>
+              <a:rPr sz="2000"/>
+              <a:t> at the start of the console line means R is </a:t>
+            </a:r>
+            <a:r>
+              <a:rPr sz="2000" b="1"/>
+              <a:t>still waiting</a:t>
+            </a:r>
+            <a:r>
+              <a:rPr sz="2000"/>
+              <a:t> for you to finish a command. Press Esc to start over.</a:t>
+            </a:r>
+          </a:p>
+        </p:txBody>
+      </p:sp>
+      <p:sp>
+        <p:nvSpPr>
+          <p:cNvPr id="4" name="Content Placeholder 3"/>
+          <p:cNvSpPr>
+            <a:spLocks noGrp="1"/>
+          </p:cNvSpPr>
+          <p:nvPr>
+            <p:ph idx="2" sz="half"/>
+          </p:nvPr>
+        </p:nvSpPr>
+        <p:spPr/>
+        <p:txBody>
+          <a:bodyPr/>
+          <a:lstStyle/>
+          <a:p>
+            <a:pPr lvl="0" indent="0" marL="1270000">
+              <a:buNone/>
+            </a:pPr>
+            <a:r>
+              <a:rPr sz="2000" b="1"/>
+              <a:t>Note</a:t>
+            </a:r>
+          </a:p>
+          <a:p>
+            <a:pPr lvl="0" indent="0" marL="1270000">
+              <a:buNone/>
+            </a:pPr>
+            <a:r>
+              <a:rPr sz="2000" b="1"/>
+              <a:t>📊 Coming from Excel?</a:t>
+            </a:r>
+          </a:p>
+          <a:p>
+            <a:pPr lvl="0" indent="0" marL="1270000">
+              <a:buNone/>
+            </a:pPr>
+            <a:r>
+              <a:rPr sz="2000"/>
+              <a:t>This is just like typing </a:t>
+            </a:r>
+            <a:r>
+              <a:rPr sz="2000">
+                <a:latin typeface="Courier"/>
+              </a:rPr>
+              <a:t>=3+5</a:t>
+            </a:r>
+            <a:r>
+              <a:rPr sz="2000"/>
+              <a:t> into an Excel cell — except there are no cells, just a line you type and run.</a:t>
             </a:r>
           </a:p>
         </p:txBody>

--- a/docs/lectures/lecture_02/02_lecture_powerpoint.pptx
+++ b/docs/lectures/lecture_02/02_lecture_powerpoint.pptx
@@ -3368,7 +3368,7 @@
             </a:pPr>
             <a:r>
               <a:rPr/>
-              <a:t>2026-06-28</a:t>
+              <a:t>2026-06-30</a:t>
             </a:r>
           </a:p>
         </p:txBody>
@@ -3431,6 +3431,10 @@
               </a:rPr>
               <a:t>&lt;-</a:t>
             </a:r>
+            <a:r>
+              <a:rPr/>
+              <a:t> assignment operator - alligators eats minus sign</a:t>
+            </a:r>
           </a:p>
         </p:txBody>
       </p:sp>
@@ -3666,7 +3670,7 @@
             </a:r>
             <a:r>
               <a:rPr sz="2000"/>
-              <a:t> = “take the thing on the right and store it under the name on the left.”</a:t>
+              <a:t> “puts the thing on right and stores it in the name on left.” not always the same as =</a:t>
             </a:r>
           </a:p>
         </p:txBody>
@@ -4268,7 +4272,15 @@
             </a:r>
             <a:r>
               <a:rPr sz="2000"/>
-              <a:t> objects. Pick one style and stick with it.</a:t>
+              <a:t> objects. Pick one style and stick with it. I </a:t>
+            </a:r>
+            <a:r>
+              <a:rPr sz="2000" b="1"/>
+              <a:t>URGE</a:t>
+            </a:r>
+            <a:r>
+              <a:rPr sz="2000"/>
+              <a:t> you to use lower case and _</a:t>
             </a:r>
           </a:p>
         </p:txBody>
@@ -4327,12 +4339,17 @@
             </a:r>
           </a:p>
           <a:p>
-            <a:pPr lvl="0" indent="0" marL="1270000">
-              <a:buNone/>
-            </a:pPr>
+            <a:pPr lvl="0"/>
             <a:r>
               <a:rPr sz="2000"/>
-              <a:t>Our naming convention throughout this course: - data frames → </a:t>
+              <a:t>Our naming convention throughout this course:</a:t>
+            </a:r>
+          </a:p>
+          <a:p>
+            <a:pPr lvl="1"/>
+            <a:r>
+              <a:rPr sz="2000"/>
+              <a:t>- data frames → </a:t>
             </a:r>
             <a:r>
               <a:rPr sz="2000">
@@ -4340,9 +4357,12 @@
               </a:rPr>
               <a:t>_df</a:t>
             </a:r>
+          </a:p>
+          <a:p>
+            <a:pPr lvl="1"/>
             <a:r>
               <a:rPr sz="2000"/>
-              <a:t> - plots → </a:t>
+              <a:t>- plots → </a:t>
             </a:r>
             <a:r>
               <a:rPr sz="2000">
@@ -4350,9 +4370,12 @@
               </a:rPr>
               <a:t>_plot</a:t>
             </a:r>
+          </a:p>
+          <a:p>
+            <a:pPr lvl="1"/>
             <a:r>
               <a:rPr sz="2000"/>
-              <a:t> - models → </a:t>
+              <a:t>- models → </a:t>
             </a:r>
             <a:r>
               <a:rPr sz="2000">
@@ -5183,7 +5206,7 @@
         </p:blipFill>
         <p:spPr bwMode="auto">
           <a:xfrm>
-            <a:off x="4495800" y="876300"/>
+            <a:off x="4495800" y="863600"/>
             <a:ext cx="4406900" cy="3390900"/>
           </a:xfrm>
           <a:prstGeom prst="rect">
@@ -5290,7 +5313,7 @@
             </a:r>
             <a:r>
               <a:rPr/>
-              <a:t> (“combine”):</a:t>
+              <a:t> (“combine”) or concatenated list:</a:t>
             </a:r>
           </a:p>
           <a:p>
@@ -6362,7 +6385,16 @@
             </a:pPr>
             <a:r>
               <a:rPr/>
-              <a:t>The console forgets. A </a:t>
+              <a:t>The console forgets.</a:t>
+            </a:r>
+          </a:p>
+          <a:p>
+            <a:pPr lvl="0" indent="0" marL="0">
+              <a:buNone/>
+            </a:pPr>
+            <a:r>
+              <a:rPr/>
+              <a:t>A </a:t>
             </a:r>
             <a:r>
               <a:rPr b="1"/>
@@ -6508,12 +6540,17 @@
             </a:r>
           </a:p>
           <a:p>
-            <a:pPr lvl="0" indent="0" marL="1270000">
-              <a:buNone/>
-            </a:pPr>
+            <a:pPr lvl="0"/>
             <a:r>
               <a:rPr sz="2000"/>
-              <a:t>Console = scratch paper. Script = the lab notebook you keep.</a:t>
+              <a:t>Console = scratch paper.</a:t>
+            </a:r>
+          </a:p>
+          <a:p>
+            <a:pPr lvl="0"/>
+            <a:r>
+              <a:rPr sz="2000"/>
+              <a:t>Script = the lab notebook you keep.</a:t>
             </a:r>
           </a:p>
         </p:txBody>
@@ -9119,9 +9156,7 @@
             </a:r>
           </a:p>
           <a:p>
-            <a:pPr lvl="0" indent="0" marL="1270000">
-              <a:buNone/>
-            </a:pPr>
+            <a:pPr lvl="0"/>
             <a:r>
               <a:rPr sz="2000"/>
               <a:t>The </a:t>
@@ -9142,8 +9177,11 @@
             </a:r>
             <a:r>
               <a:rPr sz="2000"/>
-              <a:t> of a line, never the start. </a:t>
-            </a:r>
+              <a:t> of a line, never the start.</a:t>
+            </a:r>
+          </a:p>
+          <a:p>
+            <a:pPr lvl="0"/>
             <a:r>
               <a:rPr sz="2000">
                 <a:latin typeface="Courier"/>
@@ -9152,7 +9190,14 @@
             </a:r>
             <a:r>
               <a:rPr sz="2000"/>
-              <a:t> at the start = error.</a:t>
+              <a:t> at the start = error</a:t>
+            </a:r>
+          </a:p>
+          <a:p>
+            <a:pPr lvl="0"/>
+            <a:r>
+              <a:rPr sz="2000"/>
+              <a:t>AND YES - Totally confusing to have %&gt;% for code and + for plots - but its the way it is….</a:t>
             </a:r>
           </a:p>
         </p:txBody>
@@ -9173,8 +9218,8 @@
         </p:blipFill>
         <p:spPr bwMode="auto">
           <a:xfrm>
-            <a:off x="4495800" y="698500"/>
-            <a:ext cx="4406900" cy="3733800"/>
+            <a:off x="4902200" y="660400"/>
+            <a:ext cx="3581400" cy="3810000"/>
           </a:xfrm>
           <a:prstGeom prst="rect">
             <a:avLst/>
@@ -9776,36 +9821,31 @@
           </a:p>
         </p:txBody>
       </p:sp>
-      <p:pic>
-        <p:nvPicPr>
-          <p:cNvPr descr="images/paste-3.png" id="0" name="Picture 1"/>
-          <p:cNvPicPr>
-            <a:picLocks noGrp="1" noChangeAspect="1"/>
-          </p:cNvPicPr>
-          <p:nvPr/>
-        </p:nvPicPr>
-        <p:blipFill>
-          <a:blip r:embed="rId2"/>
-          <a:stretch>
-            <a:fillRect/>
-          </a:stretch>
-        </p:blipFill>
-        <p:spPr bwMode="auto">
-          <a:xfrm>
-            <a:off x="4495800" y="876300"/>
-            <a:ext cx="4406900" cy="3390900"/>
-          </a:xfrm>
-          <a:prstGeom prst="rect">
-            <a:avLst/>
-          </a:prstGeom>
-          <a:noFill/>
-          <a:ln w="9525">
-            <a:noFill/>
-            <a:headEnd/>
-            <a:tailEnd/>
-          </a:ln>
-        </p:spPr>
-      </p:pic>
+      <p:sp>
+        <p:nvSpPr>
+          <p:cNvPr id="4" name="Content Placeholder 3"/>
+          <p:cNvSpPr>
+            <a:spLocks noGrp="1"/>
+          </p:cNvSpPr>
+          <p:nvPr>
+            <p:ph idx="2" sz="half"/>
+          </p:nvPr>
+        </p:nvSpPr>
+        <p:spPr/>
+        <p:txBody>
+          <a:bodyPr/>
+          <a:lstStyle/>
+          <a:p>
+            <a:pPr lvl="0" indent="0" marL="0">
+              <a:buNone/>
+            </a:pPr>
+            <a:r>
+              <a:rPr b="1"/>
+              <a:t>CAN YOU DRAW A SKETCH OF WHAT THIS MIGHT LOOK LIKE???</a:t>
+            </a:r>
+          </a:p>
+        </p:txBody>
+      </p:sp>
     </p:spTree>
   </p:cSld>
 </p:sld>
@@ -10268,6 +10308,51 @@
             </a:r>
           </a:p>
           <a:p>
+            <a:pPr lvl="0"/>
+            <a:r>
+              <a:rPr b="1"/>
+              <a:t>📖 File format tip</a:t>
+            </a:r>
+          </a:p>
+          <a:p>
+            <a:pPr lvl="0"/>
+            <a:r>
+              <a:rPr/>
+              <a:t>Save figures as </a:t>
+            </a:r>
+            <a:r>
+              <a:rPr b="1"/>
+              <a:t>PNG</a:t>
+            </a:r>
+            <a:r>
+              <a:rPr/>
+              <a:t> (</a:t>
+            </a:r>
+            <a:r>
+              <a:rPr>
+                <a:latin typeface="Courier"/>
+              </a:rPr>
+              <a:t>.png</a:t>
+            </a:r>
+            <a:r>
+              <a:rPr/>
+              <a:t>) for reports and Canvas submissions.</a:t>
+            </a:r>
+          </a:p>
+          <a:p>
+            <a:pPr lvl="0"/>
+            <a:r>
+              <a:rPr>
+                <a:latin typeface="Courier"/>
+              </a:rPr>
+              <a:t>dpi = 300</a:t>
+            </a:r>
+            <a:r>
+              <a:rPr/>
+              <a:t> means 300 dots per inch — high enough for print and posters.</a:t>
+            </a:r>
+          </a:p>
+          <a:p>
             <a:pPr lvl="0" indent="0" marL="1270000">
               <a:buNone/>
             </a:pPr>
@@ -10357,52 +10442,6 @@
             <a:pPr lvl="0" indent="0" marL="1270000">
               <a:buNone/>
             </a:pPr>
-            <a:r>
-              <a:rPr sz="2000" b="1"/>
-              <a:t>📖 File format tip</a:t>
-            </a:r>
-          </a:p>
-          <a:p>
-            <a:pPr lvl="0" indent="0" marL="1270000">
-              <a:buNone/>
-            </a:pPr>
-            <a:r>
-              <a:rPr sz="2000"/>
-              <a:t>Save figures as </a:t>
-            </a:r>
-            <a:r>
-              <a:rPr sz="2000" b="1"/>
-              <a:t>PNG</a:t>
-            </a:r>
-            <a:r>
-              <a:rPr sz="2000"/>
-              <a:t> (</a:t>
-            </a:r>
-            <a:r>
-              <a:rPr sz="2000">
-                <a:latin typeface="Courier"/>
-              </a:rPr>
-              <a:t>.png</a:t>
-            </a:r>
-            <a:r>
-              <a:rPr sz="2000"/>
-              <a:t>) for reports and Canvas submissions.</a:t>
-            </a:r>
-          </a:p>
-          <a:p>
-            <a:pPr lvl="0" indent="0" marL="1270000">
-              <a:buNone/>
-            </a:pPr>
-            <a:r>
-              <a:rPr sz="2000">
-                <a:latin typeface="Courier"/>
-              </a:rPr>
-              <a:t>dpi = 300</a:t>
-            </a:r>
-            <a:r>
-              <a:rPr sz="2000"/>
-              <a:t> means 300 dots per inch — high enough for print and posters.</a:t>
-            </a:r>
           </a:p>
         </p:txBody>
       </p:sp>
@@ -11260,17 +11299,21 @@
               <a:t>storing things with </a:t>
             </a:r>
             <a:r>
-              <a:rPr>
+              <a:rPr b="1">
                 <a:latin typeface="Courier"/>
               </a:rPr>
               <a:t>&lt;-</a:t>
             </a:r>
+            <a:r>
+              <a:rPr/>
+              <a:t> the assignment operator - alligator eats the minus sign…</a:t>
+            </a:r>
           </a:p>
           <a:p>
             <a:pPr lvl="1"/>
             <a:r>
               <a:rPr b="1"/>
-              <a:t>functions</a:t>
+              <a:t>values</a:t>
             </a:r>
             <a:r>
               <a:rPr/>
@@ -11364,8 +11407,8 @@
         </p:blipFill>
         <p:spPr bwMode="auto">
           <a:xfrm>
-            <a:off x="4495800" y="698500"/>
-            <a:ext cx="4406900" cy="3733800"/>
+            <a:off x="4902200" y="660400"/>
+            <a:ext cx="3581400" cy="3810000"/>
           </a:xfrm>
           <a:prstGeom prst="rect">
             <a:avLst/>
@@ -11611,7 +11654,7 @@
         <p:spPr bwMode="auto">
           <a:xfrm>
             <a:off x="4699000" y="660400"/>
-            <a:ext cx="4000500" cy="3810000"/>
+            <a:ext cx="3987800" cy="3810000"/>
           </a:xfrm>
           <a:prstGeom prst="rect">
             <a:avLst/>
@@ -11834,12 +11877,17 @@
             </a:r>
           </a:p>
           <a:p>
-            <a:pPr lvl="0" indent="0" marL="1270000">
-              <a:buNone/>
-            </a:pPr>
+            <a:pPr lvl="0"/>
             <a:r>
               <a:rPr sz="2000"/>
-              <a:t>In Excel you keep one big file. In R we keep </a:t>
+              <a:t>In Excel you keep one big file and it can be hard to figure out what was done and how</a:t>
+            </a:r>
+          </a:p>
+          <a:p>
+            <a:pPr lvl="0"/>
+            <a:r>
+              <a:rPr sz="2000"/>
+              <a:t>In R we keep </a:t>
             </a:r>
             <a:r>
               <a:rPr sz="2000" b="1"/>
@@ -11847,7 +11895,14 @@
             </a:r>
             <a:r>
               <a:rPr sz="2000"/>
-              <a:t> and write </a:t>
+              <a:t> and</a:t>
+            </a:r>
+          </a:p>
+          <a:p>
+            <a:pPr lvl="1"/>
+            <a:r>
+              <a:rPr sz="2000"/>
+              <a:t>write </a:t>
             </a:r>
             <a:r>
               <a:rPr sz="2000" i="1"/>
@@ -11855,7 +11910,26 @@
             </a:r>
             <a:r>
               <a:rPr sz="2000"/>
-              <a:t> processed files — so you can always trace your steps and never overwrite your original numbers.</a:t>
+              <a:t> processed files</a:t>
+            </a:r>
+          </a:p>
+          <a:p>
+            <a:pPr lvl="2"/>
+            <a:r>
+              <a:rPr sz="2000"/>
+              <a:t>— so you can </a:t>
+            </a:r>
+            <a:r>
+              <a:rPr sz="2000" b="1"/>
+              <a:t>always trace your steps</a:t>
+            </a:r>
+            <a:r>
+              <a:rPr sz="2000"/>
+              <a:t> and n</a:t>
+            </a:r>
+            <a:r>
+              <a:rPr sz="2000" b="1"/>
+              <a:t>ever overwrite your original numbers</a:t>
             </a:r>
           </a:p>
         </p:txBody>
@@ -11946,7 +12020,7 @@
             </a:r>
             <a:r>
               <a:rPr/>
-              <a:t> (top-left) — your scripts live here</a:t>
+              <a:t> (top-left) — your scripts live here when you have a script open</a:t>
             </a:r>
           </a:p>
           <a:p>
@@ -12001,12 +12075,17 @@
             </a:r>
           </a:p>
           <a:p>
-            <a:pPr lvl="0" indent="0" marL="1270000">
-              <a:buNone/>
-            </a:pPr>
+            <a:pPr lvl="0"/>
             <a:r>
               <a:rPr sz="2000"/>
-              <a:t>Find each pane on your screen now. Click the </a:t>
+              <a:t>Find each pane on your screen now.</a:t>
+            </a:r>
+          </a:p>
+          <a:p>
+            <a:pPr lvl="0"/>
+            <a:r>
+              <a:rPr sz="2000"/>
+              <a:t>Click the </a:t>
             </a:r>
             <a:r>
               <a:rPr sz="2000" b="1"/>
@@ -12036,7 +12115,7 @@
         <p:spPr bwMode="auto">
           <a:xfrm>
             <a:off x="4699000" y="660400"/>
-            <a:ext cx="4000500" cy="3810000"/>
+            <a:ext cx="3987800" cy="3810000"/>
           </a:xfrm>
           <a:prstGeom prst="rect">
             <a:avLst/>
